--- a/docs/public/course-assets/course-pptx/em-001.pptx
+++ b/docs/public/course-assets/course-pptx/em-001.pptx
@@ -2,25 +2,25 @@
 <file path=ppt/presentation.xml><?xml version="1.0" encoding="utf-8"?>
 <p:presentation xmlns:p="http://schemas.openxmlformats.org/presentationml/2006/main">
   <p:sldMasterIdLst>
-    <p:sldMasterId xmlns:r="http://schemas.openxmlformats.org/officeDocument/2006/relationships" id="2147483648" r:id="Ra634c5591e5b40e7"/>
+    <p:sldMasterId xmlns:r="http://schemas.openxmlformats.org/officeDocument/2006/relationships" id="2147483648" r:id="R62717325321a4547"/>
   </p:sldMasterIdLst>
   <p:notesMasterIdLst>
-    <p:notesMasterId xmlns:r="http://schemas.openxmlformats.org/officeDocument/2006/relationships" r:id="Rd5768d36860b4ca7"/>
+    <p:notesMasterId xmlns:r="http://schemas.openxmlformats.org/officeDocument/2006/relationships" r:id="R28d38fa20a214d6c"/>
   </p:notesMasterIdLst>
   <p:sldIdLst>
-    <p:sldId xmlns:r="http://schemas.openxmlformats.org/officeDocument/2006/relationships" id="256" r:id="Rd65a0f3397044373"/>
-    <p:sldId xmlns:r="http://schemas.openxmlformats.org/officeDocument/2006/relationships" id="257" r:id="R0cd7992cf1694669"/>
-    <p:sldId xmlns:r="http://schemas.openxmlformats.org/officeDocument/2006/relationships" id="258" r:id="Rf2993127a4474afb"/>
-    <p:sldId xmlns:r="http://schemas.openxmlformats.org/officeDocument/2006/relationships" id="259" r:id="R64e18b27bde94df3"/>
-    <p:sldId xmlns:r="http://schemas.openxmlformats.org/officeDocument/2006/relationships" id="260" r:id="R5241b802b350412e"/>
-    <p:sldId xmlns:r="http://schemas.openxmlformats.org/officeDocument/2006/relationships" id="261" r:id="R56f0bb56e3d94b42"/>
-    <p:sldId xmlns:r="http://schemas.openxmlformats.org/officeDocument/2006/relationships" id="262" r:id="R1ec6038b3aa14eb8"/>
-    <p:sldId xmlns:r="http://schemas.openxmlformats.org/officeDocument/2006/relationships" id="263" r:id="Rb4dd3cf4ed604d88"/>
-    <p:sldId xmlns:r="http://schemas.openxmlformats.org/officeDocument/2006/relationships" id="264" r:id="R3622aee3d90b4d8a"/>
-    <p:sldId xmlns:r="http://schemas.openxmlformats.org/officeDocument/2006/relationships" id="265" r:id="Rfa088e278afd46e5"/>
-    <p:sldId xmlns:r="http://schemas.openxmlformats.org/officeDocument/2006/relationships" id="266" r:id="R70e937f19ccf4ca4"/>
-    <p:sldId xmlns:r="http://schemas.openxmlformats.org/officeDocument/2006/relationships" id="267" r:id="R47e837ac91414f5c"/>
-    <p:sldId xmlns:r="http://schemas.openxmlformats.org/officeDocument/2006/relationships" id="268" r:id="R36bdc59cc1234fdc"/>
+    <p:sldId xmlns:r="http://schemas.openxmlformats.org/officeDocument/2006/relationships" id="256" r:id="Re579a8f4ebdb4bb1"/>
+    <p:sldId xmlns:r="http://schemas.openxmlformats.org/officeDocument/2006/relationships" id="257" r:id="R32a05ef81d464e69"/>
+    <p:sldId xmlns:r="http://schemas.openxmlformats.org/officeDocument/2006/relationships" id="258" r:id="R55984be1d7a34a5c"/>
+    <p:sldId xmlns:r="http://schemas.openxmlformats.org/officeDocument/2006/relationships" id="259" r:id="Rd968aefbe6c340fb"/>
+    <p:sldId xmlns:r="http://schemas.openxmlformats.org/officeDocument/2006/relationships" id="260" r:id="Rcd6ae239f8b7491c"/>
+    <p:sldId xmlns:r="http://schemas.openxmlformats.org/officeDocument/2006/relationships" id="261" r:id="Rb5f6369895e54025"/>
+    <p:sldId xmlns:r="http://schemas.openxmlformats.org/officeDocument/2006/relationships" id="262" r:id="R6f5927aa86ea4f43"/>
+    <p:sldId xmlns:r="http://schemas.openxmlformats.org/officeDocument/2006/relationships" id="263" r:id="R52edf414ec4b4b89"/>
+    <p:sldId xmlns:r="http://schemas.openxmlformats.org/officeDocument/2006/relationships" id="264" r:id="Ra8eb91ad6cd048d8"/>
+    <p:sldId xmlns:r="http://schemas.openxmlformats.org/officeDocument/2006/relationships" id="265" r:id="Rd1a35deee06a4a21"/>
+    <p:sldId xmlns:r="http://schemas.openxmlformats.org/officeDocument/2006/relationships" id="266" r:id="Rc731030142f54838"/>
+    <p:sldId xmlns:r="http://schemas.openxmlformats.org/officeDocument/2006/relationships" id="267" r:id="Rf94a78eb4eb14a18"/>
+    <p:sldId xmlns:r="http://schemas.openxmlformats.org/officeDocument/2006/relationships" id="268" r:id="R7ab06d7723ac476d"/>
   </p:sldIdLst>
   <p:sldSz cx="12192000" cy="6858000"/>
   <p:notesSz cx="6858000" cy="9144000"/>
@@ -1405,7 +1405,7 @@
   </p:cSld>
   <p:clrMap bg1="lt1" tx1="dk1" bg2="lt2" tx2="dk2" accent1="accent1" accent2="accent2" accent3="accent3" accent4="accent4" accent5="accent5" accent6="accent6" hlink="hlink" folHlink="folHlink"/>
   <p:sldLayoutIdLst>
-    <p:sldLayoutId xmlns:r="http://schemas.openxmlformats.org/officeDocument/2006/relationships" id="2147483649" r:id="R8ad13c716c05494f"/>
+    <p:sldLayoutId xmlns:r="http://schemas.openxmlformats.org/officeDocument/2006/relationships" id="2147483649" r:id="Rd769fc8e37994827"/>
   </p:sldLayoutIdLst>
   <p:txStyles>
     <p:titleStyle>
@@ -1956,7 +1956,7 @@
           <p:cNvPr id="1" name="cover-rule">
             <a:extLst xmlns:a="http://schemas.openxmlformats.org/drawingml/2006/main">
               <a:ext uri="{FF2B5EF4-FFF2-40B4-BE49-F238E27FC236}">
-                <a16:creationId xmlns:a16="http://schemas.microsoft.com/office/drawing/2014/main" id="{92FD6E5D-C843-49F2-BDDE-06B6856E8C04}"/>
+                <a16:creationId xmlns:a16="http://schemas.microsoft.com/office/drawing/2014/main" id="{89C48793-DE16-4B03-8B46-C9542C5B08CB}"/>
               </a:ext>
             </a:extLst>
           </p:cNvPr>
@@ -1989,7 +1989,7 @@
           <p:cNvPr id="2" name="cover-ring-1">
             <a:extLst xmlns:a="http://schemas.openxmlformats.org/drawingml/2006/main">
               <a:ext uri="{FF2B5EF4-FFF2-40B4-BE49-F238E27FC236}">
-                <a16:creationId xmlns:a16="http://schemas.microsoft.com/office/drawing/2014/main" id="{2FBA6DF1-9032-4996-A262-2DCA23165A9B}"/>
+                <a16:creationId xmlns:a16="http://schemas.microsoft.com/office/drawing/2014/main" id="{61F4C6D5-29B2-4FDD-831B-428B42F76965}"/>
               </a:ext>
             </a:extLst>
           </p:cNvPr>
@@ -2020,7 +2020,7 @@
           <p:cNvPr id="3" name="cover-ring-2">
             <a:extLst xmlns:a="http://schemas.openxmlformats.org/drawingml/2006/main">
               <a:ext uri="{FF2B5EF4-FFF2-40B4-BE49-F238E27FC236}">
-                <a16:creationId xmlns:a16="http://schemas.microsoft.com/office/drawing/2014/main" id="{6A30ABFA-7213-4B81-985D-CC90BFC688C1}"/>
+                <a16:creationId xmlns:a16="http://schemas.microsoft.com/office/drawing/2014/main" id="{83FEBD9F-02DB-4B0A-B277-B9A8F16229D8}"/>
               </a:ext>
             </a:extLst>
           </p:cNvPr>
@@ -2051,7 +2051,7 @@
           <p:cNvPr id="4" name="cover-core">
             <a:extLst xmlns:a="http://schemas.openxmlformats.org/drawingml/2006/main">
               <a:ext uri="{FF2B5EF4-FFF2-40B4-BE49-F238E27FC236}">
-                <a16:creationId xmlns:a16="http://schemas.microsoft.com/office/drawing/2014/main" id="{A784DE3D-004D-48FE-8CC3-BD19180E43FC}"/>
+                <a16:creationId xmlns:a16="http://schemas.microsoft.com/office/drawing/2014/main" id="{92720F22-5CD7-4781-9118-064B6BE827B1}"/>
               </a:ext>
             </a:extLst>
           </p:cNvPr>
@@ -2084,7 +2084,7 @@
           <p:cNvPr id="5" name="cover-line-1">
             <a:extLst xmlns:a="http://schemas.openxmlformats.org/drawingml/2006/main">
               <a:ext uri="{FF2B5EF4-FFF2-40B4-BE49-F238E27FC236}">
-                <a16:creationId xmlns:a16="http://schemas.microsoft.com/office/drawing/2014/main" id="{C3B4E8C8-9D52-4974-B263-8AC4EDC52483}"/>
+                <a16:creationId xmlns:a16="http://schemas.microsoft.com/office/drawing/2014/main" id="{A5DDE696-A103-49FC-B16A-FCB7A66C42DE}"/>
               </a:ext>
             </a:extLst>
           </p:cNvPr>
@@ -2115,7 +2115,7 @@
           <p:cNvPr id="6" name="cover-line-2">
             <a:extLst xmlns:a="http://schemas.openxmlformats.org/drawingml/2006/main">
               <a:ext uri="{FF2B5EF4-FFF2-40B4-BE49-F238E27FC236}">
-                <a16:creationId xmlns:a16="http://schemas.microsoft.com/office/drawing/2014/main" id="{973990CF-A98F-4F26-85DB-2B965D50175E}"/>
+                <a16:creationId xmlns:a16="http://schemas.microsoft.com/office/drawing/2014/main" id="{4B772366-5B02-4598-A0DD-1DFD0E0A310A}"/>
               </a:ext>
             </a:extLst>
           </p:cNvPr>
@@ -2146,7 +2146,7 @@
           <p:cNvPr id="7" name="cover-eyebrow">
             <a:extLst xmlns:a="http://schemas.openxmlformats.org/drawingml/2006/main">
               <a:ext uri="{FF2B5EF4-FFF2-40B4-BE49-F238E27FC236}">
-                <a16:creationId xmlns:a16="http://schemas.microsoft.com/office/drawing/2014/main" id="{4A4E9CE7-C598-42BD-93F2-4AFB2EEB280B}"/>
+                <a16:creationId xmlns:a16="http://schemas.microsoft.com/office/drawing/2014/main" id="{3BDC9554-6C35-4998-B599-526B2D3FD7A0}"/>
               </a:ext>
             </a:extLst>
           </p:cNvPr>
@@ -2204,7 +2204,7 @@
           <p:cNvPr id="8" name="cover-title">
             <a:extLst xmlns:a="http://schemas.openxmlformats.org/drawingml/2006/main">
               <a:ext uri="{FF2B5EF4-FFF2-40B4-BE49-F238E27FC236}">
-                <a16:creationId xmlns:a16="http://schemas.microsoft.com/office/drawing/2014/main" id="{544E6027-A59F-42D7-802D-AEB85EBBF188}"/>
+                <a16:creationId xmlns:a16="http://schemas.microsoft.com/office/drawing/2014/main" id="{5F6344E8-3DEE-489C-85A9-B72666EE3989}"/>
               </a:ext>
             </a:extLst>
           </p:cNvPr>
@@ -2262,7 +2262,7 @@
           <p:cNvPr id="9" name="cover-subtitle">
             <a:extLst xmlns:a="http://schemas.openxmlformats.org/drawingml/2006/main">
               <a:ext uri="{FF2B5EF4-FFF2-40B4-BE49-F238E27FC236}">
-                <a16:creationId xmlns:a16="http://schemas.microsoft.com/office/drawing/2014/main" id="{484F971B-D453-4F10-9755-4CBA7AF37339}"/>
+                <a16:creationId xmlns:a16="http://schemas.microsoft.com/office/drawing/2014/main" id="{7224EE11-34B4-4C59-B039-4EE902964C17}"/>
               </a:ext>
             </a:extLst>
           </p:cNvPr>
@@ -2324,7 +2324,7 @@
           <p:cNvPr id="10" name="cover-lead">
             <a:extLst xmlns:a="http://schemas.openxmlformats.org/drawingml/2006/main">
               <a:ext uri="{FF2B5EF4-FFF2-40B4-BE49-F238E27FC236}">
-                <a16:creationId xmlns:a16="http://schemas.microsoft.com/office/drawing/2014/main" id="{458568B7-EA53-4F0D-AE5A-92EDE76CCF74}"/>
+                <a16:creationId xmlns:a16="http://schemas.microsoft.com/office/drawing/2014/main" id="{A556987D-3C55-487D-8778-04EA3DEC9E30}"/>
               </a:ext>
             </a:extLst>
           </p:cNvPr>
@@ -2382,7 +2382,7 @@
           <p:cNvPr id="11" name="cover-course">
             <a:extLst xmlns:a="http://schemas.openxmlformats.org/drawingml/2006/main">
               <a:ext uri="{FF2B5EF4-FFF2-40B4-BE49-F238E27FC236}">
-                <a16:creationId xmlns:a16="http://schemas.microsoft.com/office/drawing/2014/main" id="{172F6943-05AA-4C98-ACA8-FFF763F544A2}"/>
+                <a16:creationId xmlns:a16="http://schemas.microsoft.com/office/drawing/2014/main" id="{37BA5A9A-9804-43C4-9031-9D25DBEC7262}"/>
               </a:ext>
             </a:extLst>
           </p:cNvPr>
@@ -2440,7 +2440,7 @@
           <p:cNvPr id="12" name="cover-id">
             <a:extLst xmlns:a="http://schemas.openxmlformats.org/drawingml/2006/main">
               <a:ext uri="{FF2B5EF4-FFF2-40B4-BE49-F238E27FC236}">
-                <a16:creationId xmlns:a16="http://schemas.microsoft.com/office/drawing/2014/main" id="{D52BA515-6A55-42E3-BBDF-A635C329EFF6}"/>
+                <a16:creationId xmlns:a16="http://schemas.microsoft.com/office/drawing/2014/main" id="{4AB7EF76-8A10-4163-A584-A8E8097DBB9A}"/>
               </a:ext>
             </a:extLst>
           </p:cNvPr>
@@ -2496,7 +2496,7 @@
     </p:spTree>
     <p:extLst>
       <p:ext uri="{BB962C8B-B14F-4D97-AF65-F5344CB8AC3E}">
-        <p14:creationId xmlns:p14="http://schemas.microsoft.com/office/powerpoint/2010/main" val="1127060237"/>
+        <p14:creationId xmlns:p14="http://schemas.microsoft.com/office/powerpoint/2010/main" val="1792370394"/>
       </p:ext>
     </p:extLst>
   </p:cSld>
@@ -2527,7 +2527,7 @@
           <p:cNvPr id="1" name="s10-rule">
             <a:extLst xmlns:a="http://schemas.openxmlformats.org/drawingml/2006/main">
               <a:ext uri="{FF2B5EF4-FFF2-40B4-BE49-F238E27FC236}">
-                <a16:creationId xmlns:a16="http://schemas.microsoft.com/office/drawing/2014/main" id="{22F07B00-765F-4B27-9EEF-A560318C1180}"/>
+                <a16:creationId xmlns:a16="http://schemas.microsoft.com/office/drawing/2014/main" id="{89DCF356-F76F-4DA3-805E-6E5726BB0587}"/>
               </a:ext>
             </a:extLst>
           </p:cNvPr>
@@ -2560,7 +2560,7 @@
           <p:cNvPr id="2" name="s10-eyebrow">
             <a:extLst xmlns:a="http://schemas.openxmlformats.org/drawingml/2006/main">
               <a:ext uri="{FF2B5EF4-FFF2-40B4-BE49-F238E27FC236}">
-                <a16:creationId xmlns:a16="http://schemas.microsoft.com/office/drawing/2014/main" id="{F5EAE6C6-A32B-4970-930E-3D6B6681D25D}"/>
+                <a16:creationId xmlns:a16="http://schemas.microsoft.com/office/drawing/2014/main" id="{0C2A01A1-8676-4DD8-B009-34E1654FCD2F}"/>
               </a:ext>
             </a:extLst>
           </p:cNvPr>
@@ -2618,7 +2618,7 @@
           <p:cNvPr id="3" name="s10-title">
             <a:extLst xmlns:a="http://schemas.openxmlformats.org/drawingml/2006/main">
               <a:ext uri="{FF2B5EF4-FFF2-40B4-BE49-F238E27FC236}">
-                <a16:creationId xmlns:a16="http://schemas.microsoft.com/office/drawing/2014/main" id="{C03603D3-1089-4579-9BFE-72AF6FCE598E}"/>
+                <a16:creationId xmlns:a16="http://schemas.microsoft.com/office/drawing/2014/main" id="{392F8E35-9334-43E8-8766-A92505E4F2D4}"/>
               </a:ext>
             </a:extLst>
           </p:cNvPr>
@@ -2676,7 +2676,7 @@
           <p:cNvPr id="4" name="s10-footer">
             <a:extLst xmlns:a="http://schemas.openxmlformats.org/drawingml/2006/main">
               <a:ext uri="{FF2B5EF4-FFF2-40B4-BE49-F238E27FC236}">
-                <a16:creationId xmlns:a16="http://schemas.microsoft.com/office/drawing/2014/main" id="{1CBE7450-E7E1-4B83-927E-1753ABEBCA0A}"/>
+                <a16:creationId xmlns:a16="http://schemas.microsoft.com/office/drawing/2014/main" id="{D1792857-3B3A-4F32-B077-B663DD374389}"/>
               </a:ext>
             </a:extLst>
           </p:cNvPr>
@@ -2707,7 +2707,7 @@
           <p:cNvPr id="5" name="s10-identity">
             <a:extLst xmlns:a="http://schemas.openxmlformats.org/drawingml/2006/main">
               <a:ext uri="{FF2B5EF4-FFF2-40B4-BE49-F238E27FC236}">
-                <a16:creationId xmlns:a16="http://schemas.microsoft.com/office/drawing/2014/main" id="{5A168441-025E-41D4-A94C-E3181AC3A6AC}"/>
+                <a16:creationId xmlns:a16="http://schemas.microsoft.com/office/drawing/2014/main" id="{203056DD-EDE6-465E-A614-06A69040F2C9}"/>
               </a:ext>
             </a:extLst>
           </p:cNvPr>
@@ -2765,7 +2765,7 @@
           <p:cNvPr id="6" name="case-title">
             <a:extLst xmlns:a="http://schemas.openxmlformats.org/drawingml/2006/main">
               <a:ext uri="{FF2B5EF4-FFF2-40B4-BE49-F238E27FC236}">
-                <a16:creationId xmlns:a16="http://schemas.microsoft.com/office/drawing/2014/main" id="{E9935801-B7A2-4B99-85F2-1DD7955F7060}"/>
+                <a16:creationId xmlns:a16="http://schemas.microsoft.com/office/drawing/2014/main" id="{5DCC15F8-A2B8-42D9-BFBF-F8651E7ED89C}"/>
               </a:ext>
             </a:extLst>
           </p:cNvPr>
@@ -2829,7 +2829,7 @@
           <p:cNvPr id="7" name="case-row-0">
             <a:extLst xmlns:a="http://schemas.openxmlformats.org/drawingml/2006/main">
               <a:ext uri="{FF2B5EF4-FFF2-40B4-BE49-F238E27FC236}">
-                <a16:creationId xmlns:a16="http://schemas.microsoft.com/office/drawing/2014/main" id="{A76D75C0-75AB-4894-9857-AACF1D9DA85D}"/>
+                <a16:creationId xmlns:a16="http://schemas.microsoft.com/office/drawing/2014/main" id="{7BA05522-7081-461C-B38F-C825890B7162}"/>
               </a:ext>
             </a:extLst>
           </p:cNvPr>
@@ -2893,7 +2893,7 @@
           <p:cNvPr id="8" name="case-row-1">
             <a:extLst xmlns:a="http://schemas.openxmlformats.org/drawingml/2006/main">
               <a:ext uri="{FF2B5EF4-FFF2-40B4-BE49-F238E27FC236}">
-                <a16:creationId xmlns:a16="http://schemas.microsoft.com/office/drawing/2014/main" id="{68539C77-A8B8-42B6-B93A-72F102F7C764}"/>
+                <a16:creationId xmlns:a16="http://schemas.microsoft.com/office/drawing/2014/main" id="{60211F48-BDC9-4225-8E91-C466A52381CD}"/>
               </a:ext>
             </a:extLst>
           </p:cNvPr>
@@ -2957,7 +2957,7 @@
           <p:cNvPr id="9" name="case-row-2">
             <a:extLst xmlns:a="http://schemas.openxmlformats.org/drawingml/2006/main">
               <a:ext uri="{FF2B5EF4-FFF2-40B4-BE49-F238E27FC236}">
-                <a16:creationId xmlns:a16="http://schemas.microsoft.com/office/drawing/2014/main" id="{96D3EFE5-8E64-4B23-8207-42AB8FB984A4}"/>
+                <a16:creationId xmlns:a16="http://schemas.microsoft.com/office/drawing/2014/main" id="{1503D962-3317-46DD-B8B5-C8A78256BB7B}"/>
               </a:ext>
             </a:extLst>
           </p:cNvPr>
@@ -3021,7 +3021,7 @@
           <p:cNvPr id="10" name="case-row-3">
             <a:extLst xmlns:a="http://schemas.openxmlformats.org/drawingml/2006/main">
               <a:ext uri="{FF2B5EF4-FFF2-40B4-BE49-F238E27FC236}">
-                <a16:creationId xmlns:a16="http://schemas.microsoft.com/office/drawing/2014/main" id="{80350A33-C85C-4D5C-A812-764FFA1F0672}"/>
+                <a16:creationId xmlns:a16="http://schemas.microsoft.com/office/drawing/2014/main" id="{AFD9D33D-8675-4742-AA80-188D252C4709}"/>
               </a:ext>
             </a:extLst>
           </p:cNvPr>
@@ -3085,7 +3085,7 @@
           <p:cNvPr id="11" name="case-row-4">
             <a:extLst xmlns:a="http://schemas.openxmlformats.org/drawingml/2006/main">
               <a:ext uri="{FF2B5EF4-FFF2-40B4-BE49-F238E27FC236}">
-                <a16:creationId xmlns:a16="http://schemas.microsoft.com/office/drawing/2014/main" id="{EA7DE67B-071E-424E-B1B2-A27BED43A16A}"/>
+                <a16:creationId xmlns:a16="http://schemas.microsoft.com/office/drawing/2014/main" id="{722483C1-DFFA-4597-8905-F0C0E6846C04}"/>
               </a:ext>
             </a:extLst>
           </p:cNvPr>
@@ -3109,7 +3109,7 @@
           </a:solidFill>
           <a:ln xmlns:a="http://schemas.openxmlformats.org/drawingml/2006/main" w="9525">
             <a:solidFill>
-              <a:srgbClr val="2D9B72"/>
+              <a:srgbClr val="0B6B4F"/>
             </a:solidFill>
             <a:prstDash val="solid"/>
           </a:ln>
@@ -3149,7 +3149,7 @@
           <p:cNvPr id="12" name="s10-takeaway-rule">
             <a:extLst xmlns:a="http://schemas.openxmlformats.org/drawingml/2006/main">
               <a:ext uri="{FF2B5EF4-FFF2-40B4-BE49-F238E27FC236}">
-                <a16:creationId xmlns:a16="http://schemas.microsoft.com/office/drawing/2014/main" id="{853C3D88-6DC1-42F8-B5C4-85A721B036B0}"/>
+                <a16:creationId xmlns:a16="http://schemas.microsoft.com/office/drawing/2014/main" id="{458A9C15-594C-4920-A94C-E204EEEC3F97}"/>
               </a:ext>
             </a:extLst>
           </p:cNvPr>
@@ -3182,7 +3182,7 @@
           <p:cNvPr id="13" name="s10-takeaway">
             <a:extLst xmlns:a="http://schemas.openxmlformats.org/drawingml/2006/main">
               <a:ext uri="{FF2B5EF4-FFF2-40B4-BE49-F238E27FC236}">
-                <a16:creationId xmlns:a16="http://schemas.microsoft.com/office/drawing/2014/main" id="{6B59F40B-2809-45DE-8BA1-EA357A83E17A}"/>
+                <a16:creationId xmlns:a16="http://schemas.microsoft.com/office/drawing/2014/main" id="{265A5271-A9D4-4CFD-91FD-CD8B9A05B243}"/>
               </a:ext>
             </a:extLst>
           </p:cNvPr>
@@ -3238,7 +3238,7 @@
     </p:spTree>
     <p:extLst>
       <p:ext uri="{BB962C8B-B14F-4D97-AF65-F5344CB8AC3E}">
-        <p14:creationId xmlns:p14="http://schemas.microsoft.com/office/powerpoint/2010/main" val="886747326"/>
+        <p14:creationId xmlns:p14="http://schemas.microsoft.com/office/powerpoint/2010/main" val="1633132149"/>
       </p:ext>
     </p:extLst>
   </p:cSld>
@@ -3269,7 +3269,7 @@
           <p:cNvPr id="1" name="s11-rule">
             <a:extLst xmlns:a="http://schemas.openxmlformats.org/drawingml/2006/main">
               <a:ext uri="{FF2B5EF4-FFF2-40B4-BE49-F238E27FC236}">
-                <a16:creationId xmlns:a16="http://schemas.microsoft.com/office/drawing/2014/main" id="{6F2E2326-8BD3-4038-B03B-A51FC597408E}"/>
+                <a16:creationId xmlns:a16="http://schemas.microsoft.com/office/drawing/2014/main" id="{6FD9FB55-8A3C-4710-B684-468EF4633940}"/>
               </a:ext>
             </a:extLst>
           </p:cNvPr>
@@ -3302,7 +3302,7 @@
           <p:cNvPr id="2" name="s11-eyebrow">
             <a:extLst xmlns:a="http://schemas.openxmlformats.org/drawingml/2006/main">
               <a:ext uri="{FF2B5EF4-FFF2-40B4-BE49-F238E27FC236}">
-                <a16:creationId xmlns:a16="http://schemas.microsoft.com/office/drawing/2014/main" id="{5E565605-E463-4DEE-BB3A-39DC6BBC1ED9}"/>
+                <a16:creationId xmlns:a16="http://schemas.microsoft.com/office/drawing/2014/main" id="{C53DFECF-37C2-4C0A-9286-6FC0DF15079C}"/>
               </a:ext>
             </a:extLst>
           </p:cNvPr>
@@ -3360,7 +3360,7 @@
           <p:cNvPr id="3" name="s11-title">
             <a:extLst xmlns:a="http://schemas.openxmlformats.org/drawingml/2006/main">
               <a:ext uri="{FF2B5EF4-FFF2-40B4-BE49-F238E27FC236}">
-                <a16:creationId xmlns:a16="http://schemas.microsoft.com/office/drawing/2014/main" id="{90BC7929-A0F9-4FAA-947E-8F1194EB51A2}"/>
+                <a16:creationId xmlns:a16="http://schemas.microsoft.com/office/drawing/2014/main" id="{53D71593-22EA-4457-AE50-FD2350364530}"/>
               </a:ext>
             </a:extLst>
           </p:cNvPr>
@@ -3408,7 +3408,7 @@
                 <a:ea typeface="PingFang SC"/>
                 <a:cs typeface="PingFang SC"/>
               </a:rPr>
-              <a:t>把方法落实为可验证的行动</a:t>
+              <a:t>具身智能闭环：一次可验收练习</a:t>
             </a:r>
           </a:p>
         </p:txBody>
@@ -3418,7 +3418,7 @@
           <p:cNvPr id="4" name="s11-footer">
             <a:extLst xmlns:a="http://schemas.openxmlformats.org/drawingml/2006/main">
               <a:ext uri="{FF2B5EF4-FFF2-40B4-BE49-F238E27FC236}">
-                <a16:creationId xmlns:a16="http://schemas.microsoft.com/office/drawing/2014/main" id="{A7FFE048-85CC-4A74-83A1-9FB5F20A95D8}"/>
+                <a16:creationId xmlns:a16="http://schemas.microsoft.com/office/drawing/2014/main" id="{B7E495FA-C266-4E7E-8D67-A771F50994BF}"/>
               </a:ext>
             </a:extLst>
           </p:cNvPr>
@@ -3449,7 +3449,7 @@
           <p:cNvPr id="5" name="s11-identity">
             <a:extLst xmlns:a="http://schemas.openxmlformats.org/drawingml/2006/main">
               <a:ext uri="{FF2B5EF4-FFF2-40B4-BE49-F238E27FC236}">
-                <a16:creationId xmlns:a16="http://schemas.microsoft.com/office/drawing/2014/main" id="{73F3E3D3-8DFE-4CBE-B3B6-2AE7F4A22556}"/>
+                <a16:creationId xmlns:a16="http://schemas.microsoft.com/office/drawing/2014/main" id="{1F833112-E23E-4485-A1D0-EBA9633B6444}"/>
               </a:ext>
             </a:extLst>
           </p:cNvPr>
@@ -3507,7 +3507,7 @@
           <p:cNvPr id="6" name="practice-circle-0">
             <a:extLst xmlns:a="http://schemas.openxmlformats.org/drawingml/2006/main">
               <a:ext uri="{FF2B5EF4-FFF2-40B4-BE49-F238E27FC236}">
-                <a16:creationId xmlns:a16="http://schemas.microsoft.com/office/drawing/2014/main" id="{D0A28CA4-BFCC-4E68-A19D-77D26E11B07E}"/>
+                <a16:creationId xmlns:a16="http://schemas.microsoft.com/office/drawing/2014/main" id="{AD280822-B0FC-49A4-8A83-4E7345A23E18}"/>
               </a:ext>
             </a:extLst>
           </p:cNvPr>
@@ -3540,7 +3540,7 @@
           <p:cNvPr id="7" name="practice-number-0">
             <a:extLst xmlns:a="http://schemas.openxmlformats.org/drawingml/2006/main">
               <a:ext uri="{FF2B5EF4-FFF2-40B4-BE49-F238E27FC236}">
-                <a16:creationId xmlns:a16="http://schemas.microsoft.com/office/drawing/2014/main" id="{7F073CF2-01FC-4D1F-9E79-BE99F618B0E4}"/>
+                <a16:creationId xmlns:a16="http://schemas.microsoft.com/office/drawing/2014/main" id="{DDEF7ACE-BF09-4D08-B750-E3FEAADF35A4}"/>
               </a:ext>
             </a:extLst>
           </p:cNvPr>
@@ -3598,7 +3598,7 @@
           <p:cNvPr id="8" name="practice-item-0">
             <a:extLst xmlns:a="http://schemas.openxmlformats.org/drawingml/2006/main">
               <a:ext uri="{FF2B5EF4-FFF2-40B4-BE49-F238E27FC236}">
-                <a16:creationId xmlns:a16="http://schemas.microsoft.com/office/drawing/2014/main" id="{E5607543-B68D-4D20-9424-2AF0E8B103DF}"/>
+                <a16:creationId xmlns:a16="http://schemas.microsoft.com/office/drawing/2014/main" id="{6AB92BD7-1410-4AB5-AA5C-4102582B159D}"/>
               </a:ext>
             </a:extLst>
           </p:cNvPr>
@@ -3652,7 +3652,7 @@
                 <a:ea typeface="PingFang SC"/>
                 <a:cs typeface="PingFang SC"/>
               </a:rPr>
-              <a:t>选择一个具身任务，写出感知、推理、执行三个环节。；列出这个任务可能失败的三个物理原因</a:t>
+              <a:t>选择一个具身任务，写出感知、推理、执行三个环节；列出这个任务可能失败的三个物理原因</a:t>
             </a:r>
           </a:p>
         </p:txBody>
@@ -3662,7 +3662,7 @@
           <p:cNvPr id="9" name="practice-connector-0">
             <a:extLst xmlns:a="http://schemas.openxmlformats.org/drawingml/2006/main">
               <a:ext uri="{FF2B5EF4-FFF2-40B4-BE49-F238E27FC236}">
-                <a16:creationId xmlns:a16="http://schemas.microsoft.com/office/drawing/2014/main" id="{1DC000CB-9E25-40F9-A732-85F3F4B60E14}"/>
+                <a16:creationId xmlns:a16="http://schemas.microsoft.com/office/drawing/2014/main" id="{5538F981-BF5D-4E6E-8FAD-785422F3C2F6}"/>
               </a:ext>
             </a:extLst>
           </p:cNvPr>
@@ -3682,7 +3682,7 @@
           <a:noFill xmlns:a="http://schemas.openxmlformats.org/drawingml/2006/main"/>
           <a:ln xmlns:a="http://schemas.openxmlformats.org/drawingml/2006/main" w="28575">
             <a:solidFill>
-              <a:srgbClr val="2D9B72"/>
+              <a:srgbClr val="0B6B4F"/>
             </a:solidFill>
             <a:prstDash val="solid"/>
           </a:ln>
@@ -3693,7 +3693,7 @@
           <p:cNvPr id="10" name="practice-circle-1">
             <a:extLst xmlns:a="http://schemas.openxmlformats.org/drawingml/2006/main">
               <a:ext uri="{FF2B5EF4-FFF2-40B4-BE49-F238E27FC236}">
-                <a16:creationId xmlns:a16="http://schemas.microsoft.com/office/drawing/2014/main" id="{9C6B888E-AA57-4464-A5C1-158CB861D196}"/>
+                <a16:creationId xmlns:a16="http://schemas.microsoft.com/office/drawing/2014/main" id="{310888B0-3348-481B-A26E-6BC48A1E33CF}"/>
               </a:ext>
             </a:extLst>
           </p:cNvPr>
@@ -3726,7 +3726,7 @@
           <p:cNvPr id="11" name="practice-number-1">
             <a:extLst xmlns:a="http://schemas.openxmlformats.org/drawingml/2006/main">
               <a:ext uri="{FF2B5EF4-FFF2-40B4-BE49-F238E27FC236}">
-                <a16:creationId xmlns:a16="http://schemas.microsoft.com/office/drawing/2014/main" id="{1FDA761E-B57D-4022-9C62-741BF337608E}"/>
+                <a16:creationId xmlns:a16="http://schemas.microsoft.com/office/drawing/2014/main" id="{F71A73CB-45AA-40A2-A1B9-8EB688955D89}"/>
               </a:ext>
             </a:extLst>
           </p:cNvPr>
@@ -3784,7 +3784,7 @@
           <p:cNvPr id="12" name="practice-item-1">
             <a:extLst xmlns:a="http://schemas.openxmlformats.org/drawingml/2006/main">
               <a:ext uri="{FF2B5EF4-FFF2-40B4-BE49-F238E27FC236}">
-                <a16:creationId xmlns:a16="http://schemas.microsoft.com/office/drawing/2014/main" id="{3B3A349F-D5C8-45C8-8FBD-93A74A26C30D}"/>
+                <a16:creationId xmlns:a16="http://schemas.microsoft.com/office/drawing/2014/main" id="{F0A411A7-7C27-40BE-8AFD-568C9B10D32B}"/>
               </a:ext>
             </a:extLst>
           </p:cNvPr>
@@ -3848,7 +3848,7 @@
           <p:cNvPr id="13" name="practice-connector-1">
             <a:extLst xmlns:a="http://schemas.openxmlformats.org/drawingml/2006/main">
               <a:ext uri="{FF2B5EF4-FFF2-40B4-BE49-F238E27FC236}">
-                <a16:creationId xmlns:a16="http://schemas.microsoft.com/office/drawing/2014/main" id="{750A490E-BF1C-43C5-87ED-228732631B43}"/>
+                <a16:creationId xmlns:a16="http://schemas.microsoft.com/office/drawing/2014/main" id="{91448FB1-BA31-4641-B02E-2C0F97D696DC}"/>
               </a:ext>
             </a:extLst>
           </p:cNvPr>
@@ -3868,7 +3868,7 @@
           <a:noFill xmlns:a="http://schemas.openxmlformats.org/drawingml/2006/main"/>
           <a:ln xmlns:a="http://schemas.openxmlformats.org/drawingml/2006/main" w="28575">
             <a:solidFill>
-              <a:srgbClr val="2D9B72"/>
+              <a:srgbClr val="0B6B4F"/>
             </a:solidFill>
             <a:prstDash val="solid"/>
           </a:ln>
@@ -3879,7 +3879,7 @@
           <p:cNvPr id="14" name="practice-circle-2">
             <a:extLst xmlns:a="http://schemas.openxmlformats.org/drawingml/2006/main">
               <a:ext uri="{FF2B5EF4-FFF2-40B4-BE49-F238E27FC236}">
-                <a16:creationId xmlns:a16="http://schemas.microsoft.com/office/drawing/2014/main" id="{5B988FB7-3BEE-4691-92FE-8C393C4BA857}"/>
+                <a16:creationId xmlns:a16="http://schemas.microsoft.com/office/drawing/2014/main" id="{7BF82B67-8DD3-4393-BD4C-875C08BE7390}"/>
               </a:ext>
             </a:extLst>
           </p:cNvPr>
@@ -3897,7 +3897,7 @@
             <a:avLst/>
           </a:prstGeom>
           <a:solidFill xmlns:a="http://schemas.openxmlformats.org/drawingml/2006/main">
-            <a:srgbClr val="2D9B72"/>
+            <a:srgbClr val="0B6B4F"/>
           </a:solidFill>
           <a:ln xmlns:a="http://schemas.openxmlformats.org/drawingml/2006/main" w="28575">
             <a:solidFill>
@@ -3912,7 +3912,7 @@
           <p:cNvPr id="15" name="practice-number-2">
             <a:extLst xmlns:a="http://schemas.openxmlformats.org/drawingml/2006/main">
               <a:ext uri="{FF2B5EF4-FFF2-40B4-BE49-F238E27FC236}">
-                <a16:creationId xmlns:a16="http://schemas.microsoft.com/office/drawing/2014/main" id="{0B439B73-54AF-4A30-904C-083439D8DEFC}"/>
+                <a16:creationId xmlns:a16="http://schemas.microsoft.com/office/drawing/2014/main" id="{F33CDCFC-5B88-40AE-A26B-C5D1886D4180}"/>
               </a:ext>
             </a:extLst>
           </p:cNvPr>
@@ -3970,7 +3970,7 @@
           <p:cNvPr id="16" name="practice-item-2">
             <a:extLst xmlns:a="http://schemas.openxmlformats.org/drawingml/2006/main">
               <a:ext uri="{FF2B5EF4-FFF2-40B4-BE49-F238E27FC236}">
-                <a16:creationId xmlns:a16="http://schemas.microsoft.com/office/drawing/2014/main" id="{B2B28C16-270B-4A3D-9A16-F0B156FDA9B1}"/>
+                <a16:creationId xmlns:a16="http://schemas.microsoft.com/office/drawing/2014/main" id="{C336FB8D-61D4-43E3-ADE6-7D666785519A}"/>
               </a:ext>
             </a:extLst>
           </p:cNvPr>
@@ -3994,7 +3994,7 @@
           </a:solidFill>
           <a:ln xmlns:a="http://schemas.openxmlformats.org/drawingml/2006/main" w="19050">
             <a:solidFill>
-              <a:srgbClr val="2D9B72"/>
+              <a:srgbClr val="0B6B4F"/>
             </a:solidFill>
             <a:prstDash val="solid"/>
           </a:ln>
@@ -4032,7 +4032,7 @@
     </p:spTree>
     <p:extLst>
       <p:ext uri="{BB962C8B-B14F-4D97-AF65-F5344CB8AC3E}">
-        <p14:creationId xmlns:p14="http://schemas.microsoft.com/office/powerpoint/2010/main" val="1400316383"/>
+        <p14:creationId xmlns:p14="http://schemas.microsoft.com/office/powerpoint/2010/main" val="1136474386"/>
       </p:ext>
     </p:extLst>
   </p:cSld>
@@ -4063,7 +4063,7 @@
           <p:cNvPr id="1" name="s12-rule">
             <a:extLst xmlns:a="http://schemas.openxmlformats.org/drawingml/2006/main">
               <a:ext uri="{FF2B5EF4-FFF2-40B4-BE49-F238E27FC236}">
-                <a16:creationId xmlns:a16="http://schemas.microsoft.com/office/drawing/2014/main" id="{0ACFB15E-35A7-41A3-8D73-6E73342E0B47}"/>
+                <a16:creationId xmlns:a16="http://schemas.microsoft.com/office/drawing/2014/main" id="{C4239F58-B9E5-400B-AF59-6B0371640CF7}"/>
               </a:ext>
             </a:extLst>
           </p:cNvPr>
@@ -4096,7 +4096,7 @@
           <p:cNvPr id="2" name="s12-eyebrow">
             <a:extLst xmlns:a="http://schemas.openxmlformats.org/drawingml/2006/main">
               <a:ext uri="{FF2B5EF4-FFF2-40B4-BE49-F238E27FC236}">
-                <a16:creationId xmlns:a16="http://schemas.microsoft.com/office/drawing/2014/main" id="{84BBAA96-4EEE-4C89-9AA6-BF53BA358360}"/>
+                <a16:creationId xmlns:a16="http://schemas.microsoft.com/office/drawing/2014/main" id="{91C0597A-34E4-4D87-927D-FE6CD86D5CDA}"/>
               </a:ext>
             </a:extLst>
           </p:cNvPr>
@@ -4154,7 +4154,7 @@
           <p:cNvPr id="3" name="s12-title">
             <a:extLst xmlns:a="http://schemas.openxmlformats.org/drawingml/2006/main">
               <a:ext uri="{FF2B5EF4-FFF2-40B4-BE49-F238E27FC236}">
-                <a16:creationId xmlns:a16="http://schemas.microsoft.com/office/drawing/2014/main" id="{D879E7F1-0BF6-4D0A-83C0-F0BF67094681}"/>
+                <a16:creationId xmlns:a16="http://schemas.microsoft.com/office/drawing/2014/main" id="{637A67BB-C552-455D-B0DE-2AE74556248E}"/>
               </a:ext>
             </a:extLst>
           </p:cNvPr>
@@ -4202,7 +4202,7 @@
                 <a:ea typeface="PingFang SC"/>
                 <a:cs typeface="PingFang SC"/>
               </a:rPr>
-              <a:t>带走三条可复用的判断原则</a:t>
+              <a:t>具身智能闭环：判断时先抓住三点</a:t>
             </a:r>
           </a:p>
         </p:txBody>
@@ -4212,7 +4212,7 @@
           <p:cNvPr id="4" name="s12-footer">
             <a:extLst xmlns:a="http://schemas.openxmlformats.org/drawingml/2006/main">
               <a:ext uri="{FF2B5EF4-FFF2-40B4-BE49-F238E27FC236}">
-                <a16:creationId xmlns:a16="http://schemas.microsoft.com/office/drawing/2014/main" id="{D9E7B5BD-BF51-4688-90C5-066848A81057}"/>
+                <a16:creationId xmlns:a16="http://schemas.microsoft.com/office/drawing/2014/main" id="{0E707DF9-0A22-4500-8F58-4AB2945AF21F}"/>
               </a:ext>
             </a:extLst>
           </p:cNvPr>
@@ -4243,7 +4243,7 @@
           <p:cNvPr id="5" name="s12-identity">
             <a:extLst xmlns:a="http://schemas.openxmlformats.org/drawingml/2006/main">
               <a:ext uri="{FF2B5EF4-FFF2-40B4-BE49-F238E27FC236}">
-                <a16:creationId xmlns:a16="http://schemas.microsoft.com/office/drawing/2014/main" id="{AE09BD50-3740-4B25-A530-377E192D6DEB}"/>
+                <a16:creationId xmlns:a16="http://schemas.microsoft.com/office/drawing/2014/main" id="{30E02B3C-AA86-40FD-B061-B2D69F136AC1}"/>
               </a:ext>
             </a:extLst>
           </p:cNvPr>
@@ -4301,7 +4301,7 @@
           <p:cNvPr id="6" name="recap-circle-0">
             <a:extLst xmlns:a="http://schemas.openxmlformats.org/drawingml/2006/main">
               <a:ext uri="{FF2B5EF4-FFF2-40B4-BE49-F238E27FC236}">
-                <a16:creationId xmlns:a16="http://schemas.microsoft.com/office/drawing/2014/main" id="{84237491-9F03-4670-997B-096C0D7F039F}"/>
+                <a16:creationId xmlns:a16="http://schemas.microsoft.com/office/drawing/2014/main" id="{93FF9117-6EEE-4E0F-B041-8E3E6FC72836}"/>
               </a:ext>
             </a:extLst>
           </p:cNvPr>
@@ -4334,7 +4334,7 @@
           <p:cNvPr id="7" name="recap-number-0">
             <a:extLst xmlns:a="http://schemas.openxmlformats.org/drawingml/2006/main">
               <a:ext uri="{FF2B5EF4-FFF2-40B4-BE49-F238E27FC236}">
-                <a16:creationId xmlns:a16="http://schemas.microsoft.com/office/drawing/2014/main" id="{493DD59C-62F8-451F-AED4-5BBA207CD6E3}"/>
+                <a16:creationId xmlns:a16="http://schemas.microsoft.com/office/drawing/2014/main" id="{BE109179-F562-4230-A164-70E65013060D}"/>
               </a:ext>
             </a:extLst>
           </p:cNvPr>
@@ -4392,7 +4392,7 @@
           <p:cNvPr id="8" name="recap-item-0">
             <a:extLst xmlns:a="http://schemas.openxmlformats.org/drawingml/2006/main">
               <a:ext uri="{FF2B5EF4-FFF2-40B4-BE49-F238E27FC236}">
-                <a16:creationId xmlns:a16="http://schemas.microsoft.com/office/drawing/2014/main" id="{D572FA94-871D-4FDD-8CC8-D89D65AE2A3B}"/>
+                <a16:creationId xmlns:a16="http://schemas.microsoft.com/office/drawing/2014/main" id="{A9ADA34F-1DBC-4874-A9CE-4ED2B79675DC}"/>
               </a:ext>
             </a:extLst>
           </p:cNvPr>
@@ -4446,7 +4446,7 @@
                 <a:ea typeface="PingFang SC"/>
                 <a:cs typeface="PingFang SC"/>
               </a:rPr>
-              <a:t>具身智能强调智能体拥有身体或执行载体，并与真实或仿真环境持续交互</a:t>
+              <a:t>具身智能从身体与环境交互中获得可行动状态</a:t>
             </a:r>
           </a:p>
         </p:txBody>
@@ -4456,7 +4456,7 @@
           <p:cNvPr id="9" name="recap-connector-0">
             <a:extLst xmlns:a="http://schemas.openxmlformats.org/drawingml/2006/main">
               <a:ext uri="{FF2B5EF4-FFF2-40B4-BE49-F238E27FC236}">
-                <a16:creationId xmlns:a16="http://schemas.microsoft.com/office/drawing/2014/main" id="{8DF7744F-4464-4C33-AD43-B3C68BB4864C}"/>
+                <a16:creationId xmlns:a16="http://schemas.microsoft.com/office/drawing/2014/main" id="{9A169B6D-BBDD-40C7-BFBD-47C14B1A7F70}"/>
               </a:ext>
             </a:extLst>
           </p:cNvPr>
@@ -4476,7 +4476,7 @@
           <a:noFill xmlns:a="http://schemas.openxmlformats.org/drawingml/2006/main"/>
           <a:ln xmlns:a="http://schemas.openxmlformats.org/drawingml/2006/main" w="28575">
             <a:solidFill>
-              <a:srgbClr val="2D9B72"/>
+              <a:srgbClr val="0B6B4F"/>
             </a:solidFill>
             <a:prstDash val="solid"/>
           </a:ln>
@@ -4487,7 +4487,7 @@
           <p:cNvPr id="10" name="recap-circle-1">
             <a:extLst xmlns:a="http://schemas.openxmlformats.org/drawingml/2006/main">
               <a:ext uri="{FF2B5EF4-FFF2-40B4-BE49-F238E27FC236}">
-                <a16:creationId xmlns:a16="http://schemas.microsoft.com/office/drawing/2014/main" id="{B32BDB2B-4DCB-4883-8533-B8C27D3B7329}"/>
+                <a16:creationId xmlns:a16="http://schemas.microsoft.com/office/drawing/2014/main" id="{0ADC57FA-4079-4321-910C-BD1F444E1984}"/>
               </a:ext>
             </a:extLst>
           </p:cNvPr>
@@ -4520,7 +4520,7 @@
           <p:cNvPr id="11" name="recap-number-1">
             <a:extLst xmlns:a="http://schemas.openxmlformats.org/drawingml/2006/main">
               <a:ext uri="{FF2B5EF4-FFF2-40B4-BE49-F238E27FC236}">
-                <a16:creationId xmlns:a16="http://schemas.microsoft.com/office/drawing/2014/main" id="{31379020-9F20-45D9-BABB-0FF444E6342E}"/>
+                <a16:creationId xmlns:a16="http://schemas.microsoft.com/office/drawing/2014/main" id="{AB5D1B9D-0070-4E3C-94E3-C3988B9E4884}"/>
               </a:ext>
             </a:extLst>
           </p:cNvPr>
@@ -4578,7 +4578,7 @@
           <p:cNvPr id="12" name="recap-item-1">
             <a:extLst xmlns:a="http://schemas.openxmlformats.org/drawingml/2006/main">
               <a:ext uri="{FF2B5EF4-FFF2-40B4-BE49-F238E27FC236}">
-                <a16:creationId xmlns:a16="http://schemas.microsoft.com/office/drawing/2014/main" id="{A5FDBF35-6202-40B3-9233-137C91B5E8EC}"/>
+                <a16:creationId xmlns:a16="http://schemas.microsoft.com/office/drawing/2014/main" id="{1480CDA1-E036-4F0E-9379-9B05BFEFD1E4}"/>
               </a:ext>
             </a:extLst>
           </p:cNvPr>
@@ -4642,7 +4642,7 @@
           <p:cNvPr id="13" name="recap-connector-1">
             <a:extLst xmlns:a="http://schemas.openxmlformats.org/drawingml/2006/main">
               <a:ext uri="{FF2B5EF4-FFF2-40B4-BE49-F238E27FC236}">
-                <a16:creationId xmlns:a16="http://schemas.microsoft.com/office/drawing/2014/main" id="{17EAD487-1F4B-42E4-BAD1-1FC87DFD0827}"/>
+                <a16:creationId xmlns:a16="http://schemas.microsoft.com/office/drawing/2014/main" id="{7EE2A51F-BF17-4FB0-8A4A-550FD17E742F}"/>
               </a:ext>
             </a:extLst>
           </p:cNvPr>
@@ -4662,7 +4662,7 @@
           <a:noFill xmlns:a="http://schemas.openxmlformats.org/drawingml/2006/main"/>
           <a:ln xmlns:a="http://schemas.openxmlformats.org/drawingml/2006/main" w="28575">
             <a:solidFill>
-              <a:srgbClr val="2D9B72"/>
+              <a:srgbClr val="0B6B4F"/>
             </a:solidFill>
             <a:prstDash val="solid"/>
           </a:ln>
@@ -4673,7 +4673,7 @@
           <p:cNvPr id="14" name="recap-circle-2">
             <a:extLst xmlns:a="http://schemas.openxmlformats.org/drawingml/2006/main">
               <a:ext uri="{FF2B5EF4-FFF2-40B4-BE49-F238E27FC236}">
-                <a16:creationId xmlns:a16="http://schemas.microsoft.com/office/drawing/2014/main" id="{5B500593-D12F-48B5-B374-5B757E13F8CF}"/>
+                <a16:creationId xmlns:a16="http://schemas.microsoft.com/office/drawing/2014/main" id="{3B6024CF-1404-4035-B4FB-63D58D240264}"/>
               </a:ext>
             </a:extLst>
           </p:cNvPr>
@@ -4691,7 +4691,7 @@
             <a:avLst/>
           </a:prstGeom>
           <a:solidFill xmlns:a="http://schemas.openxmlformats.org/drawingml/2006/main">
-            <a:srgbClr val="2D9B72"/>
+            <a:srgbClr val="0B6B4F"/>
           </a:solidFill>
           <a:ln xmlns:a="http://schemas.openxmlformats.org/drawingml/2006/main" w="28575">
             <a:solidFill>
@@ -4706,7 +4706,7 @@
           <p:cNvPr id="15" name="recap-number-2">
             <a:extLst xmlns:a="http://schemas.openxmlformats.org/drawingml/2006/main">
               <a:ext uri="{FF2B5EF4-FFF2-40B4-BE49-F238E27FC236}">
-                <a16:creationId xmlns:a16="http://schemas.microsoft.com/office/drawing/2014/main" id="{9879EF67-559C-4321-93D6-E8EBAA41CB26}"/>
+                <a16:creationId xmlns:a16="http://schemas.microsoft.com/office/drawing/2014/main" id="{9E4E6579-CB07-4FCA-AAF4-9BD53595DDF2}"/>
               </a:ext>
             </a:extLst>
           </p:cNvPr>
@@ -4764,7 +4764,7 @@
           <p:cNvPr id="16" name="recap-item-2">
             <a:extLst xmlns:a="http://schemas.openxmlformats.org/drawingml/2006/main">
               <a:ext uri="{FF2B5EF4-FFF2-40B4-BE49-F238E27FC236}">
-                <a16:creationId xmlns:a16="http://schemas.microsoft.com/office/drawing/2014/main" id="{16B566C2-B116-48D8-ADA0-994A19B8C8ED}"/>
+                <a16:creationId xmlns:a16="http://schemas.microsoft.com/office/drawing/2014/main" id="{BA0E9650-C7E0-4522-81EE-8938822DD37E}"/>
               </a:ext>
             </a:extLst>
           </p:cNvPr>
@@ -4788,7 +4788,7 @@
           </a:solidFill>
           <a:ln xmlns:a="http://schemas.openxmlformats.org/drawingml/2006/main" w="19050">
             <a:solidFill>
-              <a:srgbClr val="2D9B72"/>
+              <a:srgbClr val="0B6B4F"/>
             </a:solidFill>
             <a:prstDash val="solid"/>
           </a:ln>
@@ -4826,7 +4826,7 @@
     </p:spTree>
     <p:extLst>
       <p:ext uri="{BB962C8B-B14F-4D97-AF65-F5344CB8AC3E}">
-        <p14:creationId xmlns:p14="http://schemas.microsoft.com/office/powerpoint/2010/main" val="984370967"/>
+        <p14:creationId xmlns:p14="http://schemas.microsoft.com/office/powerpoint/2010/main" val="544927604"/>
       </p:ext>
     </p:extLst>
   </p:cSld>
@@ -4857,7 +4857,7 @@
           <p:cNvPr id="1" name="s13-rule">
             <a:extLst xmlns:a="http://schemas.openxmlformats.org/drawingml/2006/main">
               <a:ext uri="{FF2B5EF4-FFF2-40B4-BE49-F238E27FC236}">
-                <a16:creationId xmlns:a16="http://schemas.microsoft.com/office/drawing/2014/main" id="{7B4079D5-1937-440D-9DC2-5C7486002233}"/>
+                <a16:creationId xmlns:a16="http://schemas.microsoft.com/office/drawing/2014/main" id="{CFBC2E11-6E5F-4BB6-AA9F-6689B0B22960}"/>
               </a:ext>
             </a:extLst>
           </p:cNvPr>
@@ -4890,7 +4890,7 @@
           <p:cNvPr id="2" name="s13-eyebrow">
             <a:extLst xmlns:a="http://schemas.openxmlformats.org/drawingml/2006/main">
               <a:ext uri="{FF2B5EF4-FFF2-40B4-BE49-F238E27FC236}">
-                <a16:creationId xmlns:a16="http://schemas.microsoft.com/office/drawing/2014/main" id="{22CF32EF-C8BE-494D-9781-E02ACD44CAA8}"/>
+                <a16:creationId xmlns:a16="http://schemas.microsoft.com/office/drawing/2014/main" id="{07B86FFD-8EA1-4AA9-A4E9-8022D1379240}"/>
               </a:ext>
             </a:extLst>
           </p:cNvPr>
@@ -4948,7 +4948,7 @@
           <p:cNvPr id="3" name="s13-title">
             <a:extLst xmlns:a="http://schemas.openxmlformats.org/drawingml/2006/main">
               <a:ext uri="{FF2B5EF4-FFF2-40B4-BE49-F238E27FC236}">
-                <a16:creationId xmlns:a16="http://schemas.microsoft.com/office/drawing/2014/main" id="{1866E356-6AC6-4180-931E-6F1A2500DE57}"/>
+                <a16:creationId xmlns:a16="http://schemas.microsoft.com/office/drawing/2014/main" id="{FB917F01-3E1A-4A29-B1FD-4EE87F7EAE89}"/>
               </a:ext>
             </a:extLst>
           </p:cNvPr>
@@ -4996,7 +4996,7 @@
                 <a:ea typeface="PingFang SC"/>
                 <a:cs typeface="PingFang SC"/>
               </a:rPr>
-              <a:t>从公开重制课件回到可核对的学习资料</a:t>
+              <a:t>具身智能闭环：依据、边界与延伸</a:t>
             </a:r>
           </a:p>
         </p:txBody>
@@ -5006,7 +5006,7 @@
           <p:cNvPr id="4" name="s13-footer">
             <a:extLst xmlns:a="http://schemas.openxmlformats.org/drawingml/2006/main">
               <a:ext uri="{FF2B5EF4-FFF2-40B4-BE49-F238E27FC236}">
-                <a16:creationId xmlns:a16="http://schemas.microsoft.com/office/drawing/2014/main" id="{9E1F7242-273A-447B-8D44-AB4C12281D26}"/>
+                <a16:creationId xmlns:a16="http://schemas.microsoft.com/office/drawing/2014/main" id="{C0D3FF81-416D-4C2F-BA40-73D14758994E}"/>
               </a:ext>
             </a:extLst>
           </p:cNvPr>
@@ -5037,7 +5037,7 @@
           <p:cNvPr id="5" name="s13-identity">
             <a:extLst xmlns:a="http://schemas.openxmlformats.org/drawingml/2006/main">
               <a:ext uri="{FF2B5EF4-FFF2-40B4-BE49-F238E27FC236}">
-                <a16:creationId xmlns:a16="http://schemas.microsoft.com/office/drawing/2014/main" id="{77BDC08D-FC05-4DE4-BABC-87EB4ADDBD2E}"/>
+                <a16:creationId xmlns:a16="http://schemas.microsoft.com/office/drawing/2014/main" id="{EAB2B532-DA54-4924-BF92-6676A8BF3A88}"/>
               </a:ext>
             </a:extLst>
           </p:cNvPr>
@@ -5095,7 +5095,7 @@
           <p:cNvPr id="6" name="source-0">
             <a:extLst xmlns:a="http://schemas.openxmlformats.org/drawingml/2006/main">
               <a:ext uri="{FF2B5EF4-FFF2-40B4-BE49-F238E27FC236}">
-                <a16:creationId xmlns:a16="http://schemas.microsoft.com/office/drawing/2014/main" id="{5A7AB9D8-81E4-4028-A948-078F357370F8}"/>
+                <a16:creationId xmlns:a16="http://schemas.microsoft.com/office/drawing/2014/main" id="{CF74470E-B9A1-41B2-A4C9-764814454267}"/>
               </a:ext>
             </a:extLst>
           </p:cNvPr>
@@ -5119,7 +5119,7 @@
           </a:solidFill>
           <a:ln xmlns:a="http://schemas.openxmlformats.org/drawingml/2006/main" w="9525">
             <a:solidFill>
-              <a:srgbClr val="2D9B72"/>
+              <a:srgbClr val="0B6B4F"/>
             </a:solidFill>
             <a:prstDash val="solid"/>
           </a:ln>
@@ -5159,7 +5159,7 @@
           <p:cNvPr id="7" name="source-1">
             <a:extLst xmlns:a="http://schemas.openxmlformats.org/drawingml/2006/main">
               <a:ext uri="{FF2B5EF4-FFF2-40B4-BE49-F238E27FC236}">
-                <a16:creationId xmlns:a16="http://schemas.microsoft.com/office/drawing/2014/main" id="{080C129C-5D4B-4DED-8FC7-B3297085F4F1}"/>
+                <a16:creationId xmlns:a16="http://schemas.microsoft.com/office/drawing/2014/main" id="{0D7ACE4B-51A5-4DDD-A729-ABFDD16676BB}"/>
               </a:ext>
             </a:extLst>
           </p:cNvPr>
@@ -5190,7 +5190,7 @@
         </p:spPr>
         <p:txBody>
           <a:bodyPr xmlns:a="http://schemas.openxmlformats.org/drawingml/2006/main" lIns="152400" tIns="133350" rIns="152400" bIns="133350" anchor="ctr">
-            <a:normAutofit fontScale="84687"/>
+            <a:normAutofit fontScale="69687"/>
           </a:bodyPr>
           <a:lstStyle xmlns:a="http://schemas.openxmlformats.org/drawingml/2006/main"/>
           <a:p xmlns:a="http://schemas.openxmlformats.org/drawingml/2006/main">
@@ -5213,17 +5213,209 @@
                 <a:ea typeface="PingFang SC"/>
                 <a:cs typeface="PingFang SC"/>
               </a:rPr>
-              <a:t>02  建议把一个文本智能体和一个移动机器人放在同一张“输入—状态—动作—反馈—失败后果”表中比较，观察身体与环境怎样改变智能问题</a:t>
-            </a:r>
-          </a:p>
-        </p:txBody>
-      </p:sp>
-      <p:sp>
-        <p:nvSpPr>
-          <p:cNvPr id="8" name="s13-takeaway-rule">
-            <a:extLst xmlns:a="http://schemas.openxmlformats.org/drawingml/2006/main">
-              <a:ext uri="{FF2B5EF4-FFF2-40B4-BE49-F238E27FC236}">
-                <a16:creationId xmlns:a16="http://schemas.microsoft.com/office/drawing/2014/main" id="{E51A37BA-2876-4BC3-B6EA-ED676C6B77C2}"/>
+              <a:t>02  Rodney Brooks；Intelligence without Representation；具身与情境化智能的重要早期路线；它不是具身智能的唯一公认定义；也不意味着所有系统都应放弃内部表示</a:t>
+            </a:r>
+          </a:p>
+        </p:txBody>
+      </p:sp>
+      <p:sp>
+        <p:nvSpPr>
+          <p:cNvPr id="8" name="source-2">
+            <a:extLst xmlns:a="http://schemas.openxmlformats.org/drawingml/2006/main">
+              <a:ext uri="{FF2B5EF4-FFF2-40B4-BE49-F238E27FC236}">
+                <a16:creationId xmlns:a16="http://schemas.microsoft.com/office/drawing/2014/main" id="{1611E5F9-957F-433B-A00E-DEFB435FEBF3}"/>
+              </a:ext>
+            </a:extLst>
+          </p:cNvPr>
+          <p:cNvSpPr>
+            <a:spLocks xmlns:a="http://schemas.openxmlformats.org/drawingml/2006/main" noGrp="1"/>
+          </p:cNvSpPr>
+          <p:nvPr/>
+        </p:nvSpPr>
+        <p:spPr>
+          <a:xfrm xmlns:a="http://schemas.openxmlformats.org/drawingml/2006/main">
+            <a:off x="914400" y="3314700"/>
+            <a:ext cx="10363200" cy="533400"/>
+          </a:xfrm>
+          <a:prstGeom xmlns:a="http://schemas.openxmlformats.org/drawingml/2006/main" prst="roundRect">
+            <a:avLst>
+              <a:gd name="adj" fmla="val 21429"/>
+            </a:avLst>
+          </a:prstGeom>
+          <a:solidFill xmlns:a="http://schemas.openxmlformats.org/drawingml/2006/main">
+            <a:srgbClr val="FFFFFF"/>
+          </a:solidFill>
+          <a:ln xmlns:a="http://schemas.openxmlformats.org/drawingml/2006/main" w="9525">
+            <a:solidFill>
+              <a:srgbClr val="D8E0E8"/>
+            </a:solidFill>
+            <a:prstDash val="solid"/>
+          </a:ln>
+        </p:spPr>
+        <p:txBody>
+          <a:bodyPr xmlns:a="http://schemas.openxmlformats.org/drawingml/2006/main" lIns="152400" tIns="133350" rIns="152400" bIns="133350" anchor="ctr">
+            <a:normAutofit fontScale="76127"/>
+          </a:bodyPr>
+          <a:lstStyle xmlns:a="http://schemas.openxmlformats.org/drawingml/2006/main"/>
+          <a:p xmlns:a="http://schemas.openxmlformats.org/drawingml/2006/main">
+            <a:pPr algn="l">
+              <a:defRPr sz="1500" b="0">
+                <a:solidFill>
+                  <a:srgbClr val="10233F"/>
+                </a:solidFill>
+                <a:latin typeface="PingFang SC"/>
+                <a:ea typeface="PingFang SC"/>
+                <a:cs typeface="PingFang SC"/>
+              </a:defRPr>
+            </a:pPr>
+            <a:r>
+              <a:rPr sz="1500" b="0">
+                <a:solidFill>
+                  <a:srgbClr val="10233F"/>
+                </a:solidFill>
+                <a:latin typeface="PingFang SC"/>
+                <a:ea typeface="PingFang SC"/>
+                <a:cs typeface="PingFang SC"/>
+              </a:rPr>
+              <a:t>03  Embodied Question Answering：说明行动会改变后续可获得的信息；证据来自三维仿真任务，不能直接等同于真机能力。（核对日期：2026-07-12）</a:t>
+            </a:r>
+          </a:p>
+        </p:txBody>
+      </p:sp>
+      <p:sp>
+        <p:nvSpPr>
+          <p:cNvPr id="9" name="source-3">
+            <a:extLst xmlns:a="http://schemas.openxmlformats.org/drawingml/2006/main">
+              <a:ext uri="{FF2B5EF4-FFF2-40B4-BE49-F238E27FC236}">
+                <a16:creationId xmlns:a16="http://schemas.microsoft.com/office/drawing/2014/main" id="{E66DC610-5FB2-45C5-B93A-5A7896D851A7}"/>
+              </a:ext>
+            </a:extLst>
+          </p:cNvPr>
+          <p:cNvSpPr>
+            <a:spLocks xmlns:a="http://schemas.openxmlformats.org/drawingml/2006/main" noGrp="1"/>
+          </p:cNvSpPr>
+          <p:nvPr/>
+        </p:nvSpPr>
+        <p:spPr>
+          <a:xfrm xmlns:a="http://schemas.openxmlformats.org/drawingml/2006/main">
+            <a:off x="914400" y="4000500"/>
+            <a:ext cx="10363200" cy="533400"/>
+          </a:xfrm>
+          <a:prstGeom xmlns:a="http://schemas.openxmlformats.org/drawingml/2006/main" prst="roundRect">
+            <a:avLst>
+              <a:gd name="adj" fmla="val 21429"/>
+            </a:avLst>
+          </a:prstGeom>
+          <a:solidFill xmlns:a="http://schemas.openxmlformats.org/drawingml/2006/main">
+            <a:srgbClr val="FFFFFF"/>
+          </a:solidFill>
+          <a:ln xmlns:a="http://schemas.openxmlformats.org/drawingml/2006/main" w="9525">
+            <a:solidFill>
+              <a:srgbClr val="D8E0E8"/>
+            </a:solidFill>
+            <a:prstDash val="solid"/>
+          </a:ln>
+        </p:spPr>
+        <p:txBody>
+          <a:bodyPr xmlns:a="http://schemas.openxmlformats.org/drawingml/2006/main" lIns="152400" tIns="133350" rIns="152400" bIns="133350" anchor="ctr">
+            <a:normAutofit fontScale="80087"/>
+          </a:bodyPr>
+          <a:lstStyle xmlns:a="http://schemas.openxmlformats.org/drawingml/2006/main"/>
+          <a:p xmlns:a="http://schemas.openxmlformats.org/drawingml/2006/main">
+            <a:pPr algn="l">
+              <a:defRPr sz="1500" b="0">
+                <a:solidFill>
+                  <a:srgbClr val="10233F"/>
+                </a:solidFill>
+                <a:latin typeface="PingFang SC"/>
+                <a:ea typeface="PingFang SC"/>
+                <a:cs typeface="PingFang SC"/>
+              </a:defRPr>
+            </a:pPr>
+            <a:r>
+              <a:rPr sz="1500" b="0">
+                <a:solidFill>
+                  <a:srgbClr val="10233F"/>
+                </a:solidFill>
+                <a:latin typeface="PingFang SC"/>
+                <a:ea typeface="PingFang SC"/>
+                <a:cs typeface="PingFang SC"/>
+              </a:rPr>
+              <a:t>04  Google Research：PaLM-E：观察图像、机器人状态与高层语言计划如何组合；低层实时控制仍由专门策略承担。（核对日期：2026-07-12）</a:t>
+            </a:r>
+          </a:p>
+        </p:txBody>
+      </p:sp>
+      <p:sp>
+        <p:nvSpPr>
+          <p:cNvPr id="10" name="source-4">
+            <a:extLst xmlns:a="http://schemas.openxmlformats.org/drawingml/2006/main">
+              <a:ext uri="{FF2B5EF4-FFF2-40B4-BE49-F238E27FC236}">
+                <a16:creationId xmlns:a16="http://schemas.microsoft.com/office/drawing/2014/main" id="{51CD898E-0B53-4A35-B637-0ACF9575EF44}"/>
+              </a:ext>
+            </a:extLst>
+          </p:cNvPr>
+          <p:cNvSpPr>
+            <a:spLocks xmlns:a="http://schemas.openxmlformats.org/drawingml/2006/main" noGrp="1"/>
+          </p:cNvSpPr>
+          <p:nvPr/>
+        </p:nvSpPr>
+        <p:spPr>
+          <a:xfrm xmlns:a="http://schemas.openxmlformats.org/drawingml/2006/main">
+            <a:off x="914400" y="4686300"/>
+            <a:ext cx="10363200" cy="533400"/>
+          </a:xfrm>
+          <a:prstGeom xmlns:a="http://schemas.openxmlformats.org/drawingml/2006/main" prst="roundRect">
+            <a:avLst>
+              <a:gd name="adj" fmla="val 21429"/>
+            </a:avLst>
+          </a:prstGeom>
+          <a:solidFill xmlns:a="http://schemas.openxmlformats.org/drawingml/2006/main">
+            <a:srgbClr val="FFFFFF"/>
+          </a:solidFill>
+          <a:ln xmlns:a="http://schemas.openxmlformats.org/drawingml/2006/main" w="9525">
+            <a:solidFill>
+              <a:srgbClr val="D8E0E8"/>
+            </a:solidFill>
+            <a:prstDash val="solid"/>
+          </a:ln>
+        </p:spPr>
+        <p:txBody>
+          <a:bodyPr xmlns:a="http://schemas.openxmlformats.org/drawingml/2006/main" lIns="152400" tIns="133350" rIns="152400" bIns="133350" anchor="ctr">
+            <a:normAutofit fontScale="81387"/>
+          </a:bodyPr>
+          <a:lstStyle xmlns:a="http://schemas.openxmlformats.org/drawingml/2006/main"/>
+          <a:p xmlns:a="http://schemas.openxmlformats.org/drawingml/2006/main">
+            <a:pPr algn="l">
+              <a:defRPr sz="1500" b="0">
+                <a:solidFill>
+                  <a:srgbClr val="10233F"/>
+                </a:solidFill>
+                <a:latin typeface="PingFang SC"/>
+                <a:ea typeface="PingFang SC"/>
+                <a:cs typeface="PingFang SC"/>
+              </a:defRPr>
+            </a:pPr>
+            <a:r>
+              <a:rPr sz="1500" b="0">
+                <a:solidFill>
+                  <a:srgbClr val="10233F"/>
+                </a:solidFill>
+                <a:latin typeface="PingFang SC"/>
+                <a:ea typeface="PingFang SC"/>
+                <a:cs typeface="PingFang SC"/>
+              </a:rPr>
+              <a:t>05  Google DeepMind：RT-2：视觉—语言—动作研究系统；展示能力不能外推为开放环境中的通用性或安全保证。（核对日期：2026-07-12）</a:t>
+            </a:r>
+          </a:p>
+        </p:txBody>
+      </p:sp>
+      <p:sp>
+        <p:nvSpPr>
+          <p:cNvPr id="11" name="s13-takeaway-rule">
+            <a:extLst xmlns:a="http://schemas.openxmlformats.org/drawingml/2006/main">
+              <a:ext uri="{FF2B5EF4-FFF2-40B4-BE49-F238E27FC236}">
+                <a16:creationId xmlns:a16="http://schemas.microsoft.com/office/drawing/2014/main" id="{583C81FB-B491-4B6C-8F0D-C11A2836B7FC}"/>
               </a:ext>
             </a:extLst>
           </p:cNvPr>
@@ -5253,10 +5445,10 @@
       </p:sp>
       <p:sp>
         <p:nvSpPr>
-          <p:cNvPr id="9" name="s13-takeaway">
-            <a:extLst xmlns:a="http://schemas.openxmlformats.org/drawingml/2006/main">
-              <a:ext uri="{FF2B5EF4-FFF2-40B4-BE49-F238E27FC236}">
-                <a16:creationId xmlns:a16="http://schemas.microsoft.com/office/drawing/2014/main" id="{98986D73-AEBF-4ACD-8583-D2A50AD409D1}"/>
+          <p:cNvPr id="12" name="s13-takeaway">
+            <a:extLst xmlns:a="http://schemas.openxmlformats.org/drawingml/2006/main">
+              <a:ext uri="{FF2B5EF4-FFF2-40B4-BE49-F238E27FC236}">
+                <a16:creationId xmlns:a16="http://schemas.microsoft.com/office/drawing/2014/main" id="{2A733BE8-9AF7-476B-9A61-6CF1D6F11595}"/>
               </a:ext>
             </a:extLst>
           </p:cNvPr>
@@ -5312,7 +5504,7 @@
     </p:spTree>
     <p:extLst>
       <p:ext uri="{BB962C8B-B14F-4D97-AF65-F5344CB8AC3E}">
-        <p14:creationId xmlns:p14="http://schemas.microsoft.com/office/powerpoint/2010/main" val="1702706178"/>
+        <p14:creationId xmlns:p14="http://schemas.microsoft.com/office/powerpoint/2010/main" val="503399291"/>
       </p:ext>
     </p:extLst>
   </p:cSld>
@@ -5343,7 +5535,7 @@
           <p:cNvPr id="1" name="s2-rule">
             <a:extLst xmlns:a="http://schemas.openxmlformats.org/drawingml/2006/main">
               <a:ext uri="{FF2B5EF4-FFF2-40B4-BE49-F238E27FC236}">
-                <a16:creationId xmlns:a16="http://schemas.microsoft.com/office/drawing/2014/main" id="{9D4DCEC9-2FC1-45E1-9E0F-9969E1B97E88}"/>
+                <a16:creationId xmlns:a16="http://schemas.microsoft.com/office/drawing/2014/main" id="{C71620F7-D116-40E7-BF07-D5C9E8F168F0}"/>
               </a:ext>
             </a:extLst>
           </p:cNvPr>
@@ -5376,7 +5568,7 @@
           <p:cNvPr id="2" name="s2-eyebrow">
             <a:extLst xmlns:a="http://schemas.openxmlformats.org/drawingml/2006/main">
               <a:ext uri="{FF2B5EF4-FFF2-40B4-BE49-F238E27FC236}">
-                <a16:creationId xmlns:a16="http://schemas.microsoft.com/office/drawing/2014/main" id="{3E66E862-84ED-4CD8-93A0-8156D0427259}"/>
+                <a16:creationId xmlns:a16="http://schemas.microsoft.com/office/drawing/2014/main" id="{D1E768F0-C5BB-4E51-A75B-AB53E68EC980}"/>
               </a:ext>
             </a:extLst>
           </p:cNvPr>
@@ -5434,7 +5626,7 @@
           <p:cNvPr id="3" name="s2-title">
             <a:extLst xmlns:a="http://schemas.openxmlformats.org/drawingml/2006/main">
               <a:ext uri="{FF2B5EF4-FFF2-40B4-BE49-F238E27FC236}">
-                <a16:creationId xmlns:a16="http://schemas.microsoft.com/office/drawing/2014/main" id="{44F1ADF7-688F-438F-A7DA-91F87D1742C4}"/>
+                <a16:creationId xmlns:a16="http://schemas.microsoft.com/office/drawing/2014/main" id="{8B9FD29F-44C1-4462-95AD-C848FE0BABFA}"/>
               </a:ext>
             </a:extLst>
           </p:cNvPr>
@@ -5482,7 +5674,7 @@
                 <a:ea typeface="PingFang SC"/>
                 <a:cs typeface="PingFang SC"/>
               </a:rPr>
-              <a:t>学完这一节，你能完成这些判断与行动</a:t>
+              <a:t>具身智能闭环：2项学习结果</a:t>
             </a:r>
           </a:p>
         </p:txBody>
@@ -5492,7 +5684,7 @@
           <p:cNvPr id="4" name="s2-footer">
             <a:extLst xmlns:a="http://schemas.openxmlformats.org/drawingml/2006/main">
               <a:ext uri="{FF2B5EF4-FFF2-40B4-BE49-F238E27FC236}">
-                <a16:creationId xmlns:a16="http://schemas.microsoft.com/office/drawing/2014/main" id="{8EC61829-F309-4FCA-A409-119D0CE35873}"/>
+                <a16:creationId xmlns:a16="http://schemas.microsoft.com/office/drawing/2014/main" id="{6EF8D4A5-D376-4C3F-910F-D174245CB763}"/>
               </a:ext>
             </a:extLst>
           </p:cNvPr>
@@ -5523,7 +5715,7 @@
           <p:cNvPr id="5" name="s2-identity">
             <a:extLst xmlns:a="http://schemas.openxmlformats.org/drawingml/2006/main">
               <a:ext uri="{FF2B5EF4-FFF2-40B4-BE49-F238E27FC236}">
-                <a16:creationId xmlns:a16="http://schemas.microsoft.com/office/drawing/2014/main" id="{59DBE5F5-BD02-49B1-83A6-217D71262773}"/>
+                <a16:creationId xmlns:a16="http://schemas.microsoft.com/office/drawing/2014/main" id="{F6F02735-2132-47DA-9298-906F9120338B}"/>
               </a:ext>
             </a:extLst>
           </p:cNvPr>
@@ -5581,7 +5773,7 @@
           <p:cNvPr id="6" name="objective-1">
             <a:extLst xmlns:a="http://schemas.openxmlformats.org/drawingml/2006/main">
               <a:ext uri="{FF2B5EF4-FFF2-40B4-BE49-F238E27FC236}">
-                <a16:creationId xmlns:a16="http://schemas.microsoft.com/office/drawing/2014/main" id="{6A2F23F8-BCAD-4B5A-9562-8A7204BA2B92}"/>
+                <a16:creationId xmlns:a16="http://schemas.microsoft.com/office/drawing/2014/main" id="{C6D7142A-1273-49E0-A5E2-E8BC418B6A87}"/>
               </a:ext>
             </a:extLst>
           </p:cNvPr>
@@ -5668,7 +5860,7 @@
           <p:cNvPr id="7" name="objective-2">
             <a:extLst xmlns:a="http://schemas.openxmlformats.org/drawingml/2006/main">
               <a:ext uri="{FF2B5EF4-FFF2-40B4-BE49-F238E27FC236}">
-                <a16:creationId xmlns:a16="http://schemas.microsoft.com/office/drawing/2014/main" id="{9215A335-3957-4E91-A7C9-880404C562F5}"/>
+                <a16:creationId xmlns:a16="http://schemas.microsoft.com/office/drawing/2014/main" id="{58BD1076-8D3B-468C-823A-FBF6787E4C46}"/>
               </a:ext>
             </a:extLst>
           </p:cNvPr>
@@ -5692,7 +5884,7 @@
           </a:solidFill>
           <a:ln xmlns:a="http://schemas.openxmlformats.org/drawingml/2006/main" w="19050">
             <a:solidFill>
-              <a:srgbClr val="2D9B72"/>
+              <a:srgbClr val="0B6B4F"/>
             </a:solidFill>
             <a:prstDash val="solid"/>
           </a:ln>
@@ -5753,7 +5945,7 @@
     </p:spTree>
     <p:extLst>
       <p:ext uri="{BB962C8B-B14F-4D97-AF65-F5344CB8AC3E}">
-        <p14:creationId xmlns:p14="http://schemas.microsoft.com/office/powerpoint/2010/main" val="1243671058"/>
+        <p14:creationId xmlns:p14="http://schemas.microsoft.com/office/powerpoint/2010/main" val="1692032366"/>
       </p:ext>
     </p:extLst>
   </p:cSld>
@@ -5784,7 +5976,7 @@
           <p:cNvPr id="1" name="s3-rule">
             <a:extLst xmlns:a="http://schemas.openxmlformats.org/drawingml/2006/main">
               <a:ext uri="{FF2B5EF4-FFF2-40B4-BE49-F238E27FC236}">
-                <a16:creationId xmlns:a16="http://schemas.microsoft.com/office/drawing/2014/main" id="{DC91B7A1-888D-45FA-9A59-8925874AFF31}"/>
+                <a16:creationId xmlns:a16="http://schemas.microsoft.com/office/drawing/2014/main" id="{6D132C59-2AF4-4CFB-99AB-F4AEC3996244}"/>
               </a:ext>
             </a:extLst>
           </p:cNvPr>
@@ -5817,7 +6009,7 @@
           <p:cNvPr id="2" name="s3-eyebrow">
             <a:extLst xmlns:a="http://schemas.openxmlformats.org/drawingml/2006/main">
               <a:ext uri="{FF2B5EF4-FFF2-40B4-BE49-F238E27FC236}">
-                <a16:creationId xmlns:a16="http://schemas.microsoft.com/office/drawing/2014/main" id="{963B5A10-C2EB-442B-A5B0-5019BCF66E7B}"/>
+                <a16:creationId xmlns:a16="http://schemas.microsoft.com/office/drawing/2014/main" id="{F2DC51A6-54E3-4ABA-B951-0C1554B62504}"/>
               </a:ext>
             </a:extLst>
           </p:cNvPr>
@@ -5875,7 +6067,7 @@
           <p:cNvPr id="3" name="s3-title">
             <a:extLst xmlns:a="http://schemas.openxmlformats.org/drawingml/2006/main">
               <a:ext uri="{FF2B5EF4-FFF2-40B4-BE49-F238E27FC236}">
-                <a16:creationId xmlns:a16="http://schemas.microsoft.com/office/drawing/2014/main" id="{063262FD-B7B1-4D58-A63B-30529B2E3992}"/>
+                <a16:creationId xmlns:a16="http://schemas.microsoft.com/office/drawing/2014/main" id="{F8747FBB-FFED-47C3-B289-874D1D81A71A}"/>
               </a:ext>
             </a:extLst>
           </p:cNvPr>
@@ -5900,7 +6092,7 @@
         </p:spPr>
         <p:txBody>
           <a:bodyPr xmlns:a="http://schemas.openxmlformats.org/drawingml/2006/main" lIns="0" tIns="0" rIns="0" bIns="0" anchor="ctr">
-            <a:normAutofit fontScale="78824"/>
+            <a:normAutofit fontScale="100000"/>
           </a:bodyPr>
           <a:lstStyle xmlns:a="http://schemas.openxmlformats.org/drawingml/2006/main"/>
           <a:p xmlns:a="http://schemas.openxmlformats.org/drawingml/2006/main">
@@ -5923,7 +6115,7 @@
                 <a:ea typeface="PingFang SC"/>
                 <a:cs typeface="PingFang SC"/>
               </a:rPr>
-              <a:t>具身智能强调智能体拥有身体或执行载体，并与真实或仿真环境持续交互</a:t>
+              <a:t>具身智能从身体与环境交互中获得可行动状态</a:t>
             </a:r>
           </a:p>
         </p:txBody>
@@ -5933,7 +6125,7 @@
           <p:cNvPr id="4" name="s3-footer">
             <a:extLst xmlns:a="http://schemas.openxmlformats.org/drawingml/2006/main">
               <a:ext uri="{FF2B5EF4-FFF2-40B4-BE49-F238E27FC236}">
-                <a16:creationId xmlns:a16="http://schemas.microsoft.com/office/drawing/2014/main" id="{2788A97F-F8ED-46F1-87D7-4D8161FEA155}"/>
+                <a16:creationId xmlns:a16="http://schemas.microsoft.com/office/drawing/2014/main" id="{89C8891E-5294-43D8-B9A1-F1C1C1279DD5}"/>
               </a:ext>
             </a:extLst>
           </p:cNvPr>
@@ -5964,7 +6156,7 @@
           <p:cNvPr id="5" name="s3-identity">
             <a:extLst xmlns:a="http://schemas.openxmlformats.org/drawingml/2006/main">
               <a:ext uri="{FF2B5EF4-FFF2-40B4-BE49-F238E27FC236}">
-                <a16:creationId xmlns:a16="http://schemas.microsoft.com/office/drawing/2014/main" id="{63004A31-7454-48DE-B4E2-93BD1C22F2B3}"/>
+                <a16:creationId xmlns:a16="http://schemas.microsoft.com/office/drawing/2014/main" id="{08DAEC1A-DD2A-4243-8B2A-199DF18752BB}"/>
               </a:ext>
             </a:extLst>
           </p:cNvPr>
@@ -6022,7 +6214,7 @@
           <p:cNvPr id="6" name="core-no-0">
             <a:extLst xmlns:a="http://schemas.openxmlformats.org/drawingml/2006/main">
               <a:ext uri="{FF2B5EF4-FFF2-40B4-BE49-F238E27FC236}">
-                <a16:creationId xmlns:a16="http://schemas.microsoft.com/office/drawing/2014/main" id="{5A0E0DFD-9EA7-4D25-A38C-60B103863E6F}"/>
+                <a16:creationId xmlns:a16="http://schemas.microsoft.com/office/drawing/2014/main" id="{5E14DB1B-A080-4C03-8AA7-8AB14A0DE3EB}"/>
               </a:ext>
             </a:extLst>
           </p:cNvPr>
@@ -6054,7 +6246,7 @@
             <a:pPr algn="l">
               <a:defRPr sz="2250" b="1">
                 <a:solidFill>
-                  <a:srgbClr val="2D9B72"/>
+                  <a:srgbClr val="0B6B4F"/>
                 </a:solidFill>
                 <a:latin typeface="PingFang SC"/>
                 <a:ea typeface="PingFang SC"/>
@@ -6064,7 +6256,7 @@
             <a:r>
               <a:rPr sz="2250" b="1">
                 <a:solidFill>
-                  <a:srgbClr val="2D9B72"/>
+                  <a:srgbClr val="0B6B4F"/>
                 </a:solidFill>
                 <a:latin typeface="PingFang SC"/>
                 <a:ea typeface="PingFang SC"/>
@@ -6080,7 +6272,7 @@
           <p:cNvPr id="7" name="core-label-0">
             <a:extLst xmlns:a="http://schemas.openxmlformats.org/drawingml/2006/main">
               <a:ext uri="{FF2B5EF4-FFF2-40B4-BE49-F238E27FC236}">
-                <a16:creationId xmlns:a16="http://schemas.microsoft.com/office/drawing/2014/main" id="{3FF2D184-1DBA-4775-B650-D6559EF1835B}"/>
+                <a16:creationId xmlns:a16="http://schemas.microsoft.com/office/drawing/2014/main" id="{3BFE4ADE-C9A0-427C-B4B3-9C302123B951}"/>
               </a:ext>
             </a:extLst>
           </p:cNvPr>
@@ -6138,7 +6330,7 @@
           <p:cNvPr id="8" name="core-body-0">
             <a:extLst xmlns:a="http://schemas.openxmlformats.org/drawingml/2006/main">
               <a:ext uri="{FF2B5EF4-FFF2-40B4-BE49-F238E27FC236}">
-                <a16:creationId xmlns:a16="http://schemas.microsoft.com/office/drawing/2014/main" id="{6C8E7341-C19A-4483-8B91-9BA7DE8A7BAD}"/>
+                <a16:creationId xmlns:a16="http://schemas.microsoft.com/office/drawing/2014/main" id="{8B84DCBE-DEDA-4174-8265-15F769F4FA58}"/>
               </a:ext>
             </a:extLst>
           </p:cNvPr>
@@ -6162,7 +6354,7 @@
           </a:solidFill>
           <a:ln xmlns:a="http://schemas.openxmlformats.org/drawingml/2006/main" w="19050">
             <a:solidFill>
-              <a:srgbClr val="2D9B72"/>
+              <a:srgbClr val="0B6B4F"/>
             </a:solidFill>
             <a:prstDash val="solid"/>
           </a:ln>
@@ -6202,7 +6394,7 @@
           <p:cNvPr id="9" name="core-no-1">
             <a:extLst xmlns:a="http://schemas.openxmlformats.org/drawingml/2006/main">
               <a:ext uri="{FF2B5EF4-FFF2-40B4-BE49-F238E27FC236}">
-                <a16:creationId xmlns:a16="http://schemas.microsoft.com/office/drawing/2014/main" id="{264113F3-CA62-49E9-86FD-5DEAF3556BDC}"/>
+                <a16:creationId xmlns:a16="http://schemas.microsoft.com/office/drawing/2014/main" id="{129DB66D-412E-42F8-A6F9-CB70B313A662}"/>
               </a:ext>
             </a:extLst>
           </p:cNvPr>
@@ -6234,7 +6426,7 @@
             <a:pPr algn="l">
               <a:defRPr sz="2250" b="1">
                 <a:solidFill>
-                  <a:srgbClr val="2D9B72"/>
+                  <a:srgbClr val="0B6B4F"/>
                 </a:solidFill>
                 <a:latin typeface="PingFang SC"/>
                 <a:ea typeface="PingFang SC"/>
@@ -6244,7 +6436,7 @@
             <a:r>
               <a:rPr sz="2250" b="1">
                 <a:solidFill>
-                  <a:srgbClr val="2D9B72"/>
+                  <a:srgbClr val="0B6B4F"/>
                 </a:solidFill>
                 <a:latin typeface="PingFang SC"/>
                 <a:ea typeface="PingFang SC"/>
@@ -6260,7 +6452,7 @@
           <p:cNvPr id="10" name="core-label-1">
             <a:extLst xmlns:a="http://schemas.openxmlformats.org/drawingml/2006/main">
               <a:ext uri="{FF2B5EF4-FFF2-40B4-BE49-F238E27FC236}">
-                <a16:creationId xmlns:a16="http://schemas.microsoft.com/office/drawing/2014/main" id="{28D16439-8A4F-4BFF-AD6F-0CA85D4D4DEF}"/>
+                <a16:creationId xmlns:a16="http://schemas.microsoft.com/office/drawing/2014/main" id="{4BDAF42B-DD4F-4EA8-868F-B383604C74A8}"/>
               </a:ext>
             </a:extLst>
           </p:cNvPr>
@@ -6318,7 +6510,7 @@
           <p:cNvPr id="11" name="core-body-1">
             <a:extLst xmlns:a="http://schemas.openxmlformats.org/drawingml/2006/main">
               <a:ext uri="{FF2B5EF4-FFF2-40B4-BE49-F238E27FC236}">
-                <a16:creationId xmlns:a16="http://schemas.microsoft.com/office/drawing/2014/main" id="{E3D92E71-77A2-4B62-B1A1-391095341729}"/>
+                <a16:creationId xmlns:a16="http://schemas.microsoft.com/office/drawing/2014/main" id="{7BEA9D1B-D3A4-4CA2-81FC-F2065BA6FE41}"/>
               </a:ext>
             </a:extLst>
           </p:cNvPr>
@@ -6382,7 +6574,7 @@
           <p:cNvPr id="12" name="s3-takeaway-rule">
             <a:extLst xmlns:a="http://schemas.openxmlformats.org/drawingml/2006/main">
               <a:ext uri="{FF2B5EF4-FFF2-40B4-BE49-F238E27FC236}">
-                <a16:creationId xmlns:a16="http://schemas.microsoft.com/office/drawing/2014/main" id="{143A428E-1FC5-4067-A9F7-A10A96940388}"/>
+                <a16:creationId xmlns:a16="http://schemas.microsoft.com/office/drawing/2014/main" id="{E81499DC-2AD0-4D29-8C73-8C03584EB693}"/>
               </a:ext>
             </a:extLst>
           </p:cNvPr>
@@ -6415,7 +6607,7 @@
           <p:cNvPr id="13" name="s3-takeaway">
             <a:extLst xmlns:a="http://schemas.openxmlformats.org/drawingml/2006/main">
               <a:ext uri="{FF2B5EF4-FFF2-40B4-BE49-F238E27FC236}">
-                <a16:creationId xmlns:a16="http://schemas.microsoft.com/office/drawing/2014/main" id="{D4C2FF94-9861-4631-BE8E-933737195629}"/>
+                <a16:creationId xmlns:a16="http://schemas.microsoft.com/office/drawing/2014/main" id="{111E30AF-A111-4379-AB2E-ADF03772012A}"/>
               </a:ext>
             </a:extLst>
           </p:cNvPr>
@@ -6463,7 +6655,7 @@
                 <a:ea typeface="PingFang SC"/>
                 <a:cs typeface="PingFang SC"/>
               </a:rPr>
-              <a:t>具身智能强调智能体拥有身体或执行载体，并与真实或仿真环境持续交互</a:t>
+              <a:t>具身智能从身体与环境交互中获得可行动状态</a:t>
             </a:r>
           </a:p>
         </p:txBody>
@@ -6471,7 +6663,7 @@
     </p:spTree>
     <p:extLst>
       <p:ext uri="{BB962C8B-B14F-4D97-AF65-F5344CB8AC3E}">
-        <p14:creationId xmlns:p14="http://schemas.microsoft.com/office/powerpoint/2010/main" val="835066969"/>
+        <p14:creationId xmlns:p14="http://schemas.microsoft.com/office/powerpoint/2010/main" val="1997975032"/>
       </p:ext>
     </p:extLst>
   </p:cSld>
@@ -6502,7 +6694,7 @@
           <p:cNvPr id="1" name="s4-rule">
             <a:extLst xmlns:a="http://schemas.openxmlformats.org/drawingml/2006/main">
               <a:ext uri="{FF2B5EF4-FFF2-40B4-BE49-F238E27FC236}">
-                <a16:creationId xmlns:a16="http://schemas.microsoft.com/office/drawing/2014/main" id="{81095D31-186D-4815-BAE6-CAC4E86D8BA8}"/>
+                <a16:creationId xmlns:a16="http://schemas.microsoft.com/office/drawing/2014/main" id="{831BF8D9-C097-4DAF-AF40-9AFB881D055D}"/>
               </a:ext>
             </a:extLst>
           </p:cNvPr>
@@ -6535,7 +6727,7 @@
           <p:cNvPr id="2" name="s4-eyebrow">
             <a:extLst xmlns:a="http://schemas.openxmlformats.org/drawingml/2006/main">
               <a:ext uri="{FF2B5EF4-FFF2-40B4-BE49-F238E27FC236}">
-                <a16:creationId xmlns:a16="http://schemas.microsoft.com/office/drawing/2014/main" id="{31CEB4B3-C0A1-4DB3-AB8A-D0C41DC6E334}"/>
+                <a16:creationId xmlns:a16="http://schemas.microsoft.com/office/drawing/2014/main" id="{4B0E3106-6956-4FFD-95B7-A16AD8865A24}"/>
               </a:ext>
             </a:extLst>
           </p:cNvPr>
@@ -6593,7 +6785,7 @@
           <p:cNvPr id="3" name="s4-title">
             <a:extLst xmlns:a="http://schemas.openxmlformats.org/drawingml/2006/main">
               <a:ext uri="{FF2B5EF4-FFF2-40B4-BE49-F238E27FC236}">
-                <a16:creationId xmlns:a16="http://schemas.microsoft.com/office/drawing/2014/main" id="{86A824BE-C304-4F11-A816-4885F5086691}"/>
+                <a16:creationId xmlns:a16="http://schemas.microsoft.com/office/drawing/2014/main" id="{20A75675-DAB6-45DA-8D0F-D1C26938A634}"/>
               </a:ext>
             </a:extLst>
           </p:cNvPr>
@@ -6651,7 +6843,7 @@
           <p:cNvPr id="4" name="s4-footer">
             <a:extLst xmlns:a="http://schemas.openxmlformats.org/drawingml/2006/main">
               <a:ext uri="{FF2B5EF4-FFF2-40B4-BE49-F238E27FC236}">
-                <a16:creationId xmlns:a16="http://schemas.microsoft.com/office/drawing/2014/main" id="{4E99BC2A-5F16-4967-9227-E4B028072B07}"/>
+                <a16:creationId xmlns:a16="http://schemas.microsoft.com/office/drawing/2014/main" id="{A0DD5D0D-9C38-4838-8975-74094DA103C3}"/>
               </a:ext>
             </a:extLst>
           </p:cNvPr>
@@ -6682,7 +6874,7 @@
           <p:cNvPr id="5" name="s4-identity">
             <a:extLst xmlns:a="http://schemas.openxmlformats.org/drawingml/2006/main">
               <a:ext uri="{FF2B5EF4-FFF2-40B4-BE49-F238E27FC236}">
-                <a16:creationId xmlns:a16="http://schemas.microsoft.com/office/drawing/2014/main" id="{F1B01C16-F9A0-4F87-8BB6-1E1746EBB4F6}"/>
+                <a16:creationId xmlns:a16="http://schemas.microsoft.com/office/drawing/2014/main" id="{B89BB7F8-3DDA-4B88-999F-0EBEE8827680}"/>
               </a:ext>
             </a:extLst>
           </p:cNvPr>
@@ -6740,7 +6932,7 @@
           <p:cNvPr id="6" name="core-no-0">
             <a:extLst xmlns:a="http://schemas.openxmlformats.org/drawingml/2006/main">
               <a:ext uri="{FF2B5EF4-FFF2-40B4-BE49-F238E27FC236}">
-                <a16:creationId xmlns:a16="http://schemas.microsoft.com/office/drawing/2014/main" id="{D78B0A16-209E-41FE-BD21-F5521DE4C01E}"/>
+                <a16:creationId xmlns:a16="http://schemas.microsoft.com/office/drawing/2014/main" id="{A879A25F-8C79-4111-9ECC-42F9A3C61C08}"/>
               </a:ext>
             </a:extLst>
           </p:cNvPr>
@@ -6772,7 +6964,7 @@
             <a:pPr algn="l">
               <a:defRPr sz="2250" b="1">
                 <a:solidFill>
-                  <a:srgbClr val="2D9B72"/>
+                  <a:srgbClr val="0B6B4F"/>
                 </a:solidFill>
                 <a:latin typeface="PingFang SC"/>
                 <a:ea typeface="PingFang SC"/>
@@ -6782,7 +6974,7 @@
             <a:r>
               <a:rPr sz="2250" b="1">
                 <a:solidFill>
-                  <a:srgbClr val="2D9B72"/>
+                  <a:srgbClr val="0B6B4F"/>
                 </a:solidFill>
                 <a:latin typeface="PingFang SC"/>
                 <a:ea typeface="PingFang SC"/>
@@ -6798,7 +6990,7 @@
           <p:cNvPr id="7" name="core-label-0">
             <a:extLst xmlns:a="http://schemas.openxmlformats.org/drawingml/2006/main">
               <a:ext uri="{FF2B5EF4-FFF2-40B4-BE49-F238E27FC236}">
-                <a16:creationId xmlns:a16="http://schemas.microsoft.com/office/drawing/2014/main" id="{B413CDE5-F688-430A-8CBF-B5477E31D533}"/>
+                <a16:creationId xmlns:a16="http://schemas.microsoft.com/office/drawing/2014/main" id="{46EE789C-0353-4AC8-B619-8C669AB7EBF6}"/>
               </a:ext>
             </a:extLst>
           </p:cNvPr>
@@ -6856,7 +7048,7 @@
           <p:cNvPr id="8" name="core-body-0">
             <a:extLst xmlns:a="http://schemas.openxmlformats.org/drawingml/2006/main">
               <a:ext uri="{FF2B5EF4-FFF2-40B4-BE49-F238E27FC236}">
-                <a16:creationId xmlns:a16="http://schemas.microsoft.com/office/drawing/2014/main" id="{78265AD1-823F-4123-B866-EDB8FB1E8F10}"/>
+                <a16:creationId xmlns:a16="http://schemas.microsoft.com/office/drawing/2014/main" id="{976B8256-0BFB-4406-91B0-07290C8CE6BF}"/>
               </a:ext>
             </a:extLst>
           </p:cNvPr>
@@ -6880,7 +7072,7 @@
           </a:solidFill>
           <a:ln xmlns:a="http://schemas.openxmlformats.org/drawingml/2006/main" w="19050">
             <a:solidFill>
-              <a:srgbClr val="2D9B72"/>
+              <a:srgbClr val="0B6B4F"/>
             </a:solidFill>
             <a:prstDash val="solid"/>
           </a:ln>
@@ -6920,7 +7112,7 @@
           <p:cNvPr id="9" name="core-no-1">
             <a:extLst xmlns:a="http://schemas.openxmlformats.org/drawingml/2006/main">
               <a:ext uri="{FF2B5EF4-FFF2-40B4-BE49-F238E27FC236}">
-                <a16:creationId xmlns:a16="http://schemas.microsoft.com/office/drawing/2014/main" id="{FFC7101D-F8FB-4D4E-A485-890F954890B8}"/>
+                <a16:creationId xmlns:a16="http://schemas.microsoft.com/office/drawing/2014/main" id="{32DCAB49-4F16-429F-AF62-9EA4DF02E30B}"/>
               </a:ext>
             </a:extLst>
           </p:cNvPr>
@@ -6952,7 +7144,7 @@
             <a:pPr algn="l">
               <a:defRPr sz="2250" b="1">
                 <a:solidFill>
-                  <a:srgbClr val="2D9B72"/>
+                  <a:srgbClr val="0B6B4F"/>
                 </a:solidFill>
                 <a:latin typeface="PingFang SC"/>
                 <a:ea typeface="PingFang SC"/>
@@ -6962,7 +7154,7 @@
             <a:r>
               <a:rPr sz="2250" b="1">
                 <a:solidFill>
-                  <a:srgbClr val="2D9B72"/>
+                  <a:srgbClr val="0B6B4F"/>
                 </a:solidFill>
                 <a:latin typeface="PingFang SC"/>
                 <a:ea typeface="PingFang SC"/>
@@ -6978,7 +7170,7 @@
           <p:cNvPr id="10" name="core-body-1">
             <a:extLst xmlns:a="http://schemas.openxmlformats.org/drawingml/2006/main">
               <a:ext uri="{FF2B5EF4-FFF2-40B4-BE49-F238E27FC236}">
-                <a16:creationId xmlns:a16="http://schemas.microsoft.com/office/drawing/2014/main" id="{7273D7C9-F783-4619-AB66-1688EB04D0FB}"/>
+                <a16:creationId xmlns:a16="http://schemas.microsoft.com/office/drawing/2014/main" id="{27857B11-0F49-4EBA-A0B4-4E3D4E6109D7}"/>
               </a:ext>
             </a:extLst>
           </p:cNvPr>
@@ -7042,7 +7234,7 @@
           <p:cNvPr id="11" name="s4-takeaway-rule">
             <a:extLst xmlns:a="http://schemas.openxmlformats.org/drawingml/2006/main">
               <a:ext uri="{FF2B5EF4-FFF2-40B4-BE49-F238E27FC236}">
-                <a16:creationId xmlns:a16="http://schemas.microsoft.com/office/drawing/2014/main" id="{928DCDBB-89AA-4BE3-8322-682101809008}"/>
+                <a16:creationId xmlns:a16="http://schemas.microsoft.com/office/drawing/2014/main" id="{91F46F2D-28AE-4604-90C9-5138AB2A2508}"/>
               </a:ext>
             </a:extLst>
           </p:cNvPr>
@@ -7075,7 +7267,7 @@
           <p:cNvPr id="12" name="s4-takeaway">
             <a:extLst xmlns:a="http://schemas.openxmlformats.org/drawingml/2006/main">
               <a:ext uri="{FF2B5EF4-FFF2-40B4-BE49-F238E27FC236}">
-                <a16:creationId xmlns:a16="http://schemas.microsoft.com/office/drawing/2014/main" id="{547304D7-FC60-4BF7-8AF4-7BE7C04C6B62}"/>
+                <a16:creationId xmlns:a16="http://schemas.microsoft.com/office/drawing/2014/main" id="{26A32DD3-F7C0-433F-8C34-8215C5C6B957}"/>
               </a:ext>
             </a:extLst>
           </p:cNvPr>
@@ -7131,7 +7323,7 @@
     </p:spTree>
     <p:extLst>
       <p:ext uri="{BB962C8B-B14F-4D97-AF65-F5344CB8AC3E}">
-        <p14:creationId xmlns:p14="http://schemas.microsoft.com/office/powerpoint/2010/main" val="900543003"/>
+        <p14:creationId xmlns:p14="http://schemas.microsoft.com/office/powerpoint/2010/main" val="1610243722"/>
       </p:ext>
     </p:extLst>
   </p:cSld>
@@ -7162,7 +7354,7 @@
           <p:cNvPr id="1" name="s5-rule">
             <a:extLst xmlns:a="http://schemas.openxmlformats.org/drawingml/2006/main">
               <a:ext uri="{FF2B5EF4-FFF2-40B4-BE49-F238E27FC236}">
-                <a16:creationId xmlns:a16="http://schemas.microsoft.com/office/drawing/2014/main" id="{2039DA26-2D85-40BC-85DD-B664816A78DF}"/>
+                <a16:creationId xmlns:a16="http://schemas.microsoft.com/office/drawing/2014/main" id="{87CC0B38-CB38-47A4-A1CA-538FD011155E}"/>
               </a:ext>
             </a:extLst>
           </p:cNvPr>
@@ -7195,7 +7387,7 @@
           <p:cNvPr id="2" name="s5-eyebrow">
             <a:extLst xmlns:a="http://schemas.openxmlformats.org/drawingml/2006/main">
               <a:ext uri="{FF2B5EF4-FFF2-40B4-BE49-F238E27FC236}">
-                <a16:creationId xmlns:a16="http://schemas.microsoft.com/office/drawing/2014/main" id="{6C8AABF4-B1F3-4023-9ED3-C99389501902}"/>
+                <a16:creationId xmlns:a16="http://schemas.microsoft.com/office/drawing/2014/main" id="{AB052226-B13B-447D-9C1A-24F46A5146D2}"/>
               </a:ext>
             </a:extLst>
           </p:cNvPr>
@@ -7253,7 +7445,7 @@
           <p:cNvPr id="3" name="s5-title">
             <a:extLst xmlns:a="http://schemas.openxmlformats.org/drawingml/2006/main">
               <a:ext uri="{FF2B5EF4-FFF2-40B4-BE49-F238E27FC236}">
-                <a16:creationId xmlns:a16="http://schemas.microsoft.com/office/drawing/2014/main" id="{C3113DBF-811C-4E04-A44B-D5B099E180B7}"/>
+                <a16:creationId xmlns:a16="http://schemas.microsoft.com/office/drawing/2014/main" id="{C1FAC138-531C-444E-9690-6AFB5BA6FCBA}"/>
               </a:ext>
             </a:extLst>
           </p:cNvPr>
@@ -7311,7 +7503,7 @@
           <p:cNvPr id="4" name="s5-footer">
             <a:extLst xmlns:a="http://schemas.openxmlformats.org/drawingml/2006/main">
               <a:ext uri="{FF2B5EF4-FFF2-40B4-BE49-F238E27FC236}">
-                <a16:creationId xmlns:a16="http://schemas.microsoft.com/office/drawing/2014/main" id="{C90D3A16-0C01-4D91-86BD-3DA94DED85FB}"/>
+                <a16:creationId xmlns:a16="http://schemas.microsoft.com/office/drawing/2014/main" id="{C756B65B-77CD-4A34-8E2E-FE9D8DF4AE17}"/>
               </a:ext>
             </a:extLst>
           </p:cNvPr>
@@ -7342,7 +7534,7 @@
           <p:cNvPr id="5" name="s5-identity">
             <a:extLst xmlns:a="http://schemas.openxmlformats.org/drawingml/2006/main">
               <a:ext uri="{FF2B5EF4-FFF2-40B4-BE49-F238E27FC236}">
-                <a16:creationId xmlns:a16="http://schemas.microsoft.com/office/drawing/2014/main" id="{8F9FC7CB-F16C-4B3B-AEFA-2B42AAD83312}"/>
+                <a16:creationId xmlns:a16="http://schemas.microsoft.com/office/drawing/2014/main" id="{9B542973-640A-4820-BF4C-6B8D889CA804}"/>
               </a:ext>
             </a:extLst>
           </p:cNvPr>
@@ -7400,7 +7592,7 @@
           <p:cNvPr id="6" name="core-no-0">
             <a:extLst xmlns:a="http://schemas.openxmlformats.org/drawingml/2006/main">
               <a:ext uri="{FF2B5EF4-FFF2-40B4-BE49-F238E27FC236}">
-                <a16:creationId xmlns:a16="http://schemas.microsoft.com/office/drawing/2014/main" id="{DF558C73-BA87-4B6A-8CBB-6546412C6E66}"/>
+                <a16:creationId xmlns:a16="http://schemas.microsoft.com/office/drawing/2014/main" id="{0BC8D6A1-A737-46A5-89BC-60C3A0AFB726}"/>
               </a:ext>
             </a:extLst>
           </p:cNvPr>
@@ -7432,7 +7624,7 @@
             <a:pPr algn="l">
               <a:defRPr sz="2250" b="1">
                 <a:solidFill>
-                  <a:srgbClr val="2D9B72"/>
+                  <a:srgbClr val="0B6B4F"/>
                 </a:solidFill>
                 <a:latin typeface="PingFang SC"/>
                 <a:ea typeface="PingFang SC"/>
@@ -7442,7 +7634,7 @@
             <a:r>
               <a:rPr sz="2250" b="1">
                 <a:solidFill>
-                  <a:srgbClr val="2D9B72"/>
+                  <a:srgbClr val="0B6B4F"/>
                 </a:solidFill>
                 <a:latin typeface="PingFang SC"/>
                 <a:ea typeface="PingFang SC"/>
@@ -7458,7 +7650,7 @@
           <p:cNvPr id="7" name="core-label-0">
             <a:extLst xmlns:a="http://schemas.openxmlformats.org/drawingml/2006/main">
               <a:ext uri="{FF2B5EF4-FFF2-40B4-BE49-F238E27FC236}">
-                <a16:creationId xmlns:a16="http://schemas.microsoft.com/office/drawing/2014/main" id="{0630EB66-74DD-4CF3-9E71-A49F1623F59E}"/>
+                <a16:creationId xmlns:a16="http://schemas.microsoft.com/office/drawing/2014/main" id="{7C1781B2-67F2-4A25-9277-3DD57F58AD7C}"/>
               </a:ext>
             </a:extLst>
           </p:cNvPr>
@@ -7516,7 +7708,7 @@
           <p:cNvPr id="8" name="core-body-0">
             <a:extLst xmlns:a="http://schemas.openxmlformats.org/drawingml/2006/main">
               <a:ext uri="{FF2B5EF4-FFF2-40B4-BE49-F238E27FC236}">
-                <a16:creationId xmlns:a16="http://schemas.microsoft.com/office/drawing/2014/main" id="{C1499A44-A1E9-4998-8A2D-7739EB8DF62E}"/>
+                <a16:creationId xmlns:a16="http://schemas.microsoft.com/office/drawing/2014/main" id="{77A799DF-6307-41C8-A8B3-269F38936C7C}"/>
               </a:ext>
             </a:extLst>
           </p:cNvPr>
@@ -7540,7 +7732,7 @@
           </a:solidFill>
           <a:ln xmlns:a="http://schemas.openxmlformats.org/drawingml/2006/main" w="19050">
             <a:solidFill>
-              <a:srgbClr val="2D9B72"/>
+              <a:srgbClr val="0B6B4F"/>
             </a:solidFill>
             <a:prstDash val="solid"/>
           </a:ln>
@@ -7580,7 +7772,7 @@
           <p:cNvPr id="9" name="core-no-1">
             <a:extLst xmlns:a="http://schemas.openxmlformats.org/drawingml/2006/main">
               <a:ext uri="{FF2B5EF4-FFF2-40B4-BE49-F238E27FC236}">
-                <a16:creationId xmlns:a16="http://schemas.microsoft.com/office/drawing/2014/main" id="{74A304C6-5FDB-43E6-B028-D2E137764535}"/>
+                <a16:creationId xmlns:a16="http://schemas.microsoft.com/office/drawing/2014/main" id="{B26E3611-984D-4303-AE3D-6C6700988112}"/>
               </a:ext>
             </a:extLst>
           </p:cNvPr>
@@ -7612,7 +7804,7 @@
             <a:pPr algn="l">
               <a:defRPr sz="2250" b="1">
                 <a:solidFill>
-                  <a:srgbClr val="2D9B72"/>
+                  <a:srgbClr val="0B6B4F"/>
                 </a:solidFill>
                 <a:latin typeface="PingFang SC"/>
                 <a:ea typeface="PingFang SC"/>
@@ -7622,7 +7814,7 @@
             <a:r>
               <a:rPr sz="2250" b="1">
                 <a:solidFill>
-                  <a:srgbClr val="2D9B72"/>
+                  <a:srgbClr val="0B6B4F"/>
                 </a:solidFill>
                 <a:latin typeface="PingFang SC"/>
                 <a:ea typeface="PingFang SC"/>
@@ -7638,7 +7830,7 @@
           <p:cNvPr id="10" name="core-body-1">
             <a:extLst xmlns:a="http://schemas.openxmlformats.org/drawingml/2006/main">
               <a:ext uri="{FF2B5EF4-FFF2-40B4-BE49-F238E27FC236}">
-                <a16:creationId xmlns:a16="http://schemas.microsoft.com/office/drawing/2014/main" id="{F421D286-4974-478D-BA6A-A14B53F719F8}"/>
+                <a16:creationId xmlns:a16="http://schemas.microsoft.com/office/drawing/2014/main" id="{9153E2F0-7AB5-463B-849C-85F51BFBE2AC}"/>
               </a:ext>
             </a:extLst>
           </p:cNvPr>
@@ -7702,7 +7894,7 @@
           <p:cNvPr id="11" name="core-no-2">
             <a:extLst xmlns:a="http://schemas.openxmlformats.org/drawingml/2006/main">
               <a:ext uri="{FF2B5EF4-FFF2-40B4-BE49-F238E27FC236}">
-                <a16:creationId xmlns:a16="http://schemas.microsoft.com/office/drawing/2014/main" id="{BA180BCD-0FAC-45D8-A1BE-AFD2AB969083}"/>
+                <a16:creationId xmlns:a16="http://schemas.microsoft.com/office/drawing/2014/main" id="{EDD41996-8A0B-46B5-970F-CA8922567BEE}"/>
               </a:ext>
             </a:extLst>
           </p:cNvPr>
@@ -7734,7 +7926,7 @@
             <a:pPr algn="l">
               <a:defRPr sz="2250" b="1">
                 <a:solidFill>
-                  <a:srgbClr val="2D9B72"/>
+                  <a:srgbClr val="0B6B4F"/>
                 </a:solidFill>
                 <a:latin typeface="PingFang SC"/>
                 <a:ea typeface="PingFang SC"/>
@@ -7744,7 +7936,7 @@
             <a:r>
               <a:rPr sz="2250" b="1">
                 <a:solidFill>
-                  <a:srgbClr val="2D9B72"/>
+                  <a:srgbClr val="0B6B4F"/>
                 </a:solidFill>
                 <a:latin typeface="PingFang SC"/>
                 <a:ea typeface="PingFang SC"/>
@@ -7760,7 +7952,7 @@
           <p:cNvPr id="12" name="core-body-2">
             <a:extLst xmlns:a="http://schemas.openxmlformats.org/drawingml/2006/main">
               <a:ext uri="{FF2B5EF4-FFF2-40B4-BE49-F238E27FC236}">
-                <a16:creationId xmlns:a16="http://schemas.microsoft.com/office/drawing/2014/main" id="{B9175C96-7B0C-4FE0-9765-8F390F2478FD}"/>
+                <a16:creationId xmlns:a16="http://schemas.microsoft.com/office/drawing/2014/main" id="{8C510C75-7645-4496-BDF6-B44C3ED8E331}"/>
               </a:ext>
             </a:extLst>
           </p:cNvPr>
@@ -7814,7 +8006,7 @@
                 <a:ea typeface="PingFang SC"/>
                 <a:cs typeface="PingFang SC"/>
               </a:rPr>
-              <a:t>闭环中每个环节都有频率要求。任务规划可以按秒更新，运动控制往往需要更高频率；如果把慢速大模型直接放进底层控制回路，网络或推理抖动就可能变成不稳定动作…</a:t>
+              <a:t>闭环中每个环节都有频率要求；任务规划可以按秒更新；运动控制往往需要更高频率；如果把慢速大模型直接放进底层控制回路；网络或推理抖动就可能变成不稳定动作</a:t>
             </a:r>
           </a:p>
         </p:txBody>
@@ -7824,7 +8016,7 @@
           <p:cNvPr id="13" name="s5-takeaway-rule">
             <a:extLst xmlns:a="http://schemas.openxmlformats.org/drawingml/2006/main">
               <a:ext uri="{FF2B5EF4-FFF2-40B4-BE49-F238E27FC236}">
-                <a16:creationId xmlns:a16="http://schemas.microsoft.com/office/drawing/2014/main" id="{6375AFE6-A856-4BE8-A574-E39DC0769C1B}"/>
+                <a16:creationId xmlns:a16="http://schemas.microsoft.com/office/drawing/2014/main" id="{62B23D94-C50A-4FFC-820F-1EBCD9C0F935}"/>
               </a:ext>
             </a:extLst>
           </p:cNvPr>
@@ -7857,7 +8049,7 @@
           <p:cNvPr id="14" name="s5-takeaway">
             <a:extLst xmlns:a="http://schemas.openxmlformats.org/drawingml/2006/main">
               <a:ext uri="{FF2B5EF4-FFF2-40B4-BE49-F238E27FC236}">
-                <a16:creationId xmlns:a16="http://schemas.microsoft.com/office/drawing/2014/main" id="{244AD58F-1B9B-4EA2-95B5-A5797BF1BAB9}"/>
+                <a16:creationId xmlns:a16="http://schemas.microsoft.com/office/drawing/2014/main" id="{F3C6C005-A461-4AC2-838C-F590BDE15D72}"/>
               </a:ext>
             </a:extLst>
           </p:cNvPr>
@@ -7913,7 +8105,7 @@
     </p:spTree>
     <p:extLst>
       <p:ext uri="{BB962C8B-B14F-4D97-AF65-F5344CB8AC3E}">
-        <p14:creationId xmlns:p14="http://schemas.microsoft.com/office/powerpoint/2010/main" val="1772687691"/>
+        <p14:creationId xmlns:p14="http://schemas.microsoft.com/office/powerpoint/2010/main" val="1246327484"/>
       </p:ext>
     </p:extLst>
   </p:cSld>
@@ -7944,7 +8136,7 @@
           <p:cNvPr id="1" name="s6-rule">
             <a:extLst xmlns:a="http://schemas.openxmlformats.org/drawingml/2006/main">
               <a:ext uri="{FF2B5EF4-FFF2-40B4-BE49-F238E27FC236}">
-                <a16:creationId xmlns:a16="http://schemas.microsoft.com/office/drawing/2014/main" id="{700CC7D4-6C9E-4C0D-87CB-F3C9B93EEA78}"/>
+                <a16:creationId xmlns:a16="http://schemas.microsoft.com/office/drawing/2014/main" id="{60C7EE28-5152-4E59-9992-F7ED475291D2}"/>
               </a:ext>
             </a:extLst>
           </p:cNvPr>
@@ -7977,7 +8169,7 @@
           <p:cNvPr id="2" name="s6-eyebrow">
             <a:extLst xmlns:a="http://schemas.openxmlformats.org/drawingml/2006/main">
               <a:ext uri="{FF2B5EF4-FFF2-40B4-BE49-F238E27FC236}">
-                <a16:creationId xmlns:a16="http://schemas.microsoft.com/office/drawing/2014/main" id="{7CFDFDE1-6067-478C-B802-33FB89B412F3}"/>
+                <a16:creationId xmlns:a16="http://schemas.microsoft.com/office/drawing/2014/main" id="{E851DCDE-2D77-4A05-B70A-D943E9EAF16C}"/>
               </a:ext>
             </a:extLst>
           </p:cNvPr>
@@ -8035,7 +8227,7 @@
           <p:cNvPr id="3" name="s6-title">
             <a:extLst xmlns:a="http://schemas.openxmlformats.org/drawingml/2006/main">
               <a:ext uri="{FF2B5EF4-FFF2-40B4-BE49-F238E27FC236}">
-                <a16:creationId xmlns:a16="http://schemas.microsoft.com/office/drawing/2014/main" id="{0D32B517-7818-46DC-A944-279165A687AC}"/>
+                <a16:creationId xmlns:a16="http://schemas.microsoft.com/office/drawing/2014/main" id="{B2EC865C-BC50-47D7-A4B2-0779ED5937DC}"/>
               </a:ext>
             </a:extLst>
           </p:cNvPr>
@@ -8093,7 +8285,7 @@
           <p:cNvPr id="4" name="s6-footer">
             <a:extLst xmlns:a="http://schemas.openxmlformats.org/drawingml/2006/main">
               <a:ext uri="{FF2B5EF4-FFF2-40B4-BE49-F238E27FC236}">
-                <a16:creationId xmlns:a16="http://schemas.microsoft.com/office/drawing/2014/main" id="{C4AE9D73-B5F6-4F59-83D1-3432CBDD5480}"/>
+                <a16:creationId xmlns:a16="http://schemas.microsoft.com/office/drawing/2014/main" id="{168542D8-91F1-4CB9-875D-EE7205711716}"/>
               </a:ext>
             </a:extLst>
           </p:cNvPr>
@@ -8124,7 +8316,7 @@
           <p:cNvPr id="5" name="s6-identity">
             <a:extLst xmlns:a="http://schemas.openxmlformats.org/drawingml/2006/main">
               <a:ext uri="{FF2B5EF4-FFF2-40B4-BE49-F238E27FC236}">
-                <a16:creationId xmlns:a16="http://schemas.microsoft.com/office/drawing/2014/main" id="{28F72E87-B6EC-42E7-81E5-F8E77D3EE720}"/>
+                <a16:creationId xmlns:a16="http://schemas.microsoft.com/office/drawing/2014/main" id="{1B12A9C7-93E3-4FD4-B4DA-00FED781B367}"/>
               </a:ext>
             </a:extLst>
           </p:cNvPr>
@@ -8182,7 +8374,7 @@
           <p:cNvPr id="6" name="core-no-0">
             <a:extLst xmlns:a="http://schemas.openxmlformats.org/drawingml/2006/main">
               <a:ext uri="{FF2B5EF4-FFF2-40B4-BE49-F238E27FC236}">
-                <a16:creationId xmlns:a16="http://schemas.microsoft.com/office/drawing/2014/main" id="{9A1007DD-795B-4AAE-B0DF-294AF992835E}"/>
+                <a16:creationId xmlns:a16="http://schemas.microsoft.com/office/drawing/2014/main" id="{C6A8C68D-5887-4657-833E-6F2F7535EC4A}"/>
               </a:ext>
             </a:extLst>
           </p:cNvPr>
@@ -8214,7 +8406,7 @@
             <a:pPr algn="l">
               <a:defRPr sz="2250" b="1">
                 <a:solidFill>
-                  <a:srgbClr val="2D9B72"/>
+                  <a:srgbClr val="0B6B4F"/>
                 </a:solidFill>
                 <a:latin typeface="PingFang SC"/>
                 <a:ea typeface="PingFang SC"/>
@@ -8224,7 +8416,7 @@
             <a:r>
               <a:rPr sz="2250" b="1">
                 <a:solidFill>
-                  <a:srgbClr val="2D9B72"/>
+                  <a:srgbClr val="0B6B4F"/>
                 </a:solidFill>
                 <a:latin typeface="PingFang SC"/>
                 <a:ea typeface="PingFang SC"/>
@@ -8240,7 +8432,7 @@
           <p:cNvPr id="7" name="core-label-0">
             <a:extLst xmlns:a="http://schemas.openxmlformats.org/drawingml/2006/main">
               <a:ext uri="{FF2B5EF4-FFF2-40B4-BE49-F238E27FC236}">
-                <a16:creationId xmlns:a16="http://schemas.microsoft.com/office/drawing/2014/main" id="{5687CB8E-DD15-4EDC-9258-667AE741B49E}"/>
+                <a16:creationId xmlns:a16="http://schemas.microsoft.com/office/drawing/2014/main" id="{4D771BE5-99B1-46D9-A5B0-D6AAFCA31B85}"/>
               </a:ext>
             </a:extLst>
           </p:cNvPr>
@@ -8298,7 +8490,7 @@
           <p:cNvPr id="8" name="core-body-0">
             <a:extLst xmlns:a="http://schemas.openxmlformats.org/drawingml/2006/main">
               <a:ext uri="{FF2B5EF4-FFF2-40B4-BE49-F238E27FC236}">
-                <a16:creationId xmlns:a16="http://schemas.microsoft.com/office/drawing/2014/main" id="{63290D5B-6B1A-4D78-8AAC-D4C58DE4DF78}"/>
+                <a16:creationId xmlns:a16="http://schemas.microsoft.com/office/drawing/2014/main" id="{E4339BAD-E2BF-4581-8967-D305CB41B3B3}"/>
               </a:ext>
             </a:extLst>
           </p:cNvPr>
@@ -8322,14 +8514,14 @@
           </a:solidFill>
           <a:ln xmlns:a="http://schemas.openxmlformats.org/drawingml/2006/main" w="19050">
             <a:solidFill>
-              <a:srgbClr val="2D9B72"/>
+              <a:srgbClr val="0B6B4F"/>
             </a:solidFill>
             <a:prstDash val="solid"/>
           </a:ln>
         </p:spPr>
         <p:txBody>
           <a:bodyPr xmlns:a="http://schemas.openxmlformats.org/drawingml/2006/main" lIns="152400" tIns="133350" rIns="152400" bIns="133350" anchor="ctr">
-            <a:normAutofit fontScale="98233"/>
+            <a:normAutofit fontScale="100000"/>
           </a:bodyPr>
           <a:lstStyle xmlns:a="http://schemas.openxmlformats.org/drawingml/2006/main"/>
           <a:p xmlns:a="http://schemas.openxmlformats.org/drawingml/2006/main">
@@ -8352,7 +8544,7 @@
                 <a:ea typeface="PingFang SC"/>
                 <a:cs typeface="PingFang SC"/>
               </a:rPr>
-              <a:t>传感器只提供带噪声、延迟和遮挡的观测，系统需要把多帧信息、机器人自身状态和任务上下文融合成可用于决策的状态估计。状态不是现实本身；相机看不到杯子背面、定位会漂移…</a:t>
+              <a:t>传感器只提供带噪声、延迟和遮挡的观测；系统需要把多帧信息、机器人自身状态和任务上下文融合成可用于决策的状态估计</a:t>
             </a:r>
           </a:p>
         </p:txBody>
@@ -8362,7 +8554,7 @@
           <p:cNvPr id="9" name="core-no-1">
             <a:extLst xmlns:a="http://schemas.openxmlformats.org/drawingml/2006/main">
               <a:ext uri="{FF2B5EF4-FFF2-40B4-BE49-F238E27FC236}">
-                <a16:creationId xmlns:a16="http://schemas.microsoft.com/office/drawing/2014/main" id="{03EF0D1A-5207-493B-AC5E-49BFFE8C3A96}"/>
+                <a16:creationId xmlns:a16="http://schemas.microsoft.com/office/drawing/2014/main" id="{7B7D1947-7E4F-4B97-B0F8-5A3F0BAE5EF6}"/>
               </a:ext>
             </a:extLst>
           </p:cNvPr>
@@ -8394,7 +8586,7 @@
             <a:pPr algn="l">
               <a:defRPr sz="2250" b="1">
                 <a:solidFill>
-                  <a:srgbClr val="2D9B72"/>
+                  <a:srgbClr val="0B6B4F"/>
                 </a:solidFill>
                 <a:latin typeface="PingFang SC"/>
                 <a:ea typeface="PingFang SC"/>
@@ -8404,7 +8596,7 @@
             <a:r>
               <a:rPr sz="2250" b="1">
                 <a:solidFill>
-                  <a:srgbClr val="2D9B72"/>
+                  <a:srgbClr val="0B6B4F"/>
                 </a:solidFill>
                 <a:latin typeface="PingFang SC"/>
                 <a:ea typeface="PingFang SC"/>
@@ -8420,7 +8612,7 @@
           <p:cNvPr id="10" name="core-body-1">
             <a:extLst xmlns:a="http://schemas.openxmlformats.org/drawingml/2006/main">
               <a:ext uri="{FF2B5EF4-FFF2-40B4-BE49-F238E27FC236}">
-                <a16:creationId xmlns:a16="http://schemas.microsoft.com/office/drawing/2014/main" id="{B863325C-767D-4CF7-AF95-7F737EB5CD4D}"/>
+                <a16:creationId xmlns:a16="http://schemas.microsoft.com/office/drawing/2014/main" id="{0342C474-64F6-4776-985A-1D50E6993C6C}"/>
               </a:ext>
             </a:extLst>
           </p:cNvPr>
@@ -8474,7 +8666,7 @@
                 <a:ea typeface="PingFang SC"/>
                 <a:cs typeface="PingFang SC"/>
               </a:rPr>
-              <a:t>可靠决策要显式保留不确定性。目标位置不确定时可以换视角重新观察，路径被遮挡时可以减速，抓取失败时可以松开重试；当无法把风险降到允许范围时，应停止并请求人工处理。把“继续猜一个动作”设为默认…</a:t>
+              <a:t>可靠决策要显式保留不确定性；目标位置不确定时可以换视角重新观察；路径被遮挡时可以减速；抓取失败时可以松开重试；当无法把风险降到允许范围时；应停止并请求人工处理；把“继续猜一个动作”设为默认</a:t>
             </a:r>
           </a:p>
         </p:txBody>
@@ -8484,7 +8676,7 @@
           <p:cNvPr id="11" name="s6-takeaway-rule">
             <a:extLst xmlns:a="http://schemas.openxmlformats.org/drawingml/2006/main">
               <a:ext uri="{FF2B5EF4-FFF2-40B4-BE49-F238E27FC236}">
-                <a16:creationId xmlns:a16="http://schemas.microsoft.com/office/drawing/2014/main" id="{D1D9F33E-E26D-4D2B-A3CD-B2629A031832}"/>
+                <a16:creationId xmlns:a16="http://schemas.microsoft.com/office/drawing/2014/main" id="{575CC19B-0092-4ADF-9AFB-85542B3B3626}"/>
               </a:ext>
             </a:extLst>
           </p:cNvPr>
@@ -8517,7 +8709,7 @@
           <p:cNvPr id="12" name="s6-takeaway">
             <a:extLst xmlns:a="http://schemas.openxmlformats.org/drawingml/2006/main">
               <a:ext uri="{FF2B5EF4-FFF2-40B4-BE49-F238E27FC236}">
-                <a16:creationId xmlns:a16="http://schemas.microsoft.com/office/drawing/2014/main" id="{4B7CB1A5-08AA-435B-B0B0-F23D812B7C8D}"/>
+                <a16:creationId xmlns:a16="http://schemas.microsoft.com/office/drawing/2014/main" id="{A2848709-7F7F-4601-B85E-23D9BBB8AE15}"/>
               </a:ext>
             </a:extLst>
           </p:cNvPr>
@@ -8573,7 +8765,7 @@
     </p:spTree>
     <p:extLst>
       <p:ext uri="{BB962C8B-B14F-4D97-AF65-F5344CB8AC3E}">
-        <p14:creationId xmlns:p14="http://schemas.microsoft.com/office/powerpoint/2010/main" val="1972828546"/>
+        <p14:creationId xmlns:p14="http://schemas.microsoft.com/office/powerpoint/2010/main" val="1103543990"/>
       </p:ext>
     </p:extLst>
   </p:cSld>
@@ -8604,7 +8796,7 @@
           <p:cNvPr id="1" name="s7-rule">
             <a:extLst xmlns:a="http://schemas.openxmlformats.org/drawingml/2006/main">
               <a:ext uri="{FF2B5EF4-FFF2-40B4-BE49-F238E27FC236}">
-                <a16:creationId xmlns:a16="http://schemas.microsoft.com/office/drawing/2014/main" id="{1E28A38A-B500-4CE0-93E5-A6C3932E5A5C}"/>
+                <a16:creationId xmlns:a16="http://schemas.microsoft.com/office/drawing/2014/main" id="{B0F0CEB7-58F3-477D-BE02-3406C574F207}"/>
               </a:ext>
             </a:extLst>
           </p:cNvPr>
@@ -8637,7 +8829,7 @@
           <p:cNvPr id="2" name="s7-eyebrow">
             <a:extLst xmlns:a="http://schemas.openxmlformats.org/drawingml/2006/main">
               <a:ext uri="{FF2B5EF4-FFF2-40B4-BE49-F238E27FC236}">
-                <a16:creationId xmlns:a16="http://schemas.microsoft.com/office/drawing/2014/main" id="{FCCD66A6-1849-4ED7-A042-320250E8DEF8}"/>
+                <a16:creationId xmlns:a16="http://schemas.microsoft.com/office/drawing/2014/main" id="{24C7CC01-8F1B-4095-B3A1-F3BD4B79D8DB}"/>
               </a:ext>
             </a:extLst>
           </p:cNvPr>
@@ -8695,7 +8887,7 @@
           <p:cNvPr id="3" name="s7-title">
             <a:extLst xmlns:a="http://schemas.openxmlformats.org/drawingml/2006/main">
               <a:ext uri="{FF2B5EF4-FFF2-40B4-BE49-F238E27FC236}">
-                <a16:creationId xmlns:a16="http://schemas.microsoft.com/office/drawing/2014/main" id="{6780A41A-76DC-4984-8A76-2FDECB4F48DB}"/>
+                <a16:creationId xmlns:a16="http://schemas.microsoft.com/office/drawing/2014/main" id="{B65B409E-A44C-470B-9657-E78C51010C72}"/>
               </a:ext>
             </a:extLst>
           </p:cNvPr>
@@ -8753,7 +8945,7 @@
           <p:cNvPr id="4" name="s7-footer">
             <a:extLst xmlns:a="http://schemas.openxmlformats.org/drawingml/2006/main">
               <a:ext uri="{FF2B5EF4-FFF2-40B4-BE49-F238E27FC236}">
-                <a16:creationId xmlns:a16="http://schemas.microsoft.com/office/drawing/2014/main" id="{13EA0CBD-B7C6-45EC-B65D-FA9ABCA90142}"/>
+                <a16:creationId xmlns:a16="http://schemas.microsoft.com/office/drawing/2014/main" id="{DBE9AADA-568B-4399-8A2C-A47D04A936C7}"/>
               </a:ext>
             </a:extLst>
           </p:cNvPr>
@@ -8784,7 +8976,7 @@
           <p:cNvPr id="5" name="s7-identity">
             <a:extLst xmlns:a="http://schemas.openxmlformats.org/drawingml/2006/main">
               <a:ext uri="{FF2B5EF4-FFF2-40B4-BE49-F238E27FC236}">
-                <a16:creationId xmlns:a16="http://schemas.microsoft.com/office/drawing/2014/main" id="{08736C4B-FD21-4D91-9EEC-804C2FE42D3F}"/>
+                <a16:creationId xmlns:a16="http://schemas.microsoft.com/office/drawing/2014/main" id="{F3744EFB-4089-4747-BD95-07C272C9973C}"/>
               </a:ext>
             </a:extLst>
           </p:cNvPr>
@@ -8842,7 +9034,7 @@
           <p:cNvPr id="6" name="core-no-0">
             <a:extLst xmlns:a="http://schemas.openxmlformats.org/drawingml/2006/main">
               <a:ext uri="{FF2B5EF4-FFF2-40B4-BE49-F238E27FC236}">
-                <a16:creationId xmlns:a16="http://schemas.microsoft.com/office/drawing/2014/main" id="{FAFF2E76-1A97-402D-B3B6-5777438174F3}"/>
+                <a16:creationId xmlns:a16="http://schemas.microsoft.com/office/drawing/2014/main" id="{3D285DEE-600C-476E-9EF1-C9749B42203F}"/>
               </a:ext>
             </a:extLst>
           </p:cNvPr>
@@ -8874,7 +9066,7 @@
             <a:pPr algn="l">
               <a:defRPr sz="2250" b="1">
                 <a:solidFill>
-                  <a:srgbClr val="2D9B72"/>
+                  <a:srgbClr val="0B6B4F"/>
                 </a:solidFill>
                 <a:latin typeface="PingFang SC"/>
                 <a:ea typeface="PingFang SC"/>
@@ -8884,7 +9076,7 @@
             <a:r>
               <a:rPr sz="2250" b="1">
                 <a:solidFill>
-                  <a:srgbClr val="2D9B72"/>
+                  <a:srgbClr val="0B6B4F"/>
                 </a:solidFill>
                 <a:latin typeface="PingFang SC"/>
                 <a:ea typeface="PingFang SC"/>
@@ -8900,7 +9092,7 @@
           <p:cNvPr id="7" name="core-label-0">
             <a:extLst xmlns:a="http://schemas.openxmlformats.org/drawingml/2006/main">
               <a:ext uri="{FF2B5EF4-FFF2-40B4-BE49-F238E27FC236}">
-                <a16:creationId xmlns:a16="http://schemas.microsoft.com/office/drawing/2014/main" id="{939500BE-BB04-4DA6-A9F9-20F6D933CB9B}"/>
+                <a16:creationId xmlns:a16="http://schemas.microsoft.com/office/drawing/2014/main" id="{57235984-8BCB-49DB-B289-16D51B8E6D30}"/>
               </a:ext>
             </a:extLst>
           </p:cNvPr>
@@ -8958,7 +9150,7 @@
           <p:cNvPr id="8" name="core-body-0">
             <a:extLst xmlns:a="http://schemas.openxmlformats.org/drawingml/2006/main">
               <a:ext uri="{FF2B5EF4-FFF2-40B4-BE49-F238E27FC236}">
-                <a16:creationId xmlns:a16="http://schemas.microsoft.com/office/drawing/2014/main" id="{4DC70234-7BE4-40A7-9803-E31F8E0B32CF}"/>
+                <a16:creationId xmlns:a16="http://schemas.microsoft.com/office/drawing/2014/main" id="{FE1129BB-8F7E-4219-B540-76AD776DED45}"/>
               </a:ext>
             </a:extLst>
           </p:cNvPr>
@@ -8982,14 +9174,14 @@
           </a:solidFill>
           <a:ln xmlns:a="http://schemas.openxmlformats.org/drawingml/2006/main" w="19050">
             <a:solidFill>
-              <a:srgbClr val="2D9B72"/>
+              <a:srgbClr val="0B6B4F"/>
             </a:solidFill>
             <a:prstDash val="solid"/>
           </a:ln>
         </p:spPr>
         <p:txBody>
           <a:bodyPr xmlns:a="http://schemas.openxmlformats.org/drawingml/2006/main" lIns="152400" tIns="133350" rIns="152400" bIns="133350" anchor="ctr">
-            <a:normAutofit fontScale="98233"/>
+            <a:normAutofit fontScale="100000"/>
           </a:bodyPr>
           <a:lstStyle xmlns:a="http://schemas.openxmlformats.org/drawingml/2006/main"/>
           <a:p xmlns:a="http://schemas.openxmlformats.org/drawingml/2006/main">
@@ -9012,7 +9204,7 @@
                 <a:ea typeface="PingFang SC"/>
                 <a:cs typeface="PingFang SC"/>
               </a:rPr>
-              <a:t>一个常见架构把控制分为三层：任务层把“把水送到桌边”拆成导航、定位杯子、抓取和放置；技能层调用经过训练和测试的动作能力；实时层控制关节、轮子和接触力。安全监控独立检查速度、关节范围、碰撞距离…</a:t>
+              <a:t>一个常见架构把控制分为三层；任务层把“把水送到桌边”拆成导航、定位杯子、抓取和放置；技能层调用经过训练和测试的动作能力；实时层控制关节、轮子和接触力</a:t>
             </a:r>
           </a:p>
         </p:txBody>
@@ -9022,7 +9214,7 @@
           <p:cNvPr id="9" name="core-no-1">
             <a:extLst xmlns:a="http://schemas.openxmlformats.org/drawingml/2006/main">
               <a:ext uri="{FF2B5EF4-FFF2-40B4-BE49-F238E27FC236}">
-                <a16:creationId xmlns:a16="http://schemas.microsoft.com/office/drawing/2014/main" id="{8B52A074-5C36-44A0-B728-C4A03D9D4F06}"/>
+                <a16:creationId xmlns:a16="http://schemas.microsoft.com/office/drawing/2014/main" id="{DA87CE4F-B76A-4831-A5E6-03D9AC3EDB4D}"/>
               </a:ext>
             </a:extLst>
           </p:cNvPr>
@@ -9054,7 +9246,7 @@
             <a:pPr algn="l">
               <a:defRPr sz="2250" b="1">
                 <a:solidFill>
-                  <a:srgbClr val="2D9B72"/>
+                  <a:srgbClr val="0B6B4F"/>
                 </a:solidFill>
                 <a:latin typeface="PingFang SC"/>
                 <a:ea typeface="PingFang SC"/>
@@ -9064,7 +9256,7 @@
             <a:r>
               <a:rPr sz="2250" b="1">
                 <a:solidFill>
-                  <a:srgbClr val="2D9B72"/>
+                  <a:srgbClr val="0B6B4F"/>
                 </a:solidFill>
                 <a:latin typeface="PingFang SC"/>
                 <a:ea typeface="PingFang SC"/>
@@ -9080,7 +9272,7 @@
           <p:cNvPr id="10" name="core-body-1">
             <a:extLst xmlns:a="http://schemas.openxmlformats.org/drawingml/2006/main">
               <a:ext uri="{FF2B5EF4-FFF2-40B4-BE49-F238E27FC236}">
-                <a16:creationId xmlns:a16="http://schemas.microsoft.com/office/drawing/2014/main" id="{B7ADC1B1-B9F0-4EAD-BFF1-A21DF76821F2}"/>
+                <a16:creationId xmlns:a16="http://schemas.microsoft.com/office/drawing/2014/main" id="{6DBAB7FD-1319-44AC-9B08-34C7005EC89F}"/>
               </a:ext>
             </a:extLst>
           </p:cNvPr>
@@ -9144,7 +9336,7 @@
           <p:cNvPr id="11" name="s7-takeaway-rule">
             <a:extLst xmlns:a="http://schemas.openxmlformats.org/drawingml/2006/main">
               <a:ext uri="{FF2B5EF4-FFF2-40B4-BE49-F238E27FC236}">
-                <a16:creationId xmlns:a16="http://schemas.microsoft.com/office/drawing/2014/main" id="{B2B89DAA-ED34-43AF-9BDD-0715A26F14FD}"/>
+                <a16:creationId xmlns:a16="http://schemas.microsoft.com/office/drawing/2014/main" id="{0580788F-8973-4183-8E0C-461508D01682}"/>
               </a:ext>
             </a:extLst>
           </p:cNvPr>
@@ -9177,7 +9369,7 @@
           <p:cNvPr id="12" name="s7-takeaway">
             <a:extLst xmlns:a="http://schemas.openxmlformats.org/drawingml/2006/main">
               <a:ext uri="{FF2B5EF4-FFF2-40B4-BE49-F238E27FC236}">
-                <a16:creationId xmlns:a16="http://schemas.microsoft.com/office/drawing/2014/main" id="{1DFBD2AB-D72F-4B34-8883-C44750AE8E19}"/>
+                <a16:creationId xmlns:a16="http://schemas.microsoft.com/office/drawing/2014/main" id="{25976F4E-B5C3-4447-86B8-DF275615579E}"/>
               </a:ext>
             </a:extLst>
           </p:cNvPr>
@@ -9233,7 +9425,7 @@
     </p:spTree>
     <p:extLst>
       <p:ext uri="{BB962C8B-B14F-4D97-AF65-F5344CB8AC3E}">
-        <p14:creationId xmlns:p14="http://schemas.microsoft.com/office/powerpoint/2010/main" val="1404332685"/>
+        <p14:creationId xmlns:p14="http://schemas.microsoft.com/office/powerpoint/2010/main" val="870534557"/>
       </p:ext>
     </p:extLst>
   </p:cSld>
@@ -9264,7 +9456,7 @@
           <p:cNvPr id="1" name="s8-rule">
             <a:extLst xmlns:a="http://schemas.openxmlformats.org/drawingml/2006/main">
               <a:ext uri="{FF2B5EF4-FFF2-40B4-BE49-F238E27FC236}">
-                <a16:creationId xmlns:a16="http://schemas.microsoft.com/office/drawing/2014/main" id="{3481F4C4-FDE5-427B-89DB-8EC2CA5597B9}"/>
+                <a16:creationId xmlns:a16="http://schemas.microsoft.com/office/drawing/2014/main" id="{66A5204F-9870-43D1-BC3E-8C2538FA65EA}"/>
               </a:ext>
             </a:extLst>
           </p:cNvPr>
@@ -9297,7 +9489,7 @@
           <p:cNvPr id="2" name="s8-eyebrow">
             <a:extLst xmlns:a="http://schemas.openxmlformats.org/drawingml/2006/main">
               <a:ext uri="{FF2B5EF4-FFF2-40B4-BE49-F238E27FC236}">
-                <a16:creationId xmlns:a16="http://schemas.microsoft.com/office/drawing/2014/main" id="{4893CF8A-502A-4C24-9FE0-D0E47E8AF9AB}"/>
+                <a16:creationId xmlns:a16="http://schemas.microsoft.com/office/drawing/2014/main" id="{6A2A1517-B233-44D5-A85C-55074C96E6ED}"/>
               </a:ext>
             </a:extLst>
           </p:cNvPr>
@@ -9355,7 +9547,7 @@
           <p:cNvPr id="3" name="s8-title">
             <a:extLst xmlns:a="http://schemas.openxmlformats.org/drawingml/2006/main">
               <a:ext uri="{FF2B5EF4-FFF2-40B4-BE49-F238E27FC236}">
-                <a16:creationId xmlns:a16="http://schemas.microsoft.com/office/drawing/2014/main" id="{B078E878-AD50-4C95-985E-B64F9B537917}"/>
+                <a16:creationId xmlns:a16="http://schemas.microsoft.com/office/drawing/2014/main" id="{8E3C5414-7B17-4170-A8F2-4C3B77AE07BB}"/>
               </a:ext>
             </a:extLst>
           </p:cNvPr>
@@ -9413,7 +9605,7 @@
           <p:cNvPr id="4" name="s8-footer">
             <a:extLst xmlns:a="http://schemas.openxmlformats.org/drawingml/2006/main">
               <a:ext uri="{FF2B5EF4-FFF2-40B4-BE49-F238E27FC236}">
-                <a16:creationId xmlns:a16="http://schemas.microsoft.com/office/drawing/2014/main" id="{49A0BF8E-D888-496B-BE4A-2DBAB8963BA0}"/>
+                <a16:creationId xmlns:a16="http://schemas.microsoft.com/office/drawing/2014/main" id="{1B67B1AC-8E43-4F9B-8380-60AB09106E01}"/>
               </a:ext>
             </a:extLst>
           </p:cNvPr>
@@ -9444,7 +9636,7 @@
           <p:cNvPr id="5" name="s8-identity">
             <a:extLst xmlns:a="http://schemas.openxmlformats.org/drawingml/2006/main">
               <a:ext uri="{FF2B5EF4-FFF2-40B4-BE49-F238E27FC236}">
-                <a16:creationId xmlns:a16="http://schemas.microsoft.com/office/drawing/2014/main" id="{52FE9575-8D4E-4045-958B-93743B9E2F02}"/>
+                <a16:creationId xmlns:a16="http://schemas.microsoft.com/office/drawing/2014/main" id="{49345498-6590-4B8E-8715-EC1DB3CC8663}"/>
               </a:ext>
             </a:extLst>
           </p:cNvPr>
@@ -9502,7 +9694,7 @@
           <p:cNvPr id="6" name="core-no-0">
             <a:extLst xmlns:a="http://schemas.openxmlformats.org/drawingml/2006/main">
               <a:ext uri="{FF2B5EF4-FFF2-40B4-BE49-F238E27FC236}">
-                <a16:creationId xmlns:a16="http://schemas.microsoft.com/office/drawing/2014/main" id="{155D4498-DC63-4826-BD00-AE282C358DC3}"/>
+                <a16:creationId xmlns:a16="http://schemas.microsoft.com/office/drawing/2014/main" id="{D51C74A4-DBBB-4535-8475-FC2BC650BCF1}"/>
               </a:ext>
             </a:extLst>
           </p:cNvPr>
@@ -9534,7 +9726,7 @@
             <a:pPr algn="l">
               <a:defRPr sz="2250" b="1">
                 <a:solidFill>
-                  <a:srgbClr val="2D9B72"/>
+                  <a:srgbClr val="0B6B4F"/>
                 </a:solidFill>
                 <a:latin typeface="PingFang SC"/>
                 <a:ea typeface="PingFang SC"/>
@@ -9544,7 +9736,7 @@
             <a:r>
               <a:rPr sz="2250" b="1">
                 <a:solidFill>
-                  <a:srgbClr val="2D9B72"/>
+                  <a:srgbClr val="0B6B4F"/>
                 </a:solidFill>
                 <a:latin typeface="PingFang SC"/>
                 <a:ea typeface="PingFang SC"/>
@@ -9560,7 +9752,7 @@
           <p:cNvPr id="7" name="core-label-0">
             <a:extLst xmlns:a="http://schemas.openxmlformats.org/drawingml/2006/main">
               <a:ext uri="{FF2B5EF4-FFF2-40B4-BE49-F238E27FC236}">
-                <a16:creationId xmlns:a16="http://schemas.microsoft.com/office/drawing/2014/main" id="{8741B15B-3684-4A8D-BC5F-0FDB68B3698C}"/>
+                <a16:creationId xmlns:a16="http://schemas.microsoft.com/office/drawing/2014/main" id="{0D279A9F-BABC-485F-A1E5-A160E4E72874}"/>
               </a:ext>
             </a:extLst>
           </p:cNvPr>
@@ -9618,7 +9810,7 @@
           <p:cNvPr id="8" name="core-body-0">
             <a:extLst xmlns:a="http://schemas.openxmlformats.org/drawingml/2006/main">
               <a:ext uri="{FF2B5EF4-FFF2-40B4-BE49-F238E27FC236}">
-                <a16:creationId xmlns:a16="http://schemas.microsoft.com/office/drawing/2014/main" id="{4E7A2B45-3988-46B6-B845-7EAC17CE948A}"/>
+                <a16:creationId xmlns:a16="http://schemas.microsoft.com/office/drawing/2014/main" id="{072BCB89-F6EE-4262-A5F2-6523FE446B1F}"/>
               </a:ext>
             </a:extLst>
           </p:cNvPr>
@@ -9642,7 +9834,7 @@
           </a:solidFill>
           <a:ln xmlns:a="http://schemas.openxmlformats.org/drawingml/2006/main" w="19050">
             <a:solidFill>
-              <a:srgbClr val="2D9B72"/>
+              <a:srgbClr val="0B6B4F"/>
             </a:solidFill>
             <a:prstDash val="solid"/>
           </a:ln>
@@ -9672,7 +9864,7 @@
                 <a:ea typeface="PingFang SC"/>
                 <a:cs typeface="PingFang SC"/>
               </a:rPr>
-              <a:t>具身任务要提前列出危险源、可接受动作范围、人员隔离、急停、失联策略和恢复步骤。仿真可以覆盖大量变化，却无法完整复制材料摩擦、柔性物体、传感器故障和人类不可预测行为；真机测试必须从低速度…</a:t>
+              <a:t>具身任务要提前列出危险源、可接受动作范围、人员隔离、急停、失联策略和恢复步骤；仿真可以覆盖大量变化；却无法完整复制材料摩擦、柔性物体、传感器故障和人类不可预测行为</a:t>
             </a:r>
           </a:p>
         </p:txBody>
@@ -9682,7 +9874,7 @@
           <p:cNvPr id="9" name="core-no-1">
             <a:extLst xmlns:a="http://schemas.openxmlformats.org/drawingml/2006/main">
               <a:ext uri="{FF2B5EF4-FFF2-40B4-BE49-F238E27FC236}">
-                <a16:creationId xmlns:a16="http://schemas.microsoft.com/office/drawing/2014/main" id="{9B8169CB-31E0-4C36-BDFC-2EBB60AFB428}"/>
+                <a16:creationId xmlns:a16="http://schemas.microsoft.com/office/drawing/2014/main" id="{2325B60E-5205-4B84-B843-4CA78E4D57E6}"/>
               </a:ext>
             </a:extLst>
           </p:cNvPr>
@@ -9714,7 +9906,7 @@
             <a:pPr algn="l">
               <a:defRPr sz="2250" b="1">
                 <a:solidFill>
-                  <a:srgbClr val="2D9B72"/>
+                  <a:srgbClr val="0B6B4F"/>
                 </a:solidFill>
                 <a:latin typeface="PingFang SC"/>
                 <a:ea typeface="PingFang SC"/>
@@ -9724,7 +9916,7 @@
             <a:r>
               <a:rPr sz="2250" b="1">
                 <a:solidFill>
-                  <a:srgbClr val="2D9B72"/>
+                  <a:srgbClr val="0B6B4F"/>
                 </a:solidFill>
                 <a:latin typeface="PingFang SC"/>
                 <a:ea typeface="PingFang SC"/>
@@ -9740,7 +9932,7 @@
           <p:cNvPr id="10" name="core-body-1">
             <a:extLst xmlns:a="http://schemas.openxmlformats.org/drawingml/2006/main">
               <a:ext uri="{FF2B5EF4-FFF2-40B4-BE49-F238E27FC236}">
-                <a16:creationId xmlns:a16="http://schemas.microsoft.com/office/drawing/2014/main" id="{D7343891-D9EC-4006-A905-CC296A4B763A}"/>
+                <a16:creationId xmlns:a16="http://schemas.microsoft.com/office/drawing/2014/main" id="{50D113CB-94D0-4CA9-B6FC-851E94D61281}"/>
               </a:ext>
             </a:extLst>
           </p:cNvPr>
@@ -9804,7 +9996,7 @@
           <p:cNvPr id="11" name="s8-takeaway-rule">
             <a:extLst xmlns:a="http://schemas.openxmlformats.org/drawingml/2006/main">
               <a:ext uri="{FF2B5EF4-FFF2-40B4-BE49-F238E27FC236}">
-                <a16:creationId xmlns:a16="http://schemas.microsoft.com/office/drawing/2014/main" id="{15B45986-F3D9-46D1-9B9B-F7CEEBA3C2FB}"/>
+                <a16:creationId xmlns:a16="http://schemas.microsoft.com/office/drawing/2014/main" id="{4DFBF8B9-CD65-4606-B840-1643E74CCA48}"/>
               </a:ext>
             </a:extLst>
           </p:cNvPr>
@@ -9837,7 +10029,7 @@
           <p:cNvPr id="12" name="s8-takeaway">
             <a:extLst xmlns:a="http://schemas.openxmlformats.org/drawingml/2006/main">
               <a:ext uri="{FF2B5EF4-FFF2-40B4-BE49-F238E27FC236}">
-                <a16:creationId xmlns:a16="http://schemas.microsoft.com/office/drawing/2014/main" id="{66604D7A-3917-43FA-8F08-A1AD77858819}"/>
+                <a16:creationId xmlns:a16="http://schemas.microsoft.com/office/drawing/2014/main" id="{64CF65C1-B84C-4B30-838D-83AA17FDC433}"/>
               </a:ext>
             </a:extLst>
           </p:cNvPr>
@@ -9893,7 +10085,7 @@
     </p:spTree>
     <p:extLst>
       <p:ext uri="{BB962C8B-B14F-4D97-AF65-F5344CB8AC3E}">
-        <p14:creationId xmlns:p14="http://schemas.microsoft.com/office/powerpoint/2010/main" val="2083712706"/>
+        <p14:creationId xmlns:p14="http://schemas.microsoft.com/office/powerpoint/2010/main" val="1574473974"/>
       </p:ext>
     </p:extLst>
   </p:cSld>
@@ -9924,7 +10116,7 @@
           <p:cNvPr id="1" name="s9-rule">
             <a:extLst xmlns:a="http://schemas.openxmlformats.org/drawingml/2006/main">
               <a:ext uri="{FF2B5EF4-FFF2-40B4-BE49-F238E27FC236}">
-                <a16:creationId xmlns:a16="http://schemas.microsoft.com/office/drawing/2014/main" id="{4883B5AB-4DD0-469D-8F8F-04B55B08570D}"/>
+                <a16:creationId xmlns:a16="http://schemas.microsoft.com/office/drawing/2014/main" id="{872772B4-8574-4C9A-AD25-74EB5DE525D2}"/>
               </a:ext>
             </a:extLst>
           </p:cNvPr>
@@ -9957,7 +10149,7 @@
           <p:cNvPr id="2" name="s9-eyebrow">
             <a:extLst xmlns:a="http://schemas.openxmlformats.org/drawingml/2006/main">
               <a:ext uri="{FF2B5EF4-FFF2-40B4-BE49-F238E27FC236}">
-                <a16:creationId xmlns:a16="http://schemas.microsoft.com/office/drawing/2014/main" id="{7CB9F929-A327-49D1-804E-9DB94FD2345A}"/>
+                <a16:creationId xmlns:a16="http://schemas.microsoft.com/office/drawing/2014/main" id="{1B224CB4-03A3-4917-A446-BA12CD2AC106}"/>
               </a:ext>
             </a:extLst>
           </p:cNvPr>
@@ -10015,7 +10207,7 @@
           <p:cNvPr id="3" name="s9-title">
             <a:extLst xmlns:a="http://schemas.openxmlformats.org/drawingml/2006/main">
               <a:ext uri="{FF2B5EF4-FFF2-40B4-BE49-F238E27FC236}">
-                <a16:creationId xmlns:a16="http://schemas.microsoft.com/office/drawing/2014/main" id="{4CCF93F4-A6C7-4813-B6FE-E87046983355}"/>
+                <a16:creationId xmlns:a16="http://schemas.microsoft.com/office/drawing/2014/main" id="{42FA9DB4-D94B-4F88-9C6F-554C7EB90F63}"/>
               </a:ext>
             </a:extLst>
           </p:cNvPr>
@@ -10073,7 +10265,7 @@
           <p:cNvPr id="4" name="s9-footer">
             <a:extLst xmlns:a="http://schemas.openxmlformats.org/drawingml/2006/main">
               <a:ext uri="{FF2B5EF4-FFF2-40B4-BE49-F238E27FC236}">
-                <a16:creationId xmlns:a16="http://schemas.microsoft.com/office/drawing/2014/main" id="{822B3080-E4C5-4C6F-85B2-C06155257C0D}"/>
+                <a16:creationId xmlns:a16="http://schemas.microsoft.com/office/drawing/2014/main" id="{4D5ABC59-5F31-42ED-A754-56FF165D1AEA}"/>
               </a:ext>
             </a:extLst>
           </p:cNvPr>
@@ -10104,7 +10296,7 @@
           <p:cNvPr id="5" name="s9-identity">
             <a:extLst xmlns:a="http://schemas.openxmlformats.org/drawingml/2006/main">
               <a:ext uri="{FF2B5EF4-FFF2-40B4-BE49-F238E27FC236}">
-                <a16:creationId xmlns:a16="http://schemas.microsoft.com/office/drawing/2014/main" id="{5E08EC5F-D8AB-4547-A3FE-F820E507E416}"/>
+                <a16:creationId xmlns:a16="http://schemas.microsoft.com/office/drawing/2014/main" id="{0D988CCD-ACDF-477B-9D9B-EF9E9BCE2BEC}"/>
               </a:ext>
             </a:extLst>
           </p:cNvPr>
@@ -10162,7 +10354,7 @@
           <p:cNvPr id="6" name="core-no-0">
             <a:extLst xmlns:a="http://schemas.openxmlformats.org/drawingml/2006/main">
               <a:ext uri="{FF2B5EF4-FFF2-40B4-BE49-F238E27FC236}">
-                <a16:creationId xmlns:a16="http://schemas.microsoft.com/office/drawing/2014/main" id="{67BDC641-7AAD-4F81-AFDE-29955F303C83}"/>
+                <a16:creationId xmlns:a16="http://schemas.microsoft.com/office/drawing/2014/main" id="{931DA79B-D97A-4B7E-B8A4-06F5EB52C1D8}"/>
               </a:ext>
             </a:extLst>
           </p:cNvPr>
@@ -10194,7 +10386,7 @@
             <a:pPr algn="l">
               <a:defRPr sz="2250" b="1">
                 <a:solidFill>
-                  <a:srgbClr val="2D9B72"/>
+                  <a:srgbClr val="0B6B4F"/>
                 </a:solidFill>
                 <a:latin typeface="PingFang SC"/>
                 <a:ea typeface="PingFang SC"/>
@@ -10204,7 +10396,7 @@
             <a:r>
               <a:rPr sz="2250" b="1">
                 <a:solidFill>
-                  <a:srgbClr val="2D9B72"/>
+                  <a:srgbClr val="0B6B4F"/>
                 </a:solidFill>
                 <a:latin typeface="PingFang SC"/>
                 <a:ea typeface="PingFang SC"/>
@@ -10220,7 +10412,7 @@
           <p:cNvPr id="7" name="core-label-0">
             <a:extLst xmlns:a="http://schemas.openxmlformats.org/drawingml/2006/main">
               <a:ext uri="{FF2B5EF4-FFF2-40B4-BE49-F238E27FC236}">
-                <a16:creationId xmlns:a16="http://schemas.microsoft.com/office/drawing/2014/main" id="{8400E695-B896-4CF8-823B-55D5C6834C4E}"/>
+                <a16:creationId xmlns:a16="http://schemas.microsoft.com/office/drawing/2014/main" id="{A7205F32-D1F9-40EA-B662-59064CB08F00}"/>
               </a:ext>
             </a:extLst>
           </p:cNvPr>
@@ -10278,7 +10470,7 @@
           <p:cNvPr id="8" name="core-body-0">
             <a:extLst xmlns:a="http://schemas.openxmlformats.org/drawingml/2006/main">
               <a:ext uri="{FF2B5EF4-FFF2-40B4-BE49-F238E27FC236}">
-                <a16:creationId xmlns:a16="http://schemas.microsoft.com/office/drawing/2014/main" id="{F6F0D4E9-F1B5-4755-BDD1-7D7DB14EC73D}"/>
+                <a16:creationId xmlns:a16="http://schemas.microsoft.com/office/drawing/2014/main" id="{26CD46DC-0993-467D-9947-F6CAB47A6193}"/>
               </a:ext>
             </a:extLst>
           </p:cNvPr>
@@ -10302,7 +10494,7 @@
           </a:solidFill>
           <a:ln xmlns:a="http://schemas.openxmlformats.org/drawingml/2006/main" w="19050">
             <a:solidFill>
-              <a:srgbClr val="2D9B72"/>
+              <a:srgbClr val="0B6B4F"/>
             </a:solidFill>
             <a:prstDash val="solid"/>
           </a:ln>
@@ -10342,7 +10534,7 @@
           <p:cNvPr id="9" name="core-no-1">
             <a:extLst xmlns:a="http://schemas.openxmlformats.org/drawingml/2006/main">
               <a:ext uri="{FF2B5EF4-FFF2-40B4-BE49-F238E27FC236}">
-                <a16:creationId xmlns:a16="http://schemas.microsoft.com/office/drawing/2014/main" id="{793CE790-6F84-469D-BA81-72477D7F1F00}"/>
+                <a16:creationId xmlns:a16="http://schemas.microsoft.com/office/drawing/2014/main" id="{71C34413-4AA3-4D1A-9D17-2DACF086EA2B}"/>
               </a:ext>
             </a:extLst>
           </p:cNvPr>
@@ -10374,7 +10566,7 @@
             <a:pPr algn="l">
               <a:defRPr sz="2250" b="1">
                 <a:solidFill>
-                  <a:srgbClr val="2D9B72"/>
+                  <a:srgbClr val="0B6B4F"/>
                 </a:solidFill>
                 <a:latin typeface="PingFang SC"/>
                 <a:ea typeface="PingFang SC"/>
@@ -10384,7 +10576,7 @@
             <a:r>
               <a:rPr sz="2250" b="1">
                 <a:solidFill>
-                  <a:srgbClr val="2D9B72"/>
+                  <a:srgbClr val="0B6B4F"/>
                 </a:solidFill>
                 <a:latin typeface="PingFang SC"/>
                 <a:ea typeface="PingFang SC"/>
@@ -10400,7 +10592,7 @@
           <p:cNvPr id="10" name="core-body-1">
             <a:extLst xmlns:a="http://schemas.openxmlformats.org/drawingml/2006/main">
               <a:ext uri="{FF2B5EF4-FFF2-40B4-BE49-F238E27FC236}">
-                <a16:creationId xmlns:a16="http://schemas.microsoft.com/office/drawing/2014/main" id="{B2646796-384F-4357-A039-83621A00827C}"/>
+                <a16:creationId xmlns:a16="http://schemas.microsoft.com/office/drawing/2014/main" id="{B3185168-17B1-43EF-9967-9325A98F6882}"/>
               </a:ext>
             </a:extLst>
           </p:cNvPr>
@@ -10464,7 +10656,7 @@
           <p:cNvPr id="11" name="s9-takeaway-rule">
             <a:extLst xmlns:a="http://schemas.openxmlformats.org/drawingml/2006/main">
               <a:ext uri="{FF2B5EF4-FFF2-40B4-BE49-F238E27FC236}">
-                <a16:creationId xmlns:a16="http://schemas.microsoft.com/office/drawing/2014/main" id="{EA64A9FA-43F0-492E-BCA8-5ACCC928EAA0}"/>
+                <a16:creationId xmlns:a16="http://schemas.microsoft.com/office/drawing/2014/main" id="{61BDC207-F8A1-4CA3-A79A-362985F29A78}"/>
               </a:ext>
             </a:extLst>
           </p:cNvPr>
@@ -10497,7 +10689,7 @@
           <p:cNvPr id="12" name="s9-takeaway">
             <a:extLst xmlns:a="http://schemas.openxmlformats.org/drawingml/2006/main">
               <a:ext uri="{FF2B5EF4-FFF2-40B4-BE49-F238E27FC236}">
-                <a16:creationId xmlns:a16="http://schemas.microsoft.com/office/drawing/2014/main" id="{06748BD6-5EAB-4E74-9E61-63CBAFD29C89}"/>
+                <a16:creationId xmlns:a16="http://schemas.microsoft.com/office/drawing/2014/main" id="{59F9E146-02EE-41B1-8529-E1B077577357}"/>
               </a:ext>
             </a:extLst>
           </p:cNvPr>
@@ -10553,7 +10745,7 @@
     </p:spTree>
     <p:extLst>
       <p:ext uri="{BB962C8B-B14F-4D97-AF65-F5344CB8AC3E}">
-        <p14:creationId xmlns:p14="http://schemas.microsoft.com/office/powerpoint/2010/main" val="1367085997"/>
+        <p14:creationId xmlns:p14="http://schemas.microsoft.com/office/powerpoint/2010/main" val="376566742"/>
       </p:ext>
     </p:extLst>
   </p:cSld>

--- a/docs/public/course-assets/course-pptx/em-001.pptx
+++ b/docs/public/course-assets/course-pptx/em-001.pptx
@@ -2,25 +2,25 @@
 <file path=ppt/presentation.xml><?xml version="1.0" encoding="utf-8"?>
 <p:presentation xmlns:p="http://schemas.openxmlformats.org/presentationml/2006/main">
   <p:sldMasterIdLst>
-    <p:sldMasterId xmlns:r="http://schemas.openxmlformats.org/officeDocument/2006/relationships" id="2147483648" r:id="R62717325321a4547"/>
+    <p:sldMasterId xmlns:r="http://schemas.openxmlformats.org/officeDocument/2006/relationships" id="2147483648" r:id="R40b6aefa596644bf"/>
   </p:sldMasterIdLst>
   <p:notesMasterIdLst>
-    <p:notesMasterId xmlns:r="http://schemas.openxmlformats.org/officeDocument/2006/relationships" r:id="R28d38fa20a214d6c"/>
+    <p:notesMasterId xmlns:r="http://schemas.openxmlformats.org/officeDocument/2006/relationships" r:id="R54f11173d50b4fc7"/>
   </p:notesMasterIdLst>
   <p:sldIdLst>
-    <p:sldId xmlns:r="http://schemas.openxmlformats.org/officeDocument/2006/relationships" id="256" r:id="Re579a8f4ebdb4bb1"/>
-    <p:sldId xmlns:r="http://schemas.openxmlformats.org/officeDocument/2006/relationships" id="257" r:id="R32a05ef81d464e69"/>
-    <p:sldId xmlns:r="http://schemas.openxmlformats.org/officeDocument/2006/relationships" id="258" r:id="R55984be1d7a34a5c"/>
-    <p:sldId xmlns:r="http://schemas.openxmlformats.org/officeDocument/2006/relationships" id="259" r:id="Rd968aefbe6c340fb"/>
-    <p:sldId xmlns:r="http://schemas.openxmlformats.org/officeDocument/2006/relationships" id="260" r:id="Rcd6ae239f8b7491c"/>
-    <p:sldId xmlns:r="http://schemas.openxmlformats.org/officeDocument/2006/relationships" id="261" r:id="Rb5f6369895e54025"/>
-    <p:sldId xmlns:r="http://schemas.openxmlformats.org/officeDocument/2006/relationships" id="262" r:id="R6f5927aa86ea4f43"/>
-    <p:sldId xmlns:r="http://schemas.openxmlformats.org/officeDocument/2006/relationships" id="263" r:id="R52edf414ec4b4b89"/>
-    <p:sldId xmlns:r="http://schemas.openxmlformats.org/officeDocument/2006/relationships" id="264" r:id="Ra8eb91ad6cd048d8"/>
-    <p:sldId xmlns:r="http://schemas.openxmlformats.org/officeDocument/2006/relationships" id="265" r:id="Rd1a35deee06a4a21"/>
-    <p:sldId xmlns:r="http://schemas.openxmlformats.org/officeDocument/2006/relationships" id="266" r:id="Rc731030142f54838"/>
-    <p:sldId xmlns:r="http://schemas.openxmlformats.org/officeDocument/2006/relationships" id="267" r:id="Rf94a78eb4eb14a18"/>
-    <p:sldId xmlns:r="http://schemas.openxmlformats.org/officeDocument/2006/relationships" id="268" r:id="R7ab06d7723ac476d"/>
+    <p:sldId xmlns:r="http://schemas.openxmlformats.org/officeDocument/2006/relationships" id="256" r:id="Rb90b250e444349c6"/>
+    <p:sldId xmlns:r="http://schemas.openxmlformats.org/officeDocument/2006/relationships" id="257" r:id="R11a251d20e7c41f3"/>
+    <p:sldId xmlns:r="http://schemas.openxmlformats.org/officeDocument/2006/relationships" id="258" r:id="R75b7397a415b463c"/>
+    <p:sldId xmlns:r="http://schemas.openxmlformats.org/officeDocument/2006/relationships" id="259" r:id="Re5b5c523a6ad401d"/>
+    <p:sldId xmlns:r="http://schemas.openxmlformats.org/officeDocument/2006/relationships" id="260" r:id="Re5d7b202e9494c4b"/>
+    <p:sldId xmlns:r="http://schemas.openxmlformats.org/officeDocument/2006/relationships" id="261" r:id="Raea8143343404a8f"/>
+    <p:sldId xmlns:r="http://schemas.openxmlformats.org/officeDocument/2006/relationships" id="262" r:id="Rec56883b237646fc"/>
+    <p:sldId xmlns:r="http://schemas.openxmlformats.org/officeDocument/2006/relationships" id="263" r:id="Rf8f520a70a2c4d7f"/>
+    <p:sldId xmlns:r="http://schemas.openxmlformats.org/officeDocument/2006/relationships" id="264" r:id="R24aa573042a8433f"/>
+    <p:sldId xmlns:r="http://schemas.openxmlformats.org/officeDocument/2006/relationships" id="265" r:id="R7bff1ab3321b4ad3"/>
+    <p:sldId xmlns:r="http://schemas.openxmlformats.org/officeDocument/2006/relationships" id="266" r:id="R51718413656a430b"/>
+    <p:sldId xmlns:r="http://schemas.openxmlformats.org/officeDocument/2006/relationships" id="267" r:id="Rc2b7710a409d48fa"/>
+    <p:sldId xmlns:r="http://schemas.openxmlformats.org/officeDocument/2006/relationships" id="268" r:id="R34a18022208e4edc"/>
   </p:sldIdLst>
   <p:sldSz cx="12192000" cy="6858000"/>
   <p:notesSz cx="6858000" cy="9144000"/>
@@ -1405,7 +1405,7 @@
   </p:cSld>
   <p:clrMap bg1="lt1" tx1="dk1" bg2="lt2" tx2="dk2" accent1="accent1" accent2="accent2" accent3="accent3" accent4="accent4" accent5="accent5" accent6="accent6" hlink="hlink" folHlink="folHlink"/>
   <p:sldLayoutIdLst>
-    <p:sldLayoutId xmlns:r="http://schemas.openxmlformats.org/officeDocument/2006/relationships" id="2147483649" r:id="Rd769fc8e37994827"/>
+    <p:sldLayoutId xmlns:r="http://schemas.openxmlformats.org/officeDocument/2006/relationships" id="2147483649" r:id="R5a10fc58759e492f"/>
   </p:sldLayoutIdLst>
   <p:txStyles>
     <p:titleStyle>
@@ -1956,7 +1956,7 @@
           <p:cNvPr id="1" name="cover-rule">
             <a:extLst xmlns:a="http://schemas.openxmlformats.org/drawingml/2006/main">
               <a:ext uri="{FF2B5EF4-FFF2-40B4-BE49-F238E27FC236}">
-                <a16:creationId xmlns:a16="http://schemas.microsoft.com/office/drawing/2014/main" id="{89C48793-DE16-4B03-8B46-C9542C5B08CB}"/>
+                <a16:creationId xmlns:a16="http://schemas.microsoft.com/office/drawing/2014/main" id="{6C59221E-F045-424D-8FC4-8B2A20AA0A0E}"/>
               </a:ext>
             </a:extLst>
           </p:cNvPr>
@@ -1989,7 +1989,7 @@
           <p:cNvPr id="2" name="cover-ring-1">
             <a:extLst xmlns:a="http://schemas.openxmlformats.org/drawingml/2006/main">
               <a:ext uri="{FF2B5EF4-FFF2-40B4-BE49-F238E27FC236}">
-                <a16:creationId xmlns:a16="http://schemas.microsoft.com/office/drawing/2014/main" id="{61F4C6D5-29B2-4FDD-831B-428B42F76965}"/>
+                <a16:creationId xmlns:a16="http://schemas.microsoft.com/office/drawing/2014/main" id="{42934833-683D-4B1D-8117-5E91339933BB}"/>
               </a:ext>
             </a:extLst>
           </p:cNvPr>
@@ -2020,7 +2020,7 @@
           <p:cNvPr id="3" name="cover-ring-2">
             <a:extLst xmlns:a="http://schemas.openxmlformats.org/drawingml/2006/main">
               <a:ext uri="{FF2B5EF4-FFF2-40B4-BE49-F238E27FC236}">
-                <a16:creationId xmlns:a16="http://schemas.microsoft.com/office/drawing/2014/main" id="{83FEBD9F-02DB-4B0A-B277-B9A8F16229D8}"/>
+                <a16:creationId xmlns:a16="http://schemas.microsoft.com/office/drawing/2014/main" id="{590ACF53-564B-4764-BE4C-DB8D90FB5942}"/>
               </a:ext>
             </a:extLst>
           </p:cNvPr>
@@ -2051,7 +2051,7 @@
           <p:cNvPr id="4" name="cover-core">
             <a:extLst xmlns:a="http://schemas.openxmlformats.org/drawingml/2006/main">
               <a:ext uri="{FF2B5EF4-FFF2-40B4-BE49-F238E27FC236}">
-                <a16:creationId xmlns:a16="http://schemas.microsoft.com/office/drawing/2014/main" id="{92720F22-5CD7-4781-9118-064B6BE827B1}"/>
+                <a16:creationId xmlns:a16="http://schemas.microsoft.com/office/drawing/2014/main" id="{4FF53231-E046-4300-97F6-C431BB7E382F}"/>
               </a:ext>
             </a:extLst>
           </p:cNvPr>
@@ -2084,7 +2084,7 @@
           <p:cNvPr id="5" name="cover-line-1">
             <a:extLst xmlns:a="http://schemas.openxmlformats.org/drawingml/2006/main">
               <a:ext uri="{FF2B5EF4-FFF2-40B4-BE49-F238E27FC236}">
-                <a16:creationId xmlns:a16="http://schemas.microsoft.com/office/drawing/2014/main" id="{A5DDE696-A103-49FC-B16A-FCB7A66C42DE}"/>
+                <a16:creationId xmlns:a16="http://schemas.microsoft.com/office/drawing/2014/main" id="{36F40D75-3654-440E-8C2C-8F426D8D37DD}"/>
               </a:ext>
             </a:extLst>
           </p:cNvPr>
@@ -2115,7 +2115,7 @@
           <p:cNvPr id="6" name="cover-line-2">
             <a:extLst xmlns:a="http://schemas.openxmlformats.org/drawingml/2006/main">
               <a:ext uri="{FF2B5EF4-FFF2-40B4-BE49-F238E27FC236}">
-                <a16:creationId xmlns:a16="http://schemas.microsoft.com/office/drawing/2014/main" id="{4B772366-5B02-4598-A0DD-1DFD0E0A310A}"/>
+                <a16:creationId xmlns:a16="http://schemas.microsoft.com/office/drawing/2014/main" id="{95222F34-1AF6-4FEC-B28B-5DC8676F6DE7}"/>
               </a:ext>
             </a:extLst>
           </p:cNvPr>
@@ -2146,7 +2146,7 @@
           <p:cNvPr id="7" name="cover-eyebrow">
             <a:extLst xmlns:a="http://schemas.openxmlformats.org/drawingml/2006/main">
               <a:ext uri="{FF2B5EF4-FFF2-40B4-BE49-F238E27FC236}">
-                <a16:creationId xmlns:a16="http://schemas.microsoft.com/office/drawing/2014/main" id="{3BDC9554-6C35-4998-B599-526B2D3FD7A0}"/>
+                <a16:creationId xmlns:a16="http://schemas.microsoft.com/office/drawing/2014/main" id="{0708BD8C-DF9B-4CBF-B7F1-0A10228FB92B}"/>
               </a:ext>
             </a:extLst>
           </p:cNvPr>
@@ -2204,7 +2204,7 @@
           <p:cNvPr id="8" name="cover-title">
             <a:extLst xmlns:a="http://schemas.openxmlformats.org/drawingml/2006/main">
               <a:ext uri="{FF2B5EF4-FFF2-40B4-BE49-F238E27FC236}">
-                <a16:creationId xmlns:a16="http://schemas.microsoft.com/office/drawing/2014/main" id="{5F6344E8-3DEE-489C-85A9-B72666EE3989}"/>
+                <a16:creationId xmlns:a16="http://schemas.microsoft.com/office/drawing/2014/main" id="{59E92374-0CD5-469F-9630-434DB1F77072}"/>
               </a:ext>
             </a:extLst>
           </p:cNvPr>
@@ -2262,7 +2262,7 @@
           <p:cNvPr id="9" name="cover-subtitle">
             <a:extLst xmlns:a="http://schemas.openxmlformats.org/drawingml/2006/main">
               <a:ext uri="{FF2B5EF4-FFF2-40B4-BE49-F238E27FC236}">
-                <a16:creationId xmlns:a16="http://schemas.microsoft.com/office/drawing/2014/main" id="{7224EE11-34B4-4C59-B039-4EE902964C17}"/>
+                <a16:creationId xmlns:a16="http://schemas.microsoft.com/office/drawing/2014/main" id="{8A87970A-8B52-4C8B-B42C-C77C004888AD}"/>
               </a:ext>
             </a:extLst>
           </p:cNvPr>
@@ -2324,7 +2324,7 @@
           <p:cNvPr id="10" name="cover-lead">
             <a:extLst xmlns:a="http://schemas.openxmlformats.org/drawingml/2006/main">
               <a:ext uri="{FF2B5EF4-FFF2-40B4-BE49-F238E27FC236}">
-                <a16:creationId xmlns:a16="http://schemas.microsoft.com/office/drawing/2014/main" id="{A556987D-3C55-487D-8778-04EA3DEC9E30}"/>
+                <a16:creationId xmlns:a16="http://schemas.microsoft.com/office/drawing/2014/main" id="{9A6842EE-46AE-4B6D-A411-5772D445B65A}"/>
               </a:ext>
             </a:extLst>
           </p:cNvPr>
@@ -2382,7 +2382,7 @@
           <p:cNvPr id="11" name="cover-course">
             <a:extLst xmlns:a="http://schemas.openxmlformats.org/drawingml/2006/main">
               <a:ext uri="{FF2B5EF4-FFF2-40B4-BE49-F238E27FC236}">
-                <a16:creationId xmlns:a16="http://schemas.microsoft.com/office/drawing/2014/main" id="{37BA5A9A-9804-43C4-9031-9D25DBEC7262}"/>
+                <a16:creationId xmlns:a16="http://schemas.microsoft.com/office/drawing/2014/main" id="{58D887B8-6290-42A0-AB84-2E894853FCC0}"/>
               </a:ext>
             </a:extLst>
           </p:cNvPr>
@@ -2440,7 +2440,7 @@
           <p:cNvPr id="12" name="cover-id">
             <a:extLst xmlns:a="http://schemas.openxmlformats.org/drawingml/2006/main">
               <a:ext uri="{FF2B5EF4-FFF2-40B4-BE49-F238E27FC236}">
-                <a16:creationId xmlns:a16="http://schemas.microsoft.com/office/drawing/2014/main" id="{4AB7EF76-8A10-4163-A584-A8E8097DBB9A}"/>
+                <a16:creationId xmlns:a16="http://schemas.microsoft.com/office/drawing/2014/main" id="{D4DDEA47-4626-413D-BEC7-8FF2921ED8B2}"/>
               </a:ext>
             </a:extLst>
           </p:cNvPr>
@@ -2496,7 +2496,7 @@
     </p:spTree>
     <p:extLst>
       <p:ext uri="{BB962C8B-B14F-4D97-AF65-F5344CB8AC3E}">
-        <p14:creationId xmlns:p14="http://schemas.microsoft.com/office/powerpoint/2010/main" val="1792370394"/>
+        <p14:creationId xmlns:p14="http://schemas.microsoft.com/office/powerpoint/2010/main" val="1934839471"/>
       </p:ext>
     </p:extLst>
   </p:cSld>
@@ -2527,7 +2527,7 @@
           <p:cNvPr id="1" name="s10-rule">
             <a:extLst xmlns:a="http://schemas.openxmlformats.org/drawingml/2006/main">
               <a:ext uri="{FF2B5EF4-FFF2-40B4-BE49-F238E27FC236}">
-                <a16:creationId xmlns:a16="http://schemas.microsoft.com/office/drawing/2014/main" id="{89DCF356-F76F-4DA3-805E-6E5726BB0587}"/>
+                <a16:creationId xmlns:a16="http://schemas.microsoft.com/office/drawing/2014/main" id="{B62122CD-D338-4168-B93A-BA65021470C2}"/>
               </a:ext>
             </a:extLst>
           </p:cNvPr>
@@ -2560,7 +2560,7 @@
           <p:cNvPr id="2" name="s10-eyebrow">
             <a:extLst xmlns:a="http://schemas.openxmlformats.org/drawingml/2006/main">
               <a:ext uri="{FF2B5EF4-FFF2-40B4-BE49-F238E27FC236}">
-                <a16:creationId xmlns:a16="http://schemas.microsoft.com/office/drawing/2014/main" id="{0C2A01A1-8676-4DD8-B009-34E1654FCD2F}"/>
+                <a16:creationId xmlns:a16="http://schemas.microsoft.com/office/drawing/2014/main" id="{6C13B973-D33A-425D-9B84-B28FBBA6D5EA}"/>
               </a:ext>
             </a:extLst>
           </p:cNvPr>
@@ -2618,7 +2618,7 @@
           <p:cNvPr id="3" name="s10-title">
             <a:extLst xmlns:a="http://schemas.openxmlformats.org/drawingml/2006/main">
               <a:ext uri="{FF2B5EF4-FFF2-40B4-BE49-F238E27FC236}">
-                <a16:creationId xmlns:a16="http://schemas.microsoft.com/office/drawing/2014/main" id="{392F8E35-9334-43E8-8766-A92505E4F2D4}"/>
+                <a16:creationId xmlns:a16="http://schemas.microsoft.com/office/drawing/2014/main" id="{9E731FA6-7BC8-4228-A7F2-DD0554C2B9AF}"/>
               </a:ext>
             </a:extLst>
           </p:cNvPr>
@@ -2676,7 +2676,7 @@
           <p:cNvPr id="4" name="s10-footer">
             <a:extLst xmlns:a="http://schemas.openxmlformats.org/drawingml/2006/main">
               <a:ext uri="{FF2B5EF4-FFF2-40B4-BE49-F238E27FC236}">
-                <a16:creationId xmlns:a16="http://schemas.microsoft.com/office/drawing/2014/main" id="{D1792857-3B3A-4F32-B077-B663DD374389}"/>
+                <a16:creationId xmlns:a16="http://schemas.microsoft.com/office/drawing/2014/main" id="{6D6B462F-3824-4F62-B891-7E38E3E3C0CF}"/>
               </a:ext>
             </a:extLst>
           </p:cNvPr>
@@ -2707,7 +2707,7 @@
           <p:cNvPr id="5" name="s10-identity">
             <a:extLst xmlns:a="http://schemas.openxmlformats.org/drawingml/2006/main">
               <a:ext uri="{FF2B5EF4-FFF2-40B4-BE49-F238E27FC236}">
-                <a16:creationId xmlns:a16="http://schemas.microsoft.com/office/drawing/2014/main" id="{203056DD-EDE6-465E-A614-06A69040F2C9}"/>
+                <a16:creationId xmlns:a16="http://schemas.microsoft.com/office/drawing/2014/main" id="{4394A9B5-4A52-4CDD-9E38-D8C671597973}"/>
               </a:ext>
             </a:extLst>
           </p:cNvPr>
@@ -2765,7 +2765,7 @@
           <p:cNvPr id="6" name="case-title">
             <a:extLst xmlns:a="http://schemas.openxmlformats.org/drawingml/2006/main">
               <a:ext uri="{FF2B5EF4-FFF2-40B4-BE49-F238E27FC236}">
-                <a16:creationId xmlns:a16="http://schemas.microsoft.com/office/drawing/2014/main" id="{5DCC15F8-A2B8-42D9-BFBF-F8651E7ED89C}"/>
+                <a16:creationId xmlns:a16="http://schemas.microsoft.com/office/drawing/2014/main" id="{D3BCBAD5-D08B-4C4A-922C-CFDC02C28A9C}"/>
               </a:ext>
             </a:extLst>
           </p:cNvPr>
@@ -2829,7 +2829,7 @@
           <p:cNvPr id="7" name="case-row-0">
             <a:extLst xmlns:a="http://schemas.openxmlformats.org/drawingml/2006/main">
               <a:ext uri="{FF2B5EF4-FFF2-40B4-BE49-F238E27FC236}">
-                <a16:creationId xmlns:a16="http://schemas.microsoft.com/office/drawing/2014/main" id="{7BA05522-7081-461C-B38F-C825890B7162}"/>
+                <a16:creationId xmlns:a16="http://schemas.microsoft.com/office/drawing/2014/main" id="{1C991A74-748E-4605-8A2D-EA615B89849C}"/>
               </a:ext>
             </a:extLst>
           </p:cNvPr>
@@ -2893,7 +2893,7 @@
           <p:cNvPr id="8" name="case-row-1">
             <a:extLst xmlns:a="http://schemas.openxmlformats.org/drawingml/2006/main">
               <a:ext uri="{FF2B5EF4-FFF2-40B4-BE49-F238E27FC236}">
-                <a16:creationId xmlns:a16="http://schemas.microsoft.com/office/drawing/2014/main" id="{60211F48-BDC9-4225-8E91-C466A52381CD}"/>
+                <a16:creationId xmlns:a16="http://schemas.microsoft.com/office/drawing/2014/main" id="{87807129-770B-44B4-985C-963CA7B60136}"/>
               </a:ext>
             </a:extLst>
           </p:cNvPr>
@@ -2957,7 +2957,7 @@
           <p:cNvPr id="9" name="case-row-2">
             <a:extLst xmlns:a="http://schemas.openxmlformats.org/drawingml/2006/main">
               <a:ext uri="{FF2B5EF4-FFF2-40B4-BE49-F238E27FC236}">
-                <a16:creationId xmlns:a16="http://schemas.microsoft.com/office/drawing/2014/main" id="{1503D962-3317-46DD-B8B5-C8A78256BB7B}"/>
+                <a16:creationId xmlns:a16="http://schemas.microsoft.com/office/drawing/2014/main" id="{C81153AB-8AD5-4A4B-B313-025929DAF7C1}"/>
               </a:ext>
             </a:extLst>
           </p:cNvPr>
@@ -3021,7 +3021,7 @@
           <p:cNvPr id="10" name="case-row-3">
             <a:extLst xmlns:a="http://schemas.openxmlformats.org/drawingml/2006/main">
               <a:ext uri="{FF2B5EF4-FFF2-40B4-BE49-F238E27FC236}">
-                <a16:creationId xmlns:a16="http://schemas.microsoft.com/office/drawing/2014/main" id="{AFD9D33D-8675-4742-AA80-188D252C4709}"/>
+                <a16:creationId xmlns:a16="http://schemas.microsoft.com/office/drawing/2014/main" id="{F8C4747F-F26D-4B0A-BAD1-F7855E837B40}"/>
               </a:ext>
             </a:extLst>
           </p:cNvPr>
@@ -3085,7 +3085,7 @@
           <p:cNvPr id="11" name="case-row-4">
             <a:extLst xmlns:a="http://schemas.openxmlformats.org/drawingml/2006/main">
               <a:ext uri="{FF2B5EF4-FFF2-40B4-BE49-F238E27FC236}">
-                <a16:creationId xmlns:a16="http://schemas.microsoft.com/office/drawing/2014/main" id="{722483C1-DFFA-4597-8905-F0C0E6846C04}"/>
+                <a16:creationId xmlns:a16="http://schemas.microsoft.com/office/drawing/2014/main" id="{BA4331DD-53CE-4FAE-93FB-92B3D9017F03}"/>
               </a:ext>
             </a:extLst>
           </p:cNvPr>
@@ -3149,7 +3149,7 @@
           <p:cNvPr id="12" name="s10-takeaway-rule">
             <a:extLst xmlns:a="http://schemas.openxmlformats.org/drawingml/2006/main">
               <a:ext uri="{FF2B5EF4-FFF2-40B4-BE49-F238E27FC236}">
-                <a16:creationId xmlns:a16="http://schemas.microsoft.com/office/drawing/2014/main" id="{458A9C15-594C-4920-A94C-E204EEEC3F97}"/>
+                <a16:creationId xmlns:a16="http://schemas.microsoft.com/office/drawing/2014/main" id="{FC8CB535-0700-4472-AC8E-26E199543939}"/>
               </a:ext>
             </a:extLst>
           </p:cNvPr>
@@ -3182,7 +3182,7 @@
           <p:cNvPr id="13" name="s10-takeaway">
             <a:extLst xmlns:a="http://schemas.openxmlformats.org/drawingml/2006/main">
               <a:ext uri="{FF2B5EF4-FFF2-40B4-BE49-F238E27FC236}">
-                <a16:creationId xmlns:a16="http://schemas.microsoft.com/office/drawing/2014/main" id="{265A5271-A9D4-4CFD-91FD-CD8B9A05B243}"/>
+                <a16:creationId xmlns:a16="http://schemas.microsoft.com/office/drawing/2014/main" id="{A043E461-14F1-48B9-A5CB-4D8A47A2C1C5}"/>
               </a:ext>
             </a:extLst>
           </p:cNvPr>
@@ -3238,7 +3238,7 @@
     </p:spTree>
     <p:extLst>
       <p:ext uri="{BB962C8B-B14F-4D97-AF65-F5344CB8AC3E}">
-        <p14:creationId xmlns:p14="http://schemas.microsoft.com/office/powerpoint/2010/main" val="1633132149"/>
+        <p14:creationId xmlns:p14="http://schemas.microsoft.com/office/powerpoint/2010/main" val="1324159520"/>
       </p:ext>
     </p:extLst>
   </p:cSld>
@@ -3269,7 +3269,7 @@
           <p:cNvPr id="1" name="s11-rule">
             <a:extLst xmlns:a="http://schemas.openxmlformats.org/drawingml/2006/main">
               <a:ext uri="{FF2B5EF4-FFF2-40B4-BE49-F238E27FC236}">
-                <a16:creationId xmlns:a16="http://schemas.microsoft.com/office/drawing/2014/main" id="{6FD9FB55-8A3C-4710-B684-468EF4633940}"/>
+                <a16:creationId xmlns:a16="http://schemas.microsoft.com/office/drawing/2014/main" id="{37F1B11E-B1AB-4F28-89CB-D7755FCE87D4}"/>
               </a:ext>
             </a:extLst>
           </p:cNvPr>
@@ -3302,7 +3302,7 @@
           <p:cNvPr id="2" name="s11-eyebrow">
             <a:extLst xmlns:a="http://schemas.openxmlformats.org/drawingml/2006/main">
               <a:ext uri="{FF2B5EF4-FFF2-40B4-BE49-F238E27FC236}">
-                <a16:creationId xmlns:a16="http://schemas.microsoft.com/office/drawing/2014/main" id="{C53DFECF-37C2-4C0A-9286-6FC0DF15079C}"/>
+                <a16:creationId xmlns:a16="http://schemas.microsoft.com/office/drawing/2014/main" id="{22BD439E-6492-4269-8303-F68A047BA654}"/>
               </a:ext>
             </a:extLst>
           </p:cNvPr>
@@ -3360,7 +3360,7 @@
           <p:cNvPr id="3" name="s11-title">
             <a:extLst xmlns:a="http://schemas.openxmlformats.org/drawingml/2006/main">
               <a:ext uri="{FF2B5EF4-FFF2-40B4-BE49-F238E27FC236}">
-                <a16:creationId xmlns:a16="http://schemas.microsoft.com/office/drawing/2014/main" id="{53D71593-22EA-4457-AE50-FD2350364530}"/>
+                <a16:creationId xmlns:a16="http://schemas.microsoft.com/office/drawing/2014/main" id="{AC76AAF8-D346-4394-B915-9A52FEC077DE}"/>
               </a:ext>
             </a:extLst>
           </p:cNvPr>
@@ -3418,7 +3418,7 @@
           <p:cNvPr id="4" name="s11-footer">
             <a:extLst xmlns:a="http://schemas.openxmlformats.org/drawingml/2006/main">
               <a:ext uri="{FF2B5EF4-FFF2-40B4-BE49-F238E27FC236}">
-                <a16:creationId xmlns:a16="http://schemas.microsoft.com/office/drawing/2014/main" id="{B7E495FA-C266-4E7E-8D67-A771F50994BF}"/>
+                <a16:creationId xmlns:a16="http://schemas.microsoft.com/office/drawing/2014/main" id="{D2F7A452-79B3-4AB0-AC52-B69F4B08AA98}"/>
               </a:ext>
             </a:extLst>
           </p:cNvPr>
@@ -3449,7 +3449,7 @@
           <p:cNvPr id="5" name="s11-identity">
             <a:extLst xmlns:a="http://schemas.openxmlformats.org/drawingml/2006/main">
               <a:ext uri="{FF2B5EF4-FFF2-40B4-BE49-F238E27FC236}">
-                <a16:creationId xmlns:a16="http://schemas.microsoft.com/office/drawing/2014/main" id="{1F833112-E23E-4485-A1D0-EBA9633B6444}"/>
+                <a16:creationId xmlns:a16="http://schemas.microsoft.com/office/drawing/2014/main" id="{6084851F-C483-4C2A-8C4C-31A1343AB7DA}"/>
               </a:ext>
             </a:extLst>
           </p:cNvPr>
@@ -3507,7 +3507,7 @@
           <p:cNvPr id="6" name="practice-circle-0">
             <a:extLst xmlns:a="http://schemas.openxmlformats.org/drawingml/2006/main">
               <a:ext uri="{FF2B5EF4-FFF2-40B4-BE49-F238E27FC236}">
-                <a16:creationId xmlns:a16="http://schemas.microsoft.com/office/drawing/2014/main" id="{AD280822-B0FC-49A4-8A83-4E7345A23E18}"/>
+                <a16:creationId xmlns:a16="http://schemas.microsoft.com/office/drawing/2014/main" id="{CDBED8E6-35D7-4A61-A402-4E5E199F8C44}"/>
               </a:ext>
             </a:extLst>
           </p:cNvPr>
@@ -3540,7 +3540,7 @@
           <p:cNvPr id="7" name="practice-number-0">
             <a:extLst xmlns:a="http://schemas.openxmlformats.org/drawingml/2006/main">
               <a:ext uri="{FF2B5EF4-FFF2-40B4-BE49-F238E27FC236}">
-                <a16:creationId xmlns:a16="http://schemas.microsoft.com/office/drawing/2014/main" id="{DDEF7ACE-BF09-4D08-B750-E3FEAADF35A4}"/>
+                <a16:creationId xmlns:a16="http://schemas.microsoft.com/office/drawing/2014/main" id="{B8261D3E-004C-43E3-B615-E04DABCE7374}"/>
               </a:ext>
             </a:extLst>
           </p:cNvPr>
@@ -3598,7 +3598,7 @@
           <p:cNvPr id="8" name="practice-item-0">
             <a:extLst xmlns:a="http://schemas.openxmlformats.org/drawingml/2006/main">
               <a:ext uri="{FF2B5EF4-FFF2-40B4-BE49-F238E27FC236}">
-                <a16:creationId xmlns:a16="http://schemas.microsoft.com/office/drawing/2014/main" id="{6AB92BD7-1410-4AB5-AA5C-4102582B159D}"/>
+                <a16:creationId xmlns:a16="http://schemas.microsoft.com/office/drawing/2014/main" id="{D1335176-2053-430C-8AE5-E2FABB3417FE}"/>
               </a:ext>
             </a:extLst>
           </p:cNvPr>
@@ -3662,7 +3662,7 @@
           <p:cNvPr id="9" name="practice-connector-0">
             <a:extLst xmlns:a="http://schemas.openxmlformats.org/drawingml/2006/main">
               <a:ext uri="{FF2B5EF4-FFF2-40B4-BE49-F238E27FC236}">
-                <a16:creationId xmlns:a16="http://schemas.microsoft.com/office/drawing/2014/main" id="{5538F981-BF5D-4E6E-8FAD-785422F3C2F6}"/>
+                <a16:creationId xmlns:a16="http://schemas.microsoft.com/office/drawing/2014/main" id="{DA61A485-44BA-4865-83A7-4FC6E6A0A896}"/>
               </a:ext>
             </a:extLst>
           </p:cNvPr>
@@ -3693,7 +3693,7 @@
           <p:cNvPr id="10" name="practice-circle-1">
             <a:extLst xmlns:a="http://schemas.openxmlformats.org/drawingml/2006/main">
               <a:ext uri="{FF2B5EF4-FFF2-40B4-BE49-F238E27FC236}">
-                <a16:creationId xmlns:a16="http://schemas.microsoft.com/office/drawing/2014/main" id="{310888B0-3348-481B-A26E-6BC48A1E33CF}"/>
+                <a16:creationId xmlns:a16="http://schemas.microsoft.com/office/drawing/2014/main" id="{5570D9B4-6169-4D23-8AB0-C7F4F1B1A4E6}"/>
               </a:ext>
             </a:extLst>
           </p:cNvPr>
@@ -3726,7 +3726,7 @@
           <p:cNvPr id="11" name="practice-number-1">
             <a:extLst xmlns:a="http://schemas.openxmlformats.org/drawingml/2006/main">
               <a:ext uri="{FF2B5EF4-FFF2-40B4-BE49-F238E27FC236}">
-                <a16:creationId xmlns:a16="http://schemas.microsoft.com/office/drawing/2014/main" id="{F71A73CB-45AA-40A2-A1B9-8EB688955D89}"/>
+                <a16:creationId xmlns:a16="http://schemas.microsoft.com/office/drawing/2014/main" id="{3E39F085-D684-4F66-90E7-38BB99DE132F}"/>
               </a:ext>
             </a:extLst>
           </p:cNvPr>
@@ -3784,7 +3784,7 @@
           <p:cNvPr id="12" name="practice-item-1">
             <a:extLst xmlns:a="http://schemas.openxmlformats.org/drawingml/2006/main">
               <a:ext uri="{FF2B5EF4-FFF2-40B4-BE49-F238E27FC236}">
-                <a16:creationId xmlns:a16="http://schemas.microsoft.com/office/drawing/2014/main" id="{F0A411A7-7C27-40BE-8AFD-568C9B10D32B}"/>
+                <a16:creationId xmlns:a16="http://schemas.microsoft.com/office/drawing/2014/main" id="{0182FEAA-CFA2-4A1B-BC3D-643022AC7C06}"/>
               </a:ext>
             </a:extLst>
           </p:cNvPr>
@@ -3848,7 +3848,7 @@
           <p:cNvPr id="13" name="practice-connector-1">
             <a:extLst xmlns:a="http://schemas.openxmlformats.org/drawingml/2006/main">
               <a:ext uri="{FF2B5EF4-FFF2-40B4-BE49-F238E27FC236}">
-                <a16:creationId xmlns:a16="http://schemas.microsoft.com/office/drawing/2014/main" id="{91448FB1-BA31-4641-B02E-2C0F97D696DC}"/>
+                <a16:creationId xmlns:a16="http://schemas.microsoft.com/office/drawing/2014/main" id="{88016296-1838-493A-9D5D-F2228AC7C58F}"/>
               </a:ext>
             </a:extLst>
           </p:cNvPr>
@@ -3879,7 +3879,7 @@
           <p:cNvPr id="14" name="practice-circle-2">
             <a:extLst xmlns:a="http://schemas.openxmlformats.org/drawingml/2006/main">
               <a:ext uri="{FF2B5EF4-FFF2-40B4-BE49-F238E27FC236}">
-                <a16:creationId xmlns:a16="http://schemas.microsoft.com/office/drawing/2014/main" id="{7BF82B67-8DD3-4393-BD4C-875C08BE7390}"/>
+                <a16:creationId xmlns:a16="http://schemas.microsoft.com/office/drawing/2014/main" id="{ECA719A3-8ED9-426F-9F39-BC7FD57D8A44}"/>
               </a:ext>
             </a:extLst>
           </p:cNvPr>
@@ -3912,7 +3912,7 @@
           <p:cNvPr id="15" name="practice-number-2">
             <a:extLst xmlns:a="http://schemas.openxmlformats.org/drawingml/2006/main">
               <a:ext uri="{FF2B5EF4-FFF2-40B4-BE49-F238E27FC236}">
-                <a16:creationId xmlns:a16="http://schemas.microsoft.com/office/drawing/2014/main" id="{F33CDCFC-5B88-40AE-A26B-C5D1886D4180}"/>
+                <a16:creationId xmlns:a16="http://schemas.microsoft.com/office/drawing/2014/main" id="{1095542A-68A3-48E5-997F-BD21A0DB68EF}"/>
               </a:ext>
             </a:extLst>
           </p:cNvPr>
@@ -3970,7 +3970,7 @@
           <p:cNvPr id="16" name="practice-item-2">
             <a:extLst xmlns:a="http://schemas.openxmlformats.org/drawingml/2006/main">
               <a:ext uri="{FF2B5EF4-FFF2-40B4-BE49-F238E27FC236}">
-                <a16:creationId xmlns:a16="http://schemas.microsoft.com/office/drawing/2014/main" id="{C336FB8D-61D4-43E3-ADE6-7D666785519A}"/>
+                <a16:creationId xmlns:a16="http://schemas.microsoft.com/office/drawing/2014/main" id="{1F29F76A-7B8A-44DF-8316-7476B337D190}"/>
               </a:ext>
             </a:extLst>
           </p:cNvPr>
@@ -4032,7 +4032,7 @@
     </p:spTree>
     <p:extLst>
       <p:ext uri="{BB962C8B-B14F-4D97-AF65-F5344CB8AC3E}">
-        <p14:creationId xmlns:p14="http://schemas.microsoft.com/office/powerpoint/2010/main" val="1136474386"/>
+        <p14:creationId xmlns:p14="http://schemas.microsoft.com/office/powerpoint/2010/main" val="2030253585"/>
       </p:ext>
     </p:extLst>
   </p:cSld>
@@ -4063,7 +4063,7 @@
           <p:cNvPr id="1" name="s12-rule">
             <a:extLst xmlns:a="http://schemas.openxmlformats.org/drawingml/2006/main">
               <a:ext uri="{FF2B5EF4-FFF2-40B4-BE49-F238E27FC236}">
-                <a16:creationId xmlns:a16="http://schemas.microsoft.com/office/drawing/2014/main" id="{C4239F58-B9E5-400B-AF59-6B0371640CF7}"/>
+                <a16:creationId xmlns:a16="http://schemas.microsoft.com/office/drawing/2014/main" id="{B61D9FCF-BF44-4FDE-A6E7-6A5923CF0FA2}"/>
               </a:ext>
             </a:extLst>
           </p:cNvPr>
@@ -4096,7 +4096,7 @@
           <p:cNvPr id="2" name="s12-eyebrow">
             <a:extLst xmlns:a="http://schemas.openxmlformats.org/drawingml/2006/main">
               <a:ext uri="{FF2B5EF4-FFF2-40B4-BE49-F238E27FC236}">
-                <a16:creationId xmlns:a16="http://schemas.microsoft.com/office/drawing/2014/main" id="{91C0597A-34E4-4D87-927D-FE6CD86D5CDA}"/>
+                <a16:creationId xmlns:a16="http://schemas.microsoft.com/office/drawing/2014/main" id="{C4992733-B40A-4DA7-A011-CEC66B6E5BBA}"/>
               </a:ext>
             </a:extLst>
           </p:cNvPr>
@@ -4154,7 +4154,7 @@
           <p:cNvPr id="3" name="s12-title">
             <a:extLst xmlns:a="http://schemas.openxmlformats.org/drawingml/2006/main">
               <a:ext uri="{FF2B5EF4-FFF2-40B4-BE49-F238E27FC236}">
-                <a16:creationId xmlns:a16="http://schemas.microsoft.com/office/drawing/2014/main" id="{637A67BB-C552-455D-B0DE-2AE74556248E}"/>
+                <a16:creationId xmlns:a16="http://schemas.microsoft.com/office/drawing/2014/main" id="{63F8940F-EACD-4056-BDD6-4FAA95B4A33D}"/>
               </a:ext>
             </a:extLst>
           </p:cNvPr>
@@ -4212,7 +4212,7 @@
           <p:cNvPr id="4" name="s12-footer">
             <a:extLst xmlns:a="http://schemas.openxmlformats.org/drawingml/2006/main">
               <a:ext uri="{FF2B5EF4-FFF2-40B4-BE49-F238E27FC236}">
-                <a16:creationId xmlns:a16="http://schemas.microsoft.com/office/drawing/2014/main" id="{0E707DF9-0A22-4500-8F58-4AB2945AF21F}"/>
+                <a16:creationId xmlns:a16="http://schemas.microsoft.com/office/drawing/2014/main" id="{58F1F9DF-8D5C-4FD3-8F4D-BF05F491AEFE}"/>
               </a:ext>
             </a:extLst>
           </p:cNvPr>
@@ -4243,7 +4243,7 @@
           <p:cNvPr id="5" name="s12-identity">
             <a:extLst xmlns:a="http://schemas.openxmlformats.org/drawingml/2006/main">
               <a:ext uri="{FF2B5EF4-FFF2-40B4-BE49-F238E27FC236}">
-                <a16:creationId xmlns:a16="http://schemas.microsoft.com/office/drawing/2014/main" id="{30E02B3C-AA86-40FD-B061-B2D69F136AC1}"/>
+                <a16:creationId xmlns:a16="http://schemas.microsoft.com/office/drawing/2014/main" id="{F8720C03-2C69-492B-AD38-F8C7EF9C6253}"/>
               </a:ext>
             </a:extLst>
           </p:cNvPr>
@@ -4301,7 +4301,7 @@
           <p:cNvPr id="6" name="recap-circle-0">
             <a:extLst xmlns:a="http://schemas.openxmlformats.org/drawingml/2006/main">
               <a:ext uri="{FF2B5EF4-FFF2-40B4-BE49-F238E27FC236}">
-                <a16:creationId xmlns:a16="http://schemas.microsoft.com/office/drawing/2014/main" id="{93FF9117-6EEE-4E0F-B041-8E3E6FC72836}"/>
+                <a16:creationId xmlns:a16="http://schemas.microsoft.com/office/drawing/2014/main" id="{DA5D307D-FF5C-4398-A191-59A3E7172192}"/>
               </a:ext>
             </a:extLst>
           </p:cNvPr>
@@ -4334,7 +4334,7 @@
           <p:cNvPr id="7" name="recap-number-0">
             <a:extLst xmlns:a="http://schemas.openxmlformats.org/drawingml/2006/main">
               <a:ext uri="{FF2B5EF4-FFF2-40B4-BE49-F238E27FC236}">
-                <a16:creationId xmlns:a16="http://schemas.microsoft.com/office/drawing/2014/main" id="{BE109179-F562-4230-A164-70E65013060D}"/>
+                <a16:creationId xmlns:a16="http://schemas.microsoft.com/office/drawing/2014/main" id="{8CCFB613-4DFA-480A-A1D7-BB60AC9EDE92}"/>
               </a:ext>
             </a:extLst>
           </p:cNvPr>
@@ -4392,7 +4392,7 @@
           <p:cNvPr id="8" name="recap-item-0">
             <a:extLst xmlns:a="http://schemas.openxmlformats.org/drawingml/2006/main">
               <a:ext uri="{FF2B5EF4-FFF2-40B4-BE49-F238E27FC236}">
-                <a16:creationId xmlns:a16="http://schemas.microsoft.com/office/drawing/2014/main" id="{A9ADA34F-1DBC-4874-A9CE-4ED2B79675DC}"/>
+                <a16:creationId xmlns:a16="http://schemas.microsoft.com/office/drawing/2014/main" id="{6719EDAA-3311-4D84-A387-93F4C3F679DC}"/>
               </a:ext>
             </a:extLst>
           </p:cNvPr>
@@ -4456,7 +4456,7 @@
           <p:cNvPr id="9" name="recap-connector-0">
             <a:extLst xmlns:a="http://schemas.openxmlformats.org/drawingml/2006/main">
               <a:ext uri="{FF2B5EF4-FFF2-40B4-BE49-F238E27FC236}">
-                <a16:creationId xmlns:a16="http://schemas.microsoft.com/office/drawing/2014/main" id="{9A169B6D-BBDD-40C7-BFBD-47C14B1A7F70}"/>
+                <a16:creationId xmlns:a16="http://schemas.microsoft.com/office/drawing/2014/main" id="{B4186390-5C39-4AED-BA87-43AC4BE62375}"/>
               </a:ext>
             </a:extLst>
           </p:cNvPr>
@@ -4487,7 +4487,7 @@
           <p:cNvPr id="10" name="recap-circle-1">
             <a:extLst xmlns:a="http://schemas.openxmlformats.org/drawingml/2006/main">
               <a:ext uri="{FF2B5EF4-FFF2-40B4-BE49-F238E27FC236}">
-                <a16:creationId xmlns:a16="http://schemas.microsoft.com/office/drawing/2014/main" id="{0ADC57FA-4079-4321-910C-BD1F444E1984}"/>
+                <a16:creationId xmlns:a16="http://schemas.microsoft.com/office/drawing/2014/main" id="{03EE6523-AEF9-44CC-A0C0-F2116C9A11A9}"/>
               </a:ext>
             </a:extLst>
           </p:cNvPr>
@@ -4520,7 +4520,7 @@
           <p:cNvPr id="11" name="recap-number-1">
             <a:extLst xmlns:a="http://schemas.openxmlformats.org/drawingml/2006/main">
               <a:ext uri="{FF2B5EF4-FFF2-40B4-BE49-F238E27FC236}">
-                <a16:creationId xmlns:a16="http://schemas.microsoft.com/office/drawing/2014/main" id="{AB5D1B9D-0070-4E3C-94E3-C3988B9E4884}"/>
+                <a16:creationId xmlns:a16="http://schemas.microsoft.com/office/drawing/2014/main" id="{C2AC6150-90C4-4C52-9AE0-7B37AD4A899B}"/>
               </a:ext>
             </a:extLst>
           </p:cNvPr>
@@ -4578,7 +4578,7 @@
           <p:cNvPr id="12" name="recap-item-1">
             <a:extLst xmlns:a="http://schemas.openxmlformats.org/drawingml/2006/main">
               <a:ext uri="{FF2B5EF4-FFF2-40B4-BE49-F238E27FC236}">
-                <a16:creationId xmlns:a16="http://schemas.microsoft.com/office/drawing/2014/main" id="{1480CDA1-E036-4F0E-9379-9B05BFEFD1E4}"/>
+                <a16:creationId xmlns:a16="http://schemas.microsoft.com/office/drawing/2014/main" id="{2ACF7E22-F215-4F4A-B650-A3B61489995E}"/>
               </a:ext>
             </a:extLst>
           </p:cNvPr>
@@ -4642,7 +4642,7 @@
           <p:cNvPr id="13" name="recap-connector-1">
             <a:extLst xmlns:a="http://schemas.openxmlformats.org/drawingml/2006/main">
               <a:ext uri="{FF2B5EF4-FFF2-40B4-BE49-F238E27FC236}">
-                <a16:creationId xmlns:a16="http://schemas.microsoft.com/office/drawing/2014/main" id="{7EE2A51F-BF17-4FB0-8A4A-550FD17E742F}"/>
+                <a16:creationId xmlns:a16="http://schemas.microsoft.com/office/drawing/2014/main" id="{AA9E0A00-A6DF-4D4D-A3CE-960EFF65CDFD}"/>
               </a:ext>
             </a:extLst>
           </p:cNvPr>
@@ -4673,7 +4673,7 @@
           <p:cNvPr id="14" name="recap-circle-2">
             <a:extLst xmlns:a="http://schemas.openxmlformats.org/drawingml/2006/main">
               <a:ext uri="{FF2B5EF4-FFF2-40B4-BE49-F238E27FC236}">
-                <a16:creationId xmlns:a16="http://schemas.microsoft.com/office/drawing/2014/main" id="{3B6024CF-1404-4035-B4FB-63D58D240264}"/>
+                <a16:creationId xmlns:a16="http://schemas.microsoft.com/office/drawing/2014/main" id="{50420A79-A8B6-4FBF-9A2A-885EC0D94096}"/>
               </a:ext>
             </a:extLst>
           </p:cNvPr>
@@ -4706,7 +4706,7 @@
           <p:cNvPr id="15" name="recap-number-2">
             <a:extLst xmlns:a="http://schemas.openxmlformats.org/drawingml/2006/main">
               <a:ext uri="{FF2B5EF4-FFF2-40B4-BE49-F238E27FC236}">
-                <a16:creationId xmlns:a16="http://schemas.microsoft.com/office/drawing/2014/main" id="{9E4E6579-CB07-4FCA-AAF4-9BD53595DDF2}"/>
+                <a16:creationId xmlns:a16="http://schemas.microsoft.com/office/drawing/2014/main" id="{CED39CCB-A08A-4B21-8539-619314FE48BC}"/>
               </a:ext>
             </a:extLst>
           </p:cNvPr>
@@ -4764,7 +4764,7 @@
           <p:cNvPr id="16" name="recap-item-2">
             <a:extLst xmlns:a="http://schemas.openxmlformats.org/drawingml/2006/main">
               <a:ext uri="{FF2B5EF4-FFF2-40B4-BE49-F238E27FC236}">
-                <a16:creationId xmlns:a16="http://schemas.microsoft.com/office/drawing/2014/main" id="{BA0E9650-C7E0-4522-81EE-8938822DD37E}"/>
+                <a16:creationId xmlns:a16="http://schemas.microsoft.com/office/drawing/2014/main" id="{6E4E656F-53D9-4929-955B-27852DBB5BFD}"/>
               </a:ext>
             </a:extLst>
           </p:cNvPr>
@@ -4826,7 +4826,7 @@
     </p:spTree>
     <p:extLst>
       <p:ext uri="{BB962C8B-B14F-4D97-AF65-F5344CB8AC3E}">
-        <p14:creationId xmlns:p14="http://schemas.microsoft.com/office/powerpoint/2010/main" val="544927604"/>
+        <p14:creationId xmlns:p14="http://schemas.microsoft.com/office/powerpoint/2010/main" val="1143346995"/>
       </p:ext>
     </p:extLst>
   </p:cSld>
@@ -4857,7 +4857,7 @@
           <p:cNvPr id="1" name="s13-rule">
             <a:extLst xmlns:a="http://schemas.openxmlformats.org/drawingml/2006/main">
               <a:ext uri="{FF2B5EF4-FFF2-40B4-BE49-F238E27FC236}">
-                <a16:creationId xmlns:a16="http://schemas.microsoft.com/office/drawing/2014/main" id="{CFBC2E11-6E5F-4BB6-AA9F-6689B0B22960}"/>
+                <a16:creationId xmlns:a16="http://schemas.microsoft.com/office/drawing/2014/main" id="{503B6C83-9B97-4767-96D5-3422F5914B0B}"/>
               </a:ext>
             </a:extLst>
           </p:cNvPr>
@@ -4890,7 +4890,7 @@
           <p:cNvPr id="2" name="s13-eyebrow">
             <a:extLst xmlns:a="http://schemas.openxmlformats.org/drawingml/2006/main">
               <a:ext uri="{FF2B5EF4-FFF2-40B4-BE49-F238E27FC236}">
-                <a16:creationId xmlns:a16="http://schemas.microsoft.com/office/drawing/2014/main" id="{07B86FFD-8EA1-4AA9-A4E9-8022D1379240}"/>
+                <a16:creationId xmlns:a16="http://schemas.microsoft.com/office/drawing/2014/main" id="{1A658134-85E1-49B0-9720-2D69B2FEA35C}"/>
               </a:ext>
             </a:extLst>
           </p:cNvPr>
@@ -4948,7 +4948,7 @@
           <p:cNvPr id="3" name="s13-title">
             <a:extLst xmlns:a="http://schemas.openxmlformats.org/drawingml/2006/main">
               <a:ext uri="{FF2B5EF4-FFF2-40B4-BE49-F238E27FC236}">
-                <a16:creationId xmlns:a16="http://schemas.microsoft.com/office/drawing/2014/main" id="{FB917F01-3E1A-4A29-B1FD-4EE87F7EAE89}"/>
+                <a16:creationId xmlns:a16="http://schemas.microsoft.com/office/drawing/2014/main" id="{A6D6BC3B-D95A-452A-A6A9-A9D589892C04}"/>
               </a:ext>
             </a:extLst>
           </p:cNvPr>
@@ -5006,7 +5006,7 @@
           <p:cNvPr id="4" name="s13-footer">
             <a:extLst xmlns:a="http://schemas.openxmlformats.org/drawingml/2006/main">
               <a:ext uri="{FF2B5EF4-FFF2-40B4-BE49-F238E27FC236}">
-                <a16:creationId xmlns:a16="http://schemas.microsoft.com/office/drawing/2014/main" id="{C0D3FF81-416D-4C2F-BA40-73D14758994E}"/>
+                <a16:creationId xmlns:a16="http://schemas.microsoft.com/office/drawing/2014/main" id="{6222B74A-E8C1-44CD-8A3C-61C3756031F8}"/>
               </a:ext>
             </a:extLst>
           </p:cNvPr>
@@ -5037,7 +5037,7 @@
           <p:cNvPr id="5" name="s13-identity">
             <a:extLst xmlns:a="http://schemas.openxmlformats.org/drawingml/2006/main">
               <a:ext uri="{FF2B5EF4-FFF2-40B4-BE49-F238E27FC236}">
-                <a16:creationId xmlns:a16="http://schemas.microsoft.com/office/drawing/2014/main" id="{EAB2B532-DA54-4924-BF92-6676A8BF3A88}"/>
+                <a16:creationId xmlns:a16="http://schemas.microsoft.com/office/drawing/2014/main" id="{E8E42ABF-50EE-40D7-B9F2-B0DEA64E09DE}"/>
               </a:ext>
             </a:extLst>
           </p:cNvPr>
@@ -5095,7 +5095,7 @@
           <p:cNvPr id="6" name="source-0">
             <a:extLst xmlns:a="http://schemas.openxmlformats.org/drawingml/2006/main">
               <a:ext uri="{FF2B5EF4-FFF2-40B4-BE49-F238E27FC236}">
-                <a16:creationId xmlns:a16="http://schemas.microsoft.com/office/drawing/2014/main" id="{CF74470E-B9A1-41B2-A4C9-764814454267}"/>
+                <a16:creationId xmlns:a16="http://schemas.microsoft.com/office/drawing/2014/main" id="{55785F56-7461-4625-B701-AF04967AE0F8}"/>
               </a:ext>
             </a:extLst>
           </p:cNvPr>
@@ -5159,7 +5159,7 @@
           <p:cNvPr id="7" name="source-1">
             <a:extLst xmlns:a="http://schemas.openxmlformats.org/drawingml/2006/main">
               <a:ext uri="{FF2B5EF4-FFF2-40B4-BE49-F238E27FC236}">
-                <a16:creationId xmlns:a16="http://schemas.microsoft.com/office/drawing/2014/main" id="{0D7ACE4B-51A5-4DDD-A729-ABFDD16676BB}"/>
+                <a16:creationId xmlns:a16="http://schemas.microsoft.com/office/drawing/2014/main" id="{2585405F-7B38-458B-ABAA-CA20BA6C2589}"/>
               </a:ext>
             </a:extLst>
           </p:cNvPr>
@@ -5223,7 +5223,7 @@
           <p:cNvPr id="8" name="source-2">
             <a:extLst xmlns:a="http://schemas.openxmlformats.org/drawingml/2006/main">
               <a:ext uri="{FF2B5EF4-FFF2-40B4-BE49-F238E27FC236}">
-                <a16:creationId xmlns:a16="http://schemas.microsoft.com/office/drawing/2014/main" id="{1611E5F9-957F-433B-A00E-DEFB435FEBF3}"/>
+                <a16:creationId xmlns:a16="http://schemas.microsoft.com/office/drawing/2014/main" id="{8DBCE17B-0BBE-42D9-8CCB-E939569A87C5}"/>
               </a:ext>
             </a:extLst>
           </p:cNvPr>
@@ -5287,7 +5287,7 @@
           <p:cNvPr id="9" name="source-3">
             <a:extLst xmlns:a="http://schemas.openxmlformats.org/drawingml/2006/main">
               <a:ext uri="{FF2B5EF4-FFF2-40B4-BE49-F238E27FC236}">
-                <a16:creationId xmlns:a16="http://schemas.microsoft.com/office/drawing/2014/main" id="{E66DC610-5FB2-45C5-B93A-5A7896D851A7}"/>
+                <a16:creationId xmlns:a16="http://schemas.microsoft.com/office/drawing/2014/main" id="{9E69C4DF-F057-46B5-AFBA-392DDC5747F8}"/>
               </a:ext>
             </a:extLst>
           </p:cNvPr>
@@ -5351,7 +5351,7 @@
           <p:cNvPr id="10" name="source-4">
             <a:extLst xmlns:a="http://schemas.openxmlformats.org/drawingml/2006/main">
               <a:ext uri="{FF2B5EF4-FFF2-40B4-BE49-F238E27FC236}">
-                <a16:creationId xmlns:a16="http://schemas.microsoft.com/office/drawing/2014/main" id="{51CD898E-0B53-4A35-B637-0ACF9575EF44}"/>
+                <a16:creationId xmlns:a16="http://schemas.microsoft.com/office/drawing/2014/main" id="{D89B7982-876A-4E24-92BA-33853AFB171A}"/>
               </a:ext>
             </a:extLst>
           </p:cNvPr>
@@ -5415,7 +5415,7 @@
           <p:cNvPr id="11" name="s13-takeaway-rule">
             <a:extLst xmlns:a="http://schemas.openxmlformats.org/drawingml/2006/main">
               <a:ext uri="{FF2B5EF4-FFF2-40B4-BE49-F238E27FC236}">
-                <a16:creationId xmlns:a16="http://schemas.microsoft.com/office/drawing/2014/main" id="{583C81FB-B491-4B6C-8F0D-C11A2836B7FC}"/>
+                <a16:creationId xmlns:a16="http://schemas.microsoft.com/office/drawing/2014/main" id="{073ABB3E-AC70-4465-AF62-A4805BE02137}"/>
               </a:ext>
             </a:extLst>
           </p:cNvPr>
@@ -5448,7 +5448,7 @@
           <p:cNvPr id="12" name="s13-takeaway">
             <a:extLst xmlns:a="http://schemas.openxmlformats.org/drawingml/2006/main">
               <a:ext uri="{FF2B5EF4-FFF2-40B4-BE49-F238E27FC236}">
-                <a16:creationId xmlns:a16="http://schemas.microsoft.com/office/drawing/2014/main" id="{2A733BE8-9AF7-476B-9A61-6CF1D6F11595}"/>
+                <a16:creationId xmlns:a16="http://schemas.microsoft.com/office/drawing/2014/main" id="{9013461C-E3FC-4041-AFD8-4DA9D67F5281}"/>
               </a:ext>
             </a:extLst>
           </p:cNvPr>
@@ -5473,7 +5473,7 @@
         </p:spPr>
         <p:txBody>
           <a:bodyPr xmlns:a="http://schemas.openxmlformats.org/drawingml/2006/main" lIns="0" tIns="0" rIns="0" bIns="0" anchor="ctr">
-            <a:normAutofit fontScale="100000"/>
+            <a:normAutofit fontScale="95911"/>
           </a:bodyPr>
           <a:lstStyle xmlns:a="http://schemas.openxmlformats.org/drawingml/2006/main"/>
           <a:p xmlns:a="http://schemas.openxmlformats.org/drawingml/2006/main">
@@ -5496,7 +5496,7 @@
                 <a:ea typeface="PingFang SC"/>
                 <a:cs typeface="PingFang SC"/>
               </a:rPr>
-              <a:t>公开幻灯片只使用课程原创文字与原生图形；完整论证、链接和事实边界请见本节讲义。</a:t>
+              <a:t>课程精编页用于讲授主线；播放器中的“原课件”模式保留团队 PowerPoint 精选页、真实图片和可播放视频。</a:t>
             </a:r>
           </a:p>
         </p:txBody>
@@ -5504,7 +5504,7 @@
     </p:spTree>
     <p:extLst>
       <p:ext uri="{BB962C8B-B14F-4D97-AF65-F5344CB8AC3E}">
-        <p14:creationId xmlns:p14="http://schemas.microsoft.com/office/powerpoint/2010/main" val="503399291"/>
+        <p14:creationId xmlns:p14="http://schemas.microsoft.com/office/powerpoint/2010/main" val="1595921895"/>
       </p:ext>
     </p:extLst>
   </p:cSld>
@@ -5535,7 +5535,7 @@
           <p:cNvPr id="1" name="s2-rule">
             <a:extLst xmlns:a="http://schemas.openxmlformats.org/drawingml/2006/main">
               <a:ext uri="{FF2B5EF4-FFF2-40B4-BE49-F238E27FC236}">
-                <a16:creationId xmlns:a16="http://schemas.microsoft.com/office/drawing/2014/main" id="{C71620F7-D116-40E7-BF07-D5C9E8F168F0}"/>
+                <a16:creationId xmlns:a16="http://schemas.microsoft.com/office/drawing/2014/main" id="{33B2B9B1-5F80-4435-986B-73011FD53E35}"/>
               </a:ext>
             </a:extLst>
           </p:cNvPr>
@@ -5568,7 +5568,7 @@
           <p:cNvPr id="2" name="s2-eyebrow">
             <a:extLst xmlns:a="http://schemas.openxmlformats.org/drawingml/2006/main">
               <a:ext uri="{FF2B5EF4-FFF2-40B4-BE49-F238E27FC236}">
-                <a16:creationId xmlns:a16="http://schemas.microsoft.com/office/drawing/2014/main" id="{D1E768F0-C5BB-4E51-A75B-AB53E68EC980}"/>
+                <a16:creationId xmlns:a16="http://schemas.microsoft.com/office/drawing/2014/main" id="{50525F11-688E-4134-A7F7-469B3ED38C98}"/>
               </a:ext>
             </a:extLst>
           </p:cNvPr>
@@ -5626,7 +5626,7 @@
           <p:cNvPr id="3" name="s2-title">
             <a:extLst xmlns:a="http://schemas.openxmlformats.org/drawingml/2006/main">
               <a:ext uri="{FF2B5EF4-FFF2-40B4-BE49-F238E27FC236}">
-                <a16:creationId xmlns:a16="http://schemas.microsoft.com/office/drawing/2014/main" id="{8B9FD29F-44C1-4462-95AD-C848FE0BABFA}"/>
+                <a16:creationId xmlns:a16="http://schemas.microsoft.com/office/drawing/2014/main" id="{25725ED0-7D1E-43E3-A928-113745A17D9C}"/>
               </a:ext>
             </a:extLst>
           </p:cNvPr>
@@ -5684,7 +5684,7 @@
           <p:cNvPr id="4" name="s2-footer">
             <a:extLst xmlns:a="http://schemas.openxmlformats.org/drawingml/2006/main">
               <a:ext uri="{FF2B5EF4-FFF2-40B4-BE49-F238E27FC236}">
-                <a16:creationId xmlns:a16="http://schemas.microsoft.com/office/drawing/2014/main" id="{6EF8D4A5-D376-4C3F-910F-D174245CB763}"/>
+                <a16:creationId xmlns:a16="http://schemas.microsoft.com/office/drawing/2014/main" id="{08D265EF-BA25-4D8B-900A-9AF677129B35}"/>
               </a:ext>
             </a:extLst>
           </p:cNvPr>
@@ -5715,7 +5715,7 @@
           <p:cNvPr id="5" name="s2-identity">
             <a:extLst xmlns:a="http://schemas.openxmlformats.org/drawingml/2006/main">
               <a:ext uri="{FF2B5EF4-FFF2-40B4-BE49-F238E27FC236}">
-                <a16:creationId xmlns:a16="http://schemas.microsoft.com/office/drawing/2014/main" id="{F6F02735-2132-47DA-9298-906F9120338B}"/>
+                <a16:creationId xmlns:a16="http://schemas.microsoft.com/office/drawing/2014/main" id="{97E5D72E-C44F-417A-A667-56B44EE9E21D}"/>
               </a:ext>
             </a:extLst>
           </p:cNvPr>
@@ -5773,7 +5773,7 @@
           <p:cNvPr id="6" name="objective-1">
             <a:extLst xmlns:a="http://schemas.openxmlformats.org/drawingml/2006/main">
               <a:ext uri="{FF2B5EF4-FFF2-40B4-BE49-F238E27FC236}">
-                <a16:creationId xmlns:a16="http://schemas.microsoft.com/office/drawing/2014/main" id="{C6D7142A-1273-49E0-A5E2-E8BC418B6A87}"/>
+                <a16:creationId xmlns:a16="http://schemas.microsoft.com/office/drawing/2014/main" id="{487A6B95-EE64-40CD-A4AA-85B0C7982195}"/>
               </a:ext>
             </a:extLst>
           </p:cNvPr>
@@ -5860,7 +5860,7 @@
           <p:cNvPr id="7" name="objective-2">
             <a:extLst xmlns:a="http://schemas.openxmlformats.org/drawingml/2006/main">
               <a:ext uri="{FF2B5EF4-FFF2-40B4-BE49-F238E27FC236}">
-                <a16:creationId xmlns:a16="http://schemas.microsoft.com/office/drawing/2014/main" id="{58BD1076-8D3B-468C-823A-FBF6787E4C46}"/>
+                <a16:creationId xmlns:a16="http://schemas.microsoft.com/office/drawing/2014/main" id="{EB09EAB9-ED64-46FB-AB04-9A59BA0265B5}"/>
               </a:ext>
             </a:extLst>
           </p:cNvPr>
@@ -5945,7 +5945,7 @@
     </p:spTree>
     <p:extLst>
       <p:ext uri="{BB962C8B-B14F-4D97-AF65-F5344CB8AC3E}">
-        <p14:creationId xmlns:p14="http://schemas.microsoft.com/office/powerpoint/2010/main" val="1692032366"/>
+        <p14:creationId xmlns:p14="http://schemas.microsoft.com/office/powerpoint/2010/main" val="1201912448"/>
       </p:ext>
     </p:extLst>
   </p:cSld>
@@ -5976,7 +5976,7 @@
           <p:cNvPr id="1" name="s3-rule">
             <a:extLst xmlns:a="http://schemas.openxmlformats.org/drawingml/2006/main">
               <a:ext uri="{FF2B5EF4-FFF2-40B4-BE49-F238E27FC236}">
-                <a16:creationId xmlns:a16="http://schemas.microsoft.com/office/drawing/2014/main" id="{6D132C59-2AF4-4CFB-99AB-F4AEC3996244}"/>
+                <a16:creationId xmlns:a16="http://schemas.microsoft.com/office/drawing/2014/main" id="{C8A35ED2-B386-403F-B7EF-97D9AF9F355D}"/>
               </a:ext>
             </a:extLst>
           </p:cNvPr>
@@ -6009,7 +6009,7 @@
           <p:cNvPr id="2" name="s3-eyebrow">
             <a:extLst xmlns:a="http://schemas.openxmlformats.org/drawingml/2006/main">
               <a:ext uri="{FF2B5EF4-FFF2-40B4-BE49-F238E27FC236}">
-                <a16:creationId xmlns:a16="http://schemas.microsoft.com/office/drawing/2014/main" id="{F2DC51A6-54E3-4ABA-B951-0C1554B62504}"/>
+                <a16:creationId xmlns:a16="http://schemas.microsoft.com/office/drawing/2014/main" id="{3198FE86-DB1B-4212-869D-3B7822AF6ABD}"/>
               </a:ext>
             </a:extLst>
           </p:cNvPr>
@@ -6067,7 +6067,7 @@
           <p:cNvPr id="3" name="s3-title">
             <a:extLst xmlns:a="http://schemas.openxmlformats.org/drawingml/2006/main">
               <a:ext uri="{FF2B5EF4-FFF2-40B4-BE49-F238E27FC236}">
-                <a16:creationId xmlns:a16="http://schemas.microsoft.com/office/drawing/2014/main" id="{F8747FBB-FFED-47C3-B289-874D1D81A71A}"/>
+                <a16:creationId xmlns:a16="http://schemas.microsoft.com/office/drawing/2014/main" id="{1C690E27-B79E-4EFC-8D1E-B40451C5C5E2}"/>
               </a:ext>
             </a:extLst>
           </p:cNvPr>
@@ -6125,7 +6125,7 @@
           <p:cNvPr id="4" name="s3-footer">
             <a:extLst xmlns:a="http://schemas.openxmlformats.org/drawingml/2006/main">
               <a:ext uri="{FF2B5EF4-FFF2-40B4-BE49-F238E27FC236}">
-                <a16:creationId xmlns:a16="http://schemas.microsoft.com/office/drawing/2014/main" id="{89C8891E-5294-43D8-B9A1-F1C1C1279DD5}"/>
+                <a16:creationId xmlns:a16="http://schemas.microsoft.com/office/drawing/2014/main" id="{035EEC2F-1BBC-4E30-B57E-2316F44CE1BF}"/>
               </a:ext>
             </a:extLst>
           </p:cNvPr>
@@ -6156,7 +6156,7 @@
           <p:cNvPr id="5" name="s3-identity">
             <a:extLst xmlns:a="http://schemas.openxmlformats.org/drawingml/2006/main">
               <a:ext uri="{FF2B5EF4-FFF2-40B4-BE49-F238E27FC236}">
-                <a16:creationId xmlns:a16="http://schemas.microsoft.com/office/drawing/2014/main" id="{08DAEC1A-DD2A-4243-8B2A-199DF18752BB}"/>
+                <a16:creationId xmlns:a16="http://schemas.microsoft.com/office/drawing/2014/main" id="{B1D075BE-15C8-4B01-B0E2-B214AEE994D4}"/>
               </a:ext>
             </a:extLst>
           </p:cNvPr>
@@ -6214,7 +6214,7 @@
           <p:cNvPr id="6" name="core-no-0">
             <a:extLst xmlns:a="http://schemas.openxmlformats.org/drawingml/2006/main">
               <a:ext uri="{FF2B5EF4-FFF2-40B4-BE49-F238E27FC236}">
-                <a16:creationId xmlns:a16="http://schemas.microsoft.com/office/drawing/2014/main" id="{5E14DB1B-A080-4C03-8AA7-8AB14A0DE3EB}"/>
+                <a16:creationId xmlns:a16="http://schemas.microsoft.com/office/drawing/2014/main" id="{857A9804-29C1-44E1-9D7C-CBCE6F547EC9}"/>
               </a:ext>
             </a:extLst>
           </p:cNvPr>
@@ -6272,7 +6272,7 @@
           <p:cNvPr id="7" name="core-label-0">
             <a:extLst xmlns:a="http://schemas.openxmlformats.org/drawingml/2006/main">
               <a:ext uri="{FF2B5EF4-FFF2-40B4-BE49-F238E27FC236}">
-                <a16:creationId xmlns:a16="http://schemas.microsoft.com/office/drawing/2014/main" id="{3BFE4ADE-C9A0-427C-B4B3-9C302123B951}"/>
+                <a16:creationId xmlns:a16="http://schemas.microsoft.com/office/drawing/2014/main" id="{161E4565-10E8-48DA-93CF-86A4C05B4AF1}"/>
               </a:ext>
             </a:extLst>
           </p:cNvPr>
@@ -6330,7 +6330,7 @@
           <p:cNvPr id="8" name="core-body-0">
             <a:extLst xmlns:a="http://schemas.openxmlformats.org/drawingml/2006/main">
               <a:ext uri="{FF2B5EF4-FFF2-40B4-BE49-F238E27FC236}">
-                <a16:creationId xmlns:a16="http://schemas.microsoft.com/office/drawing/2014/main" id="{8B84DCBE-DEDA-4174-8265-15F769F4FA58}"/>
+                <a16:creationId xmlns:a16="http://schemas.microsoft.com/office/drawing/2014/main" id="{2EC52A17-5F22-4821-930E-583F2CC47816}"/>
               </a:ext>
             </a:extLst>
           </p:cNvPr>
@@ -6394,7 +6394,7 @@
           <p:cNvPr id="9" name="core-no-1">
             <a:extLst xmlns:a="http://schemas.openxmlformats.org/drawingml/2006/main">
               <a:ext uri="{FF2B5EF4-FFF2-40B4-BE49-F238E27FC236}">
-                <a16:creationId xmlns:a16="http://schemas.microsoft.com/office/drawing/2014/main" id="{129DB66D-412E-42F8-A6F9-CB70B313A662}"/>
+                <a16:creationId xmlns:a16="http://schemas.microsoft.com/office/drawing/2014/main" id="{8043B35E-D9E1-46AB-8DD6-DBEF46BB4E9C}"/>
               </a:ext>
             </a:extLst>
           </p:cNvPr>
@@ -6452,7 +6452,7 @@
           <p:cNvPr id="10" name="core-label-1">
             <a:extLst xmlns:a="http://schemas.openxmlformats.org/drawingml/2006/main">
               <a:ext uri="{FF2B5EF4-FFF2-40B4-BE49-F238E27FC236}">
-                <a16:creationId xmlns:a16="http://schemas.microsoft.com/office/drawing/2014/main" id="{4BDAF42B-DD4F-4EA8-868F-B383604C74A8}"/>
+                <a16:creationId xmlns:a16="http://schemas.microsoft.com/office/drawing/2014/main" id="{442C5706-0A20-4344-8E64-34C4BFDF4D3E}"/>
               </a:ext>
             </a:extLst>
           </p:cNvPr>
@@ -6510,7 +6510,7 @@
           <p:cNvPr id="11" name="core-body-1">
             <a:extLst xmlns:a="http://schemas.openxmlformats.org/drawingml/2006/main">
               <a:ext uri="{FF2B5EF4-FFF2-40B4-BE49-F238E27FC236}">
-                <a16:creationId xmlns:a16="http://schemas.microsoft.com/office/drawing/2014/main" id="{7BEA9D1B-D3A4-4CA2-81FC-F2065BA6FE41}"/>
+                <a16:creationId xmlns:a16="http://schemas.microsoft.com/office/drawing/2014/main" id="{27590291-B717-49DF-9DA1-F8912C92B118}"/>
               </a:ext>
             </a:extLst>
           </p:cNvPr>
@@ -6574,7 +6574,7 @@
           <p:cNvPr id="12" name="s3-takeaway-rule">
             <a:extLst xmlns:a="http://schemas.openxmlformats.org/drawingml/2006/main">
               <a:ext uri="{FF2B5EF4-FFF2-40B4-BE49-F238E27FC236}">
-                <a16:creationId xmlns:a16="http://schemas.microsoft.com/office/drawing/2014/main" id="{E81499DC-2AD0-4D29-8C73-8C03584EB693}"/>
+                <a16:creationId xmlns:a16="http://schemas.microsoft.com/office/drawing/2014/main" id="{3057DF4A-0704-47AA-877C-60CAF4821009}"/>
               </a:ext>
             </a:extLst>
           </p:cNvPr>
@@ -6607,7 +6607,7 @@
           <p:cNvPr id="13" name="s3-takeaway">
             <a:extLst xmlns:a="http://schemas.openxmlformats.org/drawingml/2006/main">
               <a:ext uri="{FF2B5EF4-FFF2-40B4-BE49-F238E27FC236}">
-                <a16:creationId xmlns:a16="http://schemas.microsoft.com/office/drawing/2014/main" id="{111E30AF-A111-4379-AB2E-ADF03772012A}"/>
+                <a16:creationId xmlns:a16="http://schemas.microsoft.com/office/drawing/2014/main" id="{E64306B5-96E9-4327-A7BB-4F3F8F297A41}"/>
               </a:ext>
             </a:extLst>
           </p:cNvPr>
@@ -6663,7 +6663,7 @@
     </p:spTree>
     <p:extLst>
       <p:ext uri="{BB962C8B-B14F-4D97-AF65-F5344CB8AC3E}">
-        <p14:creationId xmlns:p14="http://schemas.microsoft.com/office/powerpoint/2010/main" val="1997975032"/>
+        <p14:creationId xmlns:p14="http://schemas.microsoft.com/office/powerpoint/2010/main" val="1355289348"/>
       </p:ext>
     </p:extLst>
   </p:cSld>
@@ -6694,7 +6694,7 @@
           <p:cNvPr id="1" name="s4-rule">
             <a:extLst xmlns:a="http://schemas.openxmlformats.org/drawingml/2006/main">
               <a:ext uri="{FF2B5EF4-FFF2-40B4-BE49-F238E27FC236}">
-                <a16:creationId xmlns:a16="http://schemas.microsoft.com/office/drawing/2014/main" id="{831BF8D9-C097-4DAF-AF40-9AFB881D055D}"/>
+                <a16:creationId xmlns:a16="http://schemas.microsoft.com/office/drawing/2014/main" id="{22E6439C-F791-4B50-BF80-22EB818E75FE}"/>
               </a:ext>
             </a:extLst>
           </p:cNvPr>
@@ -6727,7 +6727,7 @@
           <p:cNvPr id="2" name="s4-eyebrow">
             <a:extLst xmlns:a="http://schemas.openxmlformats.org/drawingml/2006/main">
               <a:ext uri="{FF2B5EF4-FFF2-40B4-BE49-F238E27FC236}">
-                <a16:creationId xmlns:a16="http://schemas.microsoft.com/office/drawing/2014/main" id="{4B0E3106-6956-4FFD-95B7-A16AD8865A24}"/>
+                <a16:creationId xmlns:a16="http://schemas.microsoft.com/office/drawing/2014/main" id="{7A35C7E7-C6A9-4D9A-AB73-B9AF587B1DDF}"/>
               </a:ext>
             </a:extLst>
           </p:cNvPr>
@@ -6785,7 +6785,7 @@
           <p:cNvPr id="3" name="s4-title">
             <a:extLst xmlns:a="http://schemas.openxmlformats.org/drawingml/2006/main">
               <a:ext uri="{FF2B5EF4-FFF2-40B4-BE49-F238E27FC236}">
-                <a16:creationId xmlns:a16="http://schemas.microsoft.com/office/drawing/2014/main" id="{20A75675-DAB6-45DA-8D0F-D1C26938A634}"/>
+                <a16:creationId xmlns:a16="http://schemas.microsoft.com/office/drawing/2014/main" id="{0CB398BB-694C-478C-AC31-B22CE1B785D0}"/>
               </a:ext>
             </a:extLst>
           </p:cNvPr>
@@ -6843,7 +6843,7 @@
           <p:cNvPr id="4" name="s4-footer">
             <a:extLst xmlns:a="http://schemas.openxmlformats.org/drawingml/2006/main">
               <a:ext uri="{FF2B5EF4-FFF2-40B4-BE49-F238E27FC236}">
-                <a16:creationId xmlns:a16="http://schemas.microsoft.com/office/drawing/2014/main" id="{A0DD5D0D-9C38-4838-8975-74094DA103C3}"/>
+                <a16:creationId xmlns:a16="http://schemas.microsoft.com/office/drawing/2014/main" id="{7E559B8F-CA9A-4094-B6D6-1C9819B4FA93}"/>
               </a:ext>
             </a:extLst>
           </p:cNvPr>
@@ -6874,7 +6874,7 @@
           <p:cNvPr id="5" name="s4-identity">
             <a:extLst xmlns:a="http://schemas.openxmlformats.org/drawingml/2006/main">
               <a:ext uri="{FF2B5EF4-FFF2-40B4-BE49-F238E27FC236}">
-                <a16:creationId xmlns:a16="http://schemas.microsoft.com/office/drawing/2014/main" id="{B89BB7F8-3DDA-4B88-999F-0EBEE8827680}"/>
+                <a16:creationId xmlns:a16="http://schemas.microsoft.com/office/drawing/2014/main" id="{D3CCD112-866D-4190-AAE1-7D0742C1FE91}"/>
               </a:ext>
             </a:extLst>
           </p:cNvPr>
@@ -6932,7 +6932,7 @@
           <p:cNvPr id="6" name="core-no-0">
             <a:extLst xmlns:a="http://schemas.openxmlformats.org/drawingml/2006/main">
               <a:ext uri="{FF2B5EF4-FFF2-40B4-BE49-F238E27FC236}">
-                <a16:creationId xmlns:a16="http://schemas.microsoft.com/office/drawing/2014/main" id="{A879A25F-8C79-4111-9ECC-42F9A3C61C08}"/>
+                <a16:creationId xmlns:a16="http://schemas.microsoft.com/office/drawing/2014/main" id="{028FD5E5-3DD7-46EC-9D79-D7A9035A1A0D}"/>
               </a:ext>
             </a:extLst>
           </p:cNvPr>
@@ -6990,7 +6990,7 @@
           <p:cNvPr id="7" name="core-label-0">
             <a:extLst xmlns:a="http://schemas.openxmlformats.org/drawingml/2006/main">
               <a:ext uri="{FF2B5EF4-FFF2-40B4-BE49-F238E27FC236}">
-                <a16:creationId xmlns:a16="http://schemas.microsoft.com/office/drawing/2014/main" id="{46EE789C-0353-4AC8-B619-8C669AB7EBF6}"/>
+                <a16:creationId xmlns:a16="http://schemas.microsoft.com/office/drawing/2014/main" id="{24D844D7-8450-4E80-8A71-C65F81A19343}"/>
               </a:ext>
             </a:extLst>
           </p:cNvPr>
@@ -7048,7 +7048,7 @@
           <p:cNvPr id="8" name="core-body-0">
             <a:extLst xmlns:a="http://schemas.openxmlformats.org/drawingml/2006/main">
               <a:ext uri="{FF2B5EF4-FFF2-40B4-BE49-F238E27FC236}">
-                <a16:creationId xmlns:a16="http://schemas.microsoft.com/office/drawing/2014/main" id="{976B8256-0BFB-4406-91B0-07290C8CE6BF}"/>
+                <a16:creationId xmlns:a16="http://schemas.microsoft.com/office/drawing/2014/main" id="{836CBF5A-F470-4948-A7B8-1CAAC8CAF3F3}"/>
               </a:ext>
             </a:extLst>
           </p:cNvPr>
@@ -7112,7 +7112,7 @@
           <p:cNvPr id="9" name="core-no-1">
             <a:extLst xmlns:a="http://schemas.openxmlformats.org/drawingml/2006/main">
               <a:ext uri="{FF2B5EF4-FFF2-40B4-BE49-F238E27FC236}">
-                <a16:creationId xmlns:a16="http://schemas.microsoft.com/office/drawing/2014/main" id="{32DCAB49-4F16-429F-AF62-9EA4DF02E30B}"/>
+                <a16:creationId xmlns:a16="http://schemas.microsoft.com/office/drawing/2014/main" id="{D88C3A6D-6B2A-434F-92CB-856595CE1435}"/>
               </a:ext>
             </a:extLst>
           </p:cNvPr>
@@ -7170,7 +7170,7 @@
           <p:cNvPr id="10" name="core-body-1">
             <a:extLst xmlns:a="http://schemas.openxmlformats.org/drawingml/2006/main">
               <a:ext uri="{FF2B5EF4-FFF2-40B4-BE49-F238E27FC236}">
-                <a16:creationId xmlns:a16="http://schemas.microsoft.com/office/drawing/2014/main" id="{27857B11-0F49-4EBA-A0B4-4E3D4E6109D7}"/>
+                <a16:creationId xmlns:a16="http://schemas.microsoft.com/office/drawing/2014/main" id="{DA810D81-6867-4831-AE5B-28D463478E86}"/>
               </a:ext>
             </a:extLst>
           </p:cNvPr>
@@ -7234,7 +7234,7 @@
           <p:cNvPr id="11" name="s4-takeaway-rule">
             <a:extLst xmlns:a="http://schemas.openxmlformats.org/drawingml/2006/main">
               <a:ext uri="{FF2B5EF4-FFF2-40B4-BE49-F238E27FC236}">
-                <a16:creationId xmlns:a16="http://schemas.microsoft.com/office/drawing/2014/main" id="{91F46F2D-28AE-4604-90C9-5138AB2A2508}"/>
+                <a16:creationId xmlns:a16="http://schemas.microsoft.com/office/drawing/2014/main" id="{DF02030E-D098-485E-A11C-7E0F46440635}"/>
               </a:ext>
             </a:extLst>
           </p:cNvPr>
@@ -7267,7 +7267,7 @@
           <p:cNvPr id="12" name="s4-takeaway">
             <a:extLst xmlns:a="http://schemas.openxmlformats.org/drawingml/2006/main">
               <a:ext uri="{FF2B5EF4-FFF2-40B4-BE49-F238E27FC236}">
-                <a16:creationId xmlns:a16="http://schemas.microsoft.com/office/drawing/2014/main" id="{26A32DD3-F7C0-433F-8C34-8215C5C6B957}"/>
+                <a16:creationId xmlns:a16="http://schemas.microsoft.com/office/drawing/2014/main" id="{5DCA240B-98CC-4388-B155-B0A80F2C2B20}"/>
               </a:ext>
             </a:extLst>
           </p:cNvPr>
@@ -7323,7 +7323,7 @@
     </p:spTree>
     <p:extLst>
       <p:ext uri="{BB962C8B-B14F-4D97-AF65-F5344CB8AC3E}">
-        <p14:creationId xmlns:p14="http://schemas.microsoft.com/office/powerpoint/2010/main" val="1610243722"/>
+        <p14:creationId xmlns:p14="http://schemas.microsoft.com/office/powerpoint/2010/main" val="1895037870"/>
       </p:ext>
     </p:extLst>
   </p:cSld>
@@ -7354,7 +7354,7 @@
           <p:cNvPr id="1" name="s5-rule">
             <a:extLst xmlns:a="http://schemas.openxmlformats.org/drawingml/2006/main">
               <a:ext uri="{FF2B5EF4-FFF2-40B4-BE49-F238E27FC236}">
-                <a16:creationId xmlns:a16="http://schemas.microsoft.com/office/drawing/2014/main" id="{87CC0B38-CB38-47A4-A1CA-538FD011155E}"/>
+                <a16:creationId xmlns:a16="http://schemas.microsoft.com/office/drawing/2014/main" id="{63A19BA5-3E7B-4865-9DD5-E9EE977FF2D8}"/>
               </a:ext>
             </a:extLst>
           </p:cNvPr>
@@ -7387,7 +7387,7 @@
           <p:cNvPr id="2" name="s5-eyebrow">
             <a:extLst xmlns:a="http://schemas.openxmlformats.org/drawingml/2006/main">
               <a:ext uri="{FF2B5EF4-FFF2-40B4-BE49-F238E27FC236}">
-                <a16:creationId xmlns:a16="http://schemas.microsoft.com/office/drawing/2014/main" id="{AB052226-B13B-447D-9C1A-24F46A5146D2}"/>
+                <a16:creationId xmlns:a16="http://schemas.microsoft.com/office/drawing/2014/main" id="{F49B9169-9BFF-41A0-A2EB-49D837C46940}"/>
               </a:ext>
             </a:extLst>
           </p:cNvPr>
@@ -7445,7 +7445,7 @@
           <p:cNvPr id="3" name="s5-title">
             <a:extLst xmlns:a="http://schemas.openxmlformats.org/drawingml/2006/main">
               <a:ext uri="{FF2B5EF4-FFF2-40B4-BE49-F238E27FC236}">
-                <a16:creationId xmlns:a16="http://schemas.microsoft.com/office/drawing/2014/main" id="{C1FAC138-531C-444E-9690-6AFB5BA6FCBA}"/>
+                <a16:creationId xmlns:a16="http://schemas.microsoft.com/office/drawing/2014/main" id="{C4CD2FC1-FFD3-4C5D-899B-B9CA6A171291}"/>
               </a:ext>
             </a:extLst>
           </p:cNvPr>
@@ -7503,7 +7503,7 @@
           <p:cNvPr id="4" name="s5-footer">
             <a:extLst xmlns:a="http://schemas.openxmlformats.org/drawingml/2006/main">
               <a:ext uri="{FF2B5EF4-FFF2-40B4-BE49-F238E27FC236}">
-                <a16:creationId xmlns:a16="http://schemas.microsoft.com/office/drawing/2014/main" id="{C756B65B-77CD-4A34-8E2E-FE9D8DF4AE17}"/>
+                <a16:creationId xmlns:a16="http://schemas.microsoft.com/office/drawing/2014/main" id="{C72EE195-94B5-4E53-BC55-5C0E5DB51C3F}"/>
               </a:ext>
             </a:extLst>
           </p:cNvPr>
@@ -7534,7 +7534,7 @@
           <p:cNvPr id="5" name="s5-identity">
             <a:extLst xmlns:a="http://schemas.openxmlformats.org/drawingml/2006/main">
               <a:ext uri="{FF2B5EF4-FFF2-40B4-BE49-F238E27FC236}">
-                <a16:creationId xmlns:a16="http://schemas.microsoft.com/office/drawing/2014/main" id="{9B542973-640A-4820-BF4C-6B8D889CA804}"/>
+                <a16:creationId xmlns:a16="http://schemas.microsoft.com/office/drawing/2014/main" id="{DB912E61-B793-4213-8056-F448018951A0}"/>
               </a:ext>
             </a:extLst>
           </p:cNvPr>
@@ -7592,7 +7592,7 @@
           <p:cNvPr id="6" name="core-no-0">
             <a:extLst xmlns:a="http://schemas.openxmlformats.org/drawingml/2006/main">
               <a:ext uri="{FF2B5EF4-FFF2-40B4-BE49-F238E27FC236}">
-                <a16:creationId xmlns:a16="http://schemas.microsoft.com/office/drawing/2014/main" id="{0BC8D6A1-A737-46A5-89BC-60C3A0AFB726}"/>
+                <a16:creationId xmlns:a16="http://schemas.microsoft.com/office/drawing/2014/main" id="{8B3B1822-8C30-44DF-9E87-CF19DEB4D385}"/>
               </a:ext>
             </a:extLst>
           </p:cNvPr>
@@ -7650,7 +7650,7 @@
           <p:cNvPr id="7" name="core-label-0">
             <a:extLst xmlns:a="http://schemas.openxmlformats.org/drawingml/2006/main">
               <a:ext uri="{FF2B5EF4-FFF2-40B4-BE49-F238E27FC236}">
-                <a16:creationId xmlns:a16="http://schemas.microsoft.com/office/drawing/2014/main" id="{7C1781B2-67F2-4A25-9277-3DD57F58AD7C}"/>
+                <a16:creationId xmlns:a16="http://schemas.microsoft.com/office/drawing/2014/main" id="{F4A9082A-F118-494C-A5EC-BC74AA465000}"/>
               </a:ext>
             </a:extLst>
           </p:cNvPr>
@@ -7708,7 +7708,7 @@
           <p:cNvPr id="8" name="core-body-0">
             <a:extLst xmlns:a="http://schemas.openxmlformats.org/drawingml/2006/main">
               <a:ext uri="{FF2B5EF4-FFF2-40B4-BE49-F238E27FC236}">
-                <a16:creationId xmlns:a16="http://schemas.microsoft.com/office/drawing/2014/main" id="{77A799DF-6307-41C8-A8B3-269F38936C7C}"/>
+                <a16:creationId xmlns:a16="http://schemas.microsoft.com/office/drawing/2014/main" id="{43C233C3-1562-406F-AB43-9CD4CB61D4E1}"/>
               </a:ext>
             </a:extLst>
           </p:cNvPr>
@@ -7772,7 +7772,7 @@
           <p:cNvPr id="9" name="core-no-1">
             <a:extLst xmlns:a="http://schemas.openxmlformats.org/drawingml/2006/main">
               <a:ext uri="{FF2B5EF4-FFF2-40B4-BE49-F238E27FC236}">
-                <a16:creationId xmlns:a16="http://schemas.microsoft.com/office/drawing/2014/main" id="{B26E3611-984D-4303-AE3D-6C6700988112}"/>
+                <a16:creationId xmlns:a16="http://schemas.microsoft.com/office/drawing/2014/main" id="{DFAAFCA4-FC04-430B-B5B9-56E610974CB2}"/>
               </a:ext>
             </a:extLst>
           </p:cNvPr>
@@ -7830,7 +7830,7 @@
           <p:cNvPr id="10" name="core-body-1">
             <a:extLst xmlns:a="http://schemas.openxmlformats.org/drawingml/2006/main">
               <a:ext uri="{FF2B5EF4-FFF2-40B4-BE49-F238E27FC236}">
-                <a16:creationId xmlns:a16="http://schemas.microsoft.com/office/drawing/2014/main" id="{9153E2F0-7AB5-463B-849C-85F51BFBE2AC}"/>
+                <a16:creationId xmlns:a16="http://schemas.microsoft.com/office/drawing/2014/main" id="{4B0E854B-5D2C-4CEA-ABCC-D654F7DEFCC8}"/>
               </a:ext>
             </a:extLst>
           </p:cNvPr>
@@ -7894,7 +7894,7 @@
           <p:cNvPr id="11" name="core-no-2">
             <a:extLst xmlns:a="http://schemas.openxmlformats.org/drawingml/2006/main">
               <a:ext uri="{FF2B5EF4-FFF2-40B4-BE49-F238E27FC236}">
-                <a16:creationId xmlns:a16="http://schemas.microsoft.com/office/drawing/2014/main" id="{EDD41996-8A0B-46B5-970F-CA8922567BEE}"/>
+                <a16:creationId xmlns:a16="http://schemas.microsoft.com/office/drawing/2014/main" id="{BBBBDBC6-29A9-4825-89BF-B1F8E8394ECD}"/>
               </a:ext>
             </a:extLst>
           </p:cNvPr>
@@ -7952,7 +7952,7 @@
           <p:cNvPr id="12" name="core-body-2">
             <a:extLst xmlns:a="http://schemas.openxmlformats.org/drawingml/2006/main">
               <a:ext uri="{FF2B5EF4-FFF2-40B4-BE49-F238E27FC236}">
-                <a16:creationId xmlns:a16="http://schemas.microsoft.com/office/drawing/2014/main" id="{8C510C75-7645-4496-BDF6-B44C3ED8E331}"/>
+                <a16:creationId xmlns:a16="http://schemas.microsoft.com/office/drawing/2014/main" id="{B93ADA19-4DB0-4010-AEF2-64A131DD7D88}"/>
               </a:ext>
             </a:extLst>
           </p:cNvPr>
@@ -8016,7 +8016,7 @@
           <p:cNvPr id="13" name="s5-takeaway-rule">
             <a:extLst xmlns:a="http://schemas.openxmlformats.org/drawingml/2006/main">
               <a:ext uri="{FF2B5EF4-FFF2-40B4-BE49-F238E27FC236}">
-                <a16:creationId xmlns:a16="http://schemas.microsoft.com/office/drawing/2014/main" id="{62B23D94-C50A-4FFC-820F-1EBCD9C0F935}"/>
+                <a16:creationId xmlns:a16="http://schemas.microsoft.com/office/drawing/2014/main" id="{1804B714-D1DB-4761-A773-D8B2A7DE8C8D}"/>
               </a:ext>
             </a:extLst>
           </p:cNvPr>
@@ -8049,7 +8049,7 @@
           <p:cNvPr id="14" name="s5-takeaway">
             <a:extLst xmlns:a="http://schemas.openxmlformats.org/drawingml/2006/main">
               <a:ext uri="{FF2B5EF4-FFF2-40B4-BE49-F238E27FC236}">
-                <a16:creationId xmlns:a16="http://schemas.microsoft.com/office/drawing/2014/main" id="{F3C6C005-A461-4AC2-838C-F590BDE15D72}"/>
+                <a16:creationId xmlns:a16="http://schemas.microsoft.com/office/drawing/2014/main" id="{F2B96DE7-BD86-4F24-A8F3-CE4D49963E5A}"/>
               </a:ext>
             </a:extLst>
           </p:cNvPr>
@@ -8105,7 +8105,7 @@
     </p:spTree>
     <p:extLst>
       <p:ext uri="{BB962C8B-B14F-4D97-AF65-F5344CB8AC3E}">
-        <p14:creationId xmlns:p14="http://schemas.microsoft.com/office/powerpoint/2010/main" val="1246327484"/>
+        <p14:creationId xmlns:p14="http://schemas.microsoft.com/office/powerpoint/2010/main" val="2106906680"/>
       </p:ext>
     </p:extLst>
   </p:cSld>
@@ -8136,7 +8136,7 @@
           <p:cNvPr id="1" name="s6-rule">
             <a:extLst xmlns:a="http://schemas.openxmlformats.org/drawingml/2006/main">
               <a:ext uri="{FF2B5EF4-FFF2-40B4-BE49-F238E27FC236}">
-                <a16:creationId xmlns:a16="http://schemas.microsoft.com/office/drawing/2014/main" id="{60C7EE28-5152-4E59-9992-F7ED475291D2}"/>
+                <a16:creationId xmlns:a16="http://schemas.microsoft.com/office/drawing/2014/main" id="{42639657-D6B9-4AB9-9362-37D69C50F883}"/>
               </a:ext>
             </a:extLst>
           </p:cNvPr>
@@ -8169,7 +8169,7 @@
           <p:cNvPr id="2" name="s6-eyebrow">
             <a:extLst xmlns:a="http://schemas.openxmlformats.org/drawingml/2006/main">
               <a:ext uri="{FF2B5EF4-FFF2-40B4-BE49-F238E27FC236}">
-                <a16:creationId xmlns:a16="http://schemas.microsoft.com/office/drawing/2014/main" id="{E851DCDE-2D77-4A05-B70A-D943E9EAF16C}"/>
+                <a16:creationId xmlns:a16="http://schemas.microsoft.com/office/drawing/2014/main" id="{E7006497-BBC5-4CC1-9FCC-E903F6754D8B}"/>
               </a:ext>
             </a:extLst>
           </p:cNvPr>
@@ -8227,7 +8227,7 @@
           <p:cNvPr id="3" name="s6-title">
             <a:extLst xmlns:a="http://schemas.openxmlformats.org/drawingml/2006/main">
               <a:ext uri="{FF2B5EF4-FFF2-40B4-BE49-F238E27FC236}">
-                <a16:creationId xmlns:a16="http://schemas.microsoft.com/office/drawing/2014/main" id="{B2EC865C-BC50-47D7-A4B2-0779ED5937DC}"/>
+                <a16:creationId xmlns:a16="http://schemas.microsoft.com/office/drawing/2014/main" id="{184A8089-86B6-4222-A573-8B3BB918D8EE}"/>
               </a:ext>
             </a:extLst>
           </p:cNvPr>
@@ -8285,7 +8285,7 @@
           <p:cNvPr id="4" name="s6-footer">
             <a:extLst xmlns:a="http://schemas.openxmlformats.org/drawingml/2006/main">
               <a:ext uri="{FF2B5EF4-FFF2-40B4-BE49-F238E27FC236}">
-                <a16:creationId xmlns:a16="http://schemas.microsoft.com/office/drawing/2014/main" id="{168542D8-91F1-4CB9-875D-EE7205711716}"/>
+                <a16:creationId xmlns:a16="http://schemas.microsoft.com/office/drawing/2014/main" id="{C4F8E686-9AC0-4D9C-811B-92718FD665FB}"/>
               </a:ext>
             </a:extLst>
           </p:cNvPr>
@@ -8316,7 +8316,7 @@
           <p:cNvPr id="5" name="s6-identity">
             <a:extLst xmlns:a="http://schemas.openxmlformats.org/drawingml/2006/main">
               <a:ext uri="{FF2B5EF4-FFF2-40B4-BE49-F238E27FC236}">
-                <a16:creationId xmlns:a16="http://schemas.microsoft.com/office/drawing/2014/main" id="{1B12A9C7-93E3-4FD4-B4DA-00FED781B367}"/>
+                <a16:creationId xmlns:a16="http://schemas.microsoft.com/office/drawing/2014/main" id="{74CF14BA-1BF6-433A-BE89-CDBBAAF5977E}"/>
               </a:ext>
             </a:extLst>
           </p:cNvPr>
@@ -8374,7 +8374,7 @@
           <p:cNvPr id="6" name="core-no-0">
             <a:extLst xmlns:a="http://schemas.openxmlformats.org/drawingml/2006/main">
               <a:ext uri="{FF2B5EF4-FFF2-40B4-BE49-F238E27FC236}">
-                <a16:creationId xmlns:a16="http://schemas.microsoft.com/office/drawing/2014/main" id="{C6A8C68D-5887-4657-833E-6F2F7535EC4A}"/>
+                <a16:creationId xmlns:a16="http://schemas.microsoft.com/office/drawing/2014/main" id="{8FA58152-C797-46A8-B780-D371B6406256}"/>
               </a:ext>
             </a:extLst>
           </p:cNvPr>
@@ -8432,7 +8432,7 @@
           <p:cNvPr id="7" name="core-label-0">
             <a:extLst xmlns:a="http://schemas.openxmlformats.org/drawingml/2006/main">
               <a:ext uri="{FF2B5EF4-FFF2-40B4-BE49-F238E27FC236}">
-                <a16:creationId xmlns:a16="http://schemas.microsoft.com/office/drawing/2014/main" id="{4D771BE5-99B1-46D9-A5B0-D6AAFCA31B85}"/>
+                <a16:creationId xmlns:a16="http://schemas.microsoft.com/office/drawing/2014/main" id="{3E8270EE-CE9C-40BC-9609-9C0F21444548}"/>
               </a:ext>
             </a:extLst>
           </p:cNvPr>
@@ -8490,7 +8490,7 @@
           <p:cNvPr id="8" name="core-body-0">
             <a:extLst xmlns:a="http://schemas.openxmlformats.org/drawingml/2006/main">
               <a:ext uri="{FF2B5EF4-FFF2-40B4-BE49-F238E27FC236}">
-                <a16:creationId xmlns:a16="http://schemas.microsoft.com/office/drawing/2014/main" id="{E4339BAD-E2BF-4581-8967-D305CB41B3B3}"/>
+                <a16:creationId xmlns:a16="http://schemas.microsoft.com/office/drawing/2014/main" id="{F919605F-48AE-4B67-A6A1-A24F80EEE438}"/>
               </a:ext>
             </a:extLst>
           </p:cNvPr>
@@ -8554,7 +8554,7 @@
           <p:cNvPr id="9" name="core-no-1">
             <a:extLst xmlns:a="http://schemas.openxmlformats.org/drawingml/2006/main">
               <a:ext uri="{FF2B5EF4-FFF2-40B4-BE49-F238E27FC236}">
-                <a16:creationId xmlns:a16="http://schemas.microsoft.com/office/drawing/2014/main" id="{7B7D1947-7E4F-4B97-B0F8-5A3F0BAE5EF6}"/>
+                <a16:creationId xmlns:a16="http://schemas.microsoft.com/office/drawing/2014/main" id="{2E1D8B88-37E3-45D8-AFCC-D6DD7C24383D}"/>
               </a:ext>
             </a:extLst>
           </p:cNvPr>
@@ -8612,7 +8612,7 @@
           <p:cNvPr id="10" name="core-body-1">
             <a:extLst xmlns:a="http://schemas.openxmlformats.org/drawingml/2006/main">
               <a:ext uri="{FF2B5EF4-FFF2-40B4-BE49-F238E27FC236}">
-                <a16:creationId xmlns:a16="http://schemas.microsoft.com/office/drawing/2014/main" id="{0342C474-64F6-4776-985A-1D50E6993C6C}"/>
+                <a16:creationId xmlns:a16="http://schemas.microsoft.com/office/drawing/2014/main" id="{3581A371-FC96-4854-A58C-D8F293DE4859}"/>
               </a:ext>
             </a:extLst>
           </p:cNvPr>
@@ -8676,7 +8676,7 @@
           <p:cNvPr id="11" name="s6-takeaway-rule">
             <a:extLst xmlns:a="http://schemas.openxmlformats.org/drawingml/2006/main">
               <a:ext uri="{FF2B5EF4-FFF2-40B4-BE49-F238E27FC236}">
-                <a16:creationId xmlns:a16="http://schemas.microsoft.com/office/drawing/2014/main" id="{575CC19B-0092-4ADF-9AFB-85542B3B3626}"/>
+                <a16:creationId xmlns:a16="http://schemas.microsoft.com/office/drawing/2014/main" id="{77BF3FCF-6155-4A88-8233-938B7895C049}"/>
               </a:ext>
             </a:extLst>
           </p:cNvPr>
@@ -8709,7 +8709,7 @@
           <p:cNvPr id="12" name="s6-takeaway">
             <a:extLst xmlns:a="http://schemas.openxmlformats.org/drawingml/2006/main">
               <a:ext uri="{FF2B5EF4-FFF2-40B4-BE49-F238E27FC236}">
-                <a16:creationId xmlns:a16="http://schemas.microsoft.com/office/drawing/2014/main" id="{A2848709-7F7F-4601-B85E-23D9BBB8AE15}"/>
+                <a16:creationId xmlns:a16="http://schemas.microsoft.com/office/drawing/2014/main" id="{E2FFF86D-B945-4143-BCAF-C9A08911027A}"/>
               </a:ext>
             </a:extLst>
           </p:cNvPr>
@@ -8765,7 +8765,7 @@
     </p:spTree>
     <p:extLst>
       <p:ext uri="{BB962C8B-B14F-4D97-AF65-F5344CB8AC3E}">
-        <p14:creationId xmlns:p14="http://schemas.microsoft.com/office/powerpoint/2010/main" val="1103543990"/>
+        <p14:creationId xmlns:p14="http://schemas.microsoft.com/office/powerpoint/2010/main" val="37287434"/>
       </p:ext>
     </p:extLst>
   </p:cSld>
@@ -8796,7 +8796,7 @@
           <p:cNvPr id="1" name="s7-rule">
             <a:extLst xmlns:a="http://schemas.openxmlformats.org/drawingml/2006/main">
               <a:ext uri="{FF2B5EF4-FFF2-40B4-BE49-F238E27FC236}">
-                <a16:creationId xmlns:a16="http://schemas.microsoft.com/office/drawing/2014/main" id="{B0F0CEB7-58F3-477D-BE02-3406C574F207}"/>
+                <a16:creationId xmlns:a16="http://schemas.microsoft.com/office/drawing/2014/main" id="{23B824FB-2714-49A3-B70A-FEA559BE8B39}"/>
               </a:ext>
             </a:extLst>
           </p:cNvPr>
@@ -8829,7 +8829,7 @@
           <p:cNvPr id="2" name="s7-eyebrow">
             <a:extLst xmlns:a="http://schemas.openxmlformats.org/drawingml/2006/main">
               <a:ext uri="{FF2B5EF4-FFF2-40B4-BE49-F238E27FC236}">
-                <a16:creationId xmlns:a16="http://schemas.microsoft.com/office/drawing/2014/main" id="{24C7CC01-8F1B-4095-B3A1-F3BD4B79D8DB}"/>
+                <a16:creationId xmlns:a16="http://schemas.microsoft.com/office/drawing/2014/main" id="{6D54AD77-CCD7-4FA8-83C2-958CC2CB7CB0}"/>
               </a:ext>
             </a:extLst>
           </p:cNvPr>
@@ -8887,7 +8887,7 @@
           <p:cNvPr id="3" name="s7-title">
             <a:extLst xmlns:a="http://schemas.openxmlformats.org/drawingml/2006/main">
               <a:ext uri="{FF2B5EF4-FFF2-40B4-BE49-F238E27FC236}">
-                <a16:creationId xmlns:a16="http://schemas.microsoft.com/office/drawing/2014/main" id="{B65B409E-A44C-470B-9657-E78C51010C72}"/>
+                <a16:creationId xmlns:a16="http://schemas.microsoft.com/office/drawing/2014/main" id="{C9FC3744-D24C-43BC-9AFB-B09330A3DA4D}"/>
               </a:ext>
             </a:extLst>
           </p:cNvPr>
@@ -8945,7 +8945,7 @@
           <p:cNvPr id="4" name="s7-footer">
             <a:extLst xmlns:a="http://schemas.openxmlformats.org/drawingml/2006/main">
               <a:ext uri="{FF2B5EF4-FFF2-40B4-BE49-F238E27FC236}">
-                <a16:creationId xmlns:a16="http://schemas.microsoft.com/office/drawing/2014/main" id="{DBE9AADA-568B-4399-8A2C-A47D04A936C7}"/>
+                <a16:creationId xmlns:a16="http://schemas.microsoft.com/office/drawing/2014/main" id="{A8A0E03C-F9D1-414B-B1E2-29D1A993762D}"/>
               </a:ext>
             </a:extLst>
           </p:cNvPr>
@@ -8976,7 +8976,7 @@
           <p:cNvPr id="5" name="s7-identity">
             <a:extLst xmlns:a="http://schemas.openxmlformats.org/drawingml/2006/main">
               <a:ext uri="{FF2B5EF4-FFF2-40B4-BE49-F238E27FC236}">
-                <a16:creationId xmlns:a16="http://schemas.microsoft.com/office/drawing/2014/main" id="{F3744EFB-4089-4747-BD95-07C272C9973C}"/>
+                <a16:creationId xmlns:a16="http://schemas.microsoft.com/office/drawing/2014/main" id="{5727DCE3-8F4D-49A7-9748-90E472C0C7D4}"/>
               </a:ext>
             </a:extLst>
           </p:cNvPr>
@@ -9034,7 +9034,7 @@
           <p:cNvPr id="6" name="core-no-0">
             <a:extLst xmlns:a="http://schemas.openxmlformats.org/drawingml/2006/main">
               <a:ext uri="{FF2B5EF4-FFF2-40B4-BE49-F238E27FC236}">
-                <a16:creationId xmlns:a16="http://schemas.microsoft.com/office/drawing/2014/main" id="{3D285DEE-600C-476E-9EF1-C9749B42203F}"/>
+                <a16:creationId xmlns:a16="http://schemas.microsoft.com/office/drawing/2014/main" id="{F1D52587-C1FB-4164-88B1-0020515ABD12}"/>
               </a:ext>
             </a:extLst>
           </p:cNvPr>
@@ -9092,7 +9092,7 @@
           <p:cNvPr id="7" name="core-label-0">
             <a:extLst xmlns:a="http://schemas.openxmlformats.org/drawingml/2006/main">
               <a:ext uri="{FF2B5EF4-FFF2-40B4-BE49-F238E27FC236}">
-                <a16:creationId xmlns:a16="http://schemas.microsoft.com/office/drawing/2014/main" id="{57235984-8BCB-49DB-B289-16D51B8E6D30}"/>
+                <a16:creationId xmlns:a16="http://schemas.microsoft.com/office/drawing/2014/main" id="{6435D20F-8D53-4ECF-B2C4-743F26EC5580}"/>
               </a:ext>
             </a:extLst>
           </p:cNvPr>
@@ -9150,7 +9150,7 @@
           <p:cNvPr id="8" name="core-body-0">
             <a:extLst xmlns:a="http://schemas.openxmlformats.org/drawingml/2006/main">
               <a:ext uri="{FF2B5EF4-FFF2-40B4-BE49-F238E27FC236}">
-                <a16:creationId xmlns:a16="http://schemas.microsoft.com/office/drawing/2014/main" id="{FE1129BB-8F7E-4219-B540-76AD776DED45}"/>
+                <a16:creationId xmlns:a16="http://schemas.microsoft.com/office/drawing/2014/main" id="{A031E569-E4B8-4FE1-837F-EE2DD20D47BB}"/>
               </a:ext>
             </a:extLst>
           </p:cNvPr>
@@ -9214,7 +9214,7 @@
           <p:cNvPr id="9" name="core-no-1">
             <a:extLst xmlns:a="http://schemas.openxmlformats.org/drawingml/2006/main">
               <a:ext uri="{FF2B5EF4-FFF2-40B4-BE49-F238E27FC236}">
-                <a16:creationId xmlns:a16="http://schemas.microsoft.com/office/drawing/2014/main" id="{DA87CE4F-B76A-4831-A5E6-03D9AC3EDB4D}"/>
+                <a16:creationId xmlns:a16="http://schemas.microsoft.com/office/drawing/2014/main" id="{67E9BE18-D875-447E-BBCF-A71BD4358D50}"/>
               </a:ext>
             </a:extLst>
           </p:cNvPr>
@@ -9272,7 +9272,7 @@
           <p:cNvPr id="10" name="core-body-1">
             <a:extLst xmlns:a="http://schemas.openxmlformats.org/drawingml/2006/main">
               <a:ext uri="{FF2B5EF4-FFF2-40B4-BE49-F238E27FC236}">
-                <a16:creationId xmlns:a16="http://schemas.microsoft.com/office/drawing/2014/main" id="{6DBAB7FD-1319-44AC-9B08-34C7005EC89F}"/>
+                <a16:creationId xmlns:a16="http://schemas.microsoft.com/office/drawing/2014/main" id="{95998F12-4706-43C4-AC44-815CAA7745D2}"/>
               </a:ext>
             </a:extLst>
           </p:cNvPr>
@@ -9336,7 +9336,7 @@
           <p:cNvPr id="11" name="s7-takeaway-rule">
             <a:extLst xmlns:a="http://schemas.openxmlformats.org/drawingml/2006/main">
               <a:ext uri="{FF2B5EF4-FFF2-40B4-BE49-F238E27FC236}">
-                <a16:creationId xmlns:a16="http://schemas.microsoft.com/office/drawing/2014/main" id="{0580788F-8973-4183-8E0C-461508D01682}"/>
+                <a16:creationId xmlns:a16="http://schemas.microsoft.com/office/drawing/2014/main" id="{78567CD8-66F3-4804-80DD-088383460AC9}"/>
               </a:ext>
             </a:extLst>
           </p:cNvPr>
@@ -9369,7 +9369,7 @@
           <p:cNvPr id="12" name="s7-takeaway">
             <a:extLst xmlns:a="http://schemas.openxmlformats.org/drawingml/2006/main">
               <a:ext uri="{FF2B5EF4-FFF2-40B4-BE49-F238E27FC236}">
-                <a16:creationId xmlns:a16="http://schemas.microsoft.com/office/drawing/2014/main" id="{25976F4E-B5C3-4447-86B8-DF275615579E}"/>
+                <a16:creationId xmlns:a16="http://schemas.microsoft.com/office/drawing/2014/main" id="{ADB8A9A1-F14A-4FD2-866F-1BBBDFEEAA72}"/>
               </a:ext>
             </a:extLst>
           </p:cNvPr>
@@ -9425,7 +9425,7 @@
     </p:spTree>
     <p:extLst>
       <p:ext uri="{BB962C8B-B14F-4D97-AF65-F5344CB8AC3E}">
-        <p14:creationId xmlns:p14="http://schemas.microsoft.com/office/powerpoint/2010/main" val="870534557"/>
+        <p14:creationId xmlns:p14="http://schemas.microsoft.com/office/powerpoint/2010/main" val="1161241726"/>
       </p:ext>
     </p:extLst>
   </p:cSld>
@@ -9456,7 +9456,7 @@
           <p:cNvPr id="1" name="s8-rule">
             <a:extLst xmlns:a="http://schemas.openxmlformats.org/drawingml/2006/main">
               <a:ext uri="{FF2B5EF4-FFF2-40B4-BE49-F238E27FC236}">
-                <a16:creationId xmlns:a16="http://schemas.microsoft.com/office/drawing/2014/main" id="{66A5204F-9870-43D1-BC3E-8C2538FA65EA}"/>
+                <a16:creationId xmlns:a16="http://schemas.microsoft.com/office/drawing/2014/main" id="{D074F16A-A10D-44B5-B669-63B4D9F2E542}"/>
               </a:ext>
             </a:extLst>
           </p:cNvPr>
@@ -9489,7 +9489,7 @@
           <p:cNvPr id="2" name="s8-eyebrow">
             <a:extLst xmlns:a="http://schemas.openxmlformats.org/drawingml/2006/main">
               <a:ext uri="{FF2B5EF4-FFF2-40B4-BE49-F238E27FC236}">
-                <a16:creationId xmlns:a16="http://schemas.microsoft.com/office/drawing/2014/main" id="{6A2A1517-B233-44D5-A85C-55074C96E6ED}"/>
+                <a16:creationId xmlns:a16="http://schemas.microsoft.com/office/drawing/2014/main" id="{35C20123-9F05-4C11-9298-48EC892624BC}"/>
               </a:ext>
             </a:extLst>
           </p:cNvPr>
@@ -9547,7 +9547,7 @@
           <p:cNvPr id="3" name="s8-title">
             <a:extLst xmlns:a="http://schemas.openxmlformats.org/drawingml/2006/main">
               <a:ext uri="{FF2B5EF4-FFF2-40B4-BE49-F238E27FC236}">
-                <a16:creationId xmlns:a16="http://schemas.microsoft.com/office/drawing/2014/main" id="{8E3C5414-7B17-4170-A8F2-4C3B77AE07BB}"/>
+                <a16:creationId xmlns:a16="http://schemas.microsoft.com/office/drawing/2014/main" id="{DF8362AF-F7F2-4131-827D-EF71C92BD41B}"/>
               </a:ext>
             </a:extLst>
           </p:cNvPr>
@@ -9605,7 +9605,7 @@
           <p:cNvPr id="4" name="s8-footer">
             <a:extLst xmlns:a="http://schemas.openxmlformats.org/drawingml/2006/main">
               <a:ext uri="{FF2B5EF4-FFF2-40B4-BE49-F238E27FC236}">
-                <a16:creationId xmlns:a16="http://schemas.microsoft.com/office/drawing/2014/main" id="{1B67B1AC-8E43-4F9B-8380-60AB09106E01}"/>
+                <a16:creationId xmlns:a16="http://schemas.microsoft.com/office/drawing/2014/main" id="{07FD8C4B-7D72-42B0-8898-711EE4911C2A}"/>
               </a:ext>
             </a:extLst>
           </p:cNvPr>
@@ -9636,7 +9636,7 @@
           <p:cNvPr id="5" name="s8-identity">
             <a:extLst xmlns:a="http://schemas.openxmlformats.org/drawingml/2006/main">
               <a:ext uri="{FF2B5EF4-FFF2-40B4-BE49-F238E27FC236}">
-                <a16:creationId xmlns:a16="http://schemas.microsoft.com/office/drawing/2014/main" id="{49345498-6590-4B8E-8715-EC1DB3CC8663}"/>
+                <a16:creationId xmlns:a16="http://schemas.microsoft.com/office/drawing/2014/main" id="{398FF773-A66E-4095-A905-5319AA09E34E}"/>
               </a:ext>
             </a:extLst>
           </p:cNvPr>
@@ -9694,7 +9694,7 @@
           <p:cNvPr id="6" name="core-no-0">
             <a:extLst xmlns:a="http://schemas.openxmlformats.org/drawingml/2006/main">
               <a:ext uri="{FF2B5EF4-FFF2-40B4-BE49-F238E27FC236}">
-                <a16:creationId xmlns:a16="http://schemas.microsoft.com/office/drawing/2014/main" id="{D51C74A4-DBBB-4535-8475-FC2BC650BCF1}"/>
+                <a16:creationId xmlns:a16="http://schemas.microsoft.com/office/drawing/2014/main" id="{4B7C5215-16E4-4192-94B4-02A15817AE1D}"/>
               </a:ext>
             </a:extLst>
           </p:cNvPr>
@@ -9752,7 +9752,7 @@
           <p:cNvPr id="7" name="core-label-0">
             <a:extLst xmlns:a="http://schemas.openxmlformats.org/drawingml/2006/main">
               <a:ext uri="{FF2B5EF4-FFF2-40B4-BE49-F238E27FC236}">
-                <a16:creationId xmlns:a16="http://schemas.microsoft.com/office/drawing/2014/main" id="{0D279A9F-BABC-485F-A1E5-A160E4E72874}"/>
+                <a16:creationId xmlns:a16="http://schemas.microsoft.com/office/drawing/2014/main" id="{5C843D00-DB0F-4D3E-AC93-3367C8329947}"/>
               </a:ext>
             </a:extLst>
           </p:cNvPr>
@@ -9810,7 +9810,7 @@
           <p:cNvPr id="8" name="core-body-0">
             <a:extLst xmlns:a="http://schemas.openxmlformats.org/drawingml/2006/main">
               <a:ext uri="{FF2B5EF4-FFF2-40B4-BE49-F238E27FC236}">
-                <a16:creationId xmlns:a16="http://schemas.microsoft.com/office/drawing/2014/main" id="{072BCB89-F6EE-4262-A5F2-6523FE446B1F}"/>
+                <a16:creationId xmlns:a16="http://schemas.microsoft.com/office/drawing/2014/main" id="{26BC74FA-1D73-484F-8818-F2EA75831244}"/>
               </a:ext>
             </a:extLst>
           </p:cNvPr>
@@ -9874,7 +9874,7 @@
           <p:cNvPr id="9" name="core-no-1">
             <a:extLst xmlns:a="http://schemas.openxmlformats.org/drawingml/2006/main">
               <a:ext uri="{FF2B5EF4-FFF2-40B4-BE49-F238E27FC236}">
-                <a16:creationId xmlns:a16="http://schemas.microsoft.com/office/drawing/2014/main" id="{2325B60E-5205-4B84-B843-4CA78E4D57E6}"/>
+                <a16:creationId xmlns:a16="http://schemas.microsoft.com/office/drawing/2014/main" id="{4AD8AD2F-EDAD-44C1-BFA4-0E43AF3CB074}"/>
               </a:ext>
             </a:extLst>
           </p:cNvPr>
@@ -9932,7 +9932,7 @@
           <p:cNvPr id="10" name="core-body-1">
             <a:extLst xmlns:a="http://schemas.openxmlformats.org/drawingml/2006/main">
               <a:ext uri="{FF2B5EF4-FFF2-40B4-BE49-F238E27FC236}">
-                <a16:creationId xmlns:a16="http://schemas.microsoft.com/office/drawing/2014/main" id="{50D113CB-94D0-4CA9-B6FC-851E94D61281}"/>
+                <a16:creationId xmlns:a16="http://schemas.microsoft.com/office/drawing/2014/main" id="{A2EB2C68-D549-4EBD-9857-3B007C207E7B}"/>
               </a:ext>
             </a:extLst>
           </p:cNvPr>
@@ -9996,7 +9996,7 @@
           <p:cNvPr id="11" name="s8-takeaway-rule">
             <a:extLst xmlns:a="http://schemas.openxmlformats.org/drawingml/2006/main">
               <a:ext uri="{FF2B5EF4-FFF2-40B4-BE49-F238E27FC236}">
-                <a16:creationId xmlns:a16="http://schemas.microsoft.com/office/drawing/2014/main" id="{4DFBF8B9-CD65-4606-B840-1643E74CCA48}"/>
+                <a16:creationId xmlns:a16="http://schemas.microsoft.com/office/drawing/2014/main" id="{24882640-62C7-4EC2-9A74-1B2455F6E8A1}"/>
               </a:ext>
             </a:extLst>
           </p:cNvPr>
@@ -10029,7 +10029,7 @@
           <p:cNvPr id="12" name="s8-takeaway">
             <a:extLst xmlns:a="http://schemas.openxmlformats.org/drawingml/2006/main">
               <a:ext uri="{FF2B5EF4-FFF2-40B4-BE49-F238E27FC236}">
-                <a16:creationId xmlns:a16="http://schemas.microsoft.com/office/drawing/2014/main" id="{64CF65C1-B84C-4B30-838D-83AA17FDC433}"/>
+                <a16:creationId xmlns:a16="http://schemas.microsoft.com/office/drawing/2014/main" id="{200B354E-32E4-4660-849E-8AF71EDFE27A}"/>
               </a:ext>
             </a:extLst>
           </p:cNvPr>
@@ -10085,7 +10085,7 @@
     </p:spTree>
     <p:extLst>
       <p:ext uri="{BB962C8B-B14F-4D97-AF65-F5344CB8AC3E}">
-        <p14:creationId xmlns:p14="http://schemas.microsoft.com/office/powerpoint/2010/main" val="1574473974"/>
+        <p14:creationId xmlns:p14="http://schemas.microsoft.com/office/powerpoint/2010/main" val="741816922"/>
       </p:ext>
     </p:extLst>
   </p:cSld>
@@ -10116,7 +10116,7 @@
           <p:cNvPr id="1" name="s9-rule">
             <a:extLst xmlns:a="http://schemas.openxmlformats.org/drawingml/2006/main">
               <a:ext uri="{FF2B5EF4-FFF2-40B4-BE49-F238E27FC236}">
-                <a16:creationId xmlns:a16="http://schemas.microsoft.com/office/drawing/2014/main" id="{872772B4-8574-4C9A-AD25-74EB5DE525D2}"/>
+                <a16:creationId xmlns:a16="http://schemas.microsoft.com/office/drawing/2014/main" id="{90A69E0C-1F64-4D23-B060-0C61EB02D2D0}"/>
               </a:ext>
             </a:extLst>
           </p:cNvPr>
@@ -10149,7 +10149,7 @@
           <p:cNvPr id="2" name="s9-eyebrow">
             <a:extLst xmlns:a="http://schemas.openxmlformats.org/drawingml/2006/main">
               <a:ext uri="{FF2B5EF4-FFF2-40B4-BE49-F238E27FC236}">
-                <a16:creationId xmlns:a16="http://schemas.microsoft.com/office/drawing/2014/main" id="{1B224CB4-03A3-4917-A446-BA12CD2AC106}"/>
+                <a16:creationId xmlns:a16="http://schemas.microsoft.com/office/drawing/2014/main" id="{9D275ADE-7940-41A3-AD5E-35294A497968}"/>
               </a:ext>
             </a:extLst>
           </p:cNvPr>
@@ -10207,7 +10207,7 @@
           <p:cNvPr id="3" name="s9-title">
             <a:extLst xmlns:a="http://schemas.openxmlformats.org/drawingml/2006/main">
               <a:ext uri="{FF2B5EF4-FFF2-40B4-BE49-F238E27FC236}">
-                <a16:creationId xmlns:a16="http://schemas.microsoft.com/office/drawing/2014/main" id="{42FA9DB4-D94B-4F88-9C6F-554C7EB90F63}"/>
+                <a16:creationId xmlns:a16="http://schemas.microsoft.com/office/drawing/2014/main" id="{0C4F9931-7C27-4861-87D2-D2A56C5D4038}"/>
               </a:ext>
             </a:extLst>
           </p:cNvPr>
@@ -10265,7 +10265,7 @@
           <p:cNvPr id="4" name="s9-footer">
             <a:extLst xmlns:a="http://schemas.openxmlformats.org/drawingml/2006/main">
               <a:ext uri="{FF2B5EF4-FFF2-40B4-BE49-F238E27FC236}">
-                <a16:creationId xmlns:a16="http://schemas.microsoft.com/office/drawing/2014/main" id="{4D5ABC59-5F31-42ED-A754-56FF165D1AEA}"/>
+                <a16:creationId xmlns:a16="http://schemas.microsoft.com/office/drawing/2014/main" id="{7B591F85-41E7-4F6B-A894-21D8B800199E}"/>
               </a:ext>
             </a:extLst>
           </p:cNvPr>
@@ -10296,7 +10296,7 @@
           <p:cNvPr id="5" name="s9-identity">
             <a:extLst xmlns:a="http://schemas.openxmlformats.org/drawingml/2006/main">
               <a:ext uri="{FF2B5EF4-FFF2-40B4-BE49-F238E27FC236}">
-                <a16:creationId xmlns:a16="http://schemas.microsoft.com/office/drawing/2014/main" id="{0D988CCD-ACDF-477B-9D9B-EF9E9BCE2BEC}"/>
+                <a16:creationId xmlns:a16="http://schemas.microsoft.com/office/drawing/2014/main" id="{436699E0-B984-47C2-B6E0-BE855AA54F35}"/>
               </a:ext>
             </a:extLst>
           </p:cNvPr>
@@ -10354,7 +10354,7 @@
           <p:cNvPr id="6" name="core-no-0">
             <a:extLst xmlns:a="http://schemas.openxmlformats.org/drawingml/2006/main">
               <a:ext uri="{FF2B5EF4-FFF2-40B4-BE49-F238E27FC236}">
-                <a16:creationId xmlns:a16="http://schemas.microsoft.com/office/drawing/2014/main" id="{931DA79B-D97A-4B7E-B8A4-06F5EB52C1D8}"/>
+                <a16:creationId xmlns:a16="http://schemas.microsoft.com/office/drawing/2014/main" id="{CD114031-0DE6-4565-B249-D1C5B3A1B0CE}"/>
               </a:ext>
             </a:extLst>
           </p:cNvPr>
@@ -10412,7 +10412,7 @@
           <p:cNvPr id="7" name="core-label-0">
             <a:extLst xmlns:a="http://schemas.openxmlformats.org/drawingml/2006/main">
               <a:ext uri="{FF2B5EF4-FFF2-40B4-BE49-F238E27FC236}">
-                <a16:creationId xmlns:a16="http://schemas.microsoft.com/office/drawing/2014/main" id="{A7205F32-D1F9-40EA-B662-59064CB08F00}"/>
+                <a16:creationId xmlns:a16="http://schemas.microsoft.com/office/drawing/2014/main" id="{1F9512CB-D5FD-485D-BD34-D8CBC3F2C857}"/>
               </a:ext>
             </a:extLst>
           </p:cNvPr>
@@ -10470,7 +10470,7 @@
           <p:cNvPr id="8" name="core-body-0">
             <a:extLst xmlns:a="http://schemas.openxmlformats.org/drawingml/2006/main">
               <a:ext uri="{FF2B5EF4-FFF2-40B4-BE49-F238E27FC236}">
-                <a16:creationId xmlns:a16="http://schemas.microsoft.com/office/drawing/2014/main" id="{26CD46DC-0993-467D-9947-F6CAB47A6193}"/>
+                <a16:creationId xmlns:a16="http://schemas.microsoft.com/office/drawing/2014/main" id="{331A41F8-D33D-4E7D-9835-0DBA71335892}"/>
               </a:ext>
             </a:extLst>
           </p:cNvPr>
@@ -10534,7 +10534,7 @@
           <p:cNvPr id="9" name="core-no-1">
             <a:extLst xmlns:a="http://schemas.openxmlformats.org/drawingml/2006/main">
               <a:ext uri="{FF2B5EF4-FFF2-40B4-BE49-F238E27FC236}">
-                <a16:creationId xmlns:a16="http://schemas.microsoft.com/office/drawing/2014/main" id="{71C34413-4AA3-4D1A-9D17-2DACF086EA2B}"/>
+                <a16:creationId xmlns:a16="http://schemas.microsoft.com/office/drawing/2014/main" id="{A6CD5749-9048-4137-B2CA-2156AF2D888F}"/>
               </a:ext>
             </a:extLst>
           </p:cNvPr>
@@ -10592,7 +10592,7 @@
           <p:cNvPr id="10" name="core-body-1">
             <a:extLst xmlns:a="http://schemas.openxmlformats.org/drawingml/2006/main">
               <a:ext uri="{FF2B5EF4-FFF2-40B4-BE49-F238E27FC236}">
-                <a16:creationId xmlns:a16="http://schemas.microsoft.com/office/drawing/2014/main" id="{B3185168-17B1-43EF-9967-9325A98F6882}"/>
+                <a16:creationId xmlns:a16="http://schemas.microsoft.com/office/drawing/2014/main" id="{B3B86362-EF81-4279-AD69-AAD239D6E4F1}"/>
               </a:ext>
             </a:extLst>
           </p:cNvPr>
@@ -10656,7 +10656,7 @@
           <p:cNvPr id="11" name="s9-takeaway-rule">
             <a:extLst xmlns:a="http://schemas.openxmlformats.org/drawingml/2006/main">
               <a:ext uri="{FF2B5EF4-FFF2-40B4-BE49-F238E27FC236}">
-                <a16:creationId xmlns:a16="http://schemas.microsoft.com/office/drawing/2014/main" id="{61BDC207-F8A1-4CA3-A79A-362985F29A78}"/>
+                <a16:creationId xmlns:a16="http://schemas.microsoft.com/office/drawing/2014/main" id="{056D6F47-6366-47E2-BF2F-81F357BE4869}"/>
               </a:ext>
             </a:extLst>
           </p:cNvPr>
@@ -10689,7 +10689,7 @@
           <p:cNvPr id="12" name="s9-takeaway">
             <a:extLst xmlns:a="http://schemas.openxmlformats.org/drawingml/2006/main">
               <a:ext uri="{FF2B5EF4-FFF2-40B4-BE49-F238E27FC236}">
-                <a16:creationId xmlns:a16="http://schemas.microsoft.com/office/drawing/2014/main" id="{59F9E146-02EE-41B1-8529-E1B077577357}"/>
+                <a16:creationId xmlns:a16="http://schemas.microsoft.com/office/drawing/2014/main" id="{0048F30A-9D47-403E-BA7F-C3CBD074C726}"/>
               </a:ext>
             </a:extLst>
           </p:cNvPr>
@@ -10745,7 +10745,7 @@
     </p:spTree>
     <p:extLst>
       <p:ext uri="{BB962C8B-B14F-4D97-AF65-F5344CB8AC3E}">
-        <p14:creationId xmlns:p14="http://schemas.microsoft.com/office/powerpoint/2010/main" val="376566742"/>
+        <p14:creationId xmlns:p14="http://schemas.microsoft.com/office/powerpoint/2010/main" val="1788294440"/>
       </p:ext>
     </p:extLst>
   </p:cSld>

--- a/docs/public/course-assets/course-pptx/em-001.pptx
+++ b/docs/public/course-assets/course-pptx/em-001.pptx
@@ -2,25 +2,25 @@
 <file path=ppt/presentation.xml><?xml version="1.0" encoding="utf-8"?>
 <p:presentation xmlns:p="http://schemas.openxmlformats.org/presentationml/2006/main">
   <p:sldMasterIdLst>
-    <p:sldMasterId xmlns:r="http://schemas.openxmlformats.org/officeDocument/2006/relationships" id="2147483648" r:id="R40b6aefa596644bf"/>
+    <p:sldMasterId xmlns:r="http://schemas.openxmlformats.org/officeDocument/2006/relationships" id="2147483648" r:id="R12a8fbe3ff2542e2"/>
   </p:sldMasterIdLst>
   <p:notesMasterIdLst>
-    <p:notesMasterId xmlns:r="http://schemas.openxmlformats.org/officeDocument/2006/relationships" r:id="R54f11173d50b4fc7"/>
+    <p:notesMasterId xmlns:r="http://schemas.openxmlformats.org/officeDocument/2006/relationships" r:id="R306845dfe8a24d7d"/>
   </p:notesMasterIdLst>
   <p:sldIdLst>
-    <p:sldId xmlns:r="http://schemas.openxmlformats.org/officeDocument/2006/relationships" id="256" r:id="Rb90b250e444349c6"/>
-    <p:sldId xmlns:r="http://schemas.openxmlformats.org/officeDocument/2006/relationships" id="257" r:id="R11a251d20e7c41f3"/>
-    <p:sldId xmlns:r="http://schemas.openxmlformats.org/officeDocument/2006/relationships" id="258" r:id="R75b7397a415b463c"/>
-    <p:sldId xmlns:r="http://schemas.openxmlformats.org/officeDocument/2006/relationships" id="259" r:id="Re5b5c523a6ad401d"/>
-    <p:sldId xmlns:r="http://schemas.openxmlformats.org/officeDocument/2006/relationships" id="260" r:id="Re5d7b202e9494c4b"/>
-    <p:sldId xmlns:r="http://schemas.openxmlformats.org/officeDocument/2006/relationships" id="261" r:id="Raea8143343404a8f"/>
-    <p:sldId xmlns:r="http://schemas.openxmlformats.org/officeDocument/2006/relationships" id="262" r:id="Rec56883b237646fc"/>
-    <p:sldId xmlns:r="http://schemas.openxmlformats.org/officeDocument/2006/relationships" id="263" r:id="Rf8f520a70a2c4d7f"/>
-    <p:sldId xmlns:r="http://schemas.openxmlformats.org/officeDocument/2006/relationships" id="264" r:id="R24aa573042a8433f"/>
-    <p:sldId xmlns:r="http://schemas.openxmlformats.org/officeDocument/2006/relationships" id="265" r:id="R7bff1ab3321b4ad3"/>
-    <p:sldId xmlns:r="http://schemas.openxmlformats.org/officeDocument/2006/relationships" id="266" r:id="R51718413656a430b"/>
-    <p:sldId xmlns:r="http://schemas.openxmlformats.org/officeDocument/2006/relationships" id="267" r:id="Rc2b7710a409d48fa"/>
-    <p:sldId xmlns:r="http://schemas.openxmlformats.org/officeDocument/2006/relationships" id="268" r:id="R34a18022208e4edc"/>
+    <p:sldId xmlns:r="http://schemas.openxmlformats.org/officeDocument/2006/relationships" id="256" r:id="R0a1259b103b1482c"/>
+    <p:sldId xmlns:r="http://schemas.openxmlformats.org/officeDocument/2006/relationships" id="257" r:id="Rba5c7e657a8e4e20"/>
+    <p:sldId xmlns:r="http://schemas.openxmlformats.org/officeDocument/2006/relationships" id="258" r:id="Rddafc9c8cb604bf2"/>
+    <p:sldId xmlns:r="http://schemas.openxmlformats.org/officeDocument/2006/relationships" id="259" r:id="R06b988e4e68a433f"/>
+    <p:sldId xmlns:r="http://schemas.openxmlformats.org/officeDocument/2006/relationships" id="260" r:id="R6061b1ad2d634ec7"/>
+    <p:sldId xmlns:r="http://schemas.openxmlformats.org/officeDocument/2006/relationships" id="261" r:id="Rb736f5a82b274414"/>
+    <p:sldId xmlns:r="http://schemas.openxmlformats.org/officeDocument/2006/relationships" id="262" r:id="R0e748c63049241f0"/>
+    <p:sldId xmlns:r="http://schemas.openxmlformats.org/officeDocument/2006/relationships" id="263" r:id="R0b4212cca6284eb4"/>
+    <p:sldId xmlns:r="http://schemas.openxmlformats.org/officeDocument/2006/relationships" id="264" r:id="Ra57781d4feef4053"/>
+    <p:sldId xmlns:r="http://schemas.openxmlformats.org/officeDocument/2006/relationships" id="265" r:id="R0bb38b703f4743cf"/>
+    <p:sldId xmlns:r="http://schemas.openxmlformats.org/officeDocument/2006/relationships" id="266" r:id="Rd791153c76bc430c"/>
+    <p:sldId xmlns:r="http://schemas.openxmlformats.org/officeDocument/2006/relationships" id="267" r:id="R2a4747916a9949dd"/>
+    <p:sldId xmlns:r="http://schemas.openxmlformats.org/officeDocument/2006/relationships" id="268" r:id="Ra665003a1e2e4d12"/>
   </p:sldIdLst>
   <p:sldSz cx="12192000" cy="6858000"/>
   <p:notesSz cx="6858000" cy="9144000"/>
@@ -1405,7 +1405,7 @@
   </p:cSld>
   <p:clrMap bg1="lt1" tx1="dk1" bg2="lt2" tx2="dk2" accent1="accent1" accent2="accent2" accent3="accent3" accent4="accent4" accent5="accent5" accent6="accent6" hlink="hlink" folHlink="folHlink"/>
   <p:sldLayoutIdLst>
-    <p:sldLayoutId xmlns:r="http://schemas.openxmlformats.org/officeDocument/2006/relationships" id="2147483649" r:id="R5a10fc58759e492f"/>
+    <p:sldLayoutId xmlns:r="http://schemas.openxmlformats.org/officeDocument/2006/relationships" id="2147483649" r:id="R57799a5743c44a5e"/>
   </p:sldLayoutIdLst>
   <p:txStyles>
     <p:titleStyle>
@@ -1956,7 +1956,7 @@
           <p:cNvPr id="1" name="cover-rule">
             <a:extLst xmlns:a="http://schemas.openxmlformats.org/drawingml/2006/main">
               <a:ext uri="{FF2B5EF4-FFF2-40B4-BE49-F238E27FC236}">
-                <a16:creationId xmlns:a16="http://schemas.microsoft.com/office/drawing/2014/main" id="{6C59221E-F045-424D-8FC4-8B2A20AA0A0E}"/>
+                <a16:creationId xmlns:a16="http://schemas.microsoft.com/office/drawing/2014/main" id="{2571FD2D-A08B-4365-ADA6-0862CB9594BC}"/>
               </a:ext>
             </a:extLst>
           </p:cNvPr>
@@ -1989,7 +1989,7 @@
           <p:cNvPr id="2" name="cover-ring-1">
             <a:extLst xmlns:a="http://schemas.openxmlformats.org/drawingml/2006/main">
               <a:ext uri="{FF2B5EF4-FFF2-40B4-BE49-F238E27FC236}">
-                <a16:creationId xmlns:a16="http://schemas.microsoft.com/office/drawing/2014/main" id="{42934833-683D-4B1D-8117-5E91339933BB}"/>
+                <a16:creationId xmlns:a16="http://schemas.microsoft.com/office/drawing/2014/main" id="{BA2DD795-CA38-4BE7-900D-B8B23027E83D}"/>
               </a:ext>
             </a:extLst>
           </p:cNvPr>
@@ -2020,7 +2020,7 @@
           <p:cNvPr id="3" name="cover-ring-2">
             <a:extLst xmlns:a="http://schemas.openxmlformats.org/drawingml/2006/main">
               <a:ext uri="{FF2B5EF4-FFF2-40B4-BE49-F238E27FC236}">
-                <a16:creationId xmlns:a16="http://schemas.microsoft.com/office/drawing/2014/main" id="{590ACF53-564B-4764-BE4C-DB8D90FB5942}"/>
+                <a16:creationId xmlns:a16="http://schemas.microsoft.com/office/drawing/2014/main" id="{CCA1010C-D6C4-44EA-8B82-9C951CC6C08A}"/>
               </a:ext>
             </a:extLst>
           </p:cNvPr>
@@ -2051,7 +2051,7 @@
           <p:cNvPr id="4" name="cover-core">
             <a:extLst xmlns:a="http://schemas.openxmlformats.org/drawingml/2006/main">
               <a:ext uri="{FF2B5EF4-FFF2-40B4-BE49-F238E27FC236}">
-                <a16:creationId xmlns:a16="http://schemas.microsoft.com/office/drawing/2014/main" id="{4FF53231-E046-4300-97F6-C431BB7E382F}"/>
+                <a16:creationId xmlns:a16="http://schemas.microsoft.com/office/drawing/2014/main" id="{BAFDD279-1138-4C59-BB19-3804D52582AF}"/>
               </a:ext>
             </a:extLst>
           </p:cNvPr>
@@ -2084,7 +2084,7 @@
           <p:cNvPr id="5" name="cover-line-1">
             <a:extLst xmlns:a="http://schemas.openxmlformats.org/drawingml/2006/main">
               <a:ext uri="{FF2B5EF4-FFF2-40B4-BE49-F238E27FC236}">
-                <a16:creationId xmlns:a16="http://schemas.microsoft.com/office/drawing/2014/main" id="{36F40D75-3654-440E-8C2C-8F426D8D37DD}"/>
+                <a16:creationId xmlns:a16="http://schemas.microsoft.com/office/drawing/2014/main" id="{35D27767-23E2-47C2-BA9E-422854BAEE43}"/>
               </a:ext>
             </a:extLst>
           </p:cNvPr>
@@ -2115,7 +2115,7 @@
           <p:cNvPr id="6" name="cover-line-2">
             <a:extLst xmlns:a="http://schemas.openxmlformats.org/drawingml/2006/main">
               <a:ext uri="{FF2B5EF4-FFF2-40B4-BE49-F238E27FC236}">
-                <a16:creationId xmlns:a16="http://schemas.microsoft.com/office/drawing/2014/main" id="{95222F34-1AF6-4FEC-B28B-5DC8676F6DE7}"/>
+                <a16:creationId xmlns:a16="http://schemas.microsoft.com/office/drawing/2014/main" id="{147342D9-DEAF-42D5-8736-0E650EE365FC}"/>
               </a:ext>
             </a:extLst>
           </p:cNvPr>
@@ -2146,7 +2146,7 @@
           <p:cNvPr id="7" name="cover-eyebrow">
             <a:extLst xmlns:a="http://schemas.openxmlformats.org/drawingml/2006/main">
               <a:ext uri="{FF2B5EF4-FFF2-40B4-BE49-F238E27FC236}">
-                <a16:creationId xmlns:a16="http://schemas.microsoft.com/office/drawing/2014/main" id="{0708BD8C-DF9B-4CBF-B7F1-0A10228FB92B}"/>
+                <a16:creationId xmlns:a16="http://schemas.microsoft.com/office/drawing/2014/main" id="{74BBCEC7-54FD-4592-A511-AFEE17EC3B60}"/>
               </a:ext>
             </a:extLst>
           </p:cNvPr>
@@ -2204,7 +2204,7 @@
           <p:cNvPr id="8" name="cover-title">
             <a:extLst xmlns:a="http://schemas.openxmlformats.org/drawingml/2006/main">
               <a:ext uri="{FF2B5EF4-FFF2-40B4-BE49-F238E27FC236}">
-                <a16:creationId xmlns:a16="http://schemas.microsoft.com/office/drawing/2014/main" id="{59E92374-0CD5-469F-9630-434DB1F77072}"/>
+                <a16:creationId xmlns:a16="http://schemas.microsoft.com/office/drawing/2014/main" id="{B50A77C4-B9CE-4579-B225-92817FEEBFF5}"/>
               </a:ext>
             </a:extLst>
           </p:cNvPr>
@@ -2262,7 +2262,7 @@
           <p:cNvPr id="9" name="cover-subtitle">
             <a:extLst xmlns:a="http://schemas.openxmlformats.org/drawingml/2006/main">
               <a:ext uri="{FF2B5EF4-FFF2-40B4-BE49-F238E27FC236}">
-                <a16:creationId xmlns:a16="http://schemas.microsoft.com/office/drawing/2014/main" id="{8A87970A-8B52-4C8B-B42C-C77C004888AD}"/>
+                <a16:creationId xmlns:a16="http://schemas.microsoft.com/office/drawing/2014/main" id="{B68E7F41-8EEF-4727-BF41-E231016E66D6}"/>
               </a:ext>
             </a:extLst>
           </p:cNvPr>
@@ -2324,7 +2324,7 @@
           <p:cNvPr id="10" name="cover-lead">
             <a:extLst xmlns:a="http://schemas.openxmlformats.org/drawingml/2006/main">
               <a:ext uri="{FF2B5EF4-FFF2-40B4-BE49-F238E27FC236}">
-                <a16:creationId xmlns:a16="http://schemas.microsoft.com/office/drawing/2014/main" id="{9A6842EE-46AE-4B6D-A411-5772D445B65A}"/>
+                <a16:creationId xmlns:a16="http://schemas.microsoft.com/office/drawing/2014/main" id="{D6F7D96B-76F1-4AA1-87AC-EB6F5E1FE41E}"/>
               </a:ext>
             </a:extLst>
           </p:cNvPr>
@@ -2382,7 +2382,7 @@
           <p:cNvPr id="11" name="cover-course">
             <a:extLst xmlns:a="http://schemas.openxmlformats.org/drawingml/2006/main">
               <a:ext uri="{FF2B5EF4-FFF2-40B4-BE49-F238E27FC236}">
-                <a16:creationId xmlns:a16="http://schemas.microsoft.com/office/drawing/2014/main" id="{58D887B8-6290-42A0-AB84-2E894853FCC0}"/>
+                <a16:creationId xmlns:a16="http://schemas.microsoft.com/office/drawing/2014/main" id="{ACFCB31E-6EB5-4133-BE28-B6C025B5BDB3}"/>
               </a:ext>
             </a:extLst>
           </p:cNvPr>
@@ -2440,7 +2440,7 @@
           <p:cNvPr id="12" name="cover-id">
             <a:extLst xmlns:a="http://schemas.openxmlformats.org/drawingml/2006/main">
               <a:ext uri="{FF2B5EF4-FFF2-40B4-BE49-F238E27FC236}">
-                <a16:creationId xmlns:a16="http://schemas.microsoft.com/office/drawing/2014/main" id="{D4DDEA47-4626-413D-BEC7-8FF2921ED8B2}"/>
+                <a16:creationId xmlns:a16="http://schemas.microsoft.com/office/drawing/2014/main" id="{56EA58A7-FE03-4415-9957-D536AE3EE511}"/>
               </a:ext>
             </a:extLst>
           </p:cNvPr>
@@ -2496,7 +2496,7 @@
     </p:spTree>
     <p:extLst>
       <p:ext uri="{BB962C8B-B14F-4D97-AF65-F5344CB8AC3E}">
-        <p14:creationId xmlns:p14="http://schemas.microsoft.com/office/powerpoint/2010/main" val="1934839471"/>
+        <p14:creationId xmlns:p14="http://schemas.microsoft.com/office/powerpoint/2010/main" val="76687838"/>
       </p:ext>
     </p:extLst>
   </p:cSld>
@@ -2527,7 +2527,7 @@
           <p:cNvPr id="1" name="s10-rule">
             <a:extLst xmlns:a="http://schemas.openxmlformats.org/drawingml/2006/main">
               <a:ext uri="{FF2B5EF4-FFF2-40B4-BE49-F238E27FC236}">
-                <a16:creationId xmlns:a16="http://schemas.microsoft.com/office/drawing/2014/main" id="{B62122CD-D338-4168-B93A-BA65021470C2}"/>
+                <a16:creationId xmlns:a16="http://schemas.microsoft.com/office/drawing/2014/main" id="{84402AC3-C954-495C-B5A8-EC896F170BF4}"/>
               </a:ext>
             </a:extLst>
           </p:cNvPr>
@@ -2560,7 +2560,7 @@
           <p:cNvPr id="2" name="s10-eyebrow">
             <a:extLst xmlns:a="http://schemas.openxmlformats.org/drawingml/2006/main">
               <a:ext uri="{FF2B5EF4-FFF2-40B4-BE49-F238E27FC236}">
-                <a16:creationId xmlns:a16="http://schemas.microsoft.com/office/drawing/2014/main" id="{6C13B973-D33A-425D-9B84-B28FBBA6D5EA}"/>
+                <a16:creationId xmlns:a16="http://schemas.microsoft.com/office/drawing/2014/main" id="{1AFF2072-48E8-421A-86B5-8EAC0F676553}"/>
               </a:ext>
             </a:extLst>
           </p:cNvPr>
@@ -2618,7 +2618,7 @@
           <p:cNvPr id="3" name="s10-title">
             <a:extLst xmlns:a="http://schemas.openxmlformats.org/drawingml/2006/main">
               <a:ext uri="{FF2B5EF4-FFF2-40B4-BE49-F238E27FC236}">
-                <a16:creationId xmlns:a16="http://schemas.microsoft.com/office/drawing/2014/main" id="{9E731FA6-7BC8-4228-A7F2-DD0554C2B9AF}"/>
+                <a16:creationId xmlns:a16="http://schemas.microsoft.com/office/drawing/2014/main" id="{0D68492C-9FC4-428A-8D0F-F9743D37DFC7}"/>
               </a:ext>
             </a:extLst>
           </p:cNvPr>
@@ -2676,7 +2676,7 @@
           <p:cNvPr id="4" name="s10-footer">
             <a:extLst xmlns:a="http://schemas.openxmlformats.org/drawingml/2006/main">
               <a:ext uri="{FF2B5EF4-FFF2-40B4-BE49-F238E27FC236}">
-                <a16:creationId xmlns:a16="http://schemas.microsoft.com/office/drawing/2014/main" id="{6D6B462F-3824-4F62-B891-7E38E3E3C0CF}"/>
+                <a16:creationId xmlns:a16="http://schemas.microsoft.com/office/drawing/2014/main" id="{D698B03E-C796-4D9B-981F-3950C1A79A55}"/>
               </a:ext>
             </a:extLst>
           </p:cNvPr>
@@ -2707,7 +2707,7 @@
           <p:cNvPr id="5" name="s10-identity">
             <a:extLst xmlns:a="http://schemas.openxmlformats.org/drawingml/2006/main">
               <a:ext uri="{FF2B5EF4-FFF2-40B4-BE49-F238E27FC236}">
-                <a16:creationId xmlns:a16="http://schemas.microsoft.com/office/drawing/2014/main" id="{4394A9B5-4A52-4CDD-9E38-D8C671597973}"/>
+                <a16:creationId xmlns:a16="http://schemas.microsoft.com/office/drawing/2014/main" id="{192A538B-A00A-4265-A79C-9C96DC3A48B6}"/>
               </a:ext>
             </a:extLst>
           </p:cNvPr>
@@ -2765,7 +2765,7 @@
           <p:cNvPr id="6" name="case-title">
             <a:extLst xmlns:a="http://schemas.openxmlformats.org/drawingml/2006/main">
               <a:ext uri="{FF2B5EF4-FFF2-40B4-BE49-F238E27FC236}">
-                <a16:creationId xmlns:a16="http://schemas.microsoft.com/office/drawing/2014/main" id="{D3BCBAD5-D08B-4C4A-922C-CFDC02C28A9C}"/>
+                <a16:creationId xmlns:a16="http://schemas.microsoft.com/office/drawing/2014/main" id="{777AE994-2163-4ADD-88FC-4054B22D6ADB}"/>
               </a:ext>
             </a:extLst>
           </p:cNvPr>
@@ -2829,7 +2829,7 @@
           <p:cNvPr id="7" name="case-row-0">
             <a:extLst xmlns:a="http://schemas.openxmlformats.org/drawingml/2006/main">
               <a:ext uri="{FF2B5EF4-FFF2-40B4-BE49-F238E27FC236}">
-                <a16:creationId xmlns:a16="http://schemas.microsoft.com/office/drawing/2014/main" id="{1C991A74-748E-4605-8A2D-EA615B89849C}"/>
+                <a16:creationId xmlns:a16="http://schemas.microsoft.com/office/drawing/2014/main" id="{8DDC34D8-2923-4C28-AD37-027FF7B5AF8A}"/>
               </a:ext>
             </a:extLst>
           </p:cNvPr>
@@ -2893,7 +2893,7 @@
           <p:cNvPr id="8" name="case-row-1">
             <a:extLst xmlns:a="http://schemas.openxmlformats.org/drawingml/2006/main">
               <a:ext uri="{FF2B5EF4-FFF2-40B4-BE49-F238E27FC236}">
-                <a16:creationId xmlns:a16="http://schemas.microsoft.com/office/drawing/2014/main" id="{87807129-770B-44B4-985C-963CA7B60136}"/>
+                <a16:creationId xmlns:a16="http://schemas.microsoft.com/office/drawing/2014/main" id="{FEE45CF8-9CDE-4639-998D-96D7EB5EC276}"/>
               </a:ext>
             </a:extLst>
           </p:cNvPr>
@@ -2957,7 +2957,7 @@
           <p:cNvPr id="9" name="case-row-2">
             <a:extLst xmlns:a="http://schemas.openxmlformats.org/drawingml/2006/main">
               <a:ext uri="{FF2B5EF4-FFF2-40B4-BE49-F238E27FC236}">
-                <a16:creationId xmlns:a16="http://schemas.microsoft.com/office/drawing/2014/main" id="{C81153AB-8AD5-4A4B-B313-025929DAF7C1}"/>
+                <a16:creationId xmlns:a16="http://schemas.microsoft.com/office/drawing/2014/main" id="{BE65DA8F-4B38-45F4-8FE9-66F7359C443B}"/>
               </a:ext>
             </a:extLst>
           </p:cNvPr>
@@ -3021,7 +3021,7 @@
           <p:cNvPr id="10" name="case-row-3">
             <a:extLst xmlns:a="http://schemas.openxmlformats.org/drawingml/2006/main">
               <a:ext uri="{FF2B5EF4-FFF2-40B4-BE49-F238E27FC236}">
-                <a16:creationId xmlns:a16="http://schemas.microsoft.com/office/drawing/2014/main" id="{F8C4747F-F26D-4B0A-BAD1-F7855E837B40}"/>
+                <a16:creationId xmlns:a16="http://schemas.microsoft.com/office/drawing/2014/main" id="{2F47BCD2-A8F3-4EF4-BE2C-D584CE4DD7B0}"/>
               </a:ext>
             </a:extLst>
           </p:cNvPr>
@@ -3085,7 +3085,7 @@
           <p:cNvPr id="11" name="case-row-4">
             <a:extLst xmlns:a="http://schemas.openxmlformats.org/drawingml/2006/main">
               <a:ext uri="{FF2B5EF4-FFF2-40B4-BE49-F238E27FC236}">
-                <a16:creationId xmlns:a16="http://schemas.microsoft.com/office/drawing/2014/main" id="{BA4331DD-53CE-4FAE-93FB-92B3D9017F03}"/>
+                <a16:creationId xmlns:a16="http://schemas.microsoft.com/office/drawing/2014/main" id="{6DA4E019-488F-4A6F-9BC0-D46B7EB8168F}"/>
               </a:ext>
             </a:extLst>
           </p:cNvPr>
@@ -3149,7 +3149,7 @@
           <p:cNvPr id="12" name="s10-takeaway-rule">
             <a:extLst xmlns:a="http://schemas.openxmlformats.org/drawingml/2006/main">
               <a:ext uri="{FF2B5EF4-FFF2-40B4-BE49-F238E27FC236}">
-                <a16:creationId xmlns:a16="http://schemas.microsoft.com/office/drawing/2014/main" id="{FC8CB535-0700-4472-AC8E-26E199543939}"/>
+                <a16:creationId xmlns:a16="http://schemas.microsoft.com/office/drawing/2014/main" id="{8A757F53-359C-4E5E-ABB7-6E06566EF1F7}"/>
               </a:ext>
             </a:extLst>
           </p:cNvPr>
@@ -3182,7 +3182,7 @@
           <p:cNvPr id="13" name="s10-takeaway">
             <a:extLst xmlns:a="http://schemas.openxmlformats.org/drawingml/2006/main">
               <a:ext uri="{FF2B5EF4-FFF2-40B4-BE49-F238E27FC236}">
-                <a16:creationId xmlns:a16="http://schemas.microsoft.com/office/drawing/2014/main" id="{A043E461-14F1-48B9-A5CB-4D8A47A2C1C5}"/>
+                <a16:creationId xmlns:a16="http://schemas.microsoft.com/office/drawing/2014/main" id="{EE1447E2-7638-4394-9081-0B3B81CBD0CA}"/>
               </a:ext>
             </a:extLst>
           </p:cNvPr>
@@ -3238,7 +3238,7 @@
     </p:spTree>
     <p:extLst>
       <p:ext uri="{BB962C8B-B14F-4D97-AF65-F5344CB8AC3E}">
-        <p14:creationId xmlns:p14="http://schemas.microsoft.com/office/powerpoint/2010/main" val="1324159520"/>
+        <p14:creationId xmlns:p14="http://schemas.microsoft.com/office/powerpoint/2010/main" val="1592541939"/>
       </p:ext>
     </p:extLst>
   </p:cSld>
@@ -3269,7 +3269,7 @@
           <p:cNvPr id="1" name="s11-rule">
             <a:extLst xmlns:a="http://schemas.openxmlformats.org/drawingml/2006/main">
               <a:ext uri="{FF2B5EF4-FFF2-40B4-BE49-F238E27FC236}">
-                <a16:creationId xmlns:a16="http://schemas.microsoft.com/office/drawing/2014/main" id="{37F1B11E-B1AB-4F28-89CB-D7755FCE87D4}"/>
+                <a16:creationId xmlns:a16="http://schemas.microsoft.com/office/drawing/2014/main" id="{F6242ABF-D95C-4504-8513-9E7670260299}"/>
               </a:ext>
             </a:extLst>
           </p:cNvPr>
@@ -3302,7 +3302,7 @@
           <p:cNvPr id="2" name="s11-eyebrow">
             <a:extLst xmlns:a="http://schemas.openxmlformats.org/drawingml/2006/main">
               <a:ext uri="{FF2B5EF4-FFF2-40B4-BE49-F238E27FC236}">
-                <a16:creationId xmlns:a16="http://schemas.microsoft.com/office/drawing/2014/main" id="{22BD439E-6492-4269-8303-F68A047BA654}"/>
+                <a16:creationId xmlns:a16="http://schemas.microsoft.com/office/drawing/2014/main" id="{AFCB0CBE-3586-46BE-A225-7D595D2A25C0}"/>
               </a:ext>
             </a:extLst>
           </p:cNvPr>
@@ -3360,7 +3360,7 @@
           <p:cNvPr id="3" name="s11-title">
             <a:extLst xmlns:a="http://schemas.openxmlformats.org/drawingml/2006/main">
               <a:ext uri="{FF2B5EF4-FFF2-40B4-BE49-F238E27FC236}">
-                <a16:creationId xmlns:a16="http://schemas.microsoft.com/office/drawing/2014/main" id="{AC76AAF8-D346-4394-B915-9A52FEC077DE}"/>
+                <a16:creationId xmlns:a16="http://schemas.microsoft.com/office/drawing/2014/main" id="{481F77CC-7A69-412F-8DC2-B84C68D93421}"/>
               </a:ext>
             </a:extLst>
           </p:cNvPr>
@@ -3418,7 +3418,7 @@
           <p:cNvPr id="4" name="s11-footer">
             <a:extLst xmlns:a="http://schemas.openxmlformats.org/drawingml/2006/main">
               <a:ext uri="{FF2B5EF4-FFF2-40B4-BE49-F238E27FC236}">
-                <a16:creationId xmlns:a16="http://schemas.microsoft.com/office/drawing/2014/main" id="{D2F7A452-79B3-4AB0-AC52-B69F4B08AA98}"/>
+                <a16:creationId xmlns:a16="http://schemas.microsoft.com/office/drawing/2014/main" id="{CC607930-6873-4084-8D68-9BDCF312AA60}"/>
               </a:ext>
             </a:extLst>
           </p:cNvPr>
@@ -3449,7 +3449,7 @@
           <p:cNvPr id="5" name="s11-identity">
             <a:extLst xmlns:a="http://schemas.openxmlformats.org/drawingml/2006/main">
               <a:ext uri="{FF2B5EF4-FFF2-40B4-BE49-F238E27FC236}">
-                <a16:creationId xmlns:a16="http://schemas.microsoft.com/office/drawing/2014/main" id="{6084851F-C483-4C2A-8C4C-31A1343AB7DA}"/>
+                <a16:creationId xmlns:a16="http://schemas.microsoft.com/office/drawing/2014/main" id="{992A5224-7E1A-4B8F-A9E1-487AA950552C}"/>
               </a:ext>
             </a:extLst>
           </p:cNvPr>
@@ -3507,7 +3507,7 @@
           <p:cNvPr id="6" name="practice-circle-0">
             <a:extLst xmlns:a="http://schemas.openxmlformats.org/drawingml/2006/main">
               <a:ext uri="{FF2B5EF4-FFF2-40B4-BE49-F238E27FC236}">
-                <a16:creationId xmlns:a16="http://schemas.microsoft.com/office/drawing/2014/main" id="{CDBED8E6-35D7-4A61-A402-4E5E199F8C44}"/>
+                <a16:creationId xmlns:a16="http://schemas.microsoft.com/office/drawing/2014/main" id="{F2E76C2E-35DD-4012-B6B4-3F81EF156508}"/>
               </a:ext>
             </a:extLst>
           </p:cNvPr>
@@ -3540,7 +3540,7 @@
           <p:cNvPr id="7" name="practice-number-0">
             <a:extLst xmlns:a="http://schemas.openxmlformats.org/drawingml/2006/main">
               <a:ext uri="{FF2B5EF4-FFF2-40B4-BE49-F238E27FC236}">
-                <a16:creationId xmlns:a16="http://schemas.microsoft.com/office/drawing/2014/main" id="{B8261D3E-004C-43E3-B615-E04DABCE7374}"/>
+                <a16:creationId xmlns:a16="http://schemas.microsoft.com/office/drawing/2014/main" id="{26BBAAF0-F8F2-4A0F-8A28-AEAABFC038FD}"/>
               </a:ext>
             </a:extLst>
           </p:cNvPr>
@@ -3598,7 +3598,7 @@
           <p:cNvPr id="8" name="practice-item-0">
             <a:extLst xmlns:a="http://schemas.openxmlformats.org/drawingml/2006/main">
               <a:ext uri="{FF2B5EF4-FFF2-40B4-BE49-F238E27FC236}">
-                <a16:creationId xmlns:a16="http://schemas.microsoft.com/office/drawing/2014/main" id="{D1335176-2053-430C-8AE5-E2FABB3417FE}"/>
+                <a16:creationId xmlns:a16="http://schemas.microsoft.com/office/drawing/2014/main" id="{CAFDE297-5F31-410D-B609-E8E8B7D76F53}"/>
               </a:ext>
             </a:extLst>
           </p:cNvPr>
@@ -3662,7 +3662,7 @@
           <p:cNvPr id="9" name="practice-connector-0">
             <a:extLst xmlns:a="http://schemas.openxmlformats.org/drawingml/2006/main">
               <a:ext uri="{FF2B5EF4-FFF2-40B4-BE49-F238E27FC236}">
-                <a16:creationId xmlns:a16="http://schemas.microsoft.com/office/drawing/2014/main" id="{DA61A485-44BA-4865-83A7-4FC6E6A0A896}"/>
+                <a16:creationId xmlns:a16="http://schemas.microsoft.com/office/drawing/2014/main" id="{2DDE062B-1AB3-4A96-A3D9-CC7B79C8C29D}"/>
               </a:ext>
             </a:extLst>
           </p:cNvPr>
@@ -3693,7 +3693,7 @@
           <p:cNvPr id="10" name="practice-circle-1">
             <a:extLst xmlns:a="http://schemas.openxmlformats.org/drawingml/2006/main">
               <a:ext uri="{FF2B5EF4-FFF2-40B4-BE49-F238E27FC236}">
-                <a16:creationId xmlns:a16="http://schemas.microsoft.com/office/drawing/2014/main" id="{5570D9B4-6169-4D23-8AB0-C7F4F1B1A4E6}"/>
+                <a16:creationId xmlns:a16="http://schemas.microsoft.com/office/drawing/2014/main" id="{AD95AF64-D8F4-4616-A7D3-16FEA35F73D2}"/>
               </a:ext>
             </a:extLst>
           </p:cNvPr>
@@ -3726,7 +3726,7 @@
           <p:cNvPr id="11" name="practice-number-1">
             <a:extLst xmlns:a="http://schemas.openxmlformats.org/drawingml/2006/main">
               <a:ext uri="{FF2B5EF4-FFF2-40B4-BE49-F238E27FC236}">
-                <a16:creationId xmlns:a16="http://schemas.microsoft.com/office/drawing/2014/main" id="{3E39F085-D684-4F66-90E7-38BB99DE132F}"/>
+                <a16:creationId xmlns:a16="http://schemas.microsoft.com/office/drawing/2014/main" id="{E3AEFA48-E6A1-4E2E-BA83-3F20C2063214}"/>
               </a:ext>
             </a:extLst>
           </p:cNvPr>
@@ -3784,7 +3784,7 @@
           <p:cNvPr id="12" name="practice-item-1">
             <a:extLst xmlns:a="http://schemas.openxmlformats.org/drawingml/2006/main">
               <a:ext uri="{FF2B5EF4-FFF2-40B4-BE49-F238E27FC236}">
-                <a16:creationId xmlns:a16="http://schemas.microsoft.com/office/drawing/2014/main" id="{0182FEAA-CFA2-4A1B-BC3D-643022AC7C06}"/>
+                <a16:creationId xmlns:a16="http://schemas.microsoft.com/office/drawing/2014/main" id="{6E9ACCD0-8F6E-40B7-BAD7-E51383045DB1}"/>
               </a:ext>
             </a:extLst>
           </p:cNvPr>
@@ -3848,7 +3848,7 @@
           <p:cNvPr id="13" name="practice-connector-1">
             <a:extLst xmlns:a="http://schemas.openxmlformats.org/drawingml/2006/main">
               <a:ext uri="{FF2B5EF4-FFF2-40B4-BE49-F238E27FC236}">
-                <a16:creationId xmlns:a16="http://schemas.microsoft.com/office/drawing/2014/main" id="{88016296-1838-493A-9D5D-F2228AC7C58F}"/>
+                <a16:creationId xmlns:a16="http://schemas.microsoft.com/office/drawing/2014/main" id="{66CB10EC-A402-4EA5-8B82-CAE92B33923C}"/>
               </a:ext>
             </a:extLst>
           </p:cNvPr>
@@ -3879,7 +3879,7 @@
           <p:cNvPr id="14" name="practice-circle-2">
             <a:extLst xmlns:a="http://schemas.openxmlformats.org/drawingml/2006/main">
               <a:ext uri="{FF2B5EF4-FFF2-40B4-BE49-F238E27FC236}">
-                <a16:creationId xmlns:a16="http://schemas.microsoft.com/office/drawing/2014/main" id="{ECA719A3-8ED9-426F-9F39-BC7FD57D8A44}"/>
+                <a16:creationId xmlns:a16="http://schemas.microsoft.com/office/drawing/2014/main" id="{9A959935-C9FF-4895-93E2-57932C8E0EED}"/>
               </a:ext>
             </a:extLst>
           </p:cNvPr>
@@ -3912,7 +3912,7 @@
           <p:cNvPr id="15" name="practice-number-2">
             <a:extLst xmlns:a="http://schemas.openxmlformats.org/drawingml/2006/main">
               <a:ext uri="{FF2B5EF4-FFF2-40B4-BE49-F238E27FC236}">
-                <a16:creationId xmlns:a16="http://schemas.microsoft.com/office/drawing/2014/main" id="{1095542A-68A3-48E5-997F-BD21A0DB68EF}"/>
+                <a16:creationId xmlns:a16="http://schemas.microsoft.com/office/drawing/2014/main" id="{331F27E0-A166-4B89-B8B0-E7A674C6D93B}"/>
               </a:ext>
             </a:extLst>
           </p:cNvPr>
@@ -3970,7 +3970,7 @@
           <p:cNvPr id="16" name="practice-item-2">
             <a:extLst xmlns:a="http://schemas.openxmlformats.org/drawingml/2006/main">
               <a:ext uri="{FF2B5EF4-FFF2-40B4-BE49-F238E27FC236}">
-                <a16:creationId xmlns:a16="http://schemas.microsoft.com/office/drawing/2014/main" id="{1F29F76A-7B8A-44DF-8316-7476B337D190}"/>
+                <a16:creationId xmlns:a16="http://schemas.microsoft.com/office/drawing/2014/main" id="{E4BF8AEB-06FC-4F5E-9B77-8D79748D68A7}"/>
               </a:ext>
             </a:extLst>
           </p:cNvPr>
@@ -4032,7 +4032,7 @@
     </p:spTree>
     <p:extLst>
       <p:ext uri="{BB962C8B-B14F-4D97-AF65-F5344CB8AC3E}">
-        <p14:creationId xmlns:p14="http://schemas.microsoft.com/office/powerpoint/2010/main" val="2030253585"/>
+        <p14:creationId xmlns:p14="http://schemas.microsoft.com/office/powerpoint/2010/main" val="1097823395"/>
       </p:ext>
     </p:extLst>
   </p:cSld>
@@ -4063,7 +4063,7 @@
           <p:cNvPr id="1" name="s12-rule">
             <a:extLst xmlns:a="http://schemas.openxmlformats.org/drawingml/2006/main">
               <a:ext uri="{FF2B5EF4-FFF2-40B4-BE49-F238E27FC236}">
-                <a16:creationId xmlns:a16="http://schemas.microsoft.com/office/drawing/2014/main" id="{B61D9FCF-BF44-4FDE-A6E7-6A5923CF0FA2}"/>
+                <a16:creationId xmlns:a16="http://schemas.microsoft.com/office/drawing/2014/main" id="{5EB62303-A389-4C7A-B5B8-E2BD9C1FB3F3}"/>
               </a:ext>
             </a:extLst>
           </p:cNvPr>
@@ -4096,7 +4096,7 @@
           <p:cNvPr id="2" name="s12-eyebrow">
             <a:extLst xmlns:a="http://schemas.openxmlformats.org/drawingml/2006/main">
               <a:ext uri="{FF2B5EF4-FFF2-40B4-BE49-F238E27FC236}">
-                <a16:creationId xmlns:a16="http://schemas.microsoft.com/office/drawing/2014/main" id="{C4992733-B40A-4DA7-A011-CEC66B6E5BBA}"/>
+                <a16:creationId xmlns:a16="http://schemas.microsoft.com/office/drawing/2014/main" id="{435B3569-1F5B-4B68-805D-7E44CD40D595}"/>
               </a:ext>
             </a:extLst>
           </p:cNvPr>
@@ -4154,7 +4154,7 @@
           <p:cNvPr id="3" name="s12-title">
             <a:extLst xmlns:a="http://schemas.openxmlformats.org/drawingml/2006/main">
               <a:ext uri="{FF2B5EF4-FFF2-40B4-BE49-F238E27FC236}">
-                <a16:creationId xmlns:a16="http://schemas.microsoft.com/office/drawing/2014/main" id="{63F8940F-EACD-4056-BDD6-4FAA95B4A33D}"/>
+                <a16:creationId xmlns:a16="http://schemas.microsoft.com/office/drawing/2014/main" id="{D477DC8D-4F92-4AC8-8766-9DAF7F299CCF}"/>
               </a:ext>
             </a:extLst>
           </p:cNvPr>
@@ -4212,7 +4212,7 @@
           <p:cNvPr id="4" name="s12-footer">
             <a:extLst xmlns:a="http://schemas.openxmlformats.org/drawingml/2006/main">
               <a:ext uri="{FF2B5EF4-FFF2-40B4-BE49-F238E27FC236}">
-                <a16:creationId xmlns:a16="http://schemas.microsoft.com/office/drawing/2014/main" id="{58F1F9DF-8D5C-4FD3-8F4D-BF05F491AEFE}"/>
+                <a16:creationId xmlns:a16="http://schemas.microsoft.com/office/drawing/2014/main" id="{1ACE48A1-2A87-46D0-8458-0ED9E2CA3575}"/>
               </a:ext>
             </a:extLst>
           </p:cNvPr>
@@ -4243,7 +4243,7 @@
           <p:cNvPr id="5" name="s12-identity">
             <a:extLst xmlns:a="http://schemas.openxmlformats.org/drawingml/2006/main">
               <a:ext uri="{FF2B5EF4-FFF2-40B4-BE49-F238E27FC236}">
-                <a16:creationId xmlns:a16="http://schemas.microsoft.com/office/drawing/2014/main" id="{F8720C03-2C69-492B-AD38-F8C7EF9C6253}"/>
+                <a16:creationId xmlns:a16="http://schemas.microsoft.com/office/drawing/2014/main" id="{8DA43837-4B9D-4C56-99C0-5166E62FBF28}"/>
               </a:ext>
             </a:extLst>
           </p:cNvPr>
@@ -4301,7 +4301,7 @@
           <p:cNvPr id="6" name="recap-circle-0">
             <a:extLst xmlns:a="http://schemas.openxmlformats.org/drawingml/2006/main">
               <a:ext uri="{FF2B5EF4-FFF2-40B4-BE49-F238E27FC236}">
-                <a16:creationId xmlns:a16="http://schemas.microsoft.com/office/drawing/2014/main" id="{DA5D307D-FF5C-4398-A191-59A3E7172192}"/>
+                <a16:creationId xmlns:a16="http://schemas.microsoft.com/office/drawing/2014/main" id="{A6ECD707-A809-4606-B80B-C71751F21D0B}"/>
               </a:ext>
             </a:extLst>
           </p:cNvPr>
@@ -4334,7 +4334,7 @@
           <p:cNvPr id="7" name="recap-number-0">
             <a:extLst xmlns:a="http://schemas.openxmlformats.org/drawingml/2006/main">
               <a:ext uri="{FF2B5EF4-FFF2-40B4-BE49-F238E27FC236}">
-                <a16:creationId xmlns:a16="http://schemas.microsoft.com/office/drawing/2014/main" id="{8CCFB613-4DFA-480A-A1D7-BB60AC9EDE92}"/>
+                <a16:creationId xmlns:a16="http://schemas.microsoft.com/office/drawing/2014/main" id="{9059C5E2-CA9E-420C-A616-251012A72E87}"/>
               </a:ext>
             </a:extLst>
           </p:cNvPr>
@@ -4392,7 +4392,7 @@
           <p:cNvPr id="8" name="recap-item-0">
             <a:extLst xmlns:a="http://schemas.openxmlformats.org/drawingml/2006/main">
               <a:ext uri="{FF2B5EF4-FFF2-40B4-BE49-F238E27FC236}">
-                <a16:creationId xmlns:a16="http://schemas.microsoft.com/office/drawing/2014/main" id="{6719EDAA-3311-4D84-A387-93F4C3F679DC}"/>
+                <a16:creationId xmlns:a16="http://schemas.microsoft.com/office/drawing/2014/main" id="{C92A568A-472F-4D6E-BA9D-284AE889E631}"/>
               </a:ext>
             </a:extLst>
           </p:cNvPr>
@@ -4456,7 +4456,7 @@
           <p:cNvPr id="9" name="recap-connector-0">
             <a:extLst xmlns:a="http://schemas.openxmlformats.org/drawingml/2006/main">
               <a:ext uri="{FF2B5EF4-FFF2-40B4-BE49-F238E27FC236}">
-                <a16:creationId xmlns:a16="http://schemas.microsoft.com/office/drawing/2014/main" id="{B4186390-5C39-4AED-BA87-43AC4BE62375}"/>
+                <a16:creationId xmlns:a16="http://schemas.microsoft.com/office/drawing/2014/main" id="{7DF8E20A-58D2-4232-B6B0-65FFF7AC74A1}"/>
               </a:ext>
             </a:extLst>
           </p:cNvPr>
@@ -4487,7 +4487,7 @@
           <p:cNvPr id="10" name="recap-circle-1">
             <a:extLst xmlns:a="http://schemas.openxmlformats.org/drawingml/2006/main">
               <a:ext uri="{FF2B5EF4-FFF2-40B4-BE49-F238E27FC236}">
-                <a16:creationId xmlns:a16="http://schemas.microsoft.com/office/drawing/2014/main" id="{03EE6523-AEF9-44CC-A0C0-F2116C9A11A9}"/>
+                <a16:creationId xmlns:a16="http://schemas.microsoft.com/office/drawing/2014/main" id="{2ACFE125-4C31-45B9-9DD3-E5A17E55986A}"/>
               </a:ext>
             </a:extLst>
           </p:cNvPr>
@@ -4520,7 +4520,7 @@
           <p:cNvPr id="11" name="recap-number-1">
             <a:extLst xmlns:a="http://schemas.openxmlformats.org/drawingml/2006/main">
               <a:ext uri="{FF2B5EF4-FFF2-40B4-BE49-F238E27FC236}">
-                <a16:creationId xmlns:a16="http://schemas.microsoft.com/office/drawing/2014/main" id="{C2AC6150-90C4-4C52-9AE0-7B37AD4A899B}"/>
+                <a16:creationId xmlns:a16="http://schemas.microsoft.com/office/drawing/2014/main" id="{EC91DAB9-3C66-4C34-A16B-AF6DF24F471E}"/>
               </a:ext>
             </a:extLst>
           </p:cNvPr>
@@ -4578,7 +4578,7 @@
           <p:cNvPr id="12" name="recap-item-1">
             <a:extLst xmlns:a="http://schemas.openxmlformats.org/drawingml/2006/main">
               <a:ext uri="{FF2B5EF4-FFF2-40B4-BE49-F238E27FC236}">
-                <a16:creationId xmlns:a16="http://schemas.microsoft.com/office/drawing/2014/main" id="{2ACF7E22-F215-4F4A-B650-A3B61489995E}"/>
+                <a16:creationId xmlns:a16="http://schemas.microsoft.com/office/drawing/2014/main" id="{B436E784-61D4-451C-A3C1-3E2B2C8F0BC1}"/>
               </a:ext>
             </a:extLst>
           </p:cNvPr>
@@ -4642,7 +4642,7 @@
           <p:cNvPr id="13" name="recap-connector-1">
             <a:extLst xmlns:a="http://schemas.openxmlformats.org/drawingml/2006/main">
               <a:ext uri="{FF2B5EF4-FFF2-40B4-BE49-F238E27FC236}">
-                <a16:creationId xmlns:a16="http://schemas.microsoft.com/office/drawing/2014/main" id="{AA9E0A00-A6DF-4D4D-A3CE-960EFF65CDFD}"/>
+                <a16:creationId xmlns:a16="http://schemas.microsoft.com/office/drawing/2014/main" id="{386E3B67-D2D8-4BD1-97A3-9717D4609A71}"/>
               </a:ext>
             </a:extLst>
           </p:cNvPr>
@@ -4673,7 +4673,7 @@
           <p:cNvPr id="14" name="recap-circle-2">
             <a:extLst xmlns:a="http://schemas.openxmlformats.org/drawingml/2006/main">
               <a:ext uri="{FF2B5EF4-FFF2-40B4-BE49-F238E27FC236}">
-                <a16:creationId xmlns:a16="http://schemas.microsoft.com/office/drawing/2014/main" id="{50420A79-A8B6-4FBF-9A2A-885EC0D94096}"/>
+                <a16:creationId xmlns:a16="http://schemas.microsoft.com/office/drawing/2014/main" id="{CA63CF67-5297-4F2A-8340-9C5406C2122B}"/>
               </a:ext>
             </a:extLst>
           </p:cNvPr>
@@ -4706,7 +4706,7 @@
           <p:cNvPr id="15" name="recap-number-2">
             <a:extLst xmlns:a="http://schemas.openxmlformats.org/drawingml/2006/main">
               <a:ext uri="{FF2B5EF4-FFF2-40B4-BE49-F238E27FC236}">
-                <a16:creationId xmlns:a16="http://schemas.microsoft.com/office/drawing/2014/main" id="{CED39CCB-A08A-4B21-8539-619314FE48BC}"/>
+                <a16:creationId xmlns:a16="http://schemas.microsoft.com/office/drawing/2014/main" id="{F60DF35B-B99A-4D37-AC9E-AE84B99ED9A9}"/>
               </a:ext>
             </a:extLst>
           </p:cNvPr>
@@ -4764,7 +4764,7 @@
           <p:cNvPr id="16" name="recap-item-2">
             <a:extLst xmlns:a="http://schemas.openxmlformats.org/drawingml/2006/main">
               <a:ext uri="{FF2B5EF4-FFF2-40B4-BE49-F238E27FC236}">
-                <a16:creationId xmlns:a16="http://schemas.microsoft.com/office/drawing/2014/main" id="{6E4E656F-53D9-4929-955B-27852DBB5BFD}"/>
+                <a16:creationId xmlns:a16="http://schemas.microsoft.com/office/drawing/2014/main" id="{61239FB3-7FE4-4A15-B0A4-9B6A830E2932}"/>
               </a:ext>
             </a:extLst>
           </p:cNvPr>
@@ -4826,7 +4826,7 @@
     </p:spTree>
     <p:extLst>
       <p:ext uri="{BB962C8B-B14F-4D97-AF65-F5344CB8AC3E}">
-        <p14:creationId xmlns:p14="http://schemas.microsoft.com/office/powerpoint/2010/main" val="1143346995"/>
+        <p14:creationId xmlns:p14="http://schemas.microsoft.com/office/powerpoint/2010/main" val="1716020729"/>
       </p:ext>
     </p:extLst>
   </p:cSld>
@@ -4857,7 +4857,7 @@
           <p:cNvPr id="1" name="s13-rule">
             <a:extLst xmlns:a="http://schemas.openxmlformats.org/drawingml/2006/main">
               <a:ext uri="{FF2B5EF4-FFF2-40B4-BE49-F238E27FC236}">
-                <a16:creationId xmlns:a16="http://schemas.microsoft.com/office/drawing/2014/main" id="{503B6C83-9B97-4767-96D5-3422F5914B0B}"/>
+                <a16:creationId xmlns:a16="http://schemas.microsoft.com/office/drawing/2014/main" id="{69D67EF3-64AE-4B0F-82C4-04A4C6FD854B}"/>
               </a:ext>
             </a:extLst>
           </p:cNvPr>
@@ -4890,7 +4890,7 @@
           <p:cNvPr id="2" name="s13-eyebrow">
             <a:extLst xmlns:a="http://schemas.openxmlformats.org/drawingml/2006/main">
               <a:ext uri="{FF2B5EF4-FFF2-40B4-BE49-F238E27FC236}">
-                <a16:creationId xmlns:a16="http://schemas.microsoft.com/office/drawing/2014/main" id="{1A658134-85E1-49B0-9720-2D69B2FEA35C}"/>
+                <a16:creationId xmlns:a16="http://schemas.microsoft.com/office/drawing/2014/main" id="{8F8FE2C4-8E88-4BC7-8004-C0EF1E21D6C4}"/>
               </a:ext>
             </a:extLst>
           </p:cNvPr>
@@ -4948,7 +4948,7 @@
           <p:cNvPr id="3" name="s13-title">
             <a:extLst xmlns:a="http://schemas.openxmlformats.org/drawingml/2006/main">
               <a:ext uri="{FF2B5EF4-FFF2-40B4-BE49-F238E27FC236}">
-                <a16:creationId xmlns:a16="http://schemas.microsoft.com/office/drawing/2014/main" id="{A6D6BC3B-D95A-452A-A6A9-A9D589892C04}"/>
+                <a16:creationId xmlns:a16="http://schemas.microsoft.com/office/drawing/2014/main" id="{8D2D50B1-AFC1-4834-99BB-F30C0682F637}"/>
               </a:ext>
             </a:extLst>
           </p:cNvPr>
@@ -5006,7 +5006,7 @@
           <p:cNvPr id="4" name="s13-footer">
             <a:extLst xmlns:a="http://schemas.openxmlformats.org/drawingml/2006/main">
               <a:ext uri="{FF2B5EF4-FFF2-40B4-BE49-F238E27FC236}">
-                <a16:creationId xmlns:a16="http://schemas.microsoft.com/office/drawing/2014/main" id="{6222B74A-E8C1-44CD-8A3C-61C3756031F8}"/>
+                <a16:creationId xmlns:a16="http://schemas.microsoft.com/office/drawing/2014/main" id="{92B34023-B9CD-41DE-9E6A-1E14015C861F}"/>
               </a:ext>
             </a:extLst>
           </p:cNvPr>
@@ -5037,7 +5037,7 @@
           <p:cNvPr id="5" name="s13-identity">
             <a:extLst xmlns:a="http://schemas.openxmlformats.org/drawingml/2006/main">
               <a:ext uri="{FF2B5EF4-FFF2-40B4-BE49-F238E27FC236}">
-                <a16:creationId xmlns:a16="http://schemas.microsoft.com/office/drawing/2014/main" id="{E8E42ABF-50EE-40D7-B9F2-B0DEA64E09DE}"/>
+                <a16:creationId xmlns:a16="http://schemas.microsoft.com/office/drawing/2014/main" id="{E4A3A7AF-4D6C-4AE0-ACA4-E680D12DD95D}"/>
               </a:ext>
             </a:extLst>
           </p:cNvPr>
@@ -5095,7 +5095,7 @@
           <p:cNvPr id="6" name="source-0">
             <a:extLst xmlns:a="http://schemas.openxmlformats.org/drawingml/2006/main">
               <a:ext uri="{FF2B5EF4-FFF2-40B4-BE49-F238E27FC236}">
-                <a16:creationId xmlns:a16="http://schemas.microsoft.com/office/drawing/2014/main" id="{55785F56-7461-4625-B701-AF04967AE0F8}"/>
+                <a16:creationId xmlns:a16="http://schemas.microsoft.com/office/drawing/2014/main" id="{FC9FC046-EC02-4201-8A3B-E9D9349F615B}"/>
               </a:ext>
             </a:extLst>
           </p:cNvPr>
@@ -5159,7 +5159,7 @@
           <p:cNvPr id="7" name="source-1">
             <a:extLst xmlns:a="http://schemas.openxmlformats.org/drawingml/2006/main">
               <a:ext uri="{FF2B5EF4-FFF2-40B4-BE49-F238E27FC236}">
-                <a16:creationId xmlns:a16="http://schemas.microsoft.com/office/drawing/2014/main" id="{2585405F-7B38-458B-ABAA-CA20BA6C2589}"/>
+                <a16:creationId xmlns:a16="http://schemas.microsoft.com/office/drawing/2014/main" id="{DEC8D551-5563-4EAA-B5F1-C0A4A1E47267}"/>
               </a:ext>
             </a:extLst>
           </p:cNvPr>
@@ -5223,7 +5223,7 @@
           <p:cNvPr id="8" name="source-2">
             <a:extLst xmlns:a="http://schemas.openxmlformats.org/drawingml/2006/main">
               <a:ext uri="{FF2B5EF4-FFF2-40B4-BE49-F238E27FC236}">
-                <a16:creationId xmlns:a16="http://schemas.microsoft.com/office/drawing/2014/main" id="{8DBCE17B-0BBE-42D9-8CCB-E939569A87C5}"/>
+                <a16:creationId xmlns:a16="http://schemas.microsoft.com/office/drawing/2014/main" id="{63C12F61-FE46-4CF8-868C-A080CEBD96D9}"/>
               </a:ext>
             </a:extLst>
           </p:cNvPr>
@@ -5287,7 +5287,7 @@
           <p:cNvPr id="9" name="source-3">
             <a:extLst xmlns:a="http://schemas.openxmlformats.org/drawingml/2006/main">
               <a:ext uri="{FF2B5EF4-FFF2-40B4-BE49-F238E27FC236}">
-                <a16:creationId xmlns:a16="http://schemas.microsoft.com/office/drawing/2014/main" id="{9E69C4DF-F057-46B5-AFBA-392DDC5747F8}"/>
+                <a16:creationId xmlns:a16="http://schemas.microsoft.com/office/drawing/2014/main" id="{C63AFC2F-5703-4A4D-860B-37C00F524985}"/>
               </a:ext>
             </a:extLst>
           </p:cNvPr>
@@ -5351,7 +5351,7 @@
           <p:cNvPr id="10" name="source-4">
             <a:extLst xmlns:a="http://schemas.openxmlformats.org/drawingml/2006/main">
               <a:ext uri="{FF2B5EF4-FFF2-40B4-BE49-F238E27FC236}">
-                <a16:creationId xmlns:a16="http://schemas.microsoft.com/office/drawing/2014/main" id="{D89B7982-876A-4E24-92BA-33853AFB171A}"/>
+                <a16:creationId xmlns:a16="http://schemas.microsoft.com/office/drawing/2014/main" id="{D732DB4B-F355-46B1-8B64-FC87B54709F1}"/>
               </a:ext>
             </a:extLst>
           </p:cNvPr>
@@ -5415,7 +5415,7 @@
           <p:cNvPr id="11" name="s13-takeaway-rule">
             <a:extLst xmlns:a="http://schemas.openxmlformats.org/drawingml/2006/main">
               <a:ext uri="{FF2B5EF4-FFF2-40B4-BE49-F238E27FC236}">
-                <a16:creationId xmlns:a16="http://schemas.microsoft.com/office/drawing/2014/main" id="{073ABB3E-AC70-4465-AF62-A4805BE02137}"/>
+                <a16:creationId xmlns:a16="http://schemas.microsoft.com/office/drawing/2014/main" id="{A6810226-4F49-475F-8158-EF35EBFCFE7A}"/>
               </a:ext>
             </a:extLst>
           </p:cNvPr>
@@ -5448,7 +5448,7 @@
           <p:cNvPr id="12" name="s13-takeaway">
             <a:extLst xmlns:a="http://schemas.openxmlformats.org/drawingml/2006/main">
               <a:ext uri="{FF2B5EF4-FFF2-40B4-BE49-F238E27FC236}">
-                <a16:creationId xmlns:a16="http://schemas.microsoft.com/office/drawing/2014/main" id="{9013461C-E3FC-4041-AFD8-4DA9D67F5281}"/>
+                <a16:creationId xmlns:a16="http://schemas.microsoft.com/office/drawing/2014/main" id="{9E5070A6-746D-4FA0-B9BA-CAAD589034E7}"/>
               </a:ext>
             </a:extLst>
           </p:cNvPr>
@@ -5473,7 +5473,7 @@
         </p:spPr>
         <p:txBody>
           <a:bodyPr xmlns:a="http://schemas.openxmlformats.org/drawingml/2006/main" lIns="0" tIns="0" rIns="0" bIns="0" anchor="ctr">
-            <a:normAutofit fontScale="95911"/>
+            <a:normAutofit fontScale="100000"/>
           </a:bodyPr>
           <a:lstStyle xmlns:a="http://schemas.openxmlformats.org/drawingml/2006/main"/>
           <a:p xmlns:a="http://schemas.openxmlformats.org/drawingml/2006/main">
@@ -5496,7 +5496,7 @@
                 <a:ea typeface="PingFang SC"/>
                 <a:cs typeface="PingFang SC"/>
               </a:rPr>
-              <a:t>课程精编页用于讲授主线；播放器中的“原课件”模式保留团队 PowerPoint 精选页、真实图片和可播放视频。</a:t>
+              <a:t>课程正文与幻灯片共享同一知识主线，图片和视频用于帮助理解本节概念与案例。</a:t>
             </a:r>
           </a:p>
         </p:txBody>
@@ -5504,7 +5504,7 @@
     </p:spTree>
     <p:extLst>
       <p:ext uri="{BB962C8B-B14F-4D97-AF65-F5344CB8AC3E}">
-        <p14:creationId xmlns:p14="http://schemas.microsoft.com/office/powerpoint/2010/main" val="1595921895"/>
+        <p14:creationId xmlns:p14="http://schemas.microsoft.com/office/powerpoint/2010/main" val="463560561"/>
       </p:ext>
     </p:extLst>
   </p:cSld>
@@ -5535,7 +5535,7 @@
           <p:cNvPr id="1" name="s2-rule">
             <a:extLst xmlns:a="http://schemas.openxmlformats.org/drawingml/2006/main">
               <a:ext uri="{FF2B5EF4-FFF2-40B4-BE49-F238E27FC236}">
-                <a16:creationId xmlns:a16="http://schemas.microsoft.com/office/drawing/2014/main" id="{33B2B9B1-5F80-4435-986B-73011FD53E35}"/>
+                <a16:creationId xmlns:a16="http://schemas.microsoft.com/office/drawing/2014/main" id="{564CBCA0-62E1-465B-89ED-C02ADC95A5AD}"/>
               </a:ext>
             </a:extLst>
           </p:cNvPr>
@@ -5568,7 +5568,7 @@
           <p:cNvPr id="2" name="s2-eyebrow">
             <a:extLst xmlns:a="http://schemas.openxmlformats.org/drawingml/2006/main">
               <a:ext uri="{FF2B5EF4-FFF2-40B4-BE49-F238E27FC236}">
-                <a16:creationId xmlns:a16="http://schemas.microsoft.com/office/drawing/2014/main" id="{50525F11-688E-4134-A7F7-469B3ED38C98}"/>
+                <a16:creationId xmlns:a16="http://schemas.microsoft.com/office/drawing/2014/main" id="{C41F30F9-DB44-402D-A239-769BC5B0B6B6}"/>
               </a:ext>
             </a:extLst>
           </p:cNvPr>
@@ -5626,7 +5626,7 @@
           <p:cNvPr id="3" name="s2-title">
             <a:extLst xmlns:a="http://schemas.openxmlformats.org/drawingml/2006/main">
               <a:ext uri="{FF2B5EF4-FFF2-40B4-BE49-F238E27FC236}">
-                <a16:creationId xmlns:a16="http://schemas.microsoft.com/office/drawing/2014/main" id="{25725ED0-7D1E-43E3-A928-113745A17D9C}"/>
+                <a16:creationId xmlns:a16="http://schemas.microsoft.com/office/drawing/2014/main" id="{C54232B1-37E5-43B1-82C2-32B308450B11}"/>
               </a:ext>
             </a:extLst>
           </p:cNvPr>
@@ -5684,7 +5684,7 @@
           <p:cNvPr id="4" name="s2-footer">
             <a:extLst xmlns:a="http://schemas.openxmlformats.org/drawingml/2006/main">
               <a:ext uri="{FF2B5EF4-FFF2-40B4-BE49-F238E27FC236}">
-                <a16:creationId xmlns:a16="http://schemas.microsoft.com/office/drawing/2014/main" id="{08D265EF-BA25-4D8B-900A-9AF677129B35}"/>
+                <a16:creationId xmlns:a16="http://schemas.microsoft.com/office/drawing/2014/main" id="{E62E8263-436B-4B30-A75C-5994618043E4}"/>
               </a:ext>
             </a:extLst>
           </p:cNvPr>
@@ -5715,7 +5715,7 @@
           <p:cNvPr id="5" name="s2-identity">
             <a:extLst xmlns:a="http://schemas.openxmlformats.org/drawingml/2006/main">
               <a:ext uri="{FF2B5EF4-FFF2-40B4-BE49-F238E27FC236}">
-                <a16:creationId xmlns:a16="http://schemas.microsoft.com/office/drawing/2014/main" id="{97E5D72E-C44F-417A-A667-56B44EE9E21D}"/>
+                <a16:creationId xmlns:a16="http://schemas.microsoft.com/office/drawing/2014/main" id="{EC2AB912-DA25-4BCF-BC26-24E8A1D846A9}"/>
               </a:ext>
             </a:extLst>
           </p:cNvPr>
@@ -5773,7 +5773,7 @@
           <p:cNvPr id="6" name="objective-1">
             <a:extLst xmlns:a="http://schemas.openxmlformats.org/drawingml/2006/main">
               <a:ext uri="{FF2B5EF4-FFF2-40B4-BE49-F238E27FC236}">
-                <a16:creationId xmlns:a16="http://schemas.microsoft.com/office/drawing/2014/main" id="{487A6B95-EE64-40CD-A4AA-85B0C7982195}"/>
+                <a16:creationId xmlns:a16="http://schemas.microsoft.com/office/drawing/2014/main" id="{7A53A324-DA50-4D61-887F-F18136085A8E}"/>
               </a:ext>
             </a:extLst>
           </p:cNvPr>
@@ -5860,7 +5860,7 @@
           <p:cNvPr id="7" name="objective-2">
             <a:extLst xmlns:a="http://schemas.openxmlformats.org/drawingml/2006/main">
               <a:ext uri="{FF2B5EF4-FFF2-40B4-BE49-F238E27FC236}">
-                <a16:creationId xmlns:a16="http://schemas.microsoft.com/office/drawing/2014/main" id="{EB09EAB9-ED64-46FB-AB04-9A59BA0265B5}"/>
+                <a16:creationId xmlns:a16="http://schemas.microsoft.com/office/drawing/2014/main" id="{85D86381-9220-4004-87E3-6A5CA6BCE5EB}"/>
               </a:ext>
             </a:extLst>
           </p:cNvPr>
@@ -5945,7 +5945,7 @@
     </p:spTree>
     <p:extLst>
       <p:ext uri="{BB962C8B-B14F-4D97-AF65-F5344CB8AC3E}">
-        <p14:creationId xmlns:p14="http://schemas.microsoft.com/office/powerpoint/2010/main" val="1201912448"/>
+        <p14:creationId xmlns:p14="http://schemas.microsoft.com/office/powerpoint/2010/main" val="1798516210"/>
       </p:ext>
     </p:extLst>
   </p:cSld>
@@ -5976,7 +5976,7 @@
           <p:cNvPr id="1" name="s3-rule">
             <a:extLst xmlns:a="http://schemas.openxmlformats.org/drawingml/2006/main">
               <a:ext uri="{FF2B5EF4-FFF2-40B4-BE49-F238E27FC236}">
-                <a16:creationId xmlns:a16="http://schemas.microsoft.com/office/drawing/2014/main" id="{C8A35ED2-B386-403F-B7EF-97D9AF9F355D}"/>
+                <a16:creationId xmlns:a16="http://schemas.microsoft.com/office/drawing/2014/main" id="{3A46FD31-CE5D-40BD-A53F-36D5AED0F652}"/>
               </a:ext>
             </a:extLst>
           </p:cNvPr>
@@ -6009,7 +6009,7 @@
           <p:cNvPr id="2" name="s3-eyebrow">
             <a:extLst xmlns:a="http://schemas.openxmlformats.org/drawingml/2006/main">
               <a:ext uri="{FF2B5EF4-FFF2-40B4-BE49-F238E27FC236}">
-                <a16:creationId xmlns:a16="http://schemas.microsoft.com/office/drawing/2014/main" id="{3198FE86-DB1B-4212-869D-3B7822AF6ABD}"/>
+                <a16:creationId xmlns:a16="http://schemas.microsoft.com/office/drawing/2014/main" id="{F7166485-6037-4A4C-BD5E-CFADB5B1E47C}"/>
               </a:ext>
             </a:extLst>
           </p:cNvPr>
@@ -6067,7 +6067,7 @@
           <p:cNvPr id="3" name="s3-title">
             <a:extLst xmlns:a="http://schemas.openxmlformats.org/drawingml/2006/main">
               <a:ext uri="{FF2B5EF4-FFF2-40B4-BE49-F238E27FC236}">
-                <a16:creationId xmlns:a16="http://schemas.microsoft.com/office/drawing/2014/main" id="{1C690E27-B79E-4EFC-8D1E-B40451C5C5E2}"/>
+                <a16:creationId xmlns:a16="http://schemas.microsoft.com/office/drawing/2014/main" id="{B8B9D4CF-8B6C-409E-AA2F-AC96EC8043F2}"/>
               </a:ext>
             </a:extLst>
           </p:cNvPr>
@@ -6125,7 +6125,7 @@
           <p:cNvPr id="4" name="s3-footer">
             <a:extLst xmlns:a="http://schemas.openxmlformats.org/drawingml/2006/main">
               <a:ext uri="{FF2B5EF4-FFF2-40B4-BE49-F238E27FC236}">
-                <a16:creationId xmlns:a16="http://schemas.microsoft.com/office/drawing/2014/main" id="{035EEC2F-1BBC-4E30-B57E-2316F44CE1BF}"/>
+                <a16:creationId xmlns:a16="http://schemas.microsoft.com/office/drawing/2014/main" id="{29501B1B-EE4B-4271-AC3D-11ECCA05493A}"/>
               </a:ext>
             </a:extLst>
           </p:cNvPr>
@@ -6156,7 +6156,7 @@
           <p:cNvPr id="5" name="s3-identity">
             <a:extLst xmlns:a="http://schemas.openxmlformats.org/drawingml/2006/main">
               <a:ext uri="{FF2B5EF4-FFF2-40B4-BE49-F238E27FC236}">
-                <a16:creationId xmlns:a16="http://schemas.microsoft.com/office/drawing/2014/main" id="{B1D075BE-15C8-4B01-B0E2-B214AEE994D4}"/>
+                <a16:creationId xmlns:a16="http://schemas.microsoft.com/office/drawing/2014/main" id="{85702985-1E25-4DBC-A7E3-AF2F97A69786}"/>
               </a:ext>
             </a:extLst>
           </p:cNvPr>
@@ -6214,7 +6214,7 @@
           <p:cNvPr id="6" name="core-no-0">
             <a:extLst xmlns:a="http://schemas.openxmlformats.org/drawingml/2006/main">
               <a:ext uri="{FF2B5EF4-FFF2-40B4-BE49-F238E27FC236}">
-                <a16:creationId xmlns:a16="http://schemas.microsoft.com/office/drawing/2014/main" id="{857A9804-29C1-44E1-9D7C-CBCE6F547EC9}"/>
+                <a16:creationId xmlns:a16="http://schemas.microsoft.com/office/drawing/2014/main" id="{6E0FB43E-D5B1-4DE5-80DE-E229474F437D}"/>
               </a:ext>
             </a:extLst>
           </p:cNvPr>
@@ -6272,7 +6272,7 @@
           <p:cNvPr id="7" name="core-label-0">
             <a:extLst xmlns:a="http://schemas.openxmlformats.org/drawingml/2006/main">
               <a:ext uri="{FF2B5EF4-FFF2-40B4-BE49-F238E27FC236}">
-                <a16:creationId xmlns:a16="http://schemas.microsoft.com/office/drawing/2014/main" id="{161E4565-10E8-48DA-93CF-86A4C05B4AF1}"/>
+                <a16:creationId xmlns:a16="http://schemas.microsoft.com/office/drawing/2014/main" id="{4C81F73F-B232-4032-BE28-82E1A84BA785}"/>
               </a:ext>
             </a:extLst>
           </p:cNvPr>
@@ -6330,7 +6330,7 @@
           <p:cNvPr id="8" name="core-body-0">
             <a:extLst xmlns:a="http://schemas.openxmlformats.org/drawingml/2006/main">
               <a:ext uri="{FF2B5EF4-FFF2-40B4-BE49-F238E27FC236}">
-                <a16:creationId xmlns:a16="http://schemas.microsoft.com/office/drawing/2014/main" id="{2EC52A17-5F22-4821-930E-583F2CC47816}"/>
+                <a16:creationId xmlns:a16="http://schemas.microsoft.com/office/drawing/2014/main" id="{7BE6A99F-1F60-42D7-94EF-BE4140B04C4A}"/>
               </a:ext>
             </a:extLst>
           </p:cNvPr>
@@ -6394,7 +6394,7 @@
           <p:cNvPr id="9" name="core-no-1">
             <a:extLst xmlns:a="http://schemas.openxmlformats.org/drawingml/2006/main">
               <a:ext uri="{FF2B5EF4-FFF2-40B4-BE49-F238E27FC236}">
-                <a16:creationId xmlns:a16="http://schemas.microsoft.com/office/drawing/2014/main" id="{8043B35E-D9E1-46AB-8DD6-DBEF46BB4E9C}"/>
+                <a16:creationId xmlns:a16="http://schemas.microsoft.com/office/drawing/2014/main" id="{0F2E4346-0F36-4340-9007-78B837207107}"/>
               </a:ext>
             </a:extLst>
           </p:cNvPr>
@@ -6452,7 +6452,7 @@
           <p:cNvPr id="10" name="core-label-1">
             <a:extLst xmlns:a="http://schemas.openxmlformats.org/drawingml/2006/main">
               <a:ext uri="{FF2B5EF4-FFF2-40B4-BE49-F238E27FC236}">
-                <a16:creationId xmlns:a16="http://schemas.microsoft.com/office/drawing/2014/main" id="{442C5706-0A20-4344-8E64-34C4BFDF4D3E}"/>
+                <a16:creationId xmlns:a16="http://schemas.microsoft.com/office/drawing/2014/main" id="{31BB8B2E-A4AF-40AC-BAB5-ABDF00505DBB}"/>
               </a:ext>
             </a:extLst>
           </p:cNvPr>
@@ -6510,7 +6510,7 @@
           <p:cNvPr id="11" name="core-body-1">
             <a:extLst xmlns:a="http://schemas.openxmlformats.org/drawingml/2006/main">
               <a:ext uri="{FF2B5EF4-FFF2-40B4-BE49-F238E27FC236}">
-                <a16:creationId xmlns:a16="http://schemas.microsoft.com/office/drawing/2014/main" id="{27590291-B717-49DF-9DA1-F8912C92B118}"/>
+                <a16:creationId xmlns:a16="http://schemas.microsoft.com/office/drawing/2014/main" id="{843CE1F9-FDE5-448D-92D0-A08AE5AB5A84}"/>
               </a:ext>
             </a:extLst>
           </p:cNvPr>
@@ -6574,7 +6574,7 @@
           <p:cNvPr id="12" name="s3-takeaway-rule">
             <a:extLst xmlns:a="http://schemas.openxmlformats.org/drawingml/2006/main">
               <a:ext uri="{FF2B5EF4-FFF2-40B4-BE49-F238E27FC236}">
-                <a16:creationId xmlns:a16="http://schemas.microsoft.com/office/drawing/2014/main" id="{3057DF4A-0704-47AA-877C-60CAF4821009}"/>
+                <a16:creationId xmlns:a16="http://schemas.microsoft.com/office/drawing/2014/main" id="{7F342FB4-9744-4AE6-936F-FFF609A7A25E}"/>
               </a:ext>
             </a:extLst>
           </p:cNvPr>
@@ -6607,7 +6607,7 @@
           <p:cNvPr id="13" name="s3-takeaway">
             <a:extLst xmlns:a="http://schemas.openxmlformats.org/drawingml/2006/main">
               <a:ext uri="{FF2B5EF4-FFF2-40B4-BE49-F238E27FC236}">
-                <a16:creationId xmlns:a16="http://schemas.microsoft.com/office/drawing/2014/main" id="{E64306B5-96E9-4327-A7BB-4F3F8F297A41}"/>
+                <a16:creationId xmlns:a16="http://schemas.microsoft.com/office/drawing/2014/main" id="{ECC044E5-384E-4910-8F7B-007F2F1475F7}"/>
               </a:ext>
             </a:extLst>
           </p:cNvPr>
@@ -6663,7 +6663,7 @@
     </p:spTree>
     <p:extLst>
       <p:ext uri="{BB962C8B-B14F-4D97-AF65-F5344CB8AC3E}">
-        <p14:creationId xmlns:p14="http://schemas.microsoft.com/office/powerpoint/2010/main" val="1355289348"/>
+        <p14:creationId xmlns:p14="http://schemas.microsoft.com/office/powerpoint/2010/main" val="1901403926"/>
       </p:ext>
     </p:extLst>
   </p:cSld>
@@ -6694,7 +6694,7 @@
           <p:cNvPr id="1" name="s4-rule">
             <a:extLst xmlns:a="http://schemas.openxmlformats.org/drawingml/2006/main">
               <a:ext uri="{FF2B5EF4-FFF2-40B4-BE49-F238E27FC236}">
-                <a16:creationId xmlns:a16="http://schemas.microsoft.com/office/drawing/2014/main" id="{22E6439C-F791-4B50-BF80-22EB818E75FE}"/>
+                <a16:creationId xmlns:a16="http://schemas.microsoft.com/office/drawing/2014/main" id="{D18550CA-AFF9-46C2-ABCB-270B95E59FB9}"/>
               </a:ext>
             </a:extLst>
           </p:cNvPr>
@@ -6727,7 +6727,7 @@
           <p:cNvPr id="2" name="s4-eyebrow">
             <a:extLst xmlns:a="http://schemas.openxmlformats.org/drawingml/2006/main">
               <a:ext uri="{FF2B5EF4-FFF2-40B4-BE49-F238E27FC236}">
-                <a16:creationId xmlns:a16="http://schemas.microsoft.com/office/drawing/2014/main" id="{7A35C7E7-C6A9-4D9A-AB73-B9AF587B1DDF}"/>
+                <a16:creationId xmlns:a16="http://schemas.microsoft.com/office/drawing/2014/main" id="{C8FE8C7F-355E-48CB-9A41-11F693BC8134}"/>
               </a:ext>
             </a:extLst>
           </p:cNvPr>
@@ -6785,7 +6785,7 @@
           <p:cNvPr id="3" name="s4-title">
             <a:extLst xmlns:a="http://schemas.openxmlformats.org/drawingml/2006/main">
               <a:ext uri="{FF2B5EF4-FFF2-40B4-BE49-F238E27FC236}">
-                <a16:creationId xmlns:a16="http://schemas.microsoft.com/office/drawing/2014/main" id="{0CB398BB-694C-478C-AC31-B22CE1B785D0}"/>
+                <a16:creationId xmlns:a16="http://schemas.microsoft.com/office/drawing/2014/main" id="{5A9C2D79-C1F0-4E8C-8A7E-3FAC7695A6B3}"/>
               </a:ext>
             </a:extLst>
           </p:cNvPr>
@@ -6843,7 +6843,7 @@
           <p:cNvPr id="4" name="s4-footer">
             <a:extLst xmlns:a="http://schemas.openxmlformats.org/drawingml/2006/main">
               <a:ext uri="{FF2B5EF4-FFF2-40B4-BE49-F238E27FC236}">
-                <a16:creationId xmlns:a16="http://schemas.microsoft.com/office/drawing/2014/main" id="{7E559B8F-CA9A-4094-B6D6-1C9819B4FA93}"/>
+                <a16:creationId xmlns:a16="http://schemas.microsoft.com/office/drawing/2014/main" id="{6CE8081F-0D17-4782-BDD9-EDF766793937}"/>
               </a:ext>
             </a:extLst>
           </p:cNvPr>
@@ -6874,7 +6874,7 @@
           <p:cNvPr id="5" name="s4-identity">
             <a:extLst xmlns:a="http://schemas.openxmlformats.org/drawingml/2006/main">
               <a:ext uri="{FF2B5EF4-FFF2-40B4-BE49-F238E27FC236}">
-                <a16:creationId xmlns:a16="http://schemas.microsoft.com/office/drawing/2014/main" id="{D3CCD112-866D-4190-AAE1-7D0742C1FE91}"/>
+                <a16:creationId xmlns:a16="http://schemas.microsoft.com/office/drawing/2014/main" id="{EEA06891-5780-4D63-AA77-9D145E5F0D94}"/>
               </a:ext>
             </a:extLst>
           </p:cNvPr>
@@ -6932,7 +6932,7 @@
           <p:cNvPr id="6" name="core-no-0">
             <a:extLst xmlns:a="http://schemas.openxmlformats.org/drawingml/2006/main">
               <a:ext uri="{FF2B5EF4-FFF2-40B4-BE49-F238E27FC236}">
-                <a16:creationId xmlns:a16="http://schemas.microsoft.com/office/drawing/2014/main" id="{028FD5E5-3DD7-46EC-9D79-D7A9035A1A0D}"/>
+                <a16:creationId xmlns:a16="http://schemas.microsoft.com/office/drawing/2014/main" id="{54C66D3A-89BC-43B5-B9AB-82B394BC8A43}"/>
               </a:ext>
             </a:extLst>
           </p:cNvPr>
@@ -6990,7 +6990,7 @@
           <p:cNvPr id="7" name="core-label-0">
             <a:extLst xmlns:a="http://schemas.openxmlformats.org/drawingml/2006/main">
               <a:ext uri="{FF2B5EF4-FFF2-40B4-BE49-F238E27FC236}">
-                <a16:creationId xmlns:a16="http://schemas.microsoft.com/office/drawing/2014/main" id="{24D844D7-8450-4E80-8A71-C65F81A19343}"/>
+                <a16:creationId xmlns:a16="http://schemas.microsoft.com/office/drawing/2014/main" id="{F888880A-EAE6-44A8-A0CC-C03C33DE79D9}"/>
               </a:ext>
             </a:extLst>
           </p:cNvPr>
@@ -7048,7 +7048,7 @@
           <p:cNvPr id="8" name="core-body-0">
             <a:extLst xmlns:a="http://schemas.openxmlformats.org/drawingml/2006/main">
               <a:ext uri="{FF2B5EF4-FFF2-40B4-BE49-F238E27FC236}">
-                <a16:creationId xmlns:a16="http://schemas.microsoft.com/office/drawing/2014/main" id="{836CBF5A-F470-4948-A7B8-1CAAC8CAF3F3}"/>
+                <a16:creationId xmlns:a16="http://schemas.microsoft.com/office/drawing/2014/main" id="{A3529621-D19D-4C84-A2F6-DAEAD2DA32C0}"/>
               </a:ext>
             </a:extLst>
           </p:cNvPr>
@@ -7112,7 +7112,7 @@
           <p:cNvPr id="9" name="core-no-1">
             <a:extLst xmlns:a="http://schemas.openxmlformats.org/drawingml/2006/main">
               <a:ext uri="{FF2B5EF4-FFF2-40B4-BE49-F238E27FC236}">
-                <a16:creationId xmlns:a16="http://schemas.microsoft.com/office/drawing/2014/main" id="{D88C3A6D-6B2A-434F-92CB-856595CE1435}"/>
+                <a16:creationId xmlns:a16="http://schemas.microsoft.com/office/drawing/2014/main" id="{7B03E177-B934-4ACF-9D20-903A6941106E}"/>
               </a:ext>
             </a:extLst>
           </p:cNvPr>
@@ -7170,7 +7170,7 @@
           <p:cNvPr id="10" name="core-body-1">
             <a:extLst xmlns:a="http://schemas.openxmlformats.org/drawingml/2006/main">
               <a:ext uri="{FF2B5EF4-FFF2-40B4-BE49-F238E27FC236}">
-                <a16:creationId xmlns:a16="http://schemas.microsoft.com/office/drawing/2014/main" id="{DA810D81-6867-4831-AE5B-28D463478E86}"/>
+                <a16:creationId xmlns:a16="http://schemas.microsoft.com/office/drawing/2014/main" id="{D7E0215C-EA61-4D82-B49C-F5A1783588BD}"/>
               </a:ext>
             </a:extLst>
           </p:cNvPr>
@@ -7234,7 +7234,7 @@
           <p:cNvPr id="11" name="s4-takeaway-rule">
             <a:extLst xmlns:a="http://schemas.openxmlformats.org/drawingml/2006/main">
               <a:ext uri="{FF2B5EF4-FFF2-40B4-BE49-F238E27FC236}">
-                <a16:creationId xmlns:a16="http://schemas.microsoft.com/office/drawing/2014/main" id="{DF02030E-D098-485E-A11C-7E0F46440635}"/>
+                <a16:creationId xmlns:a16="http://schemas.microsoft.com/office/drawing/2014/main" id="{5BA59490-3895-41AD-B84E-E93C1F972019}"/>
               </a:ext>
             </a:extLst>
           </p:cNvPr>
@@ -7267,7 +7267,7 @@
           <p:cNvPr id="12" name="s4-takeaway">
             <a:extLst xmlns:a="http://schemas.openxmlformats.org/drawingml/2006/main">
               <a:ext uri="{FF2B5EF4-FFF2-40B4-BE49-F238E27FC236}">
-                <a16:creationId xmlns:a16="http://schemas.microsoft.com/office/drawing/2014/main" id="{5DCA240B-98CC-4388-B155-B0A80F2C2B20}"/>
+                <a16:creationId xmlns:a16="http://schemas.microsoft.com/office/drawing/2014/main" id="{30A50578-D473-4F3F-9062-D303698F68E1}"/>
               </a:ext>
             </a:extLst>
           </p:cNvPr>
@@ -7323,7 +7323,7 @@
     </p:spTree>
     <p:extLst>
       <p:ext uri="{BB962C8B-B14F-4D97-AF65-F5344CB8AC3E}">
-        <p14:creationId xmlns:p14="http://schemas.microsoft.com/office/powerpoint/2010/main" val="1895037870"/>
+        <p14:creationId xmlns:p14="http://schemas.microsoft.com/office/powerpoint/2010/main" val="1423043486"/>
       </p:ext>
     </p:extLst>
   </p:cSld>
@@ -7354,7 +7354,7 @@
           <p:cNvPr id="1" name="s5-rule">
             <a:extLst xmlns:a="http://schemas.openxmlformats.org/drawingml/2006/main">
               <a:ext uri="{FF2B5EF4-FFF2-40B4-BE49-F238E27FC236}">
-                <a16:creationId xmlns:a16="http://schemas.microsoft.com/office/drawing/2014/main" id="{63A19BA5-3E7B-4865-9DD5-E9EE977FF2D8}"/>
+                <a16:creationId xmlns:a16="http://schemas.microsoft.com/office/drawing/2014/main" id="{ED372D7E-82F6-4BB8-8663-06096026363A}"/>
               </a:ext>
             </a:extLst>
           </p:cNvPr>
@@ -7387,7 +7387,7 @@
           <p:cNvPr id="2" name="s5-eyebrow">
             <a:extLst xmlns:a="http://schemas.openxmlformats.org/drawingml/2006/main">
               <a:ext uri="{FF2B5EF4-FFF2-40B4-BE49-F238E27FC236}">
-                <a16:creationId xmlns:a16="http://schemas.microsoft.com/office/drawing/2014/main" id="{F49B9169-9BFF-41A0-A2EB-49D837C46940}"/>
+                <a16:creationId xmlns:a16="http://schemas.microsoft.com/office/drawing/2014/main" id="{D96BC4EC-FCD5-4A11-88DD-EC995183A847}"/>
               </a:ext>
             </a:extLst>
           </p:cNvPr>
@@ -7445,7 +7445,7 @@
           <p:cNvPr id="3" name="s5-title">
             <a:extLst xmlns:a="http://schemas.openxmlformats.org/drawingml/2006/main">
               <a:ext uri="{FF2B5EF4-FFF2-40B4-BE49-F238E27FC236}">
-                <a16:creationId xmlns:a16="http://schemas.microsoft.com/office/drawing/2014/main" id="{C4CD2FC1-FFD3-4C5D-899B-B9CA6A171291}"/>
+                <a16:creationId xmlns:a16="http://schemas.microsoft.com/office/drawing/2014/main" id="{E360EB07-112F-49CF-8D8C-FD0CCF486125}"/>
               </a:ext>
             </a:extLst>
           </p:cNvPr>
@@ -7503,7 +7503,7 @@
           <p:cNvPr id="4" name="s5-footer">
             <a:extLst xmlns:a="http://schemas.openxmlformats.org/drawingml/2006/main">
               <a:ext uri="{FF2B5EF4-FFF2-40B4-BE49-F238E27FC236}">
-                <a16:creationId xmlns:a16="http://schemas.microsoft.com/office/drawing/2014/main" id="{C72EE195-94B5-4E53-BC55-5C0E5DB51C3F}"/>
+                <a16:creationId xmlns:a16="http://schemas.microsoft.com/office/drawing/2014/main" id="{BF986982-7961-40D7-87B8-C4A321366C20}"/>
               </a:ext>
             </a:extLst>
           </p:cNvPr>
@@ -7534,7 +7534,7 @@
           <p:cNvPr id="5" name="s5-identity">
             <a:extLst xmlns:a="http://schemas.openxmlformats.org/drawingml/2006/main">
               <a:ext uri="{FF2B5EF4-FFF2-40B4-BE49-F238E27FC236}">
-                <a16:creationId xmlns:a16="http://schemas.microsoft.com/office/drawing/2014/main" id="{DB912E61-B793-4213-8056-F448018951A0}"/>
+                <a16:creationId xmlns:a16="http://schemas.microsoft.com/office/drawing/2014/main" id="{F1536DDC-B893-4B2B-9F48-179F959E2A52}"/>
               </a:ext>
             </a:extLst>
           </p:cNvPr>
@@ -7592,7 +7592,7 @@
           <p:cNvPr id="6" name="core-no-0">
             <a:extLst xmlns:a="http://schemas.openxmlformats.org/drawingml/2006/main">
               <a:ext uri="{FF2B5EF4-FFF2-40B4-BE49-F238E27FC236}">
-                <a16:creationId xmlns:a16="http://schemas.microsoft.com/office/drawing/2014/main" id="{8B3B1822-8C30-44DF-9E87-CF19DEB4D385}"/>
+                <a16:creationId xmlns:a16="http://schemas.microsoft.com/office/drawing/2014/main" id="{4546D6BC-80A5-4DB0-A711-0F514F0C4490}"/>
               </a:ext>
             </a:extLst>
           </p:cNvPr>
@@ -7650,7 +7650,7 @@
           <p:cNvPr id="7" name="core-label-0">
             <a:extLst xmlns:a="http://schemas.openxmlformats.org/drawingml/2006/main">
               <a:ext uri="{FF2B5EF4-FFF2-40B4-BE49-F238E27FC236}">
-                <a16:creationId xmlns:a16="http://schemas.microsoft.com/office/drawing/2014/main" id="{F4A9082A-F118-494C-A5EC-BC74AA465000}"/>
+                <a16:creationId xmlns:a16="http://schemas.microsoft.com/office/drawing/2014/main" id="{A82B8BA9-7905-4A40-A536-409D1F46DCF5}"/>
               </a:ext>
             </a:extLst>
           </p:cNvPr>
@@ -7708,7 +7708,7 @@
           <p:cNvPr id="8" name="core-body-0">
             <a:extLst xmlns:a="http://schemas.openxmlformats.org/drawingml/2006/main">
               <a:ext uri="{FF2B5EF4-FFF2-40B4-BE49-F238E27FC236}">
-                <a16:creationId xmlns:a16="http://schemas.microsoft.com/office/drawing/2014/main" id="{43C233C3-1562-406F-AB43-9CD4CB61D4E1}"/>
+                <a16:creationId xmlns:a16="http://schemas.microsoft.com/office/drawing/2014/main" id="{C15BD971-36E2-438F-857F-F7EE369A63F2}"/>
               </a:ext>
             </a:extLst>
           </p:cNvPr>
@@ -7772,7 +7772,7 @@
           <p:cNvPr id="9" name="core-no-1">
             <a:extLst xmlns:a="http://schemas.openxmlformats.org/drawingml/2006/main">
               <a:ext uri="{FF2B5EF4-FFF2-40B4-BE49-F238E27FC236}">
-                <a16:creationId xmlns:a16="http://schemas.microsoft.com/office/drawing/2014/main" id="{DFAAFCA4-FC04-430B-B5B9-56E610974CB2}"/>
+                <a16:creationId xmlns:a16="http://schemas.microsoft.com/office/drawing/2014/main" id="{9BBBBDA5-A7BB-4039-A28A-FDE970E90D41}"/>
               </a:ext>
             </a:extLst>
           </p:cNvPr>
@@ -7830,7 +7830,7 @@
           <p:cNvPr id="10" name="core-body-1">
             <a:extLst xmlns:a="http://schemas.openxmlformats.org/drawingml/2006/main">
               <a:ext uri="{FF2B5EF4-FFF2-40B4-BE49-F238E27FC236}">
-                <a16:creationId xmlns:a16="http://schemas.microsoft.com/office/drawing/2014/main" id="{4B0E854B-5D2C-4CEA-ABCC-D654F7DEFCC8}"/>
+                <a16:creationId xmlns:a16="http://schemas.microsoft.com/office/drawing/2014/main" id="{0D52119B-0B9C-4630-B6E1-BECA1281A00F}"/>
               </a:ext>
             </a:extLst>
           </p:cNvPr>
@@ -7894,7 +7894,7 @@
           <p:cNvPr id="11" name="core-no-2">
             <a:extLst xmlns:a="http://schemas.openxmlformats.org/drawingml/2006/main">
               <a:ext uri="{FF2B5EF4-FFF2-40B4-BE49-F238E27FC236}">
-                <a16:creationId xmlns:a16="http://schemas.microsoft.com/office/drawing/2014/main" id="{BBBBDBC6-29A9-4825-89BF-B1F8E8394ECD}"/>
+                <a16:creationId xmlns:a16="http://schemas.microsoft.com/office/drawing/2014/main" id="{3DA47D82-9DDF-4256-A759-772717E82DA8}"/>
               </a:ext>
             </a:extLst>
           </p:cNvPr>
@@ -7952,7 +7952,7 @@
           <p:cNvPr id="12" name="core-body-2">
             <a:extLst xmlns:a="http://schemas.openxmlformats.org/drawingml/2006/main">
               <a:ext uri="{FF2B5EF4-FFF2-40B4-BE49-F238E27FC236}">
-                <a16:creationId xmlns:a16="http://schemas.microsoft.com/office/drawing/2014/main" id="{B93ADA19-4DB0-4010-AEF2-64A131DD7D88}"/>
+                <a16:creationId xmlns:a16="http://schemas.microsoft.com/office/drawing/2014/main" id="{56CC3B03-CF08-4E16-A264-A3801ECAB833}"/>
               </a:ext>
             </a:extLst>
           </p:cNvPr>
@@ -8016,7 +8016,7 @@
           <p:cNvPr id="13" name="s5-takeaway-rule">
             <a:extLst xmlns:a="http://schemas.openxmlformats.org/drawingml/2006/main">
               <a:ext uri="{FF2B5EF4-FFF2-40B4-BE49-F238E27FC236}">
-                <a16:creationId xmlns:a16="http://schemas.microsoft.com/office/drawing/2014/main" id="{1804B714-D1DB-4761-A773-D8B2A7DE8C8D}"/>
+                <a16:creationId xmlns:a16="http://schemas.microsoft.com/office/drawing/2014/main" id="{AA43C1EA-C19C-47B4-ABB1-63C3ADF3F0F1}"/>
               </a:ext>
             </a:extLst>
           </p:cNvPr>
@@ -8049,7 +8049,7 @@
           <p:cNvPr id="14" name="s5-takeaway">
             <a:extLst xmlns:a="http://schemas.openxmlformats.org/drawingml/2006/main">
               <a:ext uri="{FF2B5EF4-FFF2-40B4-BE49-F238E27FC236}">
-                <a16:creationId xmlns:a16="http://schemas.microsoft.com/office/drawing/2014/main" id="{F2B96DE7-BD86-4F24-A8F3-CE4D49963E5A}"/>
+                <a16:creationId xmlns:a16="http://schemas.microsoft.com/office/drawing/2014/main" id="{BF92A765-47BC-40CC-9550-817B81DE453F}"/>
               </a:ext>
             </a:extLst>
           </p:cNvPr>
@@ -8105,7 +8105,7 @@
     </p:spTree>
     <p:extLst>
       <p:ext uri="{BB962C8B-B14F-4D97-AF65-F5344CB8AC3E}">
-        <p14:creationId xmlns:p14="http://schemas.microsoft.com/office/powerpoint/2010/main" val="2106906680"/>
+        <p14:creationId xmlns:p14="http://schemas.microsoft.com/office/powerpoint/2010/main" val="897274515"/>
       </p:ext>
     </p:extLst>
   </p:cSld>
@@ -8136,7 +8136,7 @@
           <p:cNvPr id="1" name="s6-rule">
             <a:extLst xmlns:a="http://schemas.openxmlformats.org/drawingml/2006/main">
               <a:ext uri="{FF2B5EF4-FFF2-40B4-BE49-F238E27FC236}">
-                <a16:creationId xmlns:a16="http://schemas.microsoft.com/office/drawing/2014/main" id="{42639657-D6B9-4AB9-9362-37D69C50F883}"/>
+                <a16:creationId xmlns:a16="http://schemas.microsoft.com/office/drawing/2014/main" id="{466AF478-F35D-444A-8D1C-573F610EAE01}"/>
               </a:ext>
             </a:extLst>
           </p:cNvPr>
@@ -8169,7 +8169,7 @@
           <p:cNvPr id="2" name="s6-eyebrow">
             <a:extLst xmlns:a="http://schemas.openxmlformats.org/drawingml/2006/main">
               <a:ext uri="{FF2B5EF4-FFF2-40B4-BE49-F238E27FC236}">
-                <a16:creationId xmlns:a16="http://schemas.microsoft.com/office/drawing/2014/main" id="{E7006497-BBC5-4CC1-9FCC-E903F6754D8B}"/>
+                <a16:creationId xmlns:a16="http://schemas.microsoft.com/office/drawing/2014/main" id="{B2E83A83-F5D4-4B21-8F1B-C849FE5CB03E}"/>
               </a:ext>
             </a:extLst>
           </p:cNvPr>
@@ -8227,7 +8227,7 @@
           <p:cNvPr id="3" name="s6-title">
             <a:extLst xmlns:a="http://schemas.openxmlformats.org/drawingml/2006/main">
               <a:ext uri="{FF2B5EF4-FFF2-40B4-BE49-F238E27FC236}">
-                <a16:creationId xmlns:a16="http://schemas.microsoft.com/office/drawing/2014/main" id="{184A8089-86B6-4222-A573-8B3BB918D8EE}"/>
+                <a16:creationId xmlns:a16="http://schemas.microsoft.com/office/drawing/2014/main" id="{1D94942F-0E77-4A23-835F-5F084F9CC210}"/>
               </a:ext>
             </a:extLst>
           </p:cNvPr>
@@ -8285,7 +8285,7 @@
           <p:cNvPr id="4" name="s6-footer">
             <a:extLst xmlns:a="http://schemas.openxmlformats.org/drawingml/2006/main">
               <a:ext uri="{FF2B5EF4-FFF2-40B4-BE49-F238E27FC236}">
-                <a16:creationId xmlns:a16="http://schemas.microsoft.com/office/drawing/2014/main" id="{C4F8E686-9AC0-4D9C-811B-92718FD665FB}"/>
+                <a16:creationId xmlns:a16="http://schemas.microsoft.com/office/drawing/2014/main" id="{9E657233-4AFA-40D4-8D70-C88117D5819F}"/>
               </a:ext>
             </a:extLst>
           </p:cNvPr>
@@ -8316,7 +8316,7 @@
           <p:cNvPr id="5" name="s6-identity">
             <a:extLst xmlns:a="http://schemas.openxmlformats.org/drawingml/2006/main">
               <a:ext uri="{FF2B5EF4-FFF2-40B4-BE49-F238E27FC236}">
-                <a16:creationId xmlns:a16="http://schemas.microsoft.com/office/drawing/2014/main" id="{74CF14BA-1BF6-433A-BE89-CDBBAAF5977E}"/>
+                <a16:creationId xmlns:a16="http://schemas.microsoft.com/office/drawing/2014/main" id="{0D2C23F5-EB91-4497-88A4-AC4973F7C3CC}"/>
               </a:ext>
             </a:extLst>
           </p:cNvPr>
@@ -8374,7 +8374,7 @@
           <p:cNvPr id="6" name="core-no-0">
             <a:extLst xmlns:a="http://schemas.openxmlformats.org/drawingml/2006/main">
               <a:ext uri="{FF2B5EF4-FFF2-40B4-BE49-F238E27FC236}">
-                <a16:creationId xmlns:a16="http://schemas.microsoft.com/office/drawing/2014/main" id="{8FA58152-C797-46A8-B780-D371B6406256}"/>
+                <a16:creationId xmlns:a16="http://schemas.microsoft.com/office/drawing/2014/main" id="{67BAE492-F1A7-479B-802C-B72D552E7028}"/>
               </a:ext>
             </a:extLst>
           </p:cNvPr>
@@ -8432,7 +8432,7 @@
           <p:cNvPr id="7" name="core-label-0">
             <a:extLst xmlns:a="http://schemas.openxmlformats.org/drawingml/2006/main">
               <a:ext uri="{FF2B5EF4-FFF2-40B4-BE49-F238E27FC236}">
-                <a16:creationId xmlns:a16="http://schemas.microsoft.com/office/drawing/2014/main" id="{3E8270EE-CE9C-40BC-9609-9C0F21444548}"/>
+                <a16:creationId xmlns:a16="http://schemas.microsoft.com/office/drawing/2014/main" id="{99F7724C-8AF8-4F97-9A7B-605A9482CDD1}"/>
               </a:ext>
             </a:extLst>
           </p:cNvPr>
@@ -8490,7 +8490,7 @@
           <p:cNvPr id="8" name="core-body-0">
             <a:extLst xmlns:a="http://schemas.openxmlformats.org/drawingml/2006/main">
               <a:ext uri="{FF2B5EF4-FFF2-40B4-BE49-F238E27FC236}">
-                <a16:creationId xmlns:a16="http://schemas.microsoft.com/office/drawing/2014/main" id="{F919605F-48AE-4B67-A6A1-A24F80EEE438}"/>
+                <a16:creationId xmlns:a16="http://schemas.microsoft.com/office/drawing/2014/main" id="{DD1DEAB9-A845-4E58-8A2E-991A453F5043}"/>
               </a:ext>
             </a:extLst>
           </p:cNvPr>
@@ -8554,7 +8554,7 @@
           <p:cNvPr id="9" name="core-no-1">
             <a:extLst xmlns:a="http://schemas.openxmlformats.org/drawingml/2006/main">
               <a:ext uri="{FF2B5EF4-FFF2-40B4-BE49-F238E27FC236}">
-                <a16:creationId xmlns:a16="http://schemas.microsoft.com/office/drawing/2014/main" id="{2E1D8B88-37E3-45D8-AFCC-D6DD7C24383D}"/>
+                <a16:creationId xmlns:a16="http://schemas.microsoft.com/office/drawing/2014/main" id="{7B2040E3-E9FD-42BA-9785-F7B209C9A5F8}"/>
               </a:ext>
             </a:extLst>
           </p:cNvPr>
@@ -8612,7 +8612,7 @@
           <p:cNvPr id="10" name="core-body-1">
             <a:extLst xmlns:a="http://schemas.openxmlformats.org/drawingml/2006/main">
               <a:ext uri="{FF2B5EF4-FFF2-40B4-BE49-F238E27FC236}">
-                <a16:creationId xmlns:a16="http://schemas.microsoft.com/office/drawing/2014/main" id="{3581A371-FC96-4854-A58C-D8F293DE4859}"/>
+                <a16:creationId xmlns:a16="http://schemas.microsoft.com/office/drawing/2014/main" id="{DC4FF227-14FE-4FB7-B458-9985DAABF117}"/>
               </a:ext>
             </a:extLst>
           </p:cNvPr>
@@ -8676,7 +8676,7 @@
           <p:cNvPr id="11" name="s6-takeaway-rule">
             <a:extLst xmlns:a="http://schemas.openxmlformats.org/drawingml/2006/main">
               <a:ext uri="{FF2B5EF4-FFF2-40B4-BE49-F238E27FC236}">
-                <a16:creationId xmlns:a16="http://schemas.microsoft.com/office/drawing/2014/main" id="{77BF3FCF-6155-4A88-8233-938B7895C049}"/>
+                <a16:creationId xmlns:a16="http://schemas.microsoft.com/office/drawing/2014/main" id="{47CDC8A8-A4B5-470B-92B4-F6D3D2918768}"/>
               </a:ext>
             </a:extLst>
           </p:cNvPr>
@@ -8709,7 +8709,7 @@
           <p:cNvPr id="12" name="s6-takeaway">
             <a:extLst xmlns:a="http://schemas.openxmlformats.org/drawingml/2006/main">
               <a:ext uri="{FF2B5EF4-FFF2-40B4-BE49-F238E27FC236}">
-                <a16:creationId xmlns:a16="http://schemas.microsoft.com/office/drawing/2014/main" id="{E2FFF86D-B945-4143-BCAF-C9A08911027A}"/>
+                <a16:creationId xmlns:a16="http://schemas.microsoft.com/office/drawing/2014/main" id="{B4B9AD53-6107-4D72-9C66-23E2E73527C0}"/>
               </a:ext>
             </a:extLst>
           </p:cNvPr>
@@ -8765,7 +8765,7 @@
     </p:spTree>
     <p:extLst>
       <p:ext uri="{BB962C8B-B14F-4D97-AF65-F5344CB8AC3E}">
-        <p14:creationId xmlns:p14="http://schemas.microsoft.com/office/powerpoint/2010/main" val="37287434"/>
+        <p14:creationId xmlns:p14="http://schemas.microsoft.com/office/powerpoint/2010/main" val="5830462"/>
       </p:ext>
     </p:extLst>
   </p:cSld>
@@ -8796,7 +8796,7 @@
           <p:cNvPr id="1" name="s7-rule">
             <a:extLst xmlns:a="http://schemas.openxmlformats.org/drawingml/2006/main">
               <a:ext uri="{FF2B5EF4-FFF2-40B4-BE49-F238E27FC236}">
-                <a16:creationId xmlns:a16="http://schemas.microsoft.com/office/drawing/2014/main" id="{23B824FB-2714-49A3-B70A-FEA559BE8B39}"/>
+                <a16:creationId xmlns:a16="http://schemas.microsoft.com/office/drawing/2014/main" id="{F16AD78C-FB0A-4DDF-8EBE-A2D9EC35E859}"/>
               </a:ext>
             </a:extLst>
           </p:cNvPr>
@@ -8829,7 +8829,7 @@
           <p:cNvPr id="2" name="s7-eyebrow">
             <a:extLst xmlns:a="http://schemas.openxmlformats.org/drawingml/2006/main">
               <a:ext uri="{FF2B5EF4-FFF2-40B4-BE49-F238E27FC236}">
-                <a16:creationId xmlns:a16="http://schemas.microsoft.com/office/drawing/2014/main" id="{6D54AD77-CCD7-4FA8-83C2-958CC2CB7CB0}"/>
+                <a16:creationId xmlns:a16="http://schemas.microsoft.com/office/drawing/2014/main" id="{49DF0319-362F-499D-A247-43627D67F91F}"/>
               </a:ext>
             </a:extLst>
           </p:cNvPr>
@@ -8887,7 +8887,7 @@
           <p:cNvPr id="3" name="s7-title">
             <a:extLst xmlns:a="http://schemas.openxmlformats.org/drawingml/2006/main">
               <a:ext uri="{FF2B5EF4-FFF2-40B4-BE49-F238E27FC236}">
-                <a16:creationId xmlns:a16="http://schemas.microsoft.com/office/drawing/2014/main" id="{C9FC3744-D24C-43BC-9AFB-B09330A3DA4D}"/>
+                <a16:creationId xmlns:a16="http://schemas.microsoft.com/office/drawing/2014/main" id="{D2F71CBF-C1F8-45CB-8ACA-063CC6E991E6}"/>
               </a:ext>
             </a:extLst>
           </p:cNvPr>
@@ -8945,7 +8945,7 @@
           <p:cNvPr id="4" name="s7-footer">
             <a:extLst xmlns:a="http://schemas.openxmlformats.org/drawingml/2006/main">
               <a:ext uri="{FF2B5EF4-FFF2-40B4-BE49-F238E27FC236}">
-                <a16:creationId xmlns:a16="http://schemas.microsoft.com/office/drawing/2014/main" id="{A8A0E03C-F9D1-414B-B1E2-29D1A993762D}"/>
+                <a16:creationId xmlns:a16="http://schemas.microsoft.com/office/drawing/2014/main" id="{43E7D069-5FA7-4DCE-9803-936A185D115C}"/>
               </a:ext>
             </a:extLst>
           </p:cNvPr>
@@ -8976,7 +8976,7 @@
           <p:cNvPr id="5" name="s7-identity">
             <a:extLst xmlns:a="http://schemas.openxmlformats.org/drawingml/2006/main">
               <a:ext uri="{FF2B5EF4-FFF2-40B4-BE49-F238E27FC236}">
-                <a16:creationId xmlns:a16="http://schemas.microsoft.com/office/drawing/2014/main" id="{5727DCE3-8F4D-49A7-9748-90E472C0C7D4}"/>
+                <a16:creationId xmlns:a16="http://schemas.microsoft.com/office/drawing/2014/main" id="{331CE213-150C-4E0A-84FB-33AEC73A952A}"/>
               </a:ext>
             </a:extLst>
           </p:cNvPr>
@@ -9034,7 +9034,7 @@
           <p:cNvPr id="6" name="core-no-0">
             <a:extLst xmlns:a="http://schemas.openxmlformats.org/drawingml/2006/main">
               <a:ext uri="{FF2B5EF4-FFF2-40B4-BE49-F238E27FC236}">
-                <a16:creationId xmlns:a16="http://schemas.microsoft.com/office/drawing/2014/main" id="{F1D52587-C1FB-4164-88B1-0020515ABD12}"/>
+                <a16:creationId xmlns:a16="http://schemas.microsoft.com/office/drawing/2014/main" id="{384BFAD5-C823-4BA5-BE11-F3D8B4A705C7}"/>
               </a:ext>
             </a:extLst>
           </p:cNvPr>
@@ -9092,7 +9092,7 @@
           <p:cNvPr id="7" name="core-label-0">
             <a:extLst xmlns:a="http://schemas.openxmlformats.org/drawingml/2006/main">
               <a:ext uri="{FF2B5EF4-FFF2-40B4-BE49-F238E27FC236}">
-                <a16:creationId xmlns:a16="http://schemas.microsoft.com/office/drawing/2014/main" id="{6435D20F-8D53-4ECF-B2C4-743F26EC5580}"/>
+                <a16:creationId xmlns:a16="http://schemas.microsoft.com/office/drawing/2014/main" id="{7F53760D-C9CD-4504-9CB4-47F12A72B2DA}"/>
               </a:ext>
             </a:extLst>
           </p:cNvPr>
@@ -9150,7 +9150,7 @@
           <p:cNvPr id="8" name="core-body-0">
             <a:extLst xmlns:a="http://schemas.openxmlformats.org/drawingml/2006/main">
               <a:ext uri="{FF2B5EF4-FFF2-40B4-BE49-F238E27FC236}">
-                <a16:creationId xmlns:a16="http://schemas.microsoft.com/office/drawing/2014/main" id="{A031E569-E4B8-4FE1-837F-EE2DD20D47BB}"/>
+                <a16:creationId xmlns:a16="http://schemas.microsoft.com/office/drawing/2014/main" id="{616C01F1-AA2F-48FD-AB79-35C305F9016E}"/>
               </a:ext>
             </a:extLst>
           </p:cNvPr>
@@ -9214,7 +9214,7 @@
           <p:cNvPr id="9" name="core-no-1">
             <a:extLst xmlns:a="http://schemas.openxmlformats.org/drawingml/2006/main">
               <a:ext uri="{FF2B5EF4-FFF2-40B4-BE49-F238E27FC236}">
-                <a16:creationId xmlns:a16="http://schemas.microsoft.com/office/drawing/2014/main" id="{67E9BE18-D875-447E-BBCF-A71BD4358D50}"/>
+                <a16:creationId xmlns:a16="http://schemas.microsoft.com/office/drawing/2014/main" id="{BC5BB585-153D-4C88-9C89-D93B0E5DCBED}"/>
               </a:ext>
             </a:extLst>
           </p:cNvPr>
@@ -9272,7 +9272,7 @@
           <p:cNvPr id="10" name="core-body-1">
             <a:extLst xmlns:a="http://schemas.openxmlformats.org/drawingml/2006/main">
               <a:ext uri="{FF2B5EF4-FFF2-40B4-BE49-F238E27FC236}">
-                <a16:creationId xmlns:a16="http://schemas.microsoft.com/office/drawing/2014/main" id="{95998F12-4706-43C4-AC44-815CAA7745D2}"/>
+                <a16:creationId xmlns:a16="http://schemas.microsoft.com/office/drawing/2014/main" id="{77C3A1B7-5465-4A55-A1BE-AAE5D0FA856D}"/>
               </a:ext>
             </a:extLst>
           </p:cNvPr>
@@ -9336,7 +9336,7 @@
           <p:cNvPr id="11" name="s7-takeaway-rule">
             <a:extLst xmlns:a="http://schemas.openxmlformats.org/drawingml/2006/main">
               <a:ext uri="{FF2B5EF4-FFF2-40B4-BE49-F238E27FC236}">
-                <a16:creationId xmlns:a16="http://schemas.microsoft.com/office/drawing/2014/main" id="{78567CD8-66F3-4804-80DD-088383460AC9}"/>
+                <a16:creationId xmlns:a16="http://schemas.microsoft.com/office/drawing/2014/main" id="{62AAEB36-4C4B-44DE-8101-A21774752CA9}"/>
               </a:ext>
             </a:extLst>
           </p:cNvPr>
@@ -9369,7 +9369,7 @@
           <p:cNvPr id="12" name="s7-takeaway">
             <a:extLst xmlns:a="http://schemas.openxmlformats.org/drawingml/2006/main">
               <a:ext uri="{FF2B5EF4-FFF2-40B4-BE49-F238E27FC236}">
-                <a16:creationId xmlns:a16="http://schemas.microsoft.com/office/drawing/2014/main" id="{ADB8A9A1-F14A-4FD2-866F-1BBBDFEEAA72}"/>
+                <a16:creationId xmlns:a16="http://schemas.microsoft.com/office/drawing/2014/main" id="{A8A807FF-136B-4FAF-A3FF-954C5DF7C01F}"/>
               </a:ext>
             </a:extLst>
           </p:cNvPr>
@@ -9425,7 +9425,7 @@
     </p:spTree>
     <p:extLst>
       <p:ext uri="{BB962C8B-B14F-4D97-AF65-F5344CB8AC3E}">
-        <p14:creationId xmlns:p14="http://schemas.microsoft.com/office/powerpoint/2010/main" val="1161241726"/>
+        <p14:creationId xmlns:p14="http://schemas.microsoft.com/office/powerpoint/2010/main" val="1381585134"/>
       </p:ext>
     </p:extLst>
   </p:cSld>
@@ -9456,7 +9456,7 @@
           <p:cNvPr id="1" name="s8-rule">
             <a:extLst xmlns:a="http://schemas.openxmlformats.org/drawingml/2006/main">
               <a:ext uri="{FF2B5EF4-FFF2-40B4-BE49-F238E27FC236}">
-                <a16:creationId xmlns:a16="http://schemas.microsoft.com/office/drawing/2014/main" id="{D074F16A-A10D-44B5-B669-63B4D9F2E542}"/>
+                <a16:creationId xmlns:a16="http://schemas.microsoft.com/office/drawing/2014/main" id="{15AD79A6-D96E-4098-808B-E4795DBCB45A}"/>
               </a:ext>
             </a:extLst>
           </p:cNvPr>
@@ -9489,7 +9489,7 @@
           <p:cNvPr id="2" name="s8-eyebrow">
             <a:extLst xmlns:a="http://schemas.openxmlformats.org/drawingml/2006/main">
               <a:ext uri="{FF2B5EF4-FFF2-40B4-BE49-F238E27FC236}">
-                <a16:creationId xmlns:a16="http://schemas.microsoft.com/office/drawing/2014/main" id="{35C20123-9F05-4C11-9298-48EC892624BC}"/>
+                <a16:creationId xmlns:a16="http://schemas.microsoft.com/office/drawing/2014/main" id="{67A92034-249E-451F-B0AC-0EFF448C53A1}"/>
               </a:ext>
             </a:extLst>
           </p:cNvPr>
@@ -9547,7 +9547,7 @@
           <p:cNvPr id="3" name="s8-title">
             <a:extLst xmlns:a="http://schemas.openxmlformats.org/drawingml/2006/main">
               <a:ext uri="{FF2B5EF4-FFF2-40B4-BE49-F238E27FC236}">
-                <a16:creationId xmlns:a16="http://schemas.microsoft.com/office/drawing/2014/main" id="{DF8362AF-F7F2-4131-827D-EF71C92BD41B}"/>
+                <a16:creationId xmlns:a16="http://schemas.microsoft.com/office/drawing/2014/main" id="{9FB666FA-BF3B-4B8E-91B5-47EB6EB84220}"/>
               </a:ext>
             </a:extLst>
           </p:cNvPr>
@@ -9605,7 +9605,7 @@
           <p:cNvPr id="4" name="s8-footer">
             <a:extLst xmlns:a="http://schemas.openxmlformats.org/drawingml/2006/main">
               <a:ext uri="{FF2B5EF4-FFF2-40B4-BE49-F238E27FC236}">
-                <a16:creationId xmlns:a16="http://schemas.microsoft.com/office/drawing/2014/main" id="{07FD8C4B-7D72-42B0-8898-711EE4911C2A}"/>
+                <a16:creationId xmlns:a16="http://schemas.microsoft.com/office/drawing/2014/main" id="{907A56BC-21D1-45C5-ADDB-D8BCC5937A53}"/>
               </a:ext>
             </a:extLst>
           </p:cNvPr>
@@ -9636,7 +9636,7 @@
           <p:cNvPr id="5" name="s8-identity">
             <a:extLst xmlns:a="http://schemas.openxmlformats.org/drawingml/2006/main">
               <a:ext uri="{FF2B5EF4-FFF2-40B4-BE49-F238E27FC236}">
-                <a16:creationId xmlns:a16="http://schemas.microsoft.com/office/drawing/2014/main" id="{398FF773-A66E-4095-A905-5319AA09E34E}"/>
+                <a16:creationId xmlns:a16="http://schemas.microsoft.com/office/drawing/2014/main" id="{194C211D-FA65-4431-8A16-E4330DEDEE93}"/>
               </a:ext>
             </a:extLst>
           </p:cNvPr>
@@ -9694,7 +9694,7 @@
           <p:cNvPr id="6" name="core-no-0">
             <a:extLst xmlns:a="http://schemas.openxmlformats.org/drawingml/2006/main">
               <a:ext uri="{FF2B5EF4-FFF2-40B4-BE49-F238E27FC236}">
-                <a16:creationId xmlns:a16="http://schemas.microsoft.com/office/drawing/2014/main" id="{4B7C5215-16E4-4192-94B4-02A15817AE1D}"/>
+                <a16:creationId xmlns:a16="http://schemas.microsoft.com/office/drawing/2014/main" id="{2A3621DD-D405-4B15-AF89-184B060F4730}"/>
               </a:ext>
             </a:extLst>
           </p:cNvPr>
@@ -9752,7 +9752,7 @@
           <p:cNvPr id="7" name="core-label-0">
             <a:extLst xmlns:a="http://schemas.openxmlformats.org/drawingml/2006/main">
               <a:ext uri="{FF2B5EF4-FFF2-40B4-BE49-F238E27FC236}">
-                <a16:creationId xmlns:a16="http://schemas.microsoft.com/office/drawing/2014/main" id="{5C843D00-DB0F-4D3E-AC93-3367C8329947}"/>
+                <a16:creationId xmlns:a16="http://schemas.microsoft.com/office/drawing/2014/main" id="{01657CE6-7170-4118-9D3A-D43B99F0A899}"/>
               </a:ext>
             </a:extLst>
           </p:cNvPr>
@@ -9810,7 +9810,7 @@
           <p:cNvPr id="8" name="core-body-0">
             <a:extLst xmlns:a="http://schemas.openxmlformats.org/drawingml/2006/main">
               <a:ext uri="{FF2B5EF4-FFF2-40B4-BE49-F238E27FC236}">
-                <a16:creationId xmlns:a16="http://schemas.microsoft.com/office/drawing/2014/main" id="{26BC74FA-1D73-484F-8818-F2EA75831244}"/>
+                <a16:creationId xmlns:a16="http://schemas.microsoft.com/office/drawing/2014/main" id="{B1ED966D-D8D3-4804-8CA4-F740D253D5A8}"/>
               </a:ext>
             </a:extLst>
           </p:cNvPr>
@@ -9874,7 +9874,7 @@
           <p:cNvPr id="9" name="core-no-1">
             <a:extLst xmlns:a="http://schemas.openxmlformats.org/drawingml/2006/main">
               <a:ext uri="{FF2B5EF4-FFF2-40B4-BE49-F238E27FC236}">
-                <a16:creationId xmlns:a16="http://schemas.microsoft.com/office/drawing/2014/main" id="{4AD8AD2F-EDAD-44C1-BFA4-0E43AF3CB074}"/>
+                <a16:creationId xmlns:a16="http://schemas.microsoft.com/office/drawing/2014/main" id="{65767BA1-8183-482B-B7AB-957B8FE8624A}"/>
               </a:ext>
             </a:extLst>
           </p:cNvPr>
@@ -9932,7 +9932,7 @@
           <p:cNvPr id="10" name="core-body-1">
             <a:extLst xmlns:a="http://schemas.openxmlformats.org/drawingml/2006/main">
               <a:ext uri="{FF2B5EF4-FFF2-40B4-BE49-F238E27FC236}">
-                <a16:creationId xmlns:a16="http://schemas.microsoft.com/office/drawing/2014/main" id="{A2EB2C68-D549-4EBD-9857-3B007C207E7B}"/>
+                <a16:creationId xmlns:a16="http://schemas.microsoft.com/office/drawing/2014/main" id="{D672C6FC-2FB1-4170-9996-DF36B8B02932}"/>
               </a:ext>
             </a:extLst>
           </p:cNvPr>
@@ -9996,7 +9996,7 @@
           <p:cNvPr id="11" name="s8-takeaway-rule">
             <a:extLst xmlns:a="http://schemas.openxmlformats.org/drawingml/2006/main">
               <a:ext uri="{FF2B5EF4-FFF2-40B4-BE49-F238E27FC236}">
-                <a16:creationId xmlns:a16="http://schemas.microsoft.com/office/drawing/2014/main" id="{24882640-62C7-4EC2-9A74-1B2455F6E8A1}"/>
+                <a16:creationId xmlns:a16="http://schemas.microsoft.com/office/drawing/2014/main" id="{36C9668F-FADA-4F30-9CF1-F3A97953C977}"/>
               </a:ext>
             </a:extLst>
           </p:cNvPr>
@@ -10029,7 +10029,7 @@
           <p:cNvPr id="12" name="s8-takeaway">
             <a:extLst xmlns:a="http://schemas.openxmlformats.org/drawingml/2006/main">
               <a:ext uri="{FF2B5EF4-FFF2-40B4-BE49-F238E27FC236}">
-                <a16:creationId xmlns:a16="http://schemas.microsoft.com/office/drawing/2014/main" id="{200B354E-32E4-4660-849E-8AF71EDFE27A}"/>
+                <a16:creationId xmlns:a16="http://schemas.microsoft.com/office/drawing/2014/main" id="{1F026C4E-1388-47DB-822A-AF830DB5FAF2}"/>
               </a:ext>
             </a:extLst>
           </p:cNvPr>
@@ -10085,7 +10085,7 @@
     </p:spTree>
     <p:extLst>
       <p:ext uri="{BB962C8B-B14F-4D97-AF65-F5344CB8AC3E}">
-        <p14:creationId xmlns:p14="http://schemas.microsoft.com/office/powerpoint/2010/main" val="741816922"/>
+        <p14:creationId xmlns:p14="http://schemas.microsoft.com/office/powerpoint/2010/main" val="2042580015"/>
       </p:ext>
     </p:extLst>
   </p:cSld>
@@ -10116,7 +10116,7 @@
           <p:cNvPr id="1" name="s9-rule">
             <a:extLst xmlns:a="http://schemas.openxmlformats.org/drawingml/2006/main">
               <a:ext uri="{FF2B5EF4-FFF2-40B4-BE49-F238E27FC236}">
-                <a16:creationId xmlns:a16="http://schemas.microsoft.com/office/drawing/2014/main" id="{90A69E0C-1F64-4D23-B060-0C61EB02D2D0}"/>
+                <a16:creationId xmlns:a16="http://schemas.microsoft.com/office/drawing/2014/main" id="{9AAACE42-F4BC-40D7-9B40-3D752C81EF8C}"/>
               </a:ext>
             </a:extLst>
           </p:cNvPr>
@@ -10149,7 +10149,7 @@
           <p:cNvPr id="2" name="s9-eyebrow">
             <a:extLst xmlns:a="http://schemas.openxmlformats.org/drawingml/2006/main">
               <a:ext uri="{FF2B5EF4-FFF2-40B4-BE49-F238E27FC236}">
-                <a16:creationId xmlns:a16="http://schemas.microsoft.com/office/drawing/2014/main" id="{9D275ADE-7940-41A3-AD5E-35294A497968}"/>
+                <a16:creationId xmlns:a16="http://schemas.microsoft.com/office/drawing/2014/main" id="{2CE967A7-F7FB-48F2-B539-26518D900272}"/>
               </a:ext>
             </a:extLst>
           </p:cNvPr>
@@ -10207,7 +10207,7 @@
           <p:cNvPr id="3" name="s9-title">
             <a:extLst xmlns:a="http://schemas.openxmlformats.org/drawingml/2006/main">
               <a:ext uri="{FF2B5EF4-FFF2-40B4-BE49-F238E27FC236}">
-                <a16:creationId xmlns:a16="http://schemas.microsoft.com/office/drawing/2014/main" id="{0C4F9931-7C27-4861-87D2-D2A56C5D4038}"/>
+                <a16:creationId xmlns:a16="http://schemas.microsoft.com/office/drawing/2014/main" id="{FA79183D-6BBD-4C7C-B35F-2805E7BDC77C}"/>
               </a:ext>
             </a:extLst>
           </p:cNvPr>
@@ -10265,7 +10265,7 @@
           <p:cNvPr id="4" name="s9-footer">
             <a:extLst xmlns:a="http://schemas.openxmlformats.org/drawingml/2006/main">
               <a:ext uri="{FF2B5EF4-FFF2-40B4-BE49-F238E27FC236}">
-                <a16:creationId xmlns:a16="http://schemas.microsoft.com/office/drawing/2014/main" id="{7B591F85-41E7-4F6B-A894-21D8B800199E}"/>
+                <a16:creationId xmlns:a16="http://schemas.microsoft.com/office/drawing/2014/main" id="{59984EDE-B4D6-447E-81CA-DCC3D4AD5FE0}"/>
               </a:ext>
             </a:extLst>
           </p:cNvPr>
@@ -10296,7 +10296,7 @@
           <p:cNvPr id="5" name="s9-identity">
             <a:extLst xmlns:a="http://schemas.openxmlformats.org/drawingml/2006/main">
               <a:ext uri="{FF2B5EF4-FFF2-40B4-BE49-F238E27FC236}">
-                <a16:creationId xmlns:a16="http://schemas.microsoft.com/office/drawing/2014/main" id="{436699E0-B984-47C2-B6E0-BE855AA54F35}"/>
+                <a16:creationId xmlns:a16="http://schemas.microsoft.com/office/drawing/2014/main" id="{7755C3F4-D5D1-4E3A-AA00-73DB28FA57AF}"/>
               </a:ext>
             </a:extLst>
           </p:cNvPr>
@@ -10354,7 +10354,7 @@
           <p:cNvPr id="6" name="core-no-0">
             <a:extLst xmlns:a="http://schemas.openxmlformats.org/drawingml/2006/main">
               <a:ext uri="{FF2B5EF4-FFF2-40B4-BE49-F238E27FC236}">
-                <a16:creationId xmlns:a16="http://schemas.microsoft.com/office/drawing/2014/main" id="{CD114031-0DE6-4565-B249-D1C5B3A1B0CE}"/>
+                <a16:creationId xmlns:a16="http://schemas.microsoft.com/office/drawing/2014/main" id="{0994930F-8241-4EE1-88B4-89E6C1EC4212}"/>
               </a:ext>
             </a:extLst>
           </p:cNvPr>
@@ -10412,7 +10412,7 @@
           <p:cNvPr id="7" name="core-label-0">
             <a:extLst xmlns:a="http://schemas.openxmlformats.org/drawingml/2006/main">
               <a:ext uri="{FF2B5EF4-FFF2-40B4-BE49-F238E27FC236}">
-                <a16:creationId xmlns:a16="http://schemas.microsoft.com/office/drawing/2014/main" id="{1F9512CB-D5FD-485D-BD34-D8CBC3F2C857}"/>
+                <a16:creationId xmlns:a16="http://schemas.microsoft.com/office/drawing/2014/main" id="{E550D3CA-13B5-4B96-826D-2C8CCA490C94}"/>
               </a:ext>
             </a:extLst>
           </p:cNvPr>
@@ -10470,7 +10470,7 @@
           <p:cNvPr id="8" name="core-body-0">
             <a:extLst xmlns:a="http://schemas.openxmlformats.org/drawingml/2006/main">
               <a:ext uri="{FF2B5EF4-FFF2-40B4-BE49-F238E27FC236}">
-                <a16:creationId xmlns:a16="http://schemas.microsoft.com/office/drawing/2014/main" id="{331A41F8-D33D-4E7D-9835-0DBA71335892}"/>
+                <a16:creationId xmlns:a16="http://schemas.microsoft.com/office/drawing/2014/main" id="{7AED0DFB-149A-49CF-BD90-218087EE2EAB}"/>
               </a:ext>
             </a:extLst>
           </p:cNvPr>
@@ -10534,7 +10534,7 @@
           <p:cNvPr id="9" name="core-no-1">
             <a:extLst xmlns:a="http://schemas.openxmlformats.org/drawingml/2006/main">
               <a:ext uri="{FF2B5EF4-FFF2-40B4-BE49-F238E27FC236}">
-                <a16:creationId xmlns:a16="http://schemas.microsoft.com/office/drawing/2014/main" id="{A6CD5749-9048-4137-B2CA-2156AF2D888F}"/>
+                <a16:creationId xmlns:a16="http://schemas.microsoft.com/office/drawing/2014/main" id="{B87A1724-92A1-46F5-9157-BFF3D4A5A82A}"/>
               </a:ext>
             </a:extLst>
           </p:cNvPr>
@@ -10592,7 +10592,7 @@
           <p:cNvPr id="10" name="core-body-1">
             <a:extLst xmlns:a="http://schemas.openxmlformats.org/drawingml/2006/main">
               <a:ext uri="{FF2B5EF4-FFF2-40B4-BE49-F238E27FC236}">
-                <a16:creationId xmlns:a16="http://schemas.microsoft.com/office/drawing/2014/main" id="{B3B86362-EF81-4279-AD69-AAD239D6E4F1}"/>
+                <a16:creationId xmlns:a16="http://schemas.microsoft.com/office/drawing/2014/main" id="{2823D6B7-6000-4313-8D0B-9DF595B3EF9B}"/>
               </a:ext>
             </a:extLst>
           </p:cNvPr>
@@ -10656,7 +10656,7 @@
           <p:cNvPr id="11" name="s9-takeaway-rule">
             <a:extLst xmlns:a="http://schemas.openxmlformats.org/drawingml/2006/main">
               <a:ext uri="{FF2B5EF4-FFF2-40B4-BE49-F238E27FC236}">
-                <a16:creationId xmlns:a16="http://schemas.microsoft.com/office/drawing/2014/main" id="{056D6F47-6366-47E2-BF2F-81F357BE4869}"/>
+                <a16:creationId xmlns:a16="http://schemas.microsoft.com/office/drawing/2014/main" id="{F7B69BFA-7CA4-45B3-B29E-06FC7B42076A}"/>
               </a:ext>
             </a:extLst>
           </p:cNvPr>
@@ -10689,7 +10689,7 @@
           <p:cNvPr id="12" name="s9-takeaway">
             <a:extLst xmlns:a="http://schemas.openxmlformats.org/drawingml/2006/main">
               <a:ext uri="{FF2B5EF4-FFF2-40B4-BE49-F238E27FC236}">
-                <a16:creationId xmlns:a16="http://schemas.microsoft.com/office/drawing/2014/main" id="{0048F30A-9D47-403E-BA7F-C3CBD074C726}"/>
+                <a16:creationId xmlns:a16="http://schemas.microsoft.com/office/drawing/2014/main" id="{D00AFF54-DEC1-494E-A2F4-E76A558054E2}"/>
               </a:ext>
             </a:extLst>
           </p:cNvPr>
@@ -10745,7 +10745,7 @@
     </p:spTree>
     <p:extLst>
       <p:ext uri="{BB962C8B-B14F-4D97-AF65-F5344CB8AC3E}">
-        <p14:creationId xmlns:p14="http://schemas.microsoft.com/office/powerpoint/2010/main" val="1788294440"/>
+        <p14:creationId xmlns:p14="http://schemas.microsoft.com/office/powerpoint/2010/main" val="1266071128"/>
       </p:ext>
     </p:extLst>
   </p:cSld>
